--- a/Curso Gas B/01 - ITC-ICG 01 - Distribucion por canalizacion/01 - ITC-ICG 01 - Distribucion por canalizacion - Vídeo 2.pptx
+++ b/Curso Gas B/01 - ITC-ICG 01 - Distribucion por canalizacion/01 - ITC-ICG 01 - Distribucion por canalizacion - Vídeo 2.pptx
@@ -516,12 +516,12 @@
           <a:lstStyle/>
           <a:p>
             <a:r>
-              <a:t>N1: ¿Qué pasa con una red de gas una vez que ya tiene gas dentro?</a:t>
-            </a:r>
-          </a:p>
-          <a:p>
-            <a:r>
-              <a:t>N2: Que hay que vigilarla, mantenerla y protegerla las veinticuatro horas. En el vídeo anterior vimos cómo se proyecta, se construye y se pone en servicio; ahora toca la vida diaria de la red. Cubrimos los apartados seis, siete y ocho de la instrucción: cómo se opera y se mantiene la distribución, qué documentación hay que archivar, y cómo se protege la red frente a las obras que hacen terceros en la calle. Aviso: aquí hay muchos plazos y listas cerradas, y eso es una mina de preguntas de examen.</a:t>
+              <a:t>N1: Ya vimos cómo se proyecta, se construye y se pone en servicio una red. Pero, una vez tiene gas, ¿quién la cuida?</a:t>
+            </a:r>
+          </a:p>
+          <a:p>
+            <a:r>
+              <a:t>N2: Una red viva hay que vigilarla, mantenerla y protegerla las veinticuatro horas. En este segundo vídeo cubrimos los apartados seis a ocho de la ITC-ICG cero uno: cómo se opera y se mantiene la distribución, qué documentación hay que registrar y archivar, y cómo se protege la red frente a las obras que hacen terceros en la vía pública. Aviso: aquí hay muchos plazos y muchas listas cerradas, así que es una auténtica mina de preguntas de examen. Vamos apartado por apartado.</a:t>
             </a:r>
           </a:p>
         </p:txBody>
@@ -591,12 +591,12 @@
           <a:lstStyle/>
           <a:p>
             <a:r>
-              <a:t>N1: Si aparece una fuga y no puedo arreglarla bien en el momento, ¿qué hago?</a:t>
-            </a:r>
-          </a:p>
-          <a:p>
-            <a:r>
-              <a:t>N2: Se pone una medida temporal, un parche seguro, para que no haya peligro, y en cuanto se pueda se hace la reparación definitiva. Nunca se deja a medias y ya veremos. Después de tocar la red, la regla general es repetir las pruebas en obra, pero hay una excepción muy práctica: en reparaciones puntuales o en tramos de corta extensión no hace falta el ensayo completo, basta con verificar que las uniones nuevas no fugan con disolución jabonosa, agua con jabón; si burbujea, hay fuga. Es el truco del gasista de toda la vida. Los materiales y técnicas se ajustan a las normas seiscientas de siempre.</a:t>
+              <a:t>N1: Al reanudar el servicio y trabajar con posible salida de gas, ¿qué reflejos no pueden faltar?</a:t>
+            </a:r>
+          </a:p>
+          <a:p>
+            <a:r>
+              <a:t>N2: Primero, al reabrir el gas, si pudo entrar aire en la tubería hay que purgar por los extremos para echarlo fuera antes de que se mezcle; recuerda del vídeo anterior el peligro de la mezcla aire-gas. Y mientras trabajas con posible salida de gas, cuatro reflejos que conviene memorizar juntos: detectas la presencia de gas, señalizas y controlas la zona de trabajo, retiras todas las fuentes de ignición que no sean imprescindibles, y tienes al lado el equipo de extinción específico. Detectar, señalizar, retirar chispas y extintor: esos cuatro te salvan en cualquier intervención.</a:t>
             </a:r>
           </a:p>
         </p:txBody>
@@ -666,12 +666,12 @@
           <a:lstStyle/>
           <a:p>
             <a:r>
-              <a:t>N1: ¿Qué precauciones se toman cuando puede salir gas?</a:t>
-            </a:r>
-          </a:p>
-          <a:p>
-            <a:r>
-              <a:t>N2: Cuatro reflejos que conviene memorizar juntos. Detectar la presencia de gas con el detector; señalizar y controlar el área de trabajo para que no entre nadie; retirar las fuentes potenciales de ignición que no sean imprescindibles, cualquier cosa que pueda dar chispa; y tener a mano el equipo de extinción específico, el extintor. Y algo más: al reanudar el servicio, si pudo entrar aire en la tubería, hay que purgar la red por sus extremos para echarlo fuera antes de que se mezcle con el gas. Es la misma física del vídeo anterior: aire más gas más una chispa, deflagración.</a:t>
+              <a:t>N1: ¿Qué hay que archivar y con qué números?</a:t>
+            </a:r>
+          </a:p>
+          <a:p>
+            <a:r>
+              <a:t>N2: El distribuidor guarda cartografía detallada de por dónde van los tubos, y siempre al día. Guarda también la documentación de autorización y los proyectos, con los resultados de las pruebas en obra, mientras la red esté en explotación. Y ojo a las dos cifras que caen seguro: se guardan las dos últimas vigilancias y controles de estanquidad, y las intervenciones por motivos de seguridad y las actuaciones de emergencia se archivan un mínimo de cinco años. El truco: mapa siempre, estanquidad las dos últimas, seguridad cinco años. Da igual el soporte, papel o informático, mientras la información esté y sea fiable; si en el examen ves obligatoriamente en papel, es falso.</a:t>
             </a:r>
           </a:p>
         </p:txBody>
@@ -741,12 +741,12 @@
           <a:lstStyle/>
           <a:p>
             <a:r>
-              <a:t>N1: ¿Qué papeles hay que guardar y cuánto tiempo?</a:t>
-            </a:r>
-          </a:p>
-          <a:p>
-            <a:r>
-              <a:t>N2: Memoriza los números, que caen. La cartografía, el mapa de por dónde van los tubos, siempre al día, permanentemente actualizada. Los documentos de autorización y los proyectos, con los resultados de las pruebas, se guardan durante toda la explotación. De las vigilancias y controles de estanquidad se conservan las dos últimas. Y las intervenciones por motivos de seguridad y las actuaciones en emergencias, un mínimo de cinco años. El truco: mapa siempre, estanquidad las dos últimas, seguridad cinco años. Y da igual el soporte: papel o informático, lo que cuenta es que la información esté y sea fiable; si ves obligatoriamente en papel, es falso.</a:t>
+              <a:t>N1: Una empresa va a abrir zanja en la calle para poner fibra y no sabe que justo debajo pasa el gas. ¿Qué manda la ITC?</a:t>
+            </a:r>
+          </a:p>
+          <a:p>
+            <a:r>
+              <a:t>N2: Antes de tocar la vía pública tiene que preguntar a la compañía de gas dónde están sus tubos, y aquí vienen los tres plazos, una de las preguntas más golosas del tema porque son tres números seguidos. Avisa y pide información con treinta días de antelación, por escrito y con la localización concreta. El distribuidor tiene veinte días para contestar con la mejor información de dónde están sus instalaciones y las normas a respetar. Y luego, justo antes de empezar a picar, avisa del arranque con veinticuatro horas. El truco temporal: pido con treinta, me contestan en veinte, aviso con veinticuatro horas. El solicitante no puede empezar hasta recibir y aceptar formalmente esa información.</a:t>
             </a:r>
           </a:p>
         </p:txBody>
@@ -816,12 +816,12 @@
           <a:lstStyle/>
           <a:p>
             <a:r>
-              <a:t>N1: Una empresa va a abrir zanja en la calle para fibra, ¿qué tiene que hacer antes?</a:t>
-            </a:r>
-          </a:p>
-          <a:p>
-            <a:r>
-              <a:t>N2: Preguntar dónde está el gas, porque si mete la excavadora a ciegas puede reventar la tubería. Aquí hay tres plazos seguidos, y es una de las preguntas más golosas del tema. Quien vaya a hacer obra en la vía pública avisa al distribuidor y le pide información con un mínimo de treinta días de antelación, por escrito y con la localización concreta. El distribuidor tiene un máximo de veinte días para contestar con la mejor información de dónde están sus tubos y las normas a respetar. Y luego, justo antes de empezar a picar, el solicitante comunica el inicio con al menos veinticuatro horas de antelación. El truco temporal: pido con treinta, me contestan en veinte, aviso con veinticuatro horas.</a:t>
+              <a:t>N1: ¿Y si la obra choca de frente con la tubería de gas? ¿Quién decide?</a:t>
+            </a:r>
+          </a:p>
+          <a:p>
+            <a:r>
+              <a:t>N2: Si la obra prevista afecta directamente al trazado o a la localización de la red, el distribuidor puede negarse a que se haga, pero solo por razones técnicas o de seguridad, no por capricho. Si el que quiere hacer la obra no está de acuerdo, no decide él ni la compañía: resuelve el órgano competente de la Comunidad Autónoma. Y un matiz importante: la carga de probar que de verdad hay que hacer esa obra tocando el gas es del solicitante, no del distribuidor. Meter la excavadora a ciegas es reventar el tubo y provocar la fuga; por eso todo este apartado va de preguntar antes.</a:t>
             </a:r>
           </a:p>
         </p:txBody>
@@ -891,12 +891,12 @@
           <a:lstStyle/>
           <a:p>
             <a:r>
-              <a:t>N1: ¿Y si la obra choca de frente con la tubería de gas?</a:t>
-            </a:r>
-          </a:p>
-          <a:p>
-            <a:r>
-              <a:t>N2: Entonces el distribuidor puede negarse a que se haga, por razones técnicas o de seguridad, cuando la obra afecta directamente al trazado o a la localización de la red. Si el que quiere hacer la obra no está de acuerdo, no decide él ni la compañía: resuelve el órgano competente de la Comunidad Autónoma. Y ojo, la carga de probar que hay que ejecutar esa obra tocando el gas es del solicitante, no del distribuidor. Antes de empezar, además, el solicitante tiene que haber recibido y aceptado formalmente la información; sin ese paso no puede arrancar.</a:t>
+              <a:t>N1: Cinco golpes rápidos antes del gran cierre. ¿Los tienes todos?</a:t>
+            </a:r>
+          </a:p>
+          <a:p>
+            <a:r>
+              <a:t>N2: Uno, el centro de operación vigila dos parámetros, presión y odorizante. Dos, las urgencias de seguridad en casa del usuario son tres, olor a gas, incendio o explosión, y la fuga es máxima prioridad. Tres, las fugas se clasifican en urgente, programada y de vigilancia de progresión, y pesa la proximidad a edificios. Cuatro, los plazos de las obras de terceros, treinta para avisar, veinte para contestar, veinticuatro horas antes de empezar. Y cinco, del archivo, las dos últimas estanquidades y cinco años para seguridad y emergencias. Si sueltas esos cinco de carrerilla, tienes el vídeo ganado.</a:t>
             </a:r>
           </a:p>
         </p:txBody>
@@ -966,12 +966,22 @@
           <a:lstStyle/>
           <a:p>
             <a:r>
-              <a:t>N1: Si te quedas con tres cosas de este vídeo, que sean estas.</a:t>
-            </a:r>
-          </a:p>
-          <a:p>
-            <a:r>
-              <a:t>N2: Primera: una red viva se opera y se mantiene las veinticuatro horas, y todo eso recae en el titular, con criterios de seguridad pública. Segunda: en las urgencias, la fuga de gas es máxima prioridad, y las incidencias de seguridad en casa del usuario son solo tres, olor a gas, incendio o explosión; el teléfono está siempre disponible y puede activar el plan de emergencia. Y tercera, la que es tu día a día en la calle: antes de picar la vía pública hay que preguntar dónde está el gas, con treinta días para avisar, veinte para que contesten y veinticuatro horas antes de arrancar. Meter la excavadora a ciegas es reventar el tubo y provocar la fuga.</a:t>
+              <a:t>N1: Y con esto cerramos no solo el vídeo, sino el tema entero. Si te quedas con cuatro conquistas, que sean estas.</a:t>
+            </a:r>
+          </a:p>
+          <a:p>
+            <a:r>
+              <a:t>N2: Una, reconoces los tres plazos de las obras de terceros, treinta días para avisar, veinte para que el distribuidor conteste y veinticuatro horas antes de arrancar. Dos, clasificas una fuga por su gravedad y sabes que la cercanía a un edificio habitado es lo que la vuelve urgente. Tres, ante un daño aplicas el parche seguro y dejas la reparación definitiva para cuanto antes, sin dejar nada a medias. Y cuatro, cierras cualquier reparación puntual con el truco que usarás toda la vida, la disolución jabonosa: si burbujea, fuga.</a:t>
+            </a:r>
+          </a:p>
+          <a:p>
+            <a:r>
+              <a:t>N1: ¿Y por qué es tan potente terminar aquí?</a:t>
+            </a:r>
+          </a:p>
+          <a:p>
+            <a:r>
+              <a:t>N2: Porque en el examen estos plazos y estas listas cerradas son de las preguntas que más caen, casi regalo si te las sabes; y en la obra son tu día a día, desde el vecino que llama porque huele a gas hasta la excavadora que hay que parar antes de reventar un tubo. Has recorrido la ITC-ICG cero uno completa: en el vídeo anterior la vimos nacer, del papel a la puesta en servicio, y en este la hemos mantenido viva, operándola, archivándola y protegiéndola las veinticuatro horas. Hoy ya eres mucho más gasista que ayer: dominas la red de la calle de principio a fin, justo la que empalma con las instalaciones que vas a firmar tú. Enhorabuena, cierras el tema con nota. Nos vemos en la siguiente ITC.</a:t>
             </a:r>
           </a:p>
         </p:txBody>
@@ -1041,12 +1051,12 @@
           <a:lstStyle/>
           <a:p>
             <a:r>
-              <a:t>N1: Tres números para ordenar el vídeo antes de empezar.</a:t>
-            </a:r>
-          </a:p>
-          <a:p>
-            <a:r>
-              <a:t>N2: Hay tres clases de fuga según su gravedad, que veremos en el control de estanquidad. El plan de emergencia escrito tiene ocho puntos, una checklist que conviene memorizar. Y las intervenciones por motivos de seguridad y de emergencia se archivan un mínimo de cinco años. Si retienes estos tres, ya tienes tres respuestas de examen medio hechas.</a:t>
+              <a:t>N1: Tres números para situarte antes de empezar.</a:t>
+            </a:r>
+          </a:p>
+          <a:p>
+            <a:r>
+              <a:t>N2: Este vídeo cubre tres apartados: operar y mantener la red, registrar y archivar los papeles, y proteger la red de las obras de terceros. Verás que las fugas se clasifican en tres clases según su gravedad, algo que cae mucho. Y el plan de emergencia tiene ocho puntos que conviene memorizar como una checklist. Retén estos tres bloques y el resto del vídeo se ordena solo.</a:t>
             </a:r>
           </a:p>
         </p:txBody>
@@ -1116,12 +1126,12 @@
           <a:lstStyle/>
           <a:p>
             <a:r>
-              <a:t>N1: ¿Qué diferencia hay entre operar y mantener?</a:t>
-            </a:r>
-          </a:p>
-          <a:p>
-            <a:r>
-              <a:t>N2: Operar es conducir la red día a día: vigilar presiones, la odorización, que todo fluya. Mantener es cuidarla y repararla. Las dos cosas recaen en el titular de la instalación, aunque las haga gente contratada, personal propio o ajeno, y siempre por personal cualificado. Y la Administración quiere ver los papeles: el distribuidor tiene que entregar copia de los procedimientos de sus centros de operación y de urgencias a dos sitios, al Ministerio, en materia de seguridad industrial, y a la Comunidad Autónoma que autorizó la red. Todo bajo el criterio de seguridad pública.</a:t>
+              <a:t>N1: ¿Qué diferencia hay entre operar y mantener, y de quién es la responsabilidad?</a:t>
+            </a:r>
+          </a:p>
+          <a:p>
+            <a:r>
+              <a:t>N2: Operar es conducir la red día a día, vigilar presiones, la odorización y demás; mantener es cuidarla y repararla. Las dos cosas recaen en el titular de la instalación, aunque las haga gente contratada, personal propio o ajeno, y siempre con criterio de seguridad pública y según las normas seiscientas de siempre. Además, la Administración quiere ver los papeles: el distribuidor entrega copia de los procedimientos de sus centros de operación y de urgencias a dos sitios, al Ministerio, en la parte de seguridad industrial, y a la Comunidad Autónoma que autorizó la red. Ese dato de los dos destinatarios cae en el examen.</a:t>
             </a:r>
           </a:p>
         </p:txBody>
@@ -1191,12 +1201,12 @@
           <a:lstStyle/>
           <a:p>
             <a:r>
-              <a:t>N1: ¿Dónde se vigila que la red vaya bien?</a:t>
-            </a:r>
-          </a:p>
-          <a:p>
-            <a:r>
-              <a:t>N2: En los centros de operación, que son como la torre de control de la red: allí están los medios materiales y humanos para controlar y supervisar. Los dos parámetros de calidad que hay que tener siempre a raya son la presión, que el gas llegue con la fuerza justa, y el odorizante, ese olor a huevo podrido que se le añade a propósito para que se huelan las fugas; si falta odorante, nadie detecta un escape. Y ojo a la excepción que se pregunta: las redes alimentadas desde depósitos de gas licuado del petróleo, típico de una urbanización con su depósito, no están obligadas a tener centro de operación; para ellas se dictan requisitos aparte según el tamaño.</a:t>
+              <a:t>N1: ¿Para qué sirve un centro de operación?</a:t>
+            </a:r>
+          </a:p>
+          <a:p>
+            <a:r>
+              <a:t>N2: Es la torre de control de la red: desde ahí se vigila que todo vaya bien. Los dos parámetros de calidad que hay que tener siempre a raya son la presión, que el gas llegue con la fuerza justa, y el odorizante, ese olor a huevo podrido que se le añade a propósito para que huelas las fugas. Grábate los dos, presión y odorizante, porque si falta odorante nadie detecta un escape hasta que es demasiado tarde. Y atento a la excepción, que se pregunta: las redes alimentadas desde depósitos de gas licuado del petróleo, típicas de una urbanización con su depósito, no están obligadas a tener centro de operación; para ellas se dictan requisitos aparte según el tamaño.</a:t>
             </a:r>
           </a:p>
         </p:txBody>
@@ -1266,12 +1276,12 @@
           <a:lstStyle/>
           <a:p>
             <a:r>
-              <a:t>N1: ¿Qué hace exactamente ese centro?</a:t>
-            </a:r>
-          </a:p>
-          <a:p>
-            <a:r>
-              <a:t>N2: Cuatro funciones, y hay un orden lógico para recordarlas. Primero, controla lo que pasa ahora: presión y odorante, con registros y datos teleinformados de las estaciones de regulación. Segundo, planifica el futuro con un plan de operación, pensando en el crecimiento de la demanda de la próxima campaña. Tercero, informa: elabora cada mes un informe de calidad del gas, con la odorización y el valor medio del poder calorífico superior, el pe ce ese, que es cuánta energía tiene el gas. Y cuarto, programa las actuaciones sobre las redes principales. Un detalle de examen: el dato del pe ce ese lo facilita el Gestor Técnico del Sistema, con frecuencia horaria, aunque el informe se haga mensual.</a:t>
+              <a:t>N1: ¿Cuáles son las funciones del centro de operación y cómo no liarlas?</a:t>
+            </a:r>
+          </a:p>
+          <a:p>
+            <a:r>
+              <a:t>N2: Son cuatro, y hay un orden lógico para recordarlas. Primera, controla lo que pasa ahora mismo, la presión y el odorante. Segunda, planifica el futuro con un plan de operación para la próxima campaña. Tercera, informa cada mes con un informe de calidad del gas donde resume la odorización y el valor medio del poder calorífico superior. Y cuarta, programa los trabajos sobre las redes principales. Ojo a un detalle de examen: el dato del poder calorífico lo facilita el Gestor Técnico del Sistema, con frecuencia horaria, aunque el informe de calidad se elabore solo una vez al mes.</a:t>
             </a:r>
           </a:p>
         </p:txBody>
@@ -1341,12 +1351,12 @@
           <a:lstStyle/>
           <a:p>
             <a:r>
-              <a:t>N1: ¿Qué es el plan de emergencia y qué lleva dentro?</a:t>
-            </a:r>
-          </a:p>
-          <a:p>
-            <a:r>
-              <a:t>N2: Es un documento escrito que describe cómo se organizan los medios humanos y materiales ante una situación de emergencia previsible: dice qué hacer y quién hace qué. La norma le exige ocho puntos, como una checklist: objeto y ámbito, grados de emergencia, desarrollo de la emergencia, responsables, etapas, notificación a los servicios públicos (policía, bomberos, sanitarios), análisis de las emergencias y difusión del plan. No lo confundas con el teléfono de urgencias, que es lo siguiente: el plan es el documento; la atención de urgencias es quien coge la llamada.</a:t>
+              <a:t>N1: No mezcles dos cosas que suenan parecidas. ¿Cuáles son?</a:t>
+            </a:r>
+          </a:p>
+          <a:p>
+            <a:r>
+              <a:t>N2: Una es el plan de emergencia, que es el documento escrito que dice qué hacer y quién hace qué ante un problema gordo; tiene ocho puntos, memorízalos como checklist: objeto y ámbito, grados de emergencia, desarrollo, responsables, etapas, avisar a servicios públicos como policía, bomberos y sanitarios, análisis y difusión. La otra es el servicio de atención de urgencias, que es el teléfono que coge la llamada del vecino que huele a gas; tiene que estar permanente, las veinticuatro horas, con gente que pueda ir en campo y, si hace falta, activar el plan de emergencia. Uno es el papel, el otro es el teléfono: no los confundas.</a:t>
             </a:r>
           </a:p>
         </p:txBody>
@@ -1416,12 +1426,12 @@
           <a:lstStyle/>
           <a:p>
             <a:r>
-              <a:t>N1: Cuando un vecino huele a gas, ¿a quién llama?</a:t>
-            </a:r>
-          </a:p>
-          <a:p>
-            <a:r>
-              <a:t>N2: Al servicio de atención de urgencias, que tiene que estar en funcionamiento permanente, veinticuatro horas, con asistencia telefónica y también en campo, y ser capaz de activar el plan de emergencia en el menor tiempo posible. Las urgencias de seguridad en casa del usuario son una lista cerrada de tres: olor a gas, incendio o explosión; grábalas. Y el aviso de máxima prioridad por excelencia es la fuga de gas, que se atiende antes que nada. Un detalle económico que a veces cae: el coste de tener ese servicio siempre disponible se lo repercuten a los usuarios, según diga el reglamento.</a:t>
+              <a:t>N1: Cuando te pregunten qué incidencias de seguridad atiende el distribuidor en casa del usuario, ¿qué respondes?</a:t>
+            </a:r>
+          </a:p>
+          <a:p>
+            <a:r>
+              <a:t>N2: Son tres, lista cerrada: olor a gas, incendio o explosión. Grábalas tal cual. Los centros de atención de urgencias tienen procedimientos escritos que clasifican los avisos por prioridades, y el aviso de máxima prioridad por excelencia es la fuga de gas: eso se atiende antes que nada, tomando medidas en el menor tiempo posible. Y un detalle económico que a veces cae: el coste de tener ese servicio de urgencias siempre disponible se lo repercuten a los usuarios, según lo que diga el reglamento. Guardan además los registros a disposición de la Administración.</a:t>
             </a:r>
           </a:p>
         </p:txBody>
@@ -1491,12 +1501,12 @@
           <a:lstStyle/>
           <a:p>
             <a:r>
-              <a:t>N1: ¿Todas las fugas se tratan igual?</a:t>
-            </a:r>
-          </a:p>
-          <a:p>
-            <a:r>
-              <a:t>N2: No. El titular comprueba la estanquidad de la red con un sistema de probada eficacia y clasifica las fugas en tres clases, de más a menos grave. Urgente: hay que ir ya, hay peligro inmediato. Programada: hay que arreglarla, pero se puede planificar la intervención. Y de vigilancia de progresión: es tan pequeña o tan poco peligrosa que de momento solo se vigila por si va a más. El truco para recordarlas: urgente ahora, programada pronto, progresión la miro. La documentación de estos controles queda en poder del titular, a disposición de la Comunidad Autónoma.</a:t>
+              <a:t>N1: El titular comprueba la estanquidad. ¿Cómo se clasifican las fugas que aparecen?</a:t>
+            </a:r>
+          </a:p>
+          <a:p>
+            <a:r>
+              <a:t>N2: En tres clases, de más a menos grave. Urgente, hay que ir ya porque hay peligro inmediato. Programada, hay que arreglarla pero se puede planificar la intervención. Y de vigilancia de progresión, es tan pequeña o tan poco peligrosa que de momento solo se vigila por si va a más. El truco: urgente ahora, programada pronto, progresión la miro. ¿Y por qué una misma fuga puede ser urgente o solo de vigilancia? Depende de dónde esté: una fuga pequeña en pleno campo no es lo mismo que la misma fuga pegada a un edificio habitado. Por eso uno de los factores es la proximidad a propiedades y su uso, junto con qué gas es, a qué presión va y qué dice el detector. La documentación queda en poder del titular, a disposición de la Comunidad Autónoma.</a:t>
             </a:r>
           </a:p>
         </p:txBody>
@@ -1566,12 +1576,12 @@
           <a:lstStyle/>
           <a:p>
             <a:r>
-              <a:t>N1: ¿Por qué una misma fuga puede ser urgente o solo de vigilancia?</a:t>
-            </a:r>
-          </a:p>
-          <a:p>
-            <a:r>
-              <a:t>N2: Porque depende de cuatro factores, y el más llamativo es dónde está la fuga. Una fuga pequeña en pleno campo no es lo mismo que la misma fuga pegada a un edificio habitado: la cercanía a propiedades y personas es lo que dispara la urgencia. Los otros tres factores son las características físicas del gas distribuido, la presión de operación de la instalación y las indicaciones del sistema detector de fugas. Así que el tamaño no lo es todo: pesa mucho la proximidad a edificios y el uso que se les da.</a:t>
+              <a:t>N1: Aparece una fuga o un daño y no se puede arreglar bien en el momento. ¿Qué se hace?</a:t>
+            </a:r>
+          </a:p>
+          <a:p>
+            <a:r>
+              <a:t>N2: Se pone una medida temporal, un parche seguro, para que no haya peligro, y en cuanto se pueda se hace la reparación definitiva. Nunca se deja a medias y ya veremos: el parche es solo un puente hasta la reparación buena. Regla general: después de tocar la red hay que repetir las pruebas en obra, resistencia y estanquidad de las normas seiscientas. Pero hay una excepción muy práctica: si es una reparación puntual o un tramo de corta extensión, no hace falta el paripé completo, basta con comprobar que las uniones nuevas no fugan echándoles agua con jabón; si burbujea, hay fuga. Es el clásico truco del gasista de la disolución jabonosa que vas a usar toda la vida.</a:t>
             </a:r>
           </a:p>
         </p:txBody>
@@ -4894,7 +4904,7 @@
                 </a:solidFill>
                 <a:latin typeface="Montserrat"/>
               </a:rPr>
-              <a:t>APARTADO 6.4 · MANTENIMIENTO</a:t>
+              <a:t>APARTADO 6.4 · SEGURIDAD EN LA INTERVENCIÓN</a:t>
             </a:r>
           </a:p>
         </p:txBody>
@@ -4928,7 +4938,7 @@
                 </a:solidFill>
                 <a:latin typeface="Montserrat"/>
               </a:rPr>
-              <a:t>Parche y reparación</a:t>
+              <a:t>Cuatro reflejos con gas fuera</a:t>
             </a:r>
           </a:p>
         </p:txBody>
@@ -4976,7 +4986,7 @@
                 </a:solidFill>
                 <a:latin typeface="Montserrat"/>
               </a:rPr>
-              <a:t>Medida temporal si no hay arreglo ya</a:t>
+              <a:t>Al reabrir: purga por los extremos</a:t>
             </a:r>
           </a:p>
           <a:p>
@@ -5001,7 +5011,7 @@
                 </a:solidFill>
                 <a:latin typeface="Montserrat"/>
               </a:rPr>
-              <a:t>Reparación definitiva cuanto antes</a:t>
+              <a:t>Detectar presencia de gas</a:t>
             </a:r>
           </a:p>
           <a:p>
@@ -5026,14 +5036,64 @@
                 </a:solidFill>
                 <a:latin typeface="Montserrat"/>
               </a:rPr>
-              <a:t>Uniones nuevas: disolución jabonosa</a:t>
-            </a:r>
-          </a:p>
-        </p:txBody>
-      </p:sp>
-      <p:sp>
-        <p:nvSpPr>
-          <p:cNvPr id="8" name="imgph" descr="IMGQ:plumber soapy water leak test pipe"/>
+              <a:t>Señalizar y controlar la zona</a:t>
+            </a:r>
+          </a:p>
+          <a:p>
+            <a:pPr>
+              <a:spcAft>
+                <a:spcPts val="1000"/>
+              </a:spcAft>
+            </a:pPr>
+            <a:r>
+              <a:rPr sz="1600" b="1" i="0">
+                <a:solidFill>
+                  <a:srgbClr val="2E3A80"/>
+                </a:solidFill>
+                <a:latin typeface="Montserrat"/>
+              </a:rPr>
+              <a:t>•  </a:t>
+            </a:r>
+            <a:r>
+              <a:rPr sz="1600" b="0" i="0">
+                <a:solidFill>
+                  <a:srgbClr val="1B2330"/>
+                </a:solidFill>
+                <a:latin typeface="Montserrat"/>
+              </a:rPr>
+              <a:t>Retirar fuentes de ignición</a:t>
+            </a:r>
+          </a:p>
+          <a:p>
+            <a:pPr>
+              <a:spcAft>
+                <a:spcPts val="1000"/>
+              </a:spcAft>
+            </a:pPr>
+            <a:r>
+              <a:rPr sz="1600" b="1" i="0">
+                <a:solidFill>
+                  <a:srgbClr val="2E3A80"/>
+                </a:solidFill>
+                <a:latin typeface="Montserrat"/>
+              </a:rPr>
+              <a:t>•  </a:t>
+            </a:r>
+            <a:r>
+              <a:rPr sz="1600" b="0" i="0">
+                <a:solidFill>
+                  <a:srgbClr val="1B2330"/>
+                </a:solidFill>
+                <a:latin typeface="Montserrat"/>
+              </a:rPr>
+              <a:t>Extintor específico a mano</a:t>
+            </a:r>
+          </a:p>
+        </p:txBody>
+      </p:sp>
+      <p:sp>
+        <p:nvSpPr>
+          <p:cNvPr id="8" name="imgph" descr="IMGQ:gas works site safety signage cordon"/>
           <p:cNvSpPr/>
           <p:nvPr/>
         </p:nvSpPr>
@@ -5119,7 +5179,7 @@
                 </a:solidFill>
                 <a:latin typeface="Montserrat"/>
               </a:rPr>
-              <a:t>plumber soapy water leak test pipe</a:t>
+              <a:t>gas works site safety signage cordon</a:t>
             </a:r>
           </a:p>
         </p:txBody>
@@ -5284,7 +5344,7 @@
                 </a:solidFill>
                 <a:latin typeface="Montserrat"/>
               </a:rPr>
-              <a:t>APARTADO 6.4 · PRECAUCIONES</a:t>
+              <a:t>APARTADO 7 · REGISTRO Y ARCHIVO</a:t>
             </a:r>
           </a:p>
         </p:txBody>
@@ -5318,7 +5378,7 @@
                 </a:solidFill>
                 <a:latin typeface="Montserrat"/>
               </a:rPr>
-              <a:t>Trabajar con gas presente</a:t>
+              <a:t>Los papeles que se guardan</a:t>
             </a:r>
           </a:p>
         </p:txBody>
@@ -5366,7 +5426,7 @@
                 </a:solidFill>
                 <a:latin typeface="Montserrat"/>
               </a:rPr>
-              <a:t>Detectar la presencia de gas</a:t>
+              <a:t>Cartografía siempre actualizada</a:t>
             </a:r>
           </a:p>
           <a:p>
@@ -5391,7 +5451,7 @@
                 </a:solidFill>
                 <a:latin typeface="Montserrat"/>
               </a:rPr>
-              <a:t>Señalizar y controlar la zona</a:t>
+              <a:t>Autorizaciones y proyectos con sus pruebas</a:t>
             </a:r>
           </a:p>
           <a:p>
@@ -5416,7 +5476,7 @@
                 </a:solidFill>
                 <a:latin typeface="Montserrat"/>
               </a:rPr>
-              <a:t>Retirar fuentes de ignición</a:t>
+              <a:t>Estanquidad: las dos últimas</a:t>
             </a:r>
           </a:p>
           <a:p>
@@ -5441,14 +5501,14 @@
                 </a:solidFill>
                 <a:latin typeface="Montserrat"/>
               </a:rPr>
-              <a:t>Extintor a mano</a:t>
-            </a:r>
-          </a:p>
-        </p:txBody>
-      </p:sp>
-      <p:sp>
-        <p:nvSpPr>
-          <p:cNvPr id="8" name="imgph" descr="IMGQ:gas detector safety cordon worksite"/>
+              <a:t>Seguridad y emergencias: mínimo 5 años</a:t>
+            </a:r>
+          </a:p>
+        </p:txBody>
+      </p:sp>
+      <p:sp>
+        <p:nvSpPr>
+          <p:cNvPr id="8" name="imgph" descr="IMGQ:archive folders shelves documents"/>
           <p:cNvSpPr/>
           <p:nvPr/>
         </p:nvSpPr>
@@ -5534,7 +5594,7 @@
                 </a:solidFill>
                 <a:latin typeface="Montserrat"/>
               </a:rPr>
-              <a:t>gas detector safety cordon worksite</a:t>
+              <a:t>archive folders shelves documents</a:t>
             </a:r>
           </a:p>
         </p:txBody>
@@ -5699,7 +5759,7 @@
                 </a:solidFill>
                 <a:latin typeface="Montserrat"/>
               </a:rPr>
-              <a:t>APARTADO 7 · REGISTRO Y ARCHIVO</a:t>
+              <a:t>APARTADO 8 · AFECCIONES POR TERCEROS</a:t>
             </a:r>
           </a:p>
         </p:txBody>
@@ -5733,7 +5793,7 @@
                 </a:solidFill>
                 <a:latin typeface="Montserrat"/>
               </a:rPr>
-              <a:t>Qué se guarda y cuánto</a:t>
+              <a:t>Antes de picar, pregunta</a:t>
             </a:r>
           </a:p>
         </p:txBody>
@@ -5781,7 +5841,7 @@
                 </a:solidFill>
                 <a:latin typeface="Montserrat"/>
               </a:rPr>
-              <a:t>Cartografía siempre al día</a:t>
+              <a:t>Aviso al distribuidor: 30 días antes</a:t>
             </a:r>
           </a:p>
           <a:p>
@@ -5806,7 +5866,7 @@
                 </a:solidFill>
                 <a:latin typeface="Montserrat"/>
               </a:rPr>
-              <a:t>Estanquidad: las 2 últimas</a:t>
+              <a:t>El distribuidor contesta en 20 días</a:t>
             </a:r>
           </a:p>
           <a:p>
@@ -5831,7 +5891,7 @@
                 </a:solidFill>
                 <a:latin typeface="Montserrat"/>
               </a:rPr>
-              <a:t>Seguridad y emergencias: 5 años</a:t>
+              <a:t>Inicio de obra: aviso 24 horas antes</a:t>
             </a:r>
           </a:p>
           <a:p>
@@ -5856,14 +5916,14 @@
                 </a:solidFill>
                 <a:latin typeface="Montserrat"/>
               </a:rPr>
-              <a:t>Papel o informático, pero fiable</a:t>
-            </a:r>
-          </a:p>
-        </p:txBody>
-      </p:sp>
-      <p:sp>
-        <p:nvSpPr>
-          <p:cNvPr id="8" name="imgph" descr="IMGQ:pipeline map archive folders"/>
+              <a:t>Por escrito, con la localización</a:t>
+            </a:r>
+          </a:p>
+        </p:txBody>
+      </p:sp>
+      <p:sp>
+        <p:nvSpPr>
+          <p:cNvPr id="8" name="imgph" descr="IMGQ:road excavation works underground pipes"/>
           <p:cNvSpPr/>
           <p:nvPr/>
         </p:nvSpPr>
@@ -5949,7 +6009,7 @@
                 </a:solidFill>
                 <a:latin typeface="Montserrat"/>
               </a:rPr>
-              <a:t>pipeline map archive folders</a:t>
+              <a:t>road excavation works underground pipes</a:t>
             </a:r>
           </a:p>
         </p:txBody>
@@ -6114,7 +6174,7 @@
                 </a:solidFill>
                 <a:latin typeface="Montserrat"/>
               </a:rPr>
-              <a:t>APARTADO 8 · AFECCIONES POR TERCEROS</a:t>
+              <a:t>APARTADO 8 · QUIÉN DECIDE</a:t>
             </a:r>
           </a:p>
         </p:txBody>
@@ -6148,7 +6208,7 @@
                 </a:solidFill>
                 <a:latin typeface="Montserrat"/>
               </a:rPr>
-              <a:t>Antes de picar, pregunta</a:t>
+              <a:t>Si hay pelea, manda la CA</a:t>
             </a:r>
           </a:p>
         </p:txBody>
@@ -6196,7 +6256,7 @@
                 </a:solidFill>
                 <a:latin typeface="Montserrat"/>
               </a:rPr>
-              <a:t>Aviso 30 días antes, por escrito</a:t>
+              <a:t>Afecta al trazado: distribuidor puede negarse</a:t>
             </a:r>
           </a:p>
           <a:p>
@@ -6221,7 +6281,7 @@
                 </a:solidFill>
                 <a:latin typeface="Montserrat"/>
               </a:rPr>
-              <a:t>Distribuidor contesta en 20 días</a:t>
+              <a:t>Motivo: razones técnicas o de seguridad</a:t>
             </a:r>
           </a:p>
           <a:p>
@@ -6246,14 +6306,39 @@
                 </a:solidFill>
                 <a:latin typeface="Montserrat"/>
               </a:rPr>
-              <a:t>Inicio: avisar 24 horas antes</a:t>
-            </a:r>
-          </a:p>
-        </p:txBody>
-      </p:sp>
-      <p:sp>
-        <p:nvSpPr>
-          <p:cNvPr id="8" name="imgph" descr="IMGQ:roadworks excavation warning signs"/>
+              <a:t>Desacuerdo: resuelve la Comunidad Autónoma</a:t>
+            </a:r>
+          </a:p>
+          <a:p>
+            <a:pPr>
+              <a:spcAft>
+                <a:spcPts val="1000"/>
+              </a:spcAft>
+            </a:pPr>
+            <a:r>
+              <a:rPr sz="1600" b="1" i="0">
+                <a:solidFill>
+                  <a:srgbClr val="2E3A80"/>
+                </a:solidFill>
+                <a:latin typeface="Montserrat"/>
+              </a:rPr>
+              <a:t>•  </a:t>
+            </a:r>
+            <a:r>
+              <a:rPr sz="1600" b="0" i="0">
+                <a:solidFill>
+                  <a:srgbClr val="1B2330"/>
+                </a:solidFill>
+                <a:latin typeface="Montserrat"/>
+              </a:rPr>
+              <a:t>La carga de probar es del solicitante</a:t>
+            </a:r>
+          </a:p>
+        </p:txBody>
+      </p:sp>
+      <p:sp>
+        <p:nvSpPr>
+          <p:cNvPr id="8" name="imgph" descr="IMGQ:engineers discussing plans construction site"/>
           <p:cNvSpPr/>
           <p:nvPr/>
         </p:nvSpPr>
@@ -6339,7 +6424,7 @@
                 </a:solidFill>
                 <a:latin typeface="Montserrat"/>
               </a:rPr>
-              <a:t>roadworks excavation warning signs</a:t>
+              <a:t>engineers discussing plans construction site</a:t>
             </a:r>
           </a:p>
         </p:txBody>
@@ -6504,7 +6589,7 @@
                 </a:solidFill>
                 <a:latin typeface="Montserrat"/>
               </a:rPr>
-              <a:t>APARTADO 8 · CONFLICTOS</a:t>
+              <a:t>REPASO RELÁMPAGO</a:t>
             </a:r>
           </a:p>
         </p:txBody>
@@ -6538,7 +6623,7 @@
                 </a:solidFill>
                 <a:latin typeface="Montserrat"/>
               </a:rPr>
-              <a:t>Si la obra toca el gas</a:t>
+              <a:t>Lo que no se te puede olvidar</a:t>
             </a:r>
           </a:p>
         </p:txBody>
@@ -6586,7 +6671,7 @@
                 </a:solidFill>
                 <a:latin typeface="Montserrat"/>
               </a:rPr>
-              <a:t>El distribuidor puede negarse</a:t>
+              <a:t>Dos parámetros: presión y odorizante</a:t>
             </a:r>
           </a:p>
           <a:p>
@@ -6611,7 +6696,7 @@
                 </a:solidFill>
                 <a:latin typeface="Montserrat"/>
               </a:rPr>
-              <a:t>Razones técnicas o de seguridad</a:t>
+              <a:t>Urgencias: olor, incendio, explosión</a:t>
             </a:r>
           </a:p>
           <a:p>
@@ -6636,14 +6721,64 @@
                 </a:solidFill>
                 <a:latin typeface="Montserrat"/>
               </a:rPr>
-              <a:t>Decide la Comunidad Autónoma</a:t>
-            </a:r>
-          </a:p>
-        </p:txBody>
-      </p:sp>
-      <p:sp>
-        <p:nvSpPr>
-          <p:cNvPr id="8" name="imgph" descr="IMGQ:gas pipeline warning tape ground"/>
+              <a:t>Fugas: urgente, programada, vigilancia</a:t>
+            </a:r>
+          </a:p>
+          <a:p>
+            <a:pPr>
+              <a:spcAft>
+                <a:spcPts val="1000"/>
+              </a:spcAft>
+            </a:pPr>
+            <a:r>
+              <a:rPr sz="1600" b="1" i="0">
+                <a:solidFill>
+                  <a:srgbClr val="2E3A80"/>
+                </a:solidFill>
+                <a:latin typeface="Montserrat"/>
+              </a:rPr>
+              <a:t>•  </a:t>
+            </a:r>
+            <a:r>
+              <a:rPr sz="1600" b="0" i="0">
+                <a:solidFill>
+                  <a:srgbClr val="1B2330"/>
+                </a:solidFill>
+                <a:latin typeface="Montserrat"/>
+              </a:rPr>
+              <a:t>Plazos de terceros: 30 · 20 · 24</a:t>
+            </a:r>
+          </a:p>
+          <a:p>
+            <a:pPr>
+              <a:spcAft>
+                <a:spcPts val="1000"/>
+              </a:spcAft>
+            </a:pPr>
+            <a:r>
+              <a:rPr sz="1600" b="1" i="0">
+                <a:solidFill>
+                  <a:srgbClr val="2E3A80"/>
+                </a:solidFill>
+                <a:latin typeface="Montserrat"/>
+              </a:rPr>
+              <a:t>•  </a:t>
+            </a:r>
+            <a:r>
+              <a:rPr sz="1600" b="0" i="0">
+                <a:solidFill>
+                  <a:srgbClr val="1B2330"/>
+                </a:solidFill>
+                <a:latin typeface="Montserrat"/>
+              </a:rPr>
+              <a:t>Archivo: dos últimas y cinco años</a:t>
+            </a:r>
+          </a:p>
+        </p:txBody>
+      </p:sp>
+      <p:sp>
+        <p:nvSpPr>
+          <p:cNvPr id="8" name="imgph" descr="IMGQ:gas cylinder cabinet outdoor wall"/>
           <p:cNvSpPr/>
           <p:nvPr/>
         </p:nvSpPr>
@@ -6729,7 +6864,7 @@
                 </a:solidFill>
                 <a:latin typeface="Montserrat"/>
               </a:rPr>
-              <a:t>gas pipeline warning tape ground</a:t>
+              <a:t>gas cylinder cabinet outdoor wall</a:t>
             </a:r>
           </a:p>
         </p:txBody>
@@ -6767,7 +6902,7 @@
             <a:avLst/>
           </a:prstGeom>
           <a:solidFill>
-            <a:srgbClr val="FFFFFF"/>
+            <a:srgbClr val="1E2761"/>
           </a:solidFill>
           <a:ln>
             <a:noFill/>
@@ -6804,8 +6939,8 @@
         </p:nvSpPr>
         <p:spPr>
           <a:xfrm>
-            <a:off x="10607040" y="320040"/>
-            <a:ext cx="1371600" cy="365760"/>
+            <a:off x="822960" y="640080"/>
+            <a:ext cx="10515600" cy="457200"/>
           </a:xfrm>
           <a:prstGeom prst="rect">
             <a:avLst/>
@@ -6818,15 +6953,14 @@
           </a:bodyPr>
           <a:lstStyle/>
           <a:p>
-            <a:pPr algn="r"/>
-            <a:r>
-              <a:rPr sz="1000" b="1" i="0">
-                <a:solidFill>
-                  <a:srgbClr val="64748B"/>
-                </a:solidFill>
-                <a:latin typeface="Montserrat"/>
-              </a:rPr>
-              <a:t>015 / 015</a:t>
+            <a:r>
+              <a:rPr sz="1400" b="1" i="0">
+                <a:solidFill>
+                  <a:srgbClr val="CADCFC"/>
+                </a:solidFill>
+                <a:latin typeface="Montserrat"/>
+              </a:rPr>
+              <a:t>LO QUE YA DOMINAS</a:t>
             </a:r>
           </a:p>
         </p:txBody>
@@ -6839,8 +6973,8 @@
         </p:nvSpPr>
         <p:spPr>
           <a:xfrm>
-            <a:off x="457200" y="6419088"/>
-            <a:ext cx="8229600" cy="365760"/>
+            <a:off x="822960" y="1143000"/>
+            <a:ext cx="10515600" cy="1097280"/>
           </a:xfrm>
           <a:prstGeom prst="rect">
             <a:avLst/>
@@ -6854,13 +6988,13 @@
           <a:lstStyle/>
           <a:p>
             <a:r>
-              <a:rPr sz="900" b="0" i="0">
-                <a:solidFill>
-                  <a:srgbClr val="64748B"/>
-                </a:solidFill>
-                <a:latin typeface="Montserrat"/>
-              </a:rPr>
-              <a:t>Curso Gas B · Tema 01 · Distribución por canalización</a:t>
+              <a:rPr sz="3400" b="1" i="0">
+                <a:solidFill>
+                  <a:srgbClr val="FFFFFF"/>
+                </a:solidFill>
+                <a:latin typeface="Montserrat"/>
+              </a:rPr>
+              <a:t>Ya sabes mantener viva una red de gas</a:t>
             </a:r>
           </a:p>
         </p:txBody>
@@ -6873,8 +7007,8 @@
         </p:nvSpPr>
         <p:spPr>
           <a:xfrm>
-            <a:off x="822960" y="640080"/>
-            <a:ext cx="10058400" cy="914400"/>
+            <a:off x="822960" y="2514600"/>
+            <a:ext cx="10515600" cy="2834640"/>
           </a:xfrm>
           <a:prstGeom prst="rect">
             <a:avLst/>
@@ -6887,28 +7021,161 @@
           </a:bodyPr>
           <a:lstStyle/>
           <a:p>
-            <a:r>
-              <a:rPr sz="3000" b="1" i="0">
-                <a:solidFill>
-                  <a:srgbClr val="1E2761"/>
-                </a:solidFill>
-                <a:latin typeface="Montserrat"/>
-              </a:rPr>
-              <a:t>Qué me llevo</a:t>
-            </a:r>
-          </a:p>
-        </p:txBody>
-      </p:sp>
-      <p:sp>
-        <p:nvSpPr>
-          <p:cNvPr id="6" name="TextBox 5"/>
+            <a:pPr>
+              <a:spcAft>
+                <a:spcPts val="1200"/>
+              </a:spcAft>
+            </a:pPr>
+            <a:r>
+              <a:rPr sz="2000" b="1" i="0">
+                <a:solidFill>
+                  <a:srgbClr val="CADCFC"/>
+                </a:solidFill>
+                <a:latin typeface="Montserrat"/>
+              </a:rPr>
+              <a:t>✓  </a:t>
+            </a:r>
+            <a:r>
+              <a:rPr sz="1900" b="0" i="0">
+                <a:solidFill>
+                  <a:srgbClr val="FFFFFF"/>
+                </a:solidFill>
+                <a:latin typeface="Montserrat"/>
+              </a:rPr>
+              <a:t>Reconoces los tres plazos de terceros: 30, 20 y 24</a:t>
+            </a:r>
+          </a:p>
+          <a:p>
+            <a:pPr>
+              <a:spcAft>
+                <a:spcPts val="1200"/>
+              </a:spcAft>
+            </a:pPr>
+            <a:r>
+              <a:rPr sz="2000" b="1" i="0">
+                <a:solidFill>
+                  <a:srgbClr val="CADCFC"/>
+                </a:solidFill>
+                <a:latin typeface="Montserrat"/>
+              </a:rPr>
+              <a:t>✓  </a:t>
+            </a:r>
+            <a:r>
+              <a:rPr sz="1900" b="0" i="0">
+                <a:solidFill>
+                  <a:srgbClr val="FFFFFF"/>
+                </a:solidFill>
+                <a:latin typeface="Montserrat"/>
+              </a:rPr>
+              <a:t>Clasificas una fuga por gravedad y por cercanía</a:t>
+            </a:r>
+          </a:p>
+          <a:p>
+            <a:pPr>
+              <a:spcAft>
+                <a:spcPts val="1200"/>
+              </a:spcAft>
+            </a:pPr>
+            <a:r>
+              <a:rPr sz="2000" b="1" i="0">
+                <a:solidFill>
+                  <a:srgbClr val="CADCFC"/>
+                </a:solidFill>
+                <a:latin typeface="Montserrat"/>
+              </a:rPr>
+              <a:t>✓  </a:t>
+            </a:r>
+            <a:r>
+              <a:rPr sz="1900" b="0" i="0">
+                <a:solidFill>
+                  <a:srgbClr val="FFFFFF"/>
+                </a:solidFill>
+                <a:latin typeface="Montserrat"/>
+              </a:rPr>
+              <a:t>Aplicas el parche seguro antes de la reparación buena</a:t>
+            </a:r>
+          </a:p>
+          <a:p>
+            <a:pPr>
+              <a:spcAft>
+                <a:spcPts val="1200"/>
+              </a:spcAft>
+            </a:pPr>
+            <a:r>
+              <a:rPr sz="2000" b="1" i="0">
+                <a:solidFill>
+                  <a:srgbClr val="CADCFC"/>
+                </a:solidFill>
+                <a:latin typeface="Montserrat"/>
+              </a:rPr>
+              <a:t>✓  </a:t>
+            </a:r>
+            <a:r>
+              <a:rPr sz="1900" b="0" i="0">
+                <a:solidFill>
+                  <a:srgbClr val="FFFFFF"/>
+                </a:solidFill>
+                <a:latin typeface="Montserrat"/>
+              </a:rPr>
+              <a:t>Cierras con el truco de campo: si burbujea, fuga</a:t>
+            </a:r>
+          </a:p>
+        </p:txBody>
+      </p:sp>
+      <p:sp>
+        <p:nvSpPr>
+          <p:cNvPr id="6" name="Rounded Rectangle 5"/>
+          <p:cNvSpPr/>
+          <p:nvPr/>
+        </p:nvSpPr>
+        <p:spPr>
+          <a:xfrm>
+            <a:off x="822960" y="5532120"/>
+            <a:ext cx="10515600" cy="777240"/>
+          </a:xfrm>
+          <a:prstGeom prst="roundRect">
+            <a:avLst/>
+          </a:prstGeom>
+          <a:solidFill>
+            <a:srgbClr val="2E3A80"/>
+          </a:solidFill>
+          <a:ln>
+            <a:noFill/>
+          </a:ln>
+          <a:effectLst/>
+        </p:spPr>
+        <p:style>
+          <a:lnRef idx="1">
+            <a:schemeClr val="accent1"/>
+          </a:lnRef>
+          <a:fillRef idx="3">
+            <a:schemeClr val="accent1"/>
+          </a:fillRef>
+          <a:effectRef idx="2">
+            <a:schemeClr val="accent1"/>
+          </a:effectRef>
+          <a:fontRef idx="minor">
+            <a:schemeClr val="lt1"/>
+          </a:fontRef>
+        </p:style>
+        <p:txBody>
+          <a:bodyPr rtlCol="0" anchor="ctr"/>
+          <a:lstStyle/>
+          <a:p>
+            <a:pPr algn="ctr"/>
+          </a:p>
+        </p:txBody>
+      </p:sp>
+      <p:sp>
+        <p:nvSpPr>
+          <p:cNvPr id="7" name="TextBox 6"/>
           <p:cNvSpPr txBox="1"/>
           <p:nvPr/>
         </p:nvSpPr>
         <p:spPr>
           <a:xfrm>
-            <a:off x="822960" y="2011680"/>
-            <a:ext cx="10058400" cy="3657600"/>
+            <a:off x="1051560" y="5605272"/>
+            <a:ext cx="10058400" cy="640080"/>
           </a:xfrm>
           <a:prstGeom prst="rect">
             <a:avLst/>
@@ -6921,78 +7188,14 @@
           </a:bodyPr>
           <a:lstStyle/>
           <a:p>
-            <a:pPr>
-              <a:spcAft>
-                <a:spcPts val="1400"/>
-              </a:spcAft>
-            </a:pPr>
-            <a:r>
-              <a:rPr sz="2000" b="1" i="0">
-                <a:solidFill>
-                  <a:srgbClr val="2E3A80"/>
-                </a:solidFill>
-                <a:latin typeface="Montserrat"/>
-              </a:rPr>
-              <a:t>✓  </a:t>
-            </a:r>
-            <a:r>
-              <a:rPr sz="2000" b="0" i="0">
-                <a:solidFill>
-                  <a:srgbClr val="1B2330"/>
-                </a:solidFill>
-                <a:latin typeface="Montserrat"/>
-              </a:rPr>
-              <a:t>El titular opera y mantiene 24 h</a:t>
-            </a:r>
-          </a:p>
-          <a:p>
-            <a:pPr>
-              <a:spcAft>
-                <a:spcPts val="1400"/>
-              </a:spcAft>
-            </a:pPr>
-            <a:r>
-              <a:rPr sz="2000" b="1" i="0">
-                <a:solidFill>
-                  <a:srgbClr val="2E3A80"/>
-                </a:solidFill>
-                <a:latin typeface="Montserrat"/>
-              </a:rPr>
-              <a:t>✓  </a:t>
-            </a:r>
-            <a:r>
-              <a:rPr sz="2000" b="0" i="0">
-                <a:solidFill>
-                  <a:srgbClr val="1B2330"/>
-                </a:solidFill>
-                <a:latin typeface="Montserrat"/>
-              </a:rPr>
-              <a:t>Fuga de gas = máxima prioridad</a:t>
-            </a:r>
-          </a:p>
-          <a:p>
-            <a:pPr>
-              <a:spcAft>
-                <a:spcPts val="1400"/>
-              </a:spcAft>
-            </a:pPr>
-            <a:r>
-              <a:rPr sz="2000" b="1" i="0">
-                <a:solidFill>
-                  <a:srgbClr val="2E3A80"/>
-                </a:solidFill>
-                <a:latin typeface="Montserrat"/>
-              </a:rPr>
-              <a:t>✓  </a:t>
-            </a:r>
-            <a:r>
-              <a:rPr sz="2000" b="0" i="0">
-                <a:solidFill>
-                  <a:srgbClr val="1B2330"/>
-                </a:solidFill>
-                <a:latin typeface="Montserrat"/>
-              </a:rPr>
-              <a:t>Antes de picar: 30 · 20 · 24</a:t>
+            <a:r>
+              <a:rPr sz="1500" b="1" i="1">
+                <a:solidFill>
+                  <a:srgbClr val="CADCFC"/>
+                </a:solidFill>
+                <a:latin typeface="Montserrat"/>
+              </a:rPr>
+              <a:t>Cierras la ITC-ICG 01 entera: del papel a la calle viva. Ya eres mucho más gasista que ayer.</a:t>
             </a:r>
           </a:p>
         </p:txBody>
@@ -7273,7 +7476,7 @@
                 </a:solidFill>
                 <a:latin typeface="Montserrat"/>
               </a:rPr>
-              <a:t>clases de fuga según su gravedad</a:t>
+              <a:t>apartados: operar, archivar, proteger</a:t>
             </a:r>
           </a:p>
         </p:txBody>
@@ -7354,7 +7557,7 @@
                 </a:solidFill>
                 <a:latin typeface="Montserrat"/>
               </a:rPr>
-              <a:t>8</a:t>
+              <a:t>3</a:t>
             </a:r>
           </a:p>
         </p:txBody>
@@ -7389,7 +7592,7 @@
                 </a:solidFill>
                 <a:latin typeface="Montserrat"/>
               </a:rPr>
-              <a:t>puntos del plan de emergencia</a:t>
+              <a:t>clases de fuga por gravedad</a:t>
             </a:r>
           </a:p>
         </p:txBody>
@@ -7470,7 +7673,7 @@
                 </a:solidFill>
                 <a:latin typeface="Montserrat"/>
               </a:rPr>
-              <a:t>5</a:t>
+              <a:t>8</a:t>
             </a:r>
           </a:p>
         </p:txBody>
@@ -7505,7 +7708,7 @@
                 </a:solidFill>
                 <a:latin typeface="Montserrat"/>
               </a:rPr>
-              <a:t>años de archivo de seguridad</a:t>
+              <a:t>puntos del plan de emergencia</a:t>
             </a:r>
           </a:p>
         </p:txBody>
@@ -7704,7 +7907,7 @@
                 </a:solidFill>
                 <a:latin typeface="Montserrat"/>
               </a:rPr>
-              <a:t>Vigilar y cuidar la red</a:t>
+              <a:t>Operar y mantener la red</a:t>
             </a:r>
           </a:p>
         </p:txBody>
@@ -7752,7 +7955,7 @@
                 </a:solidFill>
                 <a:latin typeface="Montserrat"/>
               </a:rPr>
-              <a:t>Operar: conducir el día a día</a:t>
+              <a:t>Criterio: seguridad pública</a:t>
             </a:r>
           </a:p>
           <a:p>
@@ -7777,7 +7980,7 @@
                 </a:solidFill>
                 <a:latin typeface="Montserrat"/>
               </a:rPr>
-              <a:t>Mantener: cuidar y reparar</a:t>
+              <a:t>Responsabilidad del titular</a:t>
             </a:r>
           </a:p>
           <a:p>
@@ -7802,7 +8005,7 @@
                 </a:solidFill>
                 <a:latin typeface="Montserrat"/>
               </a:rPr>
-              <a:t>Responsabilidad del titular</a:t>
+              <a:t>Personal cualificado, propio o ajeno</a:t>
             </a:r>
           </a:p>
           <a:p>
@@ -7827,7 +8030,7 @@
                 </a:solidFill>
                 <a:latin typeface="Montserrat"/>
               </a:rPr>
-              <a:t>Copia de procedimientos: Ministerio y CA</a:t>
+              <a:t>Procedimientos: al Ministerio y a la CA</a:t>
             </a:r>
           </a:p>
         </p:txBody>
@@ -8167,7 +8370,7 @@
                 </a:solidFill>
                 <a:latin typeface="Montserrat"/>
               </a:rPr>
-              <a:t>Medios materiales y humanos</a:t>
+              <a:t>Vigila dos parámetros: presión y odorizante</a:t>
             </a:r>
           </a:p>
           <a:p>
@@ -8192,7 +8395,7 @@
                 </a:solidFill>
                 <a:latin typeface="Montserrat"/>
               </a:rPr>
-              <a:t>Vigila presión y odorizante</a:t>
+              <a:t>Si falta odorante, nadie huele la fuga</a:t>
             </a:r>
           </a:p>
           <a:p>
@@ -8217,14 +8420,14 @@
                 </a:solidFill>
                 <a:latin typeface="Montserrat"/>
               </a:rPr>
-              <a:t>Excepción: depósitos de GLP</a:t>
-            </a:r>
-          </a:p>
-        </p:txBody>
-      </p:sp>
-      <p:sp>
-        <p:nvSpPr>
-          <p:cNvPr id="8" name="imgph" descr="IMGQ:gas pipeline control center screens"/>
+              <a:t>Excepción: redes desde depósitos de GLP</a:t>
+            </a:r>
+          </a:p>
+        </p:txBody>
+      </p:sp>
+      <p:sp>
+        <p:nvSpPr>
+          <p:cNvPr id="8" name="imgph" descr="IMGQ:gas pressure regulation station gauges"/>
           <p:cNvSpPr/>
           <p:nvPr/>
         </p:nvSpPr>
@@ -8310,7 +8513,7 @@
                 </a:solidFill>
                 <a:latin typeface="Montserrat"/>
               </a:rPr>
-              <a:t>gas pipeline control center screens</a:t>
+              <a:t>gas pressure regulation station gauges</a:t>
             </a:r>
           </a:p>
         </p:txBody>
@@ -8475,7 +8678,7 @@
                 </a:solidFill>
                 <a:latin typeface="Montserrat"/>
               </a:rPr>
-              <a:t>APARTADO 6.1 · FUNCIONES</a:t>
+              <a:t>APARTADO 6.1 · CUATRO FUNCIONES</a:t>
             </a:r>
           </a:p>
         </p:txBody>
@@ -8509,7 +8712,7 @@
                 </a:solidFill>
                 <a:latin typeface="Montserrat"/>
               </a:rPr>
-              <a:t>Cuatro funciones</a:t>
+              <a:t>Lo que hace el centro</a:t>
             </a:r>
           </a:p>
         </p:txBody>
@@ -8557,7 +8760,7 @@
                 </a:solidFill>
                 <a:latin typeface="Montserrat"/>
               </a:rPr>
-              <a:t>Controlar la red ahora</a:t>
+              <a:t>Controlar: presión y odorante ahora</a:t>
             </a:r>
           </a:p>
           <a:p>
@@ -8607,7 +8810,7 @@
                 </a:solidFill>
                 <a:latin typeface="Montserrat"/>
               </a:rPr>
-              <a:t>Informar: informe mensual (PCS)</a:t>
+              <a:t>Informar: informe mensual de calidad</a:t>
             </a:r>
           </a:p>
           <a:p>
@@ -8632,14 +8835,14 @@
                 </a:solidFill>
                 <a:latin typeface="Montserrat"/>
               </a:rPr>
-              <a:t>Programar las redes principales</a:t>
-            </a:r>
-          </a:p>
-        </p:txBody>
-      </p:sp>
-      <p:sp>
-        <p:nvSpPr>
-          <p:cNvPr id="8" name="imgph" descr="IMGQ:engineer analyzing data dashboard"/>
+              <a:t>Programar: actuaciones en redes principales</a:t>
+            </a:r>
+          </a:p>
+        </p:txBody>
+      </p:sp>
+      <p:sp>
+        <p:nvSpPr>
+          <p:cNvPr id="8" name="imgph" descr="IMGQ:engineer analyzing data screen control center"/>
           <p:cNvSpPr/>
           <p:nvPr/>
         </p:nvSpPr>
@@ -8725,7 +8928,7 @@
                 </a:solidFill>
                 <a:latin typeface="Montserrat"/>
               </a:rPr>
-              <a:t>engineer analyzing data dashboard</a:t>
+              <a:t>engineer analyzing data screen control center</a:t>
             </a:r>
           </a:p>
         </p:txBody>
@@ -8924,7 +9127,7 @@
                 </a:solidFill>
                 <a:latin typeface="Montserrat"/>
               </a:rPr>
-              <a:t>Plan de emergencia escrito</a:t>
+              <a:t>Plan escrito vs teléfono 24 h</a:t>
             </a:r>
           </a:p>
         </p:txBody>
@@ -8972,7 +9175,7 @@
                 </a:solidFill>
                 <a:latin typeface="Montserrat"/>
               </a:rPr>
-              <a:t>Documento: qué hacer y quién</a:t>
+              <a:t>Plan de emergencia: documento, 8 puntos</a:t>
             </a:r>
           </a:p>
           <a:p>
@@ -8997,7 +9200,7 @@
                 </a:solidFill>
                 <a:latin typeface="Montserrat"/>
               </a:rPr>
-              <a:t>8 puntos (objeto, grados, etapas…)</a:t>
+              <a:t>Servicio de urgencias: teléfono y campo</a:t>
             </a:r>
           </a:p>
           <a:p>
@@ -9022,14 +9225,39 @@
                 </a:solidFill>
                 <a:latin typeface="Montserrat"/>
               </a:rPr>
-              <a:t>Avisar a policía, bomberos, sanitarios</a:t>
-            </a:r>
-          </a:p>
-        </p:txBody>
-      </p:sp>
-      <p:sp>
-        <p:nvSpPr>
-          <p:cNvPr id="8" name="imgph" descr="IMGQ:emergency response plan document"/>
+              <a:t>Permanente y capaz de activar el plan</a:t>
+            </a:r>
+          </a:p>
+          <a:p>
+            <a:pPr>
+              <a:spcAft>
+                <a:spcPts val="1000"/>
+              </a:spcAft>
+            </a:pPr>
+            <a:r>
+              <a:rPr sz="1600" b="1" i="0">
+                <a:solidFill>
+                  <a:srgbClr val="2E3A80"/>
+                </a:solidFill>
+                <a:latin typeface="Montserrat"/>
+              </a:rPr>
+              <a:t>•  </a:t>
+            </a:r>
+            <a:r>
+              <a:rPr sz="1600" b="0" i="0">
+                <a:solidFill>
+                  <a:srgbClr val="1B2330"/>
+                </a:solidFill>
+                <a:latin typeface="Montserrat"/>
+              </a:rPr>
+              <a:t>Avisa a policía, bomberos y sanitarios</a:t>
+            </a:r>
+          </a:p>
+        </p:txBody>
+      </p:sp>
+      <p:sp>
+        <p:nvSpPr>
+          <p:cNvPr id="8" name="imgph" descr="IMGQ:emergency call center operator headset"/>
           <p:cNvSpPr/>
           <p:nvPr/>
         </p:nvSpPr>
@@ -9115,7 +9343,7 @@
                 </a:solidFill>
                 <a:latin typeface="Montserrat"/>
               </a:rPr>
-              <a:t>emergency response plan document</a:t>
+              <a:t>emergency call center operator headset</a:t>
             </a:r>
           </a:p>
         </p:txBody>
@@ -9280,7 +9508,7 @@
                 </a:solidFill>
                 <a:latin typeface="Montserrat"/>
               </a:rPr>
-              <a:t>APARTADO 6.2 · URGENCIAS</a:t>
+              <a:t>APARTADO 6.2 · URGENCIAS DE SEGURIDAD</a:t>
             </a:r>
           </a:p>
         </p:txBody>
@@ -9314,7 +9542,7 @@
                 </a:solidFill>
                 <a:latin typeface="Montserrat"/>
               </a:rPr>
-              <a:t>El teléfono 24 horas</a:t>
+              <a:t>Olor, incendio o explosión</a:t>
             </a:r>
           </a:p>
         </p:txBody>
@@ -9362,7 +9590,7 @@
                 </a:solidFill>
                 <a:latin typeface="Montserrat"/>
               </a:rPr>
-              <a:t>Asistencia permanente y en campo</a:t>
+              <a:t>Lista cerrada: olor a gas, incendio, explosión</a:t>
             </a:r>
           </a:p>
           <a:p>
@@ -9387,7 +9615,7 @@
                 </a:solidFill>
                 <a:latin typeface="Montserrat"/>
               </a:rPr>
-              <a:t>Capaz de activar el plan</a:t>
+              <a:t>Fuga de gas: máxima prioridad</a:t>
             </a:r>
           </a:p>
           <a:p>
@@ -9412,7 +9640,7 @@
                 </a:solidFill>
                 <a:latin typeface="Montserrat"/>
               </a:rPr>
-              <a:t>Urgencias: olor, incendio, explosión</a:t>
+              <a:t>Avisos clasificados por prioridades</a:t>
             </a:r>
           </a:p>
           <a:p>
@@ -9437,14 +9665,14 @@
                 </a:solidFill>
                 <a:latin typeface="Montserrat"/>
               </a:rPr>
-              <a:t>Fuga de gas: máxima prioridad</a:t>
-            </a:r>
-          </a:p>
-        </p:txBody>
-      </p:sp>
-      <p:sp>
-        <p:nvSpPr>
-          <p:cNvPr id="8" name="imgph" descr="IMGQ:emergency call center operator headset"/>
+              <a:t>El coste se repercute al usuario</a:t>
+            </a:r>
+          </a:p>
+        </p:txBody>
+      </p:sp>
+      <p:sp>
+        <p:nvSpPr>
+          <p:cNvPr id="8" name="imgph" descr="IMGQ:gas leak smell warning kitchen"/>
           <p:cNvSpPr/>
           <p:nvPr/>
         </p:nvSpPr>
@@ -9530,7 +9758,7 @@
                 </a:solidFill>
                 <a:latin typeface="Montserrat"/>
               </a:rPr>
-              <a:t>emergency call center operator headset</a:t>
+              <a:t>gas leak smell warning kitchen</a:t>
             </a:r>
           </a:p>
         </p:txBody>
@@ -9729,7 +9957,7 @@
                 </a:solidFill>
                 <a:latin typeface="Montserrat"/>
               </a:rPr>
-              <a:t>Clasificar las fugas</a:t>
+              <a:t>Cazar y clasificar fugas</a:t>
             </a:r>
           </a:p>
         </p:txBody>
@@ -9830,11 +10058,61 @@
               <a:t>Vigilancia de progresión: la vigilo</a:t>
             </a:r>
           </a:p>
-        </p:txBody>
-      </p:sp>
-      <p:sp>
-        <p:nvSpPr>
-          <p:cNvPr id="8" name="imgph" descr="IMGQ:gas leak detector technician"/>
+          <a:p>
+            <a:pPr>
+              <a:spcAft>
+                <a:spcPts val="1000"/>
+              </a:spcAft>
+            </a:pPr>
+            <a:r>
+              <a:rPr sz="1600" b="1" i="0">
+                <a:solidFill>
+                  <a:srgbClr val="2E3A80"/>
+                </a:solidFill>
+                <a:latin typeface="Montserrat"/>
+              </a:rPr>
+              <a:t>•  </a:t>
+            </a:r>
+            <a:r>
+              <a:rPr sz="1600" b="0" i="0">
+                <a:solidFill>
+                  <a:srgbClr val="1B2330"/>
+                </a:solidFill>
+                <a:latin typeface="Montserrat"/>
+              </a:rPr>
+              <a:t>Pesa la proximidad a edificios</a:t>
+            </a:r>
+          </a:p>
+          <a:p>
+            <a:pPr>
+              <a:spcAft>
+                <a:spcPts val="1000"/>
+              </a:spcAft>
+            </a:pPr>
+            <a:r>
+              <a:rPr sz="1600" b="1" i="0">
+                <a:solidFill>
+                  <a:srgbClr val="2E3A80"/>
+                </a:solidFill>
+                <a:latin typeface="Montserrat"/>
+              </a:rPr>
+              <a:t>•  </a:t>
+            </a:r>
+            <a:r>
+              <a:rPr sz="1600" b="0" i="0">
+                <a:solidFill>
+                  <a:srgbClr val="1B2330"/>
+                </a:solidFill>
+                <a:latin typeface="Montserrat"/>
+              </a:rPr>
+              <a:t>Documentación a disposición de la CA</a:t>
+            </a:r>
+          </a:p>
+        </p:txBody>
+      </p:sp>
+      <p:sp>
+        <p:nvSpPr>
+          <p:cNvPr id="8" name="imgph" descr="IMGQ:technician gas leak detector pipe"/>
           <p:cNvSpPr/>
           <p:nvPr/>
         </p:nvSpPr>
@@ -9920,7 +10198,7 @@
                 </a:solidFill>
                 <a:latin typeface="Montserrat"/>
               </a:rPr>
-              <a:t>gas leak detector technician</a:t>
+              <a:t>technician gas leak detector pipe</a:t>
             </a:r>
           </a:p>
         </p:txBody>
@@ -10085,7 +10363,7 @@
                 </a:solidFill>
                 <a:latin typeface="Montserrat"/>
               </a:rPr>
-              <a:t>APARTADO 6.3 · FACTORES</a:t>
+              <a:t>APARTADO 6.4 · MANTENIMIENTO</a:t>
             </a:r>
           </a:p>
         </p:txBody>
@@ -10119,7 +10397,7 @@
                 </a:solidFill>
                 <a:latin typeface="Montserrat"/>
               </a:rPr>
-              <a:t>¿Qué dispara la urgencia?</a:t>
+              <a:t>Parche primero, reparación después</a:t>
             </a:r>
           </a:p>
         </p:txBody>
@@ -10167,7 +10445,7 @@
                 </a:solidFill>
                 <a:latin typeface="Montserrat"/>
               </a:rPr>
-              <a:t>Características físicas del gas</a:t>
+              <a:t>Medida temporal si no hay reparación ya</a:t>
             </a:r>
           </a:p>
           <a:p>
@@ -10192,7 +10470,7 @@
                 </a:solidFill>
                 <a:latin typeface="Montserrat"/>
               </a:rPr>
-              <a:t>Presión de operación</a:t>
+              <a:t>Reparación definitiva en cuanto se pueda</a:t>
             </a:r>
           </a:p>
           <a:p>
@@ -10217,7 +10495,7 @@
                 </a:solidFill>
                 <a:latin typeface="Montserrat"/>
               </a:rPr>
-              <a:t>Indicaciones del detector</a:t>
+              <a:t>Tras intervenir: pruebas en obra</a:t>
             </a:r>
           </a:p>
           <a:p>
@@ -10242,14 +10520,14 @@
                 </a:solidFill>
                 <a:latin typeface="Montserrat"/>
               </a:rPr>
-              <a:t>Proximidad a edificios habitados</a:t>
-            </a:r>
-          </a:p>
-        </p:txBody>
-      </p:sp>
-      <p:sp>
-        <p:nvSpPr>
-          <p:cNvPr id="8" name="imgph" descr="IMGQ:gas pipes near residential building"/>
+              <a:t>Puntual o tramo corto: disolución jabonosa</a:t>
+            </a:r>
+          </a:p>
+        </p:txBody>
+      </p:sp>
+      <p:sp>
+        <p:nvSpPr>
+          <p:cNvPr id="8" name="imgph" descr="IMGQ:plumber applying soapy water pipe joint"/>
           <p:cNvSpPr/>
           <p:nvPr/>
         </p:nvSpPr>
@@ -10335,7 +10613,7 @@
                 </a:solidFill>
                 <a:latin typeface="Montserrat"/>
               </a:rPr>
-              <a:t>gas pipes near residential building</a:t>
+              <a:t>plumber applying soapy water pipe joint</a:t>
             </a:r>
           </a:p>
         </p:txBody>

--- a/Curso Gas B/01 - ITC-ICG 01 - Distribucion por canalizacion/01 - ITC-ICG 01 - Distribucion por canalizacion - Vídeo 2.pptx
+++ b/Curso Gas B/01 - ITC-ICG 01 - Distribucion por canalizacion/01 - ITC-ICG 01 - Distribucion por canalizacion - Vídeo 2.pptx
@@ -516,12 +516,12 @@
           <a:lstStyle/>
           <a:p>
             <a:r>
-              <a:t>N1: Ya vimos cómo se proyecta, se construye y se pone en servicio una red. Pero, una vez tiene gas, ¿quién la cuida?</a:t>
-            </a:r>
-          </a:p>
-          <a:p>
-            <a:r>
-              <a:t>N2: Una red viva hay que vigilarla, mantenerla y protegerla las veinticuatro horas. En este segundo vídeo cubrimos los apartados seis a ocho de la ITC-ICG cero uno: cómo se opera y se mantiene la distribución, qué documentación hay que registrar y archivar, y cómo se protege la red frente a las obras que hacen terceros en la vía pública. Aviso: aquí hay muchos plazos y muchas listas cerradas, así que es una auténtica mina de preguntas de examen. Vamos apartado por apartado.</a:t>
+              <a:t>N1: En el vídeo anterior dejamos la red recién puesta en marcha, con gas por dentro. Y una vez está viva, ¿quién la cuida?</a:t>
+            </a:r>
+          </a:p>
+          <a:p>
+            <a:r>
+              <a:t>N2: Esa es justo la historia de hoy. Una red de gas viva no se puede dejar sola: hay que vigilarla, mantenerla y protegerla las veinticuatro horas del día, igual que un hospital no cierra por la noche. En este segundo vídeo cubrimos los apartados seis, siete y ocho de la ITC-ICG cero uno. Tres cosas: cómo se opera y se mantiene la red en su día a día, qué papeles hay que registrar y archivar, y cómo se protege la tubería de las obras que hacen otros en la calle. Y te aviso de una cosa: este vídeo está lleno de plazos concretos y de listas cerradas. Eso, que parece un rollo, en realidad es una buena noticia para el examen, porque los plazos y las listas son de lo que más se pregunta y de lo más fácil de puntuar si te los sabes. Vamos apartado por apartado.</a:t>
             </a:r>
           </a:p>
         </p:txBody>
@@ -591,12 +591,12 @@
           <a:lstStyle/>
           <a:p>
             <a:r>
-              <a:t>N1: Al reanudar el servicio y trabajar con posible salida de gas, ¿qué reflejos no pueden faltar?</a:t>
-            </a:r>
-          </a:p>
-          <a:p>
-            <a:r>
-              <a:t>N2: Primero, al reabrir el gas, si pudo entrar aire en la tubería hay que purgar por los extremos para echarlo fuera antes de que se mezcle; recuerda del vídeo anterior el peligro de la mezcla aire-gas. Y mientras trabajas con posible salida de gas, cuatro reflejos que conviene memorizar juntos: detectas la presencia de gas, señalizas y controlas la zona de trabajo, retiras todas las fuentes de ignición que no sean imprescindibles, y tienes al lado el equipo de extinción específico. Detectar, señalizar, retirar chispas y extintor: esos cuatro te salvan en cualquier intervención.</a:t>
+              <a:t>N1: Cuando se reabre el gas y se trabaja con posible salida de gas, ¿qué reflejos de seguridad no pueden faltar?</a:t>
+            </a:r>
+          </a:p>
+          <a:p>
+            <a:r>
+              <a:t>N2: Empecemos por el momento de reabrir. Si durante la intervención pudo entrar aire en la tubería, antes de volver a dar servicio hay que purgar la red por sus extremos, es decir, echar ese aire fuera por las puntas antes de que se mezcle con el gas. ¿Por qué? Porque, como aprendiste en el vídeo anterior, el peligro es justamente la mezcla aire-gas. Y mientras se trabaja con posible salida de gas, cuatro reflejos que conviene memorizar juntos, como un solo bloque. Uno, detectar la presencia de gas, con el detector, para saber si hay gas en el aire. Dos, señalizar y controlar la zona de trabajo, para que nadie entre por descuido. Tres, retirar las fuentes de ignición que no sean imprescindibles, es decir, todo lo que pueda dar una chispa o una llama. Y cuatro, tener a mano el equipo de extinción específico, el extintor adecuado por si acaso. Detectar, señalizar, retirar chispas y extintor. Esos cuatro gestos te cubren en cualquier intervención con gas, y son exactamente los mismos que vas a repetir tú en obra.</a:t>
             </a:r>
           </a:p>
         </p:txBody>
@@ -666,12 +666,12 @@
           <a:lstStyle/>
           <a:p>
             <a:r>
-              <a:t>N1: ¿Qué hay que archivar y con qué números?</a:t>
-            </a:r>
-          </a:p>
-          <a:p>
-            <a:r>
-              <a:t>N2: El distribuidor guarda cartografía detallada de por dónde van los tubos, y siempre al día. Guarda también la documentación de autorización y los proyectos, con los resultados de las pruebas en obra, mientras la red esté en explotación. Y ojo a las dos cifras que caen seguro: se guardan las dos últimas vigilancias y controles de estanquidad, y las intervenciones por motivos de seguridad y las actuaciones de emergencia se archivan un mínimo de cinco años. El truco: mapa siempre, estanquidad las dos últimas, seguridad cinco años. Da igual el soporte, papel o informático, mientras la información esté y sea fiable; si en el examen ves obligatoriamente en papel, es falso.</a:t>
+              <a:t>N1: ¿Qué está obligado a archivar el distribuidor, y sobre todo con qué números?</a:t>
+            </a:r>
+          </a:p>
+          <a:p>
+            <a:r>
+              <a:t>N2: Vamos con lo que se guarda y, muy atento, con las cifras, que es lo que cae. Primero, el distribuidor tiene que contar con cartografía detallada de la red, o sea, el mapa de por dónde van todos los tubos, y permanentemente actualizada, siempre al día; un plano viejo puede provocar que alguien pique donde no debe. Segundo, guarda mientras la red esté en explotación la documentación de autorización y los proyectos, incluidos los resultados de las pruebas en obra, resistencia y estanquidad. Y ahora las dos cifras clave. Una: de las vigilancias y controles de estanquidad se guardan las dos últimas, no todo el histórico, las dos últimas. Otra: las intervenciones por motivos de seguridad y las actuaciones en emergencias se archivan un mínimo de cinco años. Truco para memorizarlo: mapa siempre, estanquidad las dos últimas, seguridad cinco años. Y un detalle que a veces intentan colar: el soporte da igual, vale papel o vale informático, con tal de que sea fiable. Si en un examen ves obligatoriamente en papel, es falso: lo que importa es que la información esté y sea de fiar.</a:t>
             </a:r>
           </a:p>
         </p:txBody>
@@ -741,12 +741,12 @@
           <a:lstStyle/>
           <a:p>
             <a:r>
-              <a:t>N1: Una empresa va a abrir zanja en la calle para poner fibra y no sabe que justo debajo pasa el gas. ¿Qué manda la ITC?</a:t>
-            </a:r>
-          </a:p>
-          <a:p>
-            <a:r>
-              <a:t>N2: Antes de tocar la vía pública tiene que preguntar a la compañía de gas dónde están sus tubos, y aquí vienen los tres plazos, una de las preguntas más golosas del tema porque son tres números seguidos. Avisa y pide información con treinta días de antelación, por escrito y con la localización concreta. El distribuidor tiene veinte días para contestar con la mejor información de dónde están sus instalaciones y las normas a respetar. Y luego, justo antes de empezar a picar, avisa del arranque con veinticuatro horas. El truco temporal: pido con treinta, me contestan en veinte, aviso con veinticuatro horas. El solicitante no puede empezar hasta recibir y aceptar formalmente esa información.</a:t>
+              <a:t>N1: Imagina una empresa que va a abrir zanja en la calle para poner fibra y no sabe que justo debajo pasa el gas. ¿Qué manda la ITC?</a:t>
+            </a:r>
+          </a:p>
+          <a:p>
+            <a:r>
+              <a:t>N2: Aquí está una de las preguntas más golosas del tema, porque son tres plazos seguidos y hay que decirlos en orden. La idea de fondo es de puro sentido común: antes de tocar la vía pública donde hay red de gas, hay que preguntar a la compañía dónde están sus tubos. Ahora los tres números. Primero, esa empresa avisa y solicita información al distribuidor con una antelación mínima de treinta días antes de empezar; y lo hace por escrito, por carta, fax o correo, indicando la localización concreta. Segundo, el distribuidor tiene un plazo máximo de veinte días para contestar con la mejor información disponible de dónde están sus instalaciones, qué normas hay que respetar cerca y cómo contactar con el servicio de urgencias. Y tercero, cuando la empresa ya va a arrancar de verdad, comunica el inicio de los trabajos con al menos veinticuatro horas de antelación. El truco temporal para clavarlo: pido con treinta, me contestan en veinte, aviso con veinticuatro horas. Y ojo, el solicitante no puede empezar a picar hasta haber recibido y aceptado formalmente esa información.</a:t>
             </a:r>
           </a:p>
         </p:txBody>
@@ -816,12 +816,12 @@
           <a:lstStyle/>
           <a:p>
             <a:r>
-              <a:t>N1: ¿Y si la obra choca de frente con la tubería de gas? ¿Quién decide?</a:t>
-            </a:r>
-          </a:p>
-          <a:p>
-            <a:r>
-              <a:t>N2: Si la obra prevista afecta directamente al trazado o a la localización de la red, el distribuidor puede negarse a que se haga, pero solo por razones técnicas o de seguridad, no por capricho. Si el que quiere hacer la obra no está de acuerdo, no decide él ni la compañía: resuelve el órgano competente de la Comunidad Autónoma. Y un matiz importante: la carga de probar que de verdad hay que hacer esa obra tocando el gas es del solicitante, no del distribuidor. Meter la excavadora a ciegas es reventar el tubo y provocar la fuga; por eso todo este apartado va de preguntar antes.</a:t>
+              <a:t>N1: ¿Y si la obra que quiere hacer ese tercero choca de frente con la tubería de gas? ¿Quién decide entonces?</a:t>
+            </a:r>
+          </a:p>
+          <a:p>
+            <a:r>
+              <a:t>N2: Vamos por pasos, porque hay tres piezas. Primera: si la obra prevista afecta directamente al trazado o a la localización de la red de gas, el distribuidor puede negarse a que se haga. Segunda, y muy importante, no se puede negar por capricho ni porque le moleste: solo por razones técnicas o de seguridad. Tercera: si el que quiere hacer la obra no está de acuerdo con esa negativa, no decide ninguno de los dos por su cuenta; resuelve el órgano competente de la Comunidad Autónoma, que hace de árbitro. Y hay un matiz que cae en el examen y que mucha gente falla: la carga de probar que de verdad hay que hacer esa obra tocando el gas es del solicitante, del que quiere hacer la obra, no del distribuidor. Es decir, el que quiere picar es quien tiene que demostrar que no le queda otra. Todo este apartado, en el fondo, va de lo mismo: meter la excavadora a ciegas es reventar el tubo y provocar la fuga, así que la ley obliga a preguntar antes.</a:t>
             </a:r>
           </a:p>
         </p:txBody>
@@ -891,12 +891,12 @@
           <a:lstStyle/>
           <a:p>
             <a:r>
-              <a:t>N1: Cinco golpes rápidos antes del gran cierre. ¿Los tienes todos?</a:t>
-            </a:r>
-          </a:p>
-          <a:p>
-            <a:r>
-              <a:t>N2: Uno, el centro de operación vigila dos parámetros, presión y odorizante. Dos, las urgencias de seguridad en casa del usuario son tres, olor a gas, incendio o explosión, y la fuga es máxima prioridad. Tres, las fugas se clasifican en urgente, programada y de vigilancia de progresión, y pesa la proximidad a edificios. Cuatro, los plazos de las obras de terceros, treinta para avisar, veinte para contestar, veinticuatro horas antes de empezar. Y cinco, del archivo, las dos últimas estanquidades y cinco años para seguridad y emergencias. Si sueltas esos cinco de carrerilla, tienes el vídeo ganado.</a:t>
+              <a:t>N1: Antes del gran cierre, ¿me das los golpes rápidos para comprobar que lo tengo todo?</a:t>
+            </a:r>
+          </a:p>
+          <a:p>
+            <a:r>
+              <a:t>N2: Cinco, y si los sueltas de carrerilla tienes el vídeo ganado. Uno: el centro de operación vigila dos parámetros de calidad, presión y odorizante, y sin odorante nadie huele la fuga. Dos: las urgencias de seguridad en casa del usuario son tres y forman lista cerrada, olor a gas, incendio o explosión, y la fuga de gas es de máxima prioridad. Tres: las fugas se clasifican en tres clases, urgente, programada y de vigilancia de progresión, y lo que más pesa para decidir es la proximidad a edificios. Cuatro: los plazos de las obras de terceros, treinta días para avisar, veinte para que el distribuidor conteste y veinticuatro horas antes de empezar. Y cinco, del archivo, las dos últimas estanquidades y cinco años para las intervenciones de seguridad y emergencias. Presión y odorante; olor, incendio y explosión; urgente, programada y vigilancia; treinta, veinte y veinticuatro; dos últimas y cinco años. Con esos cinco bloques vas sobrado.</a:t>
             </a:r>
           </a:p>
         </p:txBody>
@@ -966,12 +966,12 @@
           <a:lstStyle/>
           <a:p>
             <a:r>
-              <a:t>N1: Y con esto cerramos no solo el vídeo, sino el tema entero. Si te quedas con cuatro conquistas, que sean estas.</a:t>
-            </a:r>
-          </a:p>
-          <a:p>
-            <a:r>
-              <a:t>N2: Una, reconoces los tres plazos de las obras de terceros, treinta días para avisar, veinte para que el distribuidor conteste y veinticuatro horas antes de arrancar. Dos, clasificas una fuga por su gravedad y sabes que la cercanía a un edificio habitado es lo que la vuelve urgente. Tres, ante un daño aplicas el parche seguro y dejas la reparación definitiva para cuanto antes, sin dejar nada a medias. Y cuatro, cierras cualquier reparación puntual con el truco que usarás toda la vida, la disolución jabonosa: si burbujea, fuga.</a:t>
+              <a:t>N1: Y con esto cerramos no solo el vídeo, sino el tema entero. Si me llevo cuatro conquistas, ¿cuáles?</a:t>
+            </a:r>
+          </a:p>
+          <a:p>
+            <a:r>
+              <a:t>N2: Estas cuatro, y deja que te reconstruya el hilo, porque cada una tiene su porqué. Una: reconoces los tres plazos de las obras de terceros, treinta días para avisar, veinte para que el distribuidor conteste y veinticuatro horas antes de arrancar; y entiendes que existen para lo mismo, que nadie pique a ciegas sobre el gas. Dos: clasificas una fuga por su gravedad, urgente, programada o de vigilancia, y sabes que lo que la vuelve urgente no es tanto su tamaño como su cercanía a un edificio habitado, porque ahí el gas se acumula y hace daño. Tres: ante un daño aplicas primero el parche seguro y dejas la reparación definitiva para cuanto antes, sin dejar nada a medias, porque una instalación de gas a medias es un peligro. Y cuatro: cierras cualquier reparación puntual con el truco que usarás toda la vida, la disolución jabonosa, agua con jabón sobre la junta, y si burbujea, fuga.</a:t>
             </a:r>
           </a:p>
           <a:p>
@@ -981,7 +981,7 @@
           </a:p>
           <a:p>
             <a:r>
-              <a:t>N2: Porque en el examen estos plazos y estas listas cerradas son de las preguntas que más caen, casi regalo si te las sabes; y en la obra son tu día a día, desde el vecino que llama porque huele a gas hasta la excavadora que hay que parar antes de reventar un tubo. Has recorrido la ITC-ICG cero uno completa: en el vídeo anterior la vimos nacer, del papel a la puesta en servicio, y en este la hemos mantenido viva, operándola, archivándola y protegiéndola las veinticuatro horas. Hoy ya eres mucho más gasista que ayer: dominas la red de la calle de principio a fin, justo la que empalma con las instalaciones que vas a firmar tú. Enhorabuena, cierras el tema con nota. Nos vemos en la siguiente ITC.</a:t>
+              <a:t>N2: Por dos motivos que se dan la mano. En el examen, estos plazos y estas listas cerradas son de las preguntas que más caen, casi un regalo si te las sabes. Y en la obra son tu día a día de verdad: desde el vecino que llama porque huele a gas hasta la excavadora que hay que parar antes de que reviente un tubo. Piensa en el camino que has recorrido: en el primer vídeo vimos nacer la red, del papel a la puesta en servicio; en este la hemos mantenido viva, operándola, archivándola y protegiéndola las veinticuatro horas. Has cruzado entera la ITC-ICG cero uno, de principio a fin, justo la red de la calle que empalma con las instalaciones que vas a firmar tú. Hoy eres mucho más gasista que ayer, y no es un decir: dominas de arriba abajo la tubería que da de comer a todo un barrio. Enhorabuena, cierras el tema con nota. Nos vemos en la siguiente ITC.</a:t>
             </a:r>
           </a:p>
         </p:txBody>
@@ -1051,12 +1051,12 @@
           <a:lstStyle/>
           <a:p>
             <a:r>
-              <a:t>N1: Tres números para situarte antes de empezar.</a:t>
-            </a:r>
-          </a:p>
-          <a:p>
-            <a:r>
-              <a:t>N2: Este vídeo cubre tres apartados: operar y mantener la red, registrar y archivar los papeles, y proteger la red de las obras de terceros. Verás que las fugas se clasifican en tres clases según su gravedad, algo que cae mucho. Y el plan de emergencia tiene ocho puntos que conviene memorizar como una checklist. Retén estos tres bloques y el resto del vídeo se ordena solo.</a:t>
+              <a:t>N1: ¿Qué tres números me llevo de percha para ordenar el vídeo?</a:t>
+            </a:r>
+          </a:p>
+          <a:p>
+            <a:r>
+              <a:t>N2: El primero, tres: las fugas se clasifican en tres clases según lo graves que sean, y esa clasificación cae muchísimo. El segundo, ocho: son los ocho puntos que tiene que contener el plan de emergencia, y te conviene memorizarlos como una lista de la compra. Y el tercero, cinco: son los años que hay que guardar el archivo de las intervenciones por seguridad y de las emergencias, uno de esos datos numéricos que en el examen es un regalo si te lo sabes. Tres clases de fuga, ocho puntos del plan, cinco años de archivo. Con esas tres perchas colgamos todo lo demás.</a:t>
             </a:r>
           </a:p>
         </p:txBody>
@@ -1126,12 +1126,12 @@
           <a:lstStyle/>
           <a:p>
             <a:r>
-              <a:t>N1: ¿Qué diferencia hay entre operar y mantener, y de quién es la responsabilidad?</a:t>
-            </a:r>
-          </a:p>
-          <a:p>
-            <a:r>
-              <a:t>N2: Operar es conducir la red día a día, vigilar presiones, la odorización y demás; mantener es cuidarla y repararla. Las dos cosas recaen en el titular de la instalación, aunque las haga gente contratada, personal propio o ajeno, y siempre con criterio de seguridad pública y según las normas seiscientas de siempre. Además, la Administración quiere ver los papeles: el distribuidor entrega copia de los procedimientos de sus centros de operación y de urgencias a dos sitios, al Ministerio, en la parte de seguridad industrial, y a la Comunidad Autónoma que autorizó la red. Ese dato de los dos destinatarios cae en el examen.</a:t>
+              <a:t>N1: Primero de todo, ¿qué diferencia hay entre operar y mantener, y de quién es la responsabilidad?</a:t>
+            </a:r>
+          </a:p>
+          <a:p>
+            <a:r>
+              <a:t>N2: Vamos con las dos palabras, porque suenan parecidas pero no son lo mismo. Operar es conducir la red día a día: vigilar que la presión esté bien, controlar la odorización, atender el funcionamiento normal. Mantener es cuidarla y repararla: revisar, sustituir lo gastado, arreglar lo que falla. Las dos cosas, operación y mantenimiento, recaen en el titular de la instalación, aunque el trabajo lo haga gente contratada, lo que la norma llama personal propio o ajeno. Y todo con un criterio de fondo que lo tiñe todo: la seguridad pública, más las normas seiscientas de siempre. Hay además un detalle de papeleo que cae en el examen: el distribuidor tiene que poner copia de los procedimientos de sus centros de operación y de urgencias a disposición de dos destinatarios. Uno, el Ministerio, en su parte de seguridad industrial; y dos, la Comunidad Autónoma que autorizó la red. Que sean dos, y cuáles son, es justo lo que suelen preguntar.</a:t>
             </a:r>
           </a:p>
         </p:txBody>
@@ -1201,12 +1201,12 @@
           <a:lstStyle/>
           <a:p>
             <a:r>
-              <a:t>N1: ¿Para qué sirve un centro de operación?</a:t>
-            </a:r>
-          </a:p>
-          <a:p>
-            <a:r>
-              <a:t>N2: Es la torre de control de la red: desde ahí se vigila que todo vaya bien. Los dos parámetros de calidad que hay que tener siempre a raya son la presión, que el gas llegue con la fuerza justa, y el odorizante, ese olor a huevo podrido que se le añade a propósito para que huelas las fugas. Grábate los dos, presión y odorizante, porque si falta odorante nadie detecta un escape hasta que es demasiado tarde. Y atento a la excepción, que se pregunta: las redes alimentadas desde depósitos de gas licuado del petróleo, típicas de una urbanización con su depósito, no están obligadas a tener centro de operación; para ellas se dictan requisitos aparte según el tamaño.</a:t>
+              <a:t>N1: ¿Y qué es exactamente un centro de operación? ¿Un sitio con gente mirando pantallas?</a:t>
+            </a:r>
+          </a:p>
+          <a:p>
+            <a:r>
+              <a:t>N2: Justo eso: piénsalo como la torre de control de un aeropuerto, pero de la red de gas. Desde ahí se vigila que todo vaya bien, con los medios materiales y humanos necesarios. ¿Qué es lo que vigila sobre todo? Dos parámetros de calidad que tienes que grabarte. El primero, la presión, que el gas llegue con la fuerza justa a todos. El segundo, el odorizante, y este merece una explicación: el gas natural no huele a nada, así que se le añade a propósito una sustancia que huele fatal, a huevo podrido, para que cualquiera note un escape con la nariz. Por eso el odorante es de vida o muerte: si falta, hay una fuga y nadie la huele hasta que ya es tarde. Presión y odorizante, esos dos siempre a raya. Y ahora, atención a una excepción que se pregunta: las redes que se alimentan desde depósitos de gas licuado del petróleo, típicas de una urbanización con su depósito de propano, no están obligadas a tener centro de operación; para ellas se dictan requisitos aparte según su tamaño. Es un salvo que, y esos siempre caen.</a:t>
             </a:r>
           </a:p>
         </p:txBody>
@@ -1276,12 +1276,12 @@
           <a:lstStyle/>
           <a:p>
             <a:r>
-              <a:t>N1: ¿Cuáles son las funciones del centro de operación y cómo no liarlas?</a:t>
-            </a:r>
-          </a:p>
-          <a:p>
-            <a:r>
-              <a:t>N2: Son cuatro, y hay un orden lógico para recordarlas. Primera, controla lo que pasa ahora mismo, la presión y el odorante. Segunda, planifica el futuro con un plan de operación para la próxima campaña. Tercera, informa cada mes con un informe de calidad del gas donde resume la odorización y el valor medio del poder calorífico superior. Y cuarta, programa los trabajos sobre las redes principales. Ojo a un detalle de examen: el dato del poder calorífico lo facilita el Gestor Técnico del Sistema, con frecuencia horaria, aunque el informe de calidad se elabore solo una vez al mes.</a:t>
+              <a:t>N1: El centro de operación tiene cuatro funciones. ¿Cómo las ordeno para no liarme?</a:t>
+            </a:r>
+          </a:p>
+          <a:p>
+            <a:r>
+              <a:t>N2: Con una secuencia lógica en el tiempo, así no se te caen. Primera función, controlar: vigilar lo que pasa ahora mismo, presión y odorante, recopilar los registros de presión y los datos que llegan teleinformados desde las estaciones. Segunda, planificar: mirar al futuro con un plan de operación que garantice la continuidad del suministro para la próxima campaña, contando con el crecimiento previsto de la demanda. Tercera, informar: cada mes elabora un informe de calidad del gas donde resume los niveles de odorización y el valor medio del poder calorífico superior, que es la energía que lleva el gas, cuánto calienta. Y cuarta, programar: organiza los trabajos sobre las redes principales. Controlar, planificar, informar, programar. Y ojo a un detalle de examen que se cruza mucho: el dato del poder calorífico no se lo inventa el centro, se lo facilita el Gestor Técnico del Sistema, y con frecuencia horaria, cada hora, aunque el informe de calidad se elabore una sola vez al mes. No confundas el ritmo del dato, horario, con el ritmo del informe, mensual.</a:t>
             </a:r>
           </a:p>
         </p:txBody>
@@ -1351,12 +1351,12 @@
           <a:lstStyle/>
           <a:p>
             <a:r>
-              <a:t>N1: No mezcles dos cosas que suenan parecidas. ¿Cuáles son?</a:t>
-            </a:r>
-          </a:p>
-          <a:p>
-            <a:r>
-              <a:t>N2: Una es el plan de emergencia, que es el documento escrito que dice qué hacer y quién hace qué ante un problema gordo; tiene ocho puntos, memorízalos como checklist: objeto y ámbito, grados de emergencia, desarrollo, responsables, etapas, avisar a servicios públicos como policía, bomberos y sanitarios, análisis y difusión. La otra es el servicio de atención de urgencias, que es el teléfono que coge la llamada del vecino que huele a gas; tiene que estar permanente, las veinticuatro horas, con gente que pueda ir en campo y, si hace falta, activar el plan de emergencia. Uno es el papel, el otro es el teléfono: no los confundas.</a:t>
+              <a:t>N1: Aquí hay dos cosas que suenan casi igual y me lío: plan de emergencia y servicio de urgencias. ¿En qué se diferencian?</a:t>
+            </a:r>
+          </a:p>
+          <a:p>
+            <a:r>
+              <a:t>N2: Muy buena, porque es una trampa clásica. Una es un papel y la otra es un teléfono, quédate con eso. El plan de emergencia es el documento escrito que dice, con antelación y por escrito, qué hay que hacer y quién hace cada cosa cuando pasa algo gordo. Tiene ocho puntos que te conviene memorizar como una checklist: objeto y ámbito de aplicación, grados de emergencia, desarrollo de la emergencia, determinación de los responsables, etapas, notificación a los servicios públicos como policía, bomberos y sanitarios, análisis de emergencias y difusión del plan. La otra cosa es el servicio de atención de urgencias, que es el teléfono real que coge la llamada del vecino que dice huele a gas. Ese servicio tiene que estar permanente, las veinticuatro horas, con gente capaz de ir en campo y, si hace falta, activar el plan de emergencia y hacerlo en el menor tiempo posible. Resumen para no confundirlos: el plan es el papel que dice qué hacer; el servicio de urgencias es el teléfono y la furgoneta que lo hacen.</a:t>
             </a:r>
           </a:p>
         </p:txBody>
@@ -1426,12 +1426,12 @@
           <a:lstStyle/>
           <a:p>
             <a:r>
-              <a:t>N1: Cuando te pregunten qué incidencias de seguridad atiende el distribuidor en casa del usuario, ¿qué respondes?</a:t>
-            </a:r>
-          </a:p>
-          <a:p>
-            <a:r>
-              <a:t>N2: Son tres, lista cerrada: olor a gas, incendio o explosión. Grábalas tal cual. Los centros de atención de urgencias tienen procedimientos escritos que clasifican los avisos por prioridades, y el aviso de máxima prioridad por excelencia es la fuga de gas: eso se atiende antes que nada, tomando medidas en el menor tiempo posible. Y un detalle económico que a veces cae: el coste de tener ese servicio de urgencias siempre disponible se lo repercuten a los usuarios, según lo que diga el reglamento. Guardan además los registros a disposición de la Administración.</a:t>
+              <a:t>N1: Si me preguntan qué incidencias de seguridad atiende el distribuidor en casa del usuario, ¿qué contesto?</a:t>
+            </a:r>
+          </a:p>
+          <a:p>
+            <a:r>
+              <a:t>N2: Tres, y es una lista cerrada, así que apréndetela tal cual: olor a gas, incendio o explosión. Ni más ni menos que esas tres. Los centros de atención de urgencias trabajan con procedimientos escritos que clasifican los avisos por prioridades, porque no todo lo que entra por teléfono es igual de grave. ¿Y cuál es el aviso de máxima prioridad, el que se atiende antes que nada? La fuga de gas. Cualquier condición que pueda generar riesgo va a lo más alto de la cola, y la resolución de esos casos de máxima prioridad tiene su sistemática marcada. Un detalle económico que a veces cae y sorprende: tener ese servicio de urgencias siempre disponible cuesta dinero, y ese coste se repercute a los usuarios, es decir, se lo cobran a la gente según diga el reglamento. Y guardan los registros de lo que hacen a disposición de la Administración, para poder demostrar cómo actuaron ante cada incidencia.</a:t>
             </a:r>
           </a:p>
         </p:txBody>
@@ -1501,12 +1501,12 @@
           <a:lstStyle/>
           <a:p>
             <a:r>
-              <a:t>N1: El titular comprueba la estanquidad. ¿Cómo se clasifican las fugas que aparecen?</a:t>
-            </a:r>
-          </a:p>
-          <a:p>
-            <a:r>
-              <a:t>N2: En tres clases, de más a menos grave. Urgente, hay que ir ya porque hay peligro inmediato. Programada, hay que arreglarla pero se puede planificar la intervención. Y de vigilancia de progresión, es tan pequeña o tan poco peligrosa que de momento solo se vigila por si va a más. El truco: urgente ahora, programada pronto, progresión la miro. ¿Y por qué una misma fuga puede ser urgente o solo de vigilancia? Depende de dónde esté: una fuga pequeña en pleno campo no es lo mismo que la misma fuga pegada a un edificio habitado. Por eso uno de los factores es la proximidad a propiedades y su uso, junto con qué gas es, a qué presión va y qué dice el detector. La documentación queda en poder del titular, a disposición de la Comunidad Autónoma.</a:t>
+              <a:t>N1: El titular comprueba la estanquidad de la red. Cuando aparece una fuga, ¿cómo se clasifica?</a:t>
+            </a:r>
+          </a:p>
+          <a:p>
+            <a:r>
+              <a:t>N2: En tres clases, ordenadas de más a menos grave, y esta clasificación cae mucho. La primera, fuga de intervención urgente: hay peligro inmediato, hay que ir ya. La segunda, de intervención programada: hay que arreglarla sí o sí, pero se puede planificar la intervención con calma, para dentro de unos días. Y la tercera, de vigilancia de progresión: es tan pequeña o tan poco peligrosa que, de momento, solo se vigila por si va a más. Truco para el orden: urgente ahora, programada pronto, progresión la miro. Y aquí viene lo bueno, la pregunta con miga: ¿por qué la misma fuga puede ser urgente o solo de vigilancia? Porque depende sobre todo de dónde esté. Una fuga pequeña en pleno campo no es lo mismo que esa misma fuga pegada a un edificio habitado, donde el gas se puede acumular y hacer daño a la gente. Por eso, entre los factores que deciden la clase están las características del gas, la presión de operación y lo que diga el detector, pero el que más pesa es la proximidad a propiedades y edificios y el uso que se les da. La documentación de estos controles queda en poder del titular, a disposición de la Comunidad Autónoma.</a:t>
             </a:r>
           </a:p>
         </p:txBody>
@@ -1576,12 +1576,12 @@
           <a:lstStyle/>
           <a:p>
             <a:r>
-              <a:t>N1: Aparece una fuga o un daño y no se puede arreglar bien en el momento. ¿Qué se hace?</a:t>
-            </a:r>
-          </a:p>
-          <a:p>
-            <a:r>
-              <a:t>N2: Se pone una medida temporal, un parche seguro, para que no haya peligro, y en cuanto se pueda se hace la reparación definitiva. Nunca se deja a medias y ya veremos: el parche es solo un puente hasta la reparación buena. Regla general: después de tocar la red hay que repetir las pruebas en obra, resistencia y estanquidad de las normas seiscientas. Pero hay una excepción muy práctica: si es una reparación puntual o un tramo de corta extensión, no hace falta el paripé completo, basta con comprobar que las uniones nuevas no fugan echándoles agua con jabón; si burbujea, hay fuga. Es el clásico truco del gasista de la disolución jabonosa que vas a usar toda la vida.</a:t>
+              <a:t>N1: Aparece una fuga o un daño y en ese momento no se puede arreglar bien del todo. ¿Qué se hace, se deja para mañana?</a:t>
+            </a:r>
+          </a:p>
+          <a:p>
+            <a:r>
+              <a:t>N2: Nunca se deja a medias. Lo que manda la norma es tomar una medida temporal, un parche seguro que quite el peligro de inmediato, y en cuanto sea posible hacer la reparación definitiva, la de verdad. El parche no es la solución, es solo un puente hasta la reparación buena, pero mientras tanto la instalación no queda peligrosa. Ahora, la regla sobre las pruebas, que tiene una excepción muy práctica. Regla general: después de tocar la red hay que repetir las pruebas en obra, resistencia y estanquidad, según las normas seiscientas. Excepción: si es una reparación puntual o un tramo de corta extensión, no hace falta montar todo el operativo de pruebas; basta con verificar que las uniones nuevas no fugan, y eso se hace con disolución jabonosa, que es echar agua con jabón sobre la junta: si burbujea, hay fuga. Ese es el truco de gasista que vas a usar toda la vida. Fíjate bien en la condición de la excepción, porque es lo que preguntan: solo vale para reparación puntual o tramo corto; en una intervención grande, pruebas completas.</a:t>
             </a:r>
           </a:p>
         </p:txBody>
@@ -4904,7 +4904,7 @@
                 </a:solidFill>
                 <a:latin typeface="Montserrat"/>
               </a:rPr>
-              <a:t>APARTADO 6.4 · SEGURIDAD EN LA INTERVENCIÓN</a:t>
+              <a:t>APARTADO 6.4 · SEGURIDAD AL INTERVENIR</a:t>
             </a:r>
           </a:p>
         </p:txBody>
@@ -4938,7 +4938,7 @@
                 </a:solidFill>
                 <a:latin typeface="Montserrat"/>
               </a:rPr>
-              <a:t>Cuatro reflejos con gas fuera</a:t>
+              <a:t>Reflejos con gas fuera</a:t>
             </a:r>
           </a:p>
         </p:txBody>
@@ -5061,39 +5061,14 @@
                 </a:solidFill>
                 <a:latin typeface="Montserrat"/>
               </a:rPr>
-              <a:t>Retirar fuentes de ignición</a:t>
-            </a:r>
-          </a:p>
-          <a:p>
-            <a:pPr>
-              <a:spcAft>
-                <a:spcPts val="1000"/>
-              </a:spcAft>
-            </a:pPr>
-            <a:r>
-              <a:rPr sz="1600" b="1" i="0">
-                <a:solidFill>
-                  <a:srgbClr val="2E3A80"/>
-                </a:solidFill>
-                <a:latin typeface="Montserrat"/>
-              </a:rPr>
-              <a:t>•  </a:t>
-            </a:r>
-            <a:r>
-              <a:rPr sz="1600" b="0" i="0">
-                <a:solidFill>
-                  <a:srgbClr val="1B2330"/>
-                </a:solidFill>
-                <a:latin typeface="Montserrat"/>
-              </a:rPr>
-              <a:t>Extintor específico a mano</a:t>
-            </a:r>
-          </a:p>
-        </p:txBody>
-      </p:sp>
-      <p:sp>
-        <p:nvSpPr>
-          <p:cNvPr id="8" name="imgph" descr="IMGQ:gas works site safety signage cordon"/>
+              <a:t>Retirar chispas · extintor a mano</a:t>
+            </a:r>
+          </a:p>
+        </p:txBody>
+      </p:sp>
+      <p:sp>
+        <p:nvSpPr>
+          <p:cNvPr id="8" name="imgph" descr="IMGQ:gas works site safety signage cordon street"/>
           <p:cNvSpPr/>
           <p:nvPr/>
         </p:nvSpPr>
@@ -5179,7 +5154,7 @@
                 </a:solidFill>
                 <a:latin typeface="Montserrat"/>
               </a:rPr>
-              <a:t>gas works site safety signage cordon</a:t>
+              <a:t>gas works site safety signage cordon street</a:t>
             </a:r>
           </a:p>
         </p:txBody>
@@ -5508,7 +5483,7 @@
       </p:sp>
       <p:sp>
         <p:nvSpPr>
-          <p:cNvPr id="8" name="imgph" descr="IMGQ:archive folders shelves documents"/>
+          <p:cNvPr id="8" name="imgph" descr="IMGQ:archive folders shelves documents office"/>
           <p:cNvSpPr/>
           <p:nvPr/>
         </p:nvSpPr>
@@ -5594,7 +5569,7 @@
                 </a:solidFill>
                 <a:latin typeface="Montserrat"/>
               </a:rPr>
-              <a:t>archive folders shelves documents</a:t>
+              <a:t>archive folders shelves documents office</a:t>
             </a:r>
           </a:p>
         </p:txBody>
@@ -5916,14 +5891,14 @@
                 </a:solidFill>
                 <a:latin typeface="Montserrat"/>
               </a:rPr>
-              <a:t>Por escrito, con la localización</a:t>
-            </a:r>
-          </a:p>
-        </p:txBody>
-      </p:sp>
-      <p:sp>
-        <p:nvSpPr>
-          <p:cNvPr id="8" name="imgph" descr="IMGQ:road excavation works underground pipes"/>
+              <a:t>Todo por escrito, con la localización</a:t>
+            </a:r>
+          </a:p>
+        </p:txBody>
+      </p:sp>
+      <p:sp>
+        <p:nvSpPr>
+          <p:cNvPr id="8" name="imgph" descr="IMGQ:road excavation works underground utility pipes"/>
           <p:cNvSpPr/>
           <p:nvPr/>
         </p:nvSpPr>
@@ -6009,7 +5984,7 @@
                 </a:solidFill>
                 <a:latin typeface="Montserrat"/>
               </a:rPr>
-              <a:t>road excavation works underground pipes</a:t>
+              <a:t>road excavation works underground utility pipes</a:t>
             </a:r>
           </a:p>
         </p:txBody>
@@ -6281,7 +6256,7 @@
                 </a:solidFill>
                 <a:latin typeface="Montserrat"/>
               </a:rPr>
-              <a:t>Motivo: razones técnicas o de seguridad</a:t>
+              <a:t>Solo por razones técnicas o de seguridad</a:t>
             </a:r>
           </a:p>
           <a:p>
@@ -6338,7 +6313,7 @@
       </p:sp>
       <p:sp>
         <p:nvSpPr>
-          <p:cNvPr id="8" name="imgph" descr="IMGQ:engineers discussing plans construction site"/>
+          <p:cNvPr id="8" name="imgph" descr="IMGQ:two engineers discussing plans construction site"/>
           <p:cNvSpPr/>
           <p:nvPr/>
         </p:nvSpPr>
@@ -6424,7 +6399,7 @@
                 </a:solidFill>
                 <a:latin typeface="Montserrat"/>
               </a:rPr>
-              <a:t>engineers discussing plans construction site</a:t>
+              <a:t>two engineers discussing plans construction site</a:t>
             </a:r>
           </a:p>
         </p:txBody>
@@ -6778,7 +6753,7 @@
       </p:sp>
       <p:sp>
         <p:nvSpPr>
-          <p:cNvPr id="8" name="imgph" descr="IMGQ:gas cylinder cabinet outdoor wall"/>
+          <p:cNvPr id="8" name="imgph" descr="IMGQ:gas cylinder cabinet outdoor building wall"/>
           <p:cNvSpPr/>
           <p:nvPr/>
         </p:nvSpPr>
@@ -6864,7 +6839,7 @@
                 </a:solidFill>
                 <a:latin typeface="Montserrat"/>
               </a:rPr>
-              <a:t>gas cylinder cabinet outdoor wall</a:t>
+              <a:t>gas cylinder cabinet outdoor building wall</a:t>
             </a:r>
           </a:p>
         </p:txBody>
@@ -7067,7 +7042,7 @@
                 </a:solidFill>
                 <a:latin typeface="Montserrat"/>
               </a:rPr>
-              <a:t>Clasificas una fuga por gravedad y por cercanía</a:t>
+              <a:t>Clasificas una fuga por su gravedad y por su cercanía</a:t>
             </a:r>
           </a:p>
           <a:p>
@@ -7476,7 +7451,7 @@
                 </a:solidFill>
                 <a:latin typeface="Montserrat"/>
               </a:rPr>
-              <a:t>apartados: operar, archivar, proteger</a:t>
+              <a:t>clases de fuga según su gravedad</a:t>
             </a:r>
           </a:p>
         </p:txBody>
@@ -7557,7 +7532,7 @@
                 </a:solidFill>
                 <a:latin typeface="Montserrat"/>
               </a:rPr>
-              <a:t>3</a:t>
+              <a:t>8</a:t>
             </a:r>
           </a:p>
         </p:txBody>
@@ -7592,7 +7567,7 @@
                 </a:solidFill>
                 <a:latin typeface="Montserrat"/>
               </a:rPr>
-              <a:t>clases de fuga por gravedad</a:t>
+              <a:t>puntos del plan de emergencia</a:t>
             </a:r>
           </a:p>
         </p:txBody>
@@ -7673,7 +7648,7 @@
                 </a:solidFill>
                 <a:latin typeface="Montserrat"/>
               </a:rPr>
-              <a:t>8</a:t>
+              <a:t>5</a:t>
             </a:r>
           </a:p>
         </p:txBody>
@@ -7708,7 +7683,7 @@
                 </a:solidFill>
                 <a:latin typeface="Montserrat"/>
               </a:rPr>
-              <a:t>puntos del plan de emergencia</a:t>
+              <a:t>años de archivo de seguridad</a:t>
             </a:r>
           </a:p>
         </p:txBody>
@@ -7955,7 +7930,7 @@
                 </a:solidFill>
                 <a:latin typeface="Montserrat"/>
               </a:rPr>
-              <a:t>Criterio: seguridad pública</a:t>
+              <a:t>Criterio de fondo: seguridad pública</a:t>
             </a:r>
           </a:p>
           <a:p>
@@ -8037,7 +8012,7 @@
       </p:sp>
       <p:sp>
         <p:nvSpPr>
-          <p:cNvPr id="8" name="imgph" descr="IMGQ:gas control room operators monitors"/>
+          <p:cNvPr id="8" name="imgph" descr="IMGQ:gas control room operators monitors screens"/>
           <p:cNvSpPr/>
           <p:nvPr/>
         </p:nvSpPr>
@@ -8123,7 +8098,7 @@
                 </a:solidFill>
                 <a:latin typeface="Montserrat"/>
               </a:rPr>
-              <a:t>gas control room operators monitors</a:t>
+              <a:t>gas control room operators monitors screens</a:t>
             </a:r>
           </a:p>
         </p:txBody>
@@ -8395,7 +8370,7 @@
                 </a:solidFill>
                 <a:latin typeface="Montserrat"/>
               </a:rPr>
-              <a:t>Si falta odorante, nadie huele la fuga</a:t>
+              <a:t>Sin odorante, nadie huele la fuga</a:t>
             </a:r>
           </a:p>
           <a:p>
@@ -8427,7 +8402,7 @@
       </p:sp>
       <p:sp>
         <p:nvSpPr>
-          <p:cNvPr id="8" name="imgph" descr="IMGQ:gas pressure regulation station gauges"/>
+          <p:cNvPr id="8" name="imgph" descr="IMGQ:gas pressure regulation station gauges valves"/>
           <p:cNvSpPr/>
           <p:nvPr/>
         </p:nvSpPr>
@@ -8513,7 +8488,7 @@
                 </a:solidFill>
                 <a:latin typeface="Montserrat"/>
               </a:rPr>
-              <a:t>gas pressure regulation station gauges</a:t>
+              <a:t>gas pressure regulation station gauges valves</a:t>
             </a:r>
           </a:p>
         </p:txBody>
@@ -8842,7 +8817,7 @@
       </p:sp>
       <p:sp>
         <p:nvSpPr>
-          <p:cNvPr id="8" name="imgph" descr="IMGQ:engineer analyzing data screen control center"/>
+          <p:cNvPr id="8" name="imgph" descr="IMGQ:engineer analyzing data screens control center"/>
           <p:cNvSpPr/>
           <p:nvPr/>
         </p:nvSpPr>
@@ -8928,7 +8903,7 @@
                 </a:solidFill>
                 <a:latin typeface="Montserrat"/>
               </a:rPr>
-              <a:t>engineer analyzing data screen control center</a:t>
+              <a:t>engineer analyzing data screens control center</a:t>
             </a:r>
           </a:p>
         </p:txBody>
@@ -9127,7 +9102,7 @@
                 </a:solidFill>
                 <a:latin typeface="Montserrat"/>
               </a:rPr>
-              <a:t>Plan escrito vs teléfono 24 h</a:t>
+              <a:t>Plan escrito y teléfono 24 h</a:t>
             </a:r>
           </a:p>
         </p:txBody>
@@ -9175,7 +9150,7 @@
                 </a:solidFill>
                 <a:latin typeface="Montserrat"/>
               </a:rPr>
-              <a:t>Plan de emergencia: documento, 8 puntos</a:t>
+              <a:t>Plan de emergencia: documento de 8 puntos</a:t>
             </a:r>
           </a:p>
           <a:p>
@@ -9590,7 +9565,7 @@
                 </a:solidFill>
                 <a:latin typeface="Montserrat"/>
               </a:rPr>
-              <a:t>Lista cerrada: olor a gas, incendio, explosión</a:t>
+              <a:t>Lista cerrada: olor, incendio, explosión</a:t>
             </a:r>
           </a:p>
           <a:p>
@@ -9672,7 +9647,7 @@
       </p:sp>
       <p:sp>
         <p:nvSpPr>
-          <p:cNvPr id="8" name="imgph" descr="IMGQ:gas leak smell warning kitchen"/>
+          <p:cNvPr id="8" name="imgph" descr="IMGQ:person smelling gas leak kitchen worried"/>
           <p:cNvSpPr/>
           <p:nvPr/>
         </p:nvSpPr>
@@ -9758,7 +9733,7 @@
                 </a:solidFill>
                 <a:latin typeface="Montserrat"/>
               </a:rPr>
-              <a:t>gas leak smell warning kitchen</a:t>
+              <a:t>person smelling gas leak kitchen worried</a:t>
             </a:r>
           </a:p>
         </p:txBody>
@@ -10080,39 +10055,14 @@
                 </a:solidFill>
                 <a:latin typeface="Montserrat"/>
               </a:rPr>
-              <a:t>Pesa la proximidad a edificios</a:t>
-            </a:r>
-          </a:p>
-          <a:p>
-            <a:pPr>
-              <a:spcAft>
-                <a:spcPts val="1000"/>
-              </a:spcAft>
-            </a:pPr>
-            <a:r>
-              <a:rPr sz="1600" b="1" i="0">
-                <a:solidFill>
-                  <a:srgbClr val="2E3A80"/>
-                </a:solidFill>
-                <a:latin typeface="Montserrat"/>
-              </a:rPr>
-              <a:t>•  </a:t>
-            </a:r>
-            <a:r>
-              <a:rPr sz="1600" b="0" i="0">
-                <a:solidFill>
-                  <a:srgbClr val="1B2330"/>
-                </a:solidFill>
-                <a:latin typeface="Montserrat"/>
-              </a:rPr>
-              <a:t>Documentación a disposición de la CA</a:t>
-            </a:r>
-          </a:p>
-        </p:txBody>
-      </p:sp>
-      <p:sp>
-        <p:nvSpPr>
-          <p:cNvPr id="8" name="imgph" descr="IMGQ:technician gas leak detector pipe"/>
+              <a:t>Lo que decide: la proximidad a edificios</a:t>
+            </a:r>
+          </a:p>
+        </p:txBody>
+      </p:sp>
+      <p:sp>
+        <p:nvSpPr>
+          <p:cNvPr id="8" name="imgph" descr="IMGQ:technician gas leak detector survey pipe"/>
           <p:cNvSpPr/>
           <p:nvPr/>
         </p:nvSpPr>
@@ -10198,7 +10148,7 @@
                 </a:solidFill>
                 <a:latin typeface="Montserrat"/>
               </a:rPr>
-              <a:t>technician gas leak detector pipe</a:t>
+              <a:t>technician gas leak detector survey pipe</a:t>
             </a:r>
           </a:p>
         </p:txBody>
@@ -10527,7 +10477,7 @@
       </p:sp>
       <p:sp>
         <p:nvSpPr>
-          <p:cNvPr id="8" name="imgph" descr="IMGQ:plumber applying soapy water pipe joint"/>
+          <p:cNvPr id="8" name="imgph" descr="IMGQ:plumber applying soapy water pipe joint hands"/>
           <p:cNvSpPr/>
           <p:nvPr/>
         </p:nvSpPr>
@@ -10613,7 +10563,7 @@
                 </a:solidFill>
                 <a:latin typeface="Montserrat"/>
               </a:rPr>
-              <a:t>plumber applying soapy water pipe joint</a:t>
+              <a:t>plumber applying soapy water pipe joint hands</a:t>
             </a:r>
           </a:p>
         </p:txBody>

--- a/Curso Gas B/01 - ITC-ICG 01 - Distribucion por canalizacion/01 - ITC-ICG 01 - Distribucion por canalizacion - Vídeo 2.pptx
+++ b/Curso Gas B/01 - ITC-ICG 01 - Distribucion por canalizacion/01 - ITC-ICG 01 - Distribucion por canalizacion - Vídeo 2.pptx
@@ -20,6 +20,7 @@
     <p:sldId id="268" r:id="rId20"/>
     <p:sldId id="269" r:id="rId21"/>
     <p:sldId id="270" r:id="rId22"/>
+    <p:sldId id="271" r:id="rId23"/>
   </p:sldIdLst>
   <p:sldSz cx="12191695" cy="6858000" type="screen4x3"/>
   <p:notesSz cx="6858000" cy="9144000"/>
@@ -591,12 +592,12 @@
           <a:lstStyle/>
           <a:p>
             <a:r>
-              <a:t>N1: Cuando se reabre el gas y se trabaja con posible salida de gas, ¿qué reflejos de seguridad no pueden faltar?</a:t>
-            </a:r>
-          </a:p>
-          <a:p>
-            <a:r>
-              <a:t>N2: Empecemos por el momento de reabrir. Si durante la intervención pudo entrar aire en la tubería, antes de volver a dar servicio hay que purgar la red por sus extremos, es decir, echar ese aire fuera por las puntas antes de que se mezcle con el gas. ¿Por qué? Porque, como aprendiste en el vídeo anterior, el peligro es justamente la mezcla aire-gas. Y mientras se trabaja con posible salida de gas, cuatro reflejos que conviene memorizar juntos, como un solo bloque. Uno, detectar la presencia de gas, con el detector, para saber si hay gas en el aire. Dos, señalizar y controlar la zona de trabajo, para que nadie entre por descuido. Tres, retirar las fuentes de ignición que no sean imprescindibles, es decir, todo lo que pueda dar una chispa o una llama. Y cuatro, tener a mano el equipo de extinción específico, el extintor adecuado por si acaso. Detectar, señalizar, retirar chispas y extintor. Esos cuatro gestos te cubren en cualquier intervención con gas, y son exactamente los mismos que vas a repetir tú en obra.</a:t>
+              <a:t>N1: Aparece una fuga o un daño y en ese momento no se puede arreglar bien del todo. ¿Qué se hace, se deja para mañana?</a:t>
+            </a:r>
+          </a:p>
+          <a:p>
+            <a:r>
+              <a:t>N2: Nunca se deja a medias. Lo que manda la norma es tomar una medida temporal, un parche seguro que quite el peligro de inmediato, y en cuanto sea posible hacer la reparación definitiva, la de verdad. El parche no es la solución, es solo un puente hasta la reparación buena, pero mientras tanto la instalación no queda peligrosa. Ahora, la regla sobre las pruebas, que tiene una excepción muy práctica. Regla general: después de tocar la red hay que repetir las pruebas en obra, resistencia y estanquidad, según las normas seiscientas. Excepción: si es una reparación puntual o un tramo de corta extensión, no hace falta montar todo el operativo de pruebas; basta con verificar que las uniones nuevas no fugan, y eso se hace con disolución jabonosa, que es echar agua con jabón sobre la junta: si burbujea, hay fuga. Ese es el truco de gasista que vas a usar toda la vida. Fíjate bien en la condición de la excepción, porque es lo que preguntan: solo vale para reparación puntual o tramo corto; en una intervención grande, pruebas completas.</a:t>
             </a:r>
           </a:p>
         </p:txBody>
@@ -666,12 +667,12 @@
           <a:lstStyle/>
           <a:p>
             <a:r>
-              <a:t>N1: ¿Qué está obligado a archivar el distribuidor, y sobre todo con qué números?</a:t>
-            </a:r>
-          </a:p>
-          <a:p>
-            <a:r>
-              <a:t>N2: Vamos con lo que se guarda y, muy atento, con las cifras, que es lo que cae. Primero, el distribuidor tiene que contar con cartografía detallada de la red, o sea, el mapa de por dónde van todos los tubos, y permanentemente actualizada, siempre al día; un plano viejo puede provocar que alguien pique donde no debe. Segundo, guarda mientras la red esté en explotación la documentación de autorización y los proyectos, incluidos los resultados de las pruebas en obra, resistencia y estanquidad. Y ahora las dos cifras clave. Una: de las vigilancias y controles de estanquidad se guardan las dos últimas, no todo el histórico, las dos últimas. Otra: las intervenciones por motivos de seguridad y las actuaciones en emergencias se archivan un mínimo de cinco años. Truco para memorizarlo: mapa siempre, estanquidad las dos últimas, seguridad cinco años. Y un detalle que a veces intentan colar: el soporte da igual, vale papel o vale informático, con tal de que sea fiable. Si en un examen ves obligatoriamente en papel, es falso: lo que importa es que la información esté y sea de fiar.</a:t>
+              <a:t>N1: Cuando se reabre el gas y se trabaja con posible salida de gas, ¿qué reflejos de seguridad no pueden faltar?</a:t>
+            </a:r>
+          </a:p>
+          <a:p>
+            <a:r>
+              <a:t>N2: Empecemos por el momento de reabrir. Si durante la intervención pudo entrar aire en la tubería, antes de volver a dar servicio hay que purgar la red por sus extremos, es decir, echar ese aire fuera por las puntas antes de que se mezcle con el gas. ¿Por qué? Porque, como aprendiste en el vídeo anterior, el peligro es justamente la mezcla aire-gas. Y mientras se trabaja con posible salida de gas, cuatro reflejos que conviene memorizar juntos, como un solo bloque. Uno, detectar la presencia de gas, con el detector, para saber si hay gas en el aire. Dos, señalizar y controlar la zona de trabajo, para que nadie entre por descuido. Tres, retirar las fuentes de ignición que no sean imprescindibles, es decir, todo lo que pueda dar una chispa o una llama. Y cuatro, tener a mano el equipo de extinción específico, el extintor adecuado por si acaso. Detectar, señalizar, retirar chispas y extintor. Esos cuatro gestos te cubren en cualquier intervención con gas, y son exactamente los mismos que vas a repetir tú en obra.</a:t>
             </a:r>
           </a:p>
         </p:txBody>
@@ -741,12 +742,12 @@
           <a:lstStyle/>
           <a:p>
             <a:r>
-              <a:t>N1: Imagina una empresa que va a abrir zanja en la calle para poner fibra y no sabe que justo debajo pasa el gas. ¿Qué manda la ITC?</a:t>
-            </a:r>
-          </a:p>
-          <a:p>
-            <a:r>
-              <a:t>N2: Aquí está una de las preguntas más golosas del tema, porque son tres plazos seguidos y hay que decirlos en orden. La idea de fondo es de puro sentido común: antes de tocar la vía pública donde hay red de gas, hay que preguntar a la compañía dónde están sus tubos. Ahora los tres números. Primero, esa empresa avisa y solicita información al distribuidor con una antelación mínima de treinta días antes de empezar; y lo hace por escrito, por carta, fax o correo, indicando la localización concreta. Segundo, el distribuidor tiene un plazo máximo de veinte días para contestar con la mejor información disponible de dónde están sus instalaciones, qué normas hay que respetar cerca y cómo contactar con el servicio de urgencias. Y tercero, cuando la empresa ya va a arrancar de verdad, comunica el inicio de los trabajos con al menos veinticuatro horas de antelación. El truco temporal para clavarlo: pido con treinta, me contestan en veinte, aviso con veinticuatro horas. Y ojo, el solicitante no puede empezar a picar hasta haber recibido y aceptado formalmente esa información.</a:t>
+              <a:t>N1: ¿Qué está obligado a archivar el distribuidor, y sobre todo con qué números?</a:t>
+            </a:r>
+          </a:p>
+          <a:p>
+            <a:r>
+              <a:t>N2: Vamos con lo que se guarda y, muy atento, con las cifras, que es lo que cae. Primero, el distribuidor tiene que contar con cartografía detallada de la red, o sea, el mapa de por dónde van todos los tubos, y permanentemente actualizada, siempre al día; un plano viejo puede provocar que alguien pique donde no debe. Segundo, guarda mientras la red esté en explotación la documentación de autorización y los proyectos, incluidos los resultados de las pruebas en obra, resistencia y estanquidad. Y ahora las dos cifras clave. Una: de las vigilancias y controles de estanquidad se guardan las dos últimas, no todo el histórico, las dos últimas. Otra: las intervenciones por motivos de seguridad y las actuaciones en emergencias se archivan un mínimo de cinco años. Truco para memorizarlo: mapa siempre, estanquidad las dos últimas, seguridad cinco años. Y un detalle que a veces intentan colar: el soporte da igual, vale papel o vale informático, con tal de que sea fiable. Si en un examen ves obligatoriamente en papel, es falso: lo que importa es que la información esté y sea de fiar.</a:t>
             </a:r>
           </a:p>
         </p:txBody>
@@ -816,12 +817,12 @@
           <a:lstStyle/>
           <a:p>
             <a:r>
-              <a:t>N1: ¿Y si la obra que quiere hacer ese tercero choca de frente con la tubería de gas? ¿Quién decide entonces?</a:t>
-            </a:r>
-          </a:p>
-          <a:p>
-            <a:r>
-              <a:t>N2: Vamos por pasos, porque hay tres piezas. Primera: si la obra prevista afecta directamente al trazado o a la localización de la red de gas, el distribuidor puede negarse a que se haga. Segunda, y muy importante, no se puede negar por capricho ni porque le moleste: solo por razones técnicas o de seguridad. Tercera: si el que quiere hacer la obra no está de acuerdo con esa negativa, no decide ninguno de los dos por su cuenta; resuelve el órgano competente de la Comunidad Autónoma, que hace de árbitro. Y hay un matiz que cae en el examen y que mucha gente falla: la carga de probar que de verdad hay que hacer esa obra tocando el gas es del solicitante, del que quiere hacer la obra, no del distribuidor. Es decir, el que quiere picar es quien tiene que demostrar que no le queda otra. Todo este apartado, en el fondo, va de lo mismo: meter la excavadora a ciegas es reventar el tubo y provocar la fuga, así que la ley obliga a preguntar antes.</a:t>
+              <a:t>N1: Imagina una empresa que va a abrir zanja en la calle para poner fibra y no sabe que justo debajo pasa el gas. ¿Qué manda la ITC?</a:t>
+            </a:r>
+          </a:p>
+          <a:p>
+            <a:r>
+              <a:t>N2: Aquí está una de las preguntas más golosas del tema, porque son tres plazos seguidos y hay que decirlos en orden. La idea de fondo es de puro sentido común: antes de tocar la vía pública donde hay red de gas, hay que preguntar a la compañía dónde están sus tubos. Ahora los tres números. Primero, esa empresa avisa y solicita información al distribuidor con una antelación mínima de treinta días antes de empezar; y lo hace por escrito, por carta, fax o correo, indicando la localización concreta. Segundo, el distribuidor tiene un plazo máximo de veinte días para contestar con la mejor información disponible de dónde están sus instalaciones, qué normas hay que respetar cerca y cómo contactar con el servicio de urgencias. Y tercero, cuando la empresa ya va a arrancar de verdad, comunica el inicio de los trabajos con al menos veinticuatro horas de antelación. El truco temporal para clavarlo: pido con treinta, me contestan en veinte, aviso con veinticuatro horas. Y ojo, el solicitante no puede empezar a picar hasta haber recibido y aceptado formalmente esa información.</a:t>
             </a:r>
           </a:p>
         </p:txBody>
@@ -891,12 +892,12 @@
           <a:lstStyle/>
           <a:p>
             <a:r>
-              <a:t>N1: Antes del gran cierre, ¿me das los golpes rápidos para comprobar que lo tengo todo?</a:t>
-            </a:r>
-          </a:p>
-          <a:p>
-            <a:r>
-              <a:t>N2: Cinco, y si los sueltas de carrerilla tienes el vídeo ganado. Uno: el centro de operación vigila dos parámetros de calidad, presión y odorizante, y sin odorante nadie huele la fuga. Dos: las urgencias de seguridad en casa del usuario son tres y forman lista cerrada, olor a gas, incendio o explosión, y la fuga de gas es de máxima prioridad. Tres: las fugas se clasifican en tres clases, urgente, programada y de vigilancia de progresión, y lo que más pesa para decidir es la proximidad a edificios. Cuatro: los plazos de las obras de terceros, treinta días para avisar, veinte para que el distribuidor conteste y veinticuatro horas antes de empezar. Y cinco, del archivo, las dos últimas estanquidades y cinco años para las intervenciones de seguridad y emergencias. Presión y odorante; olor, incendio y explosión; urgente, programada y vigilancia; treinta, veinte y veinticuatro; dos últimas y cinco años. Con esos cinco bloques vas sobrado.</a:t>
+              <a:t>N1: ¿Y si la obra que quiere hacer ese tercero choca de frente con la tubería de gas? ¿Quién decide entonces?</a:t>
+            </a:r>
+          </a:p>
+          <a:p>
+            <a:r>
+              <a:t>N2: Vamos por pasos, porque hay tres piezas. Primera: si la obra prevista afecta directamente al trazado o a la localización de la red de gas, el distribuidor puede negarse a que se haga. Segunda, y muy importante, no se puede negar por capricho ni porque le moleste: solo por razones técnicas o de seguridad. Tercera: si el que quiere hacer la obra no está de acuerdo con esa negativa, no decide ninguno de los dos por su cuenta; resuelve el órgano competente de la Comunidad Autónoma, que hace de árbitro. Y hay un matiz que cae en el examen y que mucha gente falla: la carga de probar que de verdad hay que hacer esa obra tocando el gas es del solicitante, del que quiere hacer la obra, no del distribuidor. Es decir, el que quiere picar es quien tiene que demostrar que no le queda otra. Todo este apartado, en el fondo, va de lo mismo: meter la excavadora a ciegas es reventar el tubo y provocar la fuga, así que la ley obliga a preguntar antes.</a:t>
             </a:r>
           </a:p>
         </p:txBody>
@@ -966,6 +967,81 @@
           <a:lstStyle/>
           <a:p>
             <a:r>
+              <a:t>N1: Antes del gran cierre, ¿me das los golpes rápidos para comprobar que lo tengo todo?</a:t>
+            </a:r>
+          </a:p>
+          <a:p>
+            <a:r>
+              <a:t>N2: Cinco, y si los sueltas de carrerilla tienes el vídeo ganado. Uno: el centro de operación vigila dos parámetros de calidad, presión y odorizante, y sin odorante nadie huele la fuga. Dos: las urgencias de seguridad en casa del usuario son tres y forman lista cerrada, olor a gas, incendio o explosión, y la fuga de gas es de máxima prioridad. Tres: las fugas se clasifican en tres clases, urgente, programada y de vigilancia de progresión, y lo que más pesa para decidir es la proximidad a edificios. Cuatro: los plazos de las obras de terceros, treinta días para avisar, veinte para que el distribuidor conteste y veinticuatro horas antes de empezar. Y cinco, del archivo, las dos últimas estanquidades y cinco años para las intervenciones de seguridad y emergencias. Presión y odorante; olor, incendio y explosión; urgente, programada y vigilancia; treinta, veinte y veinticuatro; dos últimas y cinco años. Con esos cinco bloques vas sobrado.</a:t>
+            </a:r>
+          </a:p>
+        </p:txBody>
+      </p:sp>
+      <p:sp>
+        <p:nvSpPr>
+          <p:cNvPr id="4" name="Slide Number Placeholder 3"/>
+          <p:cNvSpPr>
+            <a:spLocks noGrp="1"/>
+          </p:cNvSpPr>
+          <p:nvPr>
+            <p:ph type="sldNum" idx="5" sz="quarter"/>
+          </p:nvPr>
+        </p:nvSpPr>
+        <p:spPr/>
+      </p:sp>
+    </p:spTree>
+  </p:cSld>
+  <p:clrMapOvr>
+    <a:masterClrMapping/>
+  </p:clrMapOvr>
+</p:notes>
+</file>
+
+<file path=ppt/notesSlides/notesSlide16.xml><?xml version="1.0" encoding="utf-8"?>
+<p:notes xmlns:a="http://schemas.openxmlformats.org/drawingml/2006/main" xmlns:p="http://schemas.openxmlformats.org/presentationml/2006/main" xmlns:r="http://schemas.openxmlformats.org/officeDocument/2006/relationships">
+  <p:cSld>
+    <p:spTree>
+      <p:nvGrpSpPr>
+        <p:cNvPr id="1" name=""/>
+        <p:cNvGrpSpPr/>
+        <p:nvPr/>
+      </p:nvGrpSpPr>
+      <p:grpSpPr>
+        <a:xfrm>
+          <a:off x="0" y="0"/>
+          <a:ext cx="0" cy="0"/>
+          <a:chOff x="0" y="0"/>
+          <a:chExt cx="0" cy="0"/>
+        </a:xfrm>
+      </p:grpSpPr>
+      <p:sp>
+        <p:nvSpPr>
+          <p:cNvPr id="2" name="Slide Image Placeholder 1"/>
+          <p:cNvSpPr>
+            <a:spLocks noGrp="1"/>
+          </p:cNvSpPr>
+          <p:nvPr>
+            <p:ph type="sldImg" idx="2"/>
+          </p:nvPr>
+        </p:nvSpPr>
+        <p:spPr/>
+      </p:sp>
+      <p:sp>
+        <p:nvSpPr>
+          <p:cNvPr id="3" name="Notes Placeholder 2"/>
+          <p:cNvSpPr>
+            <a:spLocks noGrp="1"/>
+          </p:cNvSpPr>
+          <p:nvPr>
+            <p:ph type="body" idx="3" sz="quarter"/>
+          </p:nvPr>
+        </p:nvSpPr>
+        <p:spPr/>
+        <p:txBody>
+          <a:bodyPr/>
+          <a:lstStyle/>
+          <a:p>
+            <a:r>
               <a:t>N1: Y con esto cerramos no solo el vídeo, sino el tema entero. Si me llevo cuatro conquistas, ¿cuáles?</a:t>
             </a:r>
           </a:p>
@@ -1124,16 +1200,7 @@
         <p:txBody>
           <a:bodyPr/>
           <a:lstStyle/>
-          <a:p>
-            <a:r>
-              <a:t>N1: Primero de todo, ¿qué diferencia hay entre operar y mantener, y de quién es la responsabilidad?</a:t>
-            </a:r>
-          </a:p>
-          <a:p>
-            <a:r>
-              <a:t>N2: Vamos con las dos palabras, porque suenan parecidas pero no son lo mismo. Operar es conducir la red día a día: vigilar que la presión esté bien, controlar la odorización, atender el funcionamiento normal. Mantener es cuidarla y repararla: revisar, sustituir lo gastado, arreglar lo que falla. Las dos cosas, operación y mantenimiento, recaen en el titular de la instalación, aunque el trabajo lo haga gente contratada, lo que la norma llama personal propio o ajeno. Y todo con un criterio de fondo que lo tiñe todo: la seguridad pública, más las normas seiscientas de siempre. Hay además un detalle de papeleo que cae en el examen: el distribuidor tiene que poner copia de los procedimientos de sus centros de operación y de urgencias a disposición de dos destinatarios. Uno, el Ministerio, en su parte de seguridad industrial; y dos, la Comunidad Autónoma que autorizó la red. Que sean dos, y cuáles son, es justo lo que suelen preguntar.</a:t>
-            </a:r>
-          </a:p>
+          <a:p/>
         </p:txBody>
       </p:sp>
       <p:sp>
@@ -1201,12 +1268,12 @@
           <a:lstStyle/>
           <a:p>
             <a:r>
-              <a:t>N1: ¿Y qué es exactamente un centro de operación? ¿Un sitio con gente mirando pantallas?</a:t>
-            </a:r>
-          </a:p>
-          <a:p>
-            <a:r>
-              <a:t>N2: Justo eso: piénsalo como la torre de control de un aeropuerto, pero de la red de gas. Desde ahí se vigila que todo vaya bien, con los medios materiales y humanos necesarios. ¿Qué es lo que vigila sobre todo? Dos parámetros de calidad que tienes que grabarte. El primero, la presión, que el gas llegue con la fuerza justa a todos. El segundo, el odorizante, y este merece una explicación: el gas natural no huele a nada, así que se le añade a propósito una sustancia que huele fatal, a huevo podrido, para que cualquiera note un escape con la nariz. Por eso el odorante es de vida o muerte: si falta, hay una fuga y nadie la huele hasta que ya es tarde. Presión y odorizante, esos dos siempre a raya. Y ahora, atención a una excepción que se pregunta: las redes que se alimentan desde depósitos de gas licuado del petróleo, típicas de una urbanización con su depósito de propano, no están obligadas a tener centro de operación; para ellas se dictan requisitos aparte según su tamaño. Es un salvo que, y esos siempre caen.</a:t>
+              <a:t>N1: Primero de todo, ¿qué diferencia hay entre operar y mantener, y de quién es la responsabilidad?</a:t>
+            </a:r>
+          </a:p>
+          <a:p>
+            <a:r>
+              <a:t>N2: Vamos con las dos palabras, porque suenan parecidas pero no son lo mismo. Operar es conducir la red día a día: vigilar que la presión esté bien, controlar la odorización, atender el funcionamiento normal. Mantener es cuidarla y repararla: revisar, sustituir lo gastado, arreglar lo que falla. Las dos cosas, operación y mantenimiento, recaen en el titular de la instalación, aunque el trabajo lo haga gente contratada, lo que la norma llama personal propio o ajeno. Y todo con un criterio de fondo que lo tiñe todo: la seguridad pública, más las normas seiscientas de siempre. Hay además un detalle de papeleo que cae en el examen: el distribuidor tiene que poner copia de los procedimientos de sus centros de operación y de urgencias a disposición de dos destinatarios. Uno, el Ministerio, en su parte de seguridad industrial; y dos, la Comunidad Autónoma que autorizó la red. Que sean dos, y cuáles son, es justo lo que suelen preguntar.</a:t>
             </a:r>
           </a:p>
         </p:txBody>
@@ -1276,12 +1343,12 @@
           <a:lstStyle/>
           <a:p>
             <a:r>
-              <a:t>N1: El centro de operación tiene cuatro funciones. ¿Cómo las ordeno para no liarme?</a:t>
-            </a:r>
-          </a:p>
-          <a:p>
-            <a:r>
-              <a:t>N2: Con una secuencia lógica en el tiempo, así no se te caen. Primera función, controlar: vigilar lo que pasa ahora mismo, presión y odorante, recopilar los registros de presión y los datos que llegan teleinformados desde las estaciones. Segunda, planificar: mirar al futuro con un plan de operación que garantice la continuidad del suministro para la próxima campaña, contando con el crecimiento previsto de la demanda. Tercera, informar: cada mes elabora un informe de calidad del gas donde resume los niveles de odorización y el valor medio del poder calorífico superior, que es la energía que lleva el gas, cuánto calienta. Y cuarta, programar: organiza los trabajos sobre las redes principales. Controlar, planificar, informar, programar. Y ojo a un detalle de examen que se cruza mucho: el dato del poder calorífico no se lo inventa el centro, se lo facilita el Gestor Técnico del Sistema, y con frecuencia horaria, cada hora, aunque el informe de calidad se elabore una sola vez al mes. No confundas el ritmo del dato, horario, con el ritmo del informe, mensual.</a:t>
+              <a:t>N1: ¿Y qué es exactamente un centro de operación? ¿Un sitio con gente mirando pantallas?</a:t>
+            </a:r>
+          </a:p>
+          <a:p>
+            <a:r>
+              <a:t>N2: Justo eso: piénsalo como la torre de control de un aeropuerto, pero de la red de gas. Desde ahí se vigila que todo vaya bien, con los medios materiales y humanos necesarios. ¿Qué es lo que vigila sobre todo? Dos parámetros de calidad que tienes que grabarte. El primero, la presión, que el gas llegue con la fuerza justa a todos. El segundo, el odorizante, y este merece una explicación: el gas natural no huele a nada, así que se le añade a propósito una sustancia que huele fatal, a huevo podrido, para que cualquiera note un escape con la nariz. Por eso el odorante es de vida o muerte: si falta, hay una fuga y nadie la huele hasta que ya es tarde. Presión y odorizante, esos dos siempre a raya. Y ahora, atención a una excepción que se pregunta: las redes que se alimentan desde depósitos de gas licuado del petróleo, típicas de una urbanización con su depósito de propano, no están obligadas a tener centro de operación; para ellas se dictan requisitos aparte según su tamaño. Es un salvo que, y esos siempre caen.</a:t>
             </a:r>
           </a:p>
         </p:txBody>
@@ -1351,12 +1418,12 @@
           <a:lstStyle/>
           <a:p>
             <a:r>
-              <a:t>N1: Aquí hay dos cosas que suenan casi igual y me lío: plan de emergencia y servicio de urgencias. ¿En qué se diferencian?</a:t>
-            </a:r>
-          </a:p>
-          <a:p>
-            <a:r>
-              <a:t>N2: Muy buena, porque es una trampa clásica. Una es un papel y la otra es un teléfono, quédate con eso. El plan de emergencia es el documento escrito que dice, con antelación y por escrito, qué hay que hacer y quién hace cada cosa cuando pasa algo gordo. Tiene ocho puntos que te conviene memorizar como una checklist: objeto y ámbito de aplicación, grados de emergencia, desarrollo de la emergencia, determinación de los responsables, etapas, notificación a los servicios públicos como policía, bomberos y sanitarios, análisis de emergencias y difusión del plan. La otra cosa es el servicio de atención de urgencias, que es el teléfono real que coge la llamada del vecino que dice huele a gas. Ese servicio tiene que estar permanente, las veinticuatro horas, con gente capaz de ir en campo y, si hace falta, activar el plan de emergencia y hacerlo en el menor tiempo posible. Resumen para no confundirlos: el plan es el papel que dice qué hacer; el servicio de urgencias es el teléfono y la furgoneta que lo hacen.</a:t>
+              <a:t>N1: El centro de operación tiene cuatro funciones. ¿Cómo las ordeno para no liarme?</a:t>
+            </a:r>
+          </a:p>
+          <a:p>
+            <a:r>
+              <a:t>N2: Con una secuencia lógica en el tiempo, así no se te caen. Primera función, controlar: vigilar lo que pasa ahora mismo, presión y odorante, recopilar los registros de presión y los datos que llegan teleinformados desde las estaciones. Segunda, planificar: mirar al futuro con un plan de operación que garantice la continuidad del suministro para la próxima campaña, contando con el crecimiento previsto de la demanda. Tercera, informar: cada mes elabora un informe de calidad del gas donde resume los niveles de odorización y el valor medio del poder calorífico superior, que es la energía que lleva el gas, cuánto calienta. Y cuarta, programar: organiza los trabajos sobre las redes principales. Controlar, planificar, informar, programar. Y ojo a un detalle de examen que se cruza mucho: el dato del poder calorífico no se lo inventa el centro, se lo facilita el Gestor Técnico del Sistema, y con frecuencia horaria, cada hora, aunque el informe de calidad se elabore una sola vez al mes. No confundas el ritmo del dato, horario, con el ritmo del informe, mensual.</a:t>
             </a:r>
           </a:p>
         </p:txBody>
@@ -1426,12 +1493,12 @@
           <a:lstStyle/>
           <a:p>
             <a:r>
-              <a:t>N1: Si me preguntan qué incidencias de seguridad atiende el distribuidor en casa del usuario, ¿qué contesto?</a:t>
-            </a:r>
-          </a:p>
-          <a:p>
-            <a:r>
-              <a:t>N2: Tres, y es una lista cerrada, así que apréndetela tal cual: olor a gas, incendio o explosión. Ni más ni menos que esas tres. Los centros de atención de urgencias trabajan con procedimientos escritos que clasifican los avisos por prioridades, porque no todo lo que entra por teléfono es igual de grave. ¿Y cuál es el aviso de máxima prioridad, el que se atiende antes que nada? La fuga de gas. Cualquier condición que pueda generar riesgo va a lo más alto de la cola, y la resolución de esos casos de máxima prioridad tiene su sistemática marcada. Un detalle económico que a veces cae y sorprende: tener ese servicio de urgencias siempre disponible cuesta dinero, y ese coste se repercute a los usuarios, es decir, se lo cobran a la gente según diga el reglamento. Y guardan los registros de lo que hacen a disposición de la Administración, para poder demostrar cómo actuaron ante cada incidencia.</a:t>
+              <a:t>N1: Aquí hay dos cosas que suenan casi igual y me lío: plan de emergencia y servicio de urgencias. ¿En qué se diferencian?</a:t>
+            </a:r>
+          </a:p>
+          <a:p>
+            <a:r>
+              <a:t>N2: Muy buena, porque es una trampa clásica. Una es un papel y la otra es un teléfono, quédate con eso. El plan de emergencia es el documento escrito que dice, con antelación y por escrito, qué hay que hacer y quién hace cada cosa cuando pasa algo gordo. Tiene ocho puntos que te conviene memorizar como una checklist: objeto y ámbito de aplicación, grados de emergencia, desarrollo de la emergencia, determinación de los responsables, etapas, notificación a los servicios públicos como policía, bomberos y sanitarios, análisis de emergencias y difusión del plan. La otra cosa es el servicio de atención de urgencias, que es el teléfono real que coge la llamada del vecino que dice huele a gas. Ese servicio tiene que estar permanente, las veinticuatro horas, con gente capaz de ir en campo y, si hace falta, activar el plan de emergencia y hacerlo en el menor tiempo posible. Resumen para no confundirlos: el plan es el papel que dice qué hacer; el servicio de urgencias es el teléfono y la furgoneta que lo hacen.</a:t>
             </a:r>
           </a:p>
         </p:txBody>
@@ -1501,12 +1568,12 @@
           <a:lstStyle/>
           <a:p>
             <a:r>
-              <a:t>N1: El titular comprueba la estanquidad de la red. Cuando aparece una fuga, ¿cómo se clasifica?</a:t>
-            </a:r>
-          </a:p>
-          <a:p>
-            <a:r>
-              <a:t>N2: En tres clases, ordenadas de más a menos grave, y esta clasificación cae mucho. La primera, fuga de intervención urgente: hay peligro inmediato, hay que ir ya. La segunda, de intervención programada: hay que arreglarla sí o sí, pero se puede planificar la intervención con calma, para dentro de unos días. Y la tercera, de vigilancia de progresión: es tan pequeña o tan poco peligrosa que, de momento, solo se vigila por si va a más. Truco para el orden: urgente ahora, programada pronto, progresión la miro. Y aquí viene lo bueno, la pregunta con miga: ¿por qué la misma fuga puede ser urgente o solo de vigilancia? Porque depende sobre todo de dónde esté. Una fuga pequeña en pleno campo no es lo mismo que esa misma fuga pegada a un edificio habitado, donde el gas se puede acumular y hacer daño a la gente. Por eso, entre los factores que deciden la clase están las características del gas, la presión de operación y lo que diga el detector, pero el que más pesa es la proximidad a propiedades y edificios y el uso que se les da. La documentación de estos controles queda en poder del titular, a disposición de la Comunidad Autónoma.</a:t>
+              <a:t>N1: Si me preguntan qué incidencias de seguridad atiende el distribuidor en casa del usuario, ¿qué contesto?</a:t>
+            </a:r>
+          </a:p>
+          <a:p>
+            <a:r>
+              <a:t>N2: Tres, y es una lista cerrada, así que apréndetela tal cual: olor a gas, incendio o explosión. Ni más ni menos que esas tres. Los centros de atención de urgencias trabajan con procedimientos escritos que clasifican los avisos por prioridades, porque no todo lo que entra por teléfono es igual de grave. ¿Y cuál es el aviso de máxima prioridad, el que se atiende antes que nada? La fuga de gas. Cualquier condición que pueda generar riesgo va a lo más alto de la cola, y la resolución de esos casos de máxima prioridad tiene su sistemática marcada. Un detalle económico que a veces cae y sorprende: tener ese servicio de urgencias siempre disponible cuesta dinero, y ese coste se repercute a los usuarios, es decir, se lo cobran a la gente según diga el reglamento. Y guardan los registros de lo que hacen a disposición de la Administración, para poder demostrar cómo actuaron ante cada incidencia.</a:t>
             </a:r>
           </a:p>
         </p:txBody>
@@ -1576,12 +1643,12 @@
           <a:lstStyle/>
           <a:p>
             <a:r>
-              <a:t>N1: Aparece una fuga o un daño y en ese momento no se puede arreglar bien del todo. ¿Qué se hace, se deja para mañana?</a:t>
-            </a:r>
-          </a:p>
-          <a:p>
-            <a:r>
-              <a:t>N2: Nunca se deja a medias. Lo que manda la norma es tomar una medida temporal, un parche seguro que quite el peligro de inmediato, y en cuanto sea posible hacer la reparación definitiva, la de verdad. El parche no es la solución, es solo un puente hasta la reparación buena, pero mientras tanto la instalación no queda peligrosa. Ahora, la regla sobre las pruebas, que tiene una excepción muy práctica. Regla general: después de tocar la red hay que repetir las pruebas en obra, resistencia y estanquidad, según las normas seiscientas. Excepción: si es una reparación puntual o un tramo de corta extensión, no hace falta montar todo el operativo de pruebas; basta con verificar que las uniones nuevas no fugan, y eso se hace con disolución jabonosa, que es echar agua con jabón sobre la junta: si burbujea, hay fuga. Ese es el truco de gasista que vas a usar toda la vida. Fíjate bien en la condición de la excepción, porque es lo que preguntan: solo vale para reparación puntual o tramo corto; en una intervención grande, pruebas completas.</a:t>
+              <a:t>N1: El titular comprueba la estanquidad de la red. Cuando aparece una fuga, ¿cómo se clasifica?</a:t>
+            </a:r>
+          </a:p>
+          <a:p>
+            <a:r>
+              <a:t>N2: En tres clases, ordenadas de más a menos grave, y esta clasificación cae mucho. La primera, fuga de intervención urgente: hay peligro inmediato, hay que ir ya. La segunda, de intervención programada: hay que arreglarla sí o sí, pero se puede planificar la intervención con calma, para dentro de unos días. Y la tercera, de vigilancia de progresión: es tan pequeña o tan poco peligrosa que, de momento, solo se vigila por si va a más. Truco para el orden: urgente ahora, programada pronto, progresión la miro. Y aquí viene lo bueno, la pregunta con miga: ¿por qué la misma fuga puede ser urgente o solo de vigilancia? Porque depende sobre todo de dónde esté. Una fuga pequeña en pleno campo no es lo mismo que esa misma fuga pegada a un edificio habitado, donde el gas se puede acumular y hacer daño a la gente. Por eso, entre los factores que deciden la clase están las características del gas, la presión de operación y lo que diga el detector, pero el que más pesa es la proximidad a propiedades y edificios y el uso que se les da. La documentación de estos controles queda en poder del titular, a disposición de la Comunidad Autónoma.</a:t>
             </a:r>
           </a:p>
         </p:txBody>
@@ -4656,7 +4723,7 @@
             <a:r>
               <a:rPr sz="1400" b="1" i="0">
                 <a:solidFill>
-                  <a:srgbClr val="CADCFC"/>
+                  <a:srgbClr val="F4A24C"/>
                 </a:solidFill>
                 <a:latin typeface="Montserrat"/>
               </a:rPr>
@@ -4667,13 +4734,57 @@
       </p:sp>
       <p:sp>
         <p:nvSpPr>
-          <p:cNvPr id="4" name="TextBox 3"/>
+          <p:cNvPr id="4" name="Rounded Rectangle 3"/>
+          <p:cNvSpPr/>
+          <p:nvPr/>
+        </p:nvSpPr>
+        <p:spPr>
+          <a:xfrm>
+            <a:off x="868680" y="2057400"/>
+            <a:ext cx="1463040" cy="82296"/>
+          </a:xfrm>
+          <a:prstGeom prst="roundRect">
+            <a:avLst/>
+          </a:prstGeom>
+          <a:solidFill>
+            <a:srgbClr val="E8801A"/>
+          </a:solidFill>
+          <a:ln>
+            <a:noFill/>
+          </a:ln>
+          <a:effectLst/>
+        </p:spPr>
+        <p:style>
+          <a:lnRef idx="1">
+            <a:schemeClr val="accent1"/>
+          </a:lnRef>
+          <a:fillRef idx="3">
+            <a:schemeClr val="accent1"/>
+          </a:fillRef>
+          <a:effectRef idx="2">
+            <a:schemeClr val="accent1"/>
+          </a:effectRef>
+          <a:fontRef idx="minor">
+            <a:schemeClr val="lt1"/>
+          </a:fontRef>
+        </p:style>
+        <p:txBody>
+          <a:bodyPr rtlCol="0" anchor="ctr"/>
+          <a:lstStyle/>
+          <a:p>
+            <a:pPr algn="ctr"/>
+          </a:p>
+        </p:txBody>
+      </p:sp>
+      <p:sp>
+        <p:nvSpPr>
+          <p:cNvPr id="5" name="TextBox 4"/>
           <p:cNvSpPr txBox="1"/>
           <p:nvPr/>
         </p:nvSpPr>
         <p:spPr>
           <a:xfrm>
-            <a:off x="822960" y="2194560"/>
+            <a:off x="822960" y="2286000"/>
             <a:ext cx="10515600" cy="2011680"/>
           </a:xfrm>
           <a:prstGeom prst="rect">
@@ -4712,7 +4823,7 @@
       </p:sp>
       <p:sp>
         <p:nvSpPr>
-          <p:cNvPr id="5" name="TextBox 4"/>
+          <p:cNvPr id="6" name="TextBox 5"/>
           <p:cNvSpPr txBox="1"/>
           <p:nvPr/>
         </p:nvSpPr>
@@ -4836,7 +4947,7 @@
                 </a:solidFill>
                 <a:latin typeface="Montserrat"/>
               </a:rPr>
-              <a:t>010 / 015</a:t>
+              <a:t>010 / 016</a:t>
             </a:r>
           </a:p>
         </p:txBody>
@@ -4884,7 +4995,7 @@
         <p:spPr>
           <a:xfrm>
             <a:off x="822960" y="457200"/>
-            <a:ext cx="8229600" cy="365760"/>
+            <a:ext cx="10058400" cy="365760"/>
           </a:xfrm>
           <a:prstGeom prst="rect">
             <a:avLst/>
@@ -4898,13 +5009,13 @@
           <a:lstStyle/>
           <a:p>
             <a:r>
-              <a:rPr sz="1200" b="1" i="0">
-                <a:solidFill>
-                  <a:srgbClr val="64748B"/>
-                </a:solidFill>
-                <a:latin typeface="Montserrat"/>
-              </a:rPr>
-              <a:t>APARTADO 6.4 · SEGURIDAD AL INTERVENIR</a:t>
+              <a:rPr sz="1300" b="1" i="0">
+                <a:solidFill>
+                  <a:srgbClr val="E8801A"/>
+                </a:solidFill>
+                <a:latin typeface="Montserrat"/>
+              </a:rPr>
+              <a:t>APARTADO 6.4 · MANTENIMIENTO</a:t>
             </a:r>
           </a:p>
         </p:txBody>
@@ -4932,26 +5043,70 @@
           <a:lstStyle/>
           <a:p>
             <a:r>
-              <a:rPr sz="2700" b="1" i="0">
+              <a:rPr sz="2800" b="1" i="0">
                 <a:solidFill>
                   <a:srgbClr val="1E2761"/>
                 </a:solidFill>
                 <a:latin typeface="Montserrat"/>
               </a:rPr>
-              <a:t>Reflejos con gas fuera</a:t>
-            </a:r>
-          </a:p>
-        </p:txBody>
-      </p:sp>
-      <p:sp>
-        <p:nvSpPr>
-          <p:cNvPr id="7" name="TextBox 6"/>
+              <a:t>Parche primero, reparación después</a:t>
+            </a:r>
+          </a:p>
+        </p:txBody>
+      </p:sp>
+      <p:sp>
+        <p:nvSpPr>
+          <p:cNvPr id="7" name="Rounded Rectangle 6"/>
+          <p:cNvSpPr/>
+          <p:nvPr/>
+        </p:nvSpPr>
+        <p:spPr>
+          <a:xfrm>
+            <a:off x="868680" y="1627632"/>
+            <a:ext cx="2011680" cy="73152"/>
+          </a:xfrm>
+          <a:prstGeom prst="roundRect">
+            <a:avLst/>
+          </a:prstGeom>
+          <a:solidFill>
+            <a:srgbClr val="E8801A"/>
+          </a:solidFill>
+          <a:ln>
+            <a:noFill/>
+          </a:ln>
+          <a:effectLst/>
+        </p:spPr>
+        <p:style>
+          <a:lnRef idx="1">
+            <a:schemeClr val="accent1"/>
+          </a:lnRef>
+          <a:fillRef idx="3">
+            <a:schemeClr val="accent1"/>
+          </a:fillRef>
+          <a:effectRef idx="2">
+            <a:schemeClr val="accent1"/>
+          </a:effectRef>
+          <a:fontRef idx="minor">
+            <a:schemeClr val="lt1"/>
+          </a:fontRef>
+        </p:style>
+        <p:txBody>
+          <a:bodyPr rtlCol="0" anchor="ctr"/>
+          <a:lstStyle/>
+          <a:p>
+            <a:pPr algn="ctr"/>
+          </a:p>
+        </p:txBody>
+      </p:sp>
+      <p:sp>
+        <p:nvSpPr>
+          <p:cNvPr id="8" name="TextBox 7"/>
           <p:cNvSpPr txBox="1"/>
           <p:nvPr/>
         </p:nvSpPr>
         <p:spPr>
           <a:xfrm>
-            <a:off x="822960" y="1920240"/>
+            <a:off x="822960" y="1965960"/>
             <a:ext cx="4983480" cy="4206240"/>
           </a:xfrm>
           <a:prstGeom prst="rect">
@@ -4967,17 +5122,17 @@
           <a:p>
             <a:pPr>
               <a:spcAft>
-                <a:spcPts val="1000"/>
+                <a:spcPts val="1100"/>
               </a:spcAft>
             </a:pPr>
             <a:r>
               <a:rPr sz="1600" b="1" i="0">
                 <a:solidFill>
-                  <a:srgbClr val="2E3A80"/>
-                </a:solidFill>
-                <a:latin typeface="Montserrat"/>
-              </a:rPr>
-              <a:t>•  </a:t>
+                  <a:srgbClr val="E8801A"/>
+                </a:solidFill>
+                <a:latin typeface="Montserrat"/>
+              </a:rPr>
+              <a:t>▸  </a:t>
             </a:r>
             <a:r>
               <a:rPr sz="1600" b="0" i="0">
@@ -4986,23 +5141,23 @@
                 </a:solidFill>
                 <a:latin typeface="Montserrat"/>
               </a:rPr>
-              <a:t>Al reabrir: purga por los extremos</a:t>
+              <a:t>Medida temporal si no hay reparación ya</a:t>
             </a:r>
           </a:p>
           <a:p>
             <a:pPr>
               <a:spcAft>
-                <a:spcPts val="1000"/>
+                <a:spcPts val="1100"/>
               </a:spcAft>
             </a:pPr>
             <a:r>
               <a:rPr sz="1600" b="1" i="0">
                 <a:solidFill>
-                  <a:srgbClr val="2E3A80"/>
-                </a:solidFill>
-                <a:latin typeface="Montserrat"/>
-              </a:rPr>
-              <a:t>•  </a:t>
+                  <a:srgbClr val="E8801A"/>
+                </a:solidFill>
+                <a:latin typeface="Montserrat"/>
+              </a:rPr>
+              <a:t>▸  </a:t>
             </a:r>
             <a:r>
               <a:rPr sz="1600" b="0" i="0">
@@ -5011,23 +5166,23 @@
                 </a:solidFill>
                 <a:latin typeface="Montserrat"/>
               </a:rPr>
-              <a:t>Detectar presencia de gas</a:t>
+              <a:t>Reparación definitiva en cuanto se pueda</a:t>
             </a:r>
           </a:p>
           <a:p>
             <a:pPr>
               <a:spcAft>
-                <a:spcPts val="1000"/>
+                <a:spcPts val="1100"/>
               </a:spcAft>
             </a:pPr>
             <a:r>
               <a:rPr sz="1600" b="1" i="0">
                 <a:solidFill>
-                  <a:srgbClr val="2E3A80"/>
-                </a:solidFill>
-                <a:latin typeface="Montserrat"/>
-              </a:rPr>
-              <a:t>•  </a:t>
+                  <a:srgbClr val="E8801A"/>
+                </a:solidFill>
+                <a:latin typeface="Montserrat"/>
+              </a:rPr>
+              <a:t>▸  </a:t>
             </a:r>
             <a:r>
               <a:rPr sz="1600" b="0" i="0">
@@ -5036,23 +5191,23 @@
                 </a:solidFill>
                 <a:latin typeface="Montserrat"/>
               </a:rPr>
-              <a:t>Señalizar y controlar la zona</a:t>
+              <a:t>Tras intervenir: pruebas en obra</a:t>
             </a:r>
           </a:p>
           <a:p>
             <a:pPr>
               <a:spcAft>
-                <a:spcPts val="1000"/>
+                <a:spcPts val="1100"/>
               </a:spcAft>
             </a:pPr>
             <a:r>
               <a:rPr sz="1600" b="1" i="0">
                 <a:solidFill>
-                  <a:srgbClr val="2E3A80"/>
-                </a:solidFill>
-                <a:latin typeface="Montserrat"/>
-              </a:rPr>
-              <a:t>•  </a:t>
+                  <a:srgbClr val="E8801A"/>
+                </a:solidFill>
+                <a:latin typeface="Montserrat"/>
+              </a:rPr>
+              <a:t>▸  </a:t>
             </a:r>
             <a:r>
               <a:rPr sz="1600" b="0" i="0">
@@ -5061,14 +5216,14 @@
                 </a:solidFill>
                 <a:latin typeface="Montserrat"/>
               </a:rPr>
-              <a:t>Retirar chispas · extintor a mano</a:t>
-            </a:r>
-          </a:p>
-        </p:txBody>
-      </p:sp>
-      <p:sp>
-        <p:nvSpPr>
-          <p:cNvPr id="8" name="imgph" descr="IMGQ:gas works site safety signage cordon street"/>
+              <a:t>Puntual o tramo corto: disolución jabonosa</a:t>
+            </a:r>
+          </a:p>
+        </p:txBody>
+      </p:sp>
+      <p:sp>
+        <p:nvSpPr>
+          <p:cNvPr id="9" name="imgph" descr="IMGQ:plumber applying soapy water pipe joint hands"/>
           <p:cNvSpPr/>
           <p:nvPr/>
         </p:nvSpPr>
@@ -5114,7 +5269,7 @@
       </p:sp>
       <p:sp>
         <p:nvSpPr>
-          <p:cNvPr id="9" name="TextBox 8"/>
+          <p:cNvPr id="10" name="TextBox 9"/>
           <p:cNvSpPr txBox="1"/>
           <p:nvPr/>
         </p:nvSpPr>
@@ -5154,7 +5309,7 @@
                 </a:solidFill>
                 <a:latin typeface="Montserrat"/>
               </a:rPr>
-              <a:t>gas works site safety signage cordon street</a:t>
+              <a:t>plumber applying soapy water pipe joint hands</a:t>
             </a:r>
           </a:p>
         </p:txBody>
@@ -5251,7 +5406,7 @@
                 </a:solidFill>
                 <a:latin typeface="Montserrat"/>
               </a:rPr>
-              <a:t>011 / 015</a:t>
+              <a:t>011 / 016</a:t>
             </a:r>
           </a:p>
         </p:txBody>
@@ -5299,7 +5454,7 @@
         <p:spPr>
           <a:xfrm>
             <a:off x="822960" y="457200"/>
-            <a:ext cx="8229600" cy="365760"/>
+            <a:ext cx="10058400" cy="365760"/>
           </a:xfrm>
           <a:prstGeom prst="rect">
             <a:avLst/>
@@ -5313,13 +5468,13 @@
           <a:lstStyle/>
           <a:p>
             <a:r>
-              <a:rPr sz="1200" b="1" i="0">
-                <a:solidFill>
-                  <a:srgbClr val="64748B"/>
-                </a:solidFill>
-                <a:latin typeface="Montserrat"/>
-              </a:rPr>
-              <a:t>APARTADO 7 · REGISTRO Y ARCHIVO</a:t>
+              <a:rPr sz="1300" b="1" i="0">
+                <a:solidFill>
+                  <a:srgbClr val="E8801A"/>
+                </a:solidFill>
+                <a:latin typeface="Montserrat"/>
+              </a:rPr>
+              <a:t>APARTADO 6.4 · SEGURIDAD AL INTERVENIR</a:t>
             </a:r>
           </a:p>
         </p:txBody>
@@ -5347,26 +5502,70 @@
           <a:lstStyle/>
           <a:p>
             <a:r>
-              <a:rPr sz="2700" b="1" i="0">
+              <a:rPr sz="2800" b="1" i="0">
                 <a:solidFill>
                   <a:srgbClr val="1E2761"/>
                 </a:solidFill>
                 <a:latin typeface="Montserrat"/>
               </a:rPr>
-              <a:t>Los papeles que se guardan</a:t>
-            </a:r>
-          </a:p>
-        </p:txBody>
-      </p:sp>
-      <p:sp>
-        <p:nvSpPr>
-          <p:cNvPr id="7" name="TextBox 6"/>
+              <a:t>Reflejos con gas fuera</a:t>
+            </a:r>
+          </a:p>
+        </p:txBody>
+      </p:sp>
+      <p:sp>
+        <p:nvSpPr>
+          <p:cNvPr id="7" name="Rounded Rectangle 6"/>
+          <p:cNvSpPr/>
+          <p:nvPr/>
+        </p:nvSpPr>
+        <p:spPr>
+          <a:xfrm>
+            <a:off x="868680" y="1627632"/>
+            <a:ext cx="2011680" cy="73152"/>
+          </a:xfrm>
+          <a:prstGeom prst="roundRect">
+            <a:avLst/>
+          </a:prstGeom>
+          <a:solidFill>
+            <a:srgbClr val="E8801A"/>
+          </a:solidFill>
+          <a:ln>
+            <a:noFill/>
+          </a:ln>
+          <a:effectLst/>
+        </p:spPr>
+        <p:style>
+          <a:lnRef idx="1">
+            <a:schemeClr val="accent1"/>
+          </a:lnRef>
+          <a:fillRef idx="3">
+            <a:schemeClr val="accent1"/>
+          </a:fillRef>
+          <a:effectRef idx="2">
+            <a:schemeClr val="accent1"/>
+          </a:effectRef>
+          <a:fontRef idx="minor">
+            <a:schemeClr val="lt1"/>
+          </a:fontRef>
+        </p:style>
+        <p:txBody>
+          <a:bodyPr rtlCol="0" anchor="ctr"/>
+          <a:lstStyle/>
+          <a:p>
+            <a:pPr algn="ctr"/>
+          </a:p>
+        </p:txBody>
+      </p:sp>
+      <p:sp>
+        <p:nvSpPr>
+          <p:cNvPr id="8" name="TextBox 7"/>
           <p:cNvSpPr txBox="1"/>
           <p:nvPr/>
         </p:nvSpPr>
         <p:spPr>
           <a:xfrm>
-            <a:off x="822960" y="1920240"/>
+            <a:off x="822960" y="1965960"/>
             <a:ext cx="4983480" cy="4206240"/>
           </a:xfrm>
           <a:prstGeom prst="rect">
@@ -5382,17 +5581,17 @@
           <a:p>
             <a:pPr>
               <a:spcAft>
-                <a:spcPts val="1000"/>
+                <a:spcPts val="1100"/>
               </a:spcAft>
             </a:pPr>
             <a:r>
               <a:rPr sz="1600" b="1" i="0">
                 <a:solidFill>
-                  <a:srgbClr val="2E3A80"/>
-                </a:solidFill>
-                <a:latin typeface="Montserrat"/>
-              </a:rPr>
-              <a:t>•  </a:t>
+                  <a:srgbClr val="E8801A"/>
+                </a:solidFill>
+                <a:latin typeface="Montserrat"/>
+              </a:rPr>
+              <a:t>▸  </a:t>
             </a:r>
             <a:r>
               <a:rPr sz="1600" b="0" i="0">
@@ -5401,23 +5600,23 @@
                 </a:solidFill>
                 <a:latin typeface="Montserrat"/>
               </a:rPr>
-              <a:t>Cartografía siempre actualizada</a:t>
+              <a:t>Al reabrir: purga por los extremos</a:t>
             </a:r>
           </a:p>
           <a:p>
             <a:pPr>
               <a:spcAft>
-                <a:spcPts val="1000"/>
+                <a:spcPts val="1100"/>
               </a:spcAft>
             </a:pPr>
             <a:r>
               <a:rPr sz="1600" b="1" i="0">
                 <a:solidFill>
-                  <a:srgbClr val="2E3A80"/>
-                </a:solidFill>
-                <a:latin typeface="Montserrat"/>
-              </a:rPr>
-              <a:t>•  </a:t>
+                  <a:srgbClr val="E8801A"/>
+                </a:solidFill>
+                <a:latin typeface="Montserrat"/>
+              </a:rPr>
+              <a:t>▸  </a:t>
             </a:r>
             <a:r>
               <a:rPr sz="1600" b="0" i="0">
@@ -5426,23 +5625,23 @@
                 </a:solidFill>
                 <a:latin typeface="Montserrat"/>
               </a:rPr>
-              <a:t>Autorizaciones y proyectos con sus pruebas</a:t>
+              <a:t>Detectar presencia de gas</a:t>
             </a:r>
           </a:p>
           <a:p>
             <a:pPr>
               <a:spcAft>
-                <a:spcPts val="1000"/>
+                <a:spcPts val="1100"/>
               </a:spcAft>
             </a:pPr>
             <a:r>
               <a:rPr sz="1600" b="1" i="0">
                 <a:solidFill>
-                  <a:srgbClr val="2E3A80"/>
-                </a:solidFill>
-                <a:latin typeface="Montserrat"/>
-              </a:rPr>
-              <a:t>•  </a:t>
+                  <a:srgbClr val="E8801A"/>
+                </a:solidFill>
+                <a:latin typeface="Montserrat"/>
+              </a:rPr>
+              <a:t>▸  </a:t>
             </a:r>
             <a:r>
               <a:rPr sz="1600" b="0" i="0">
@@ -5451,23 +5650,23 @@
                 </a:solidFill>
                 <a:latin typeface="Montserrat"/>
               </a:rPr>
-              <a:t>Estanquidad: las dos últimas</a:t>
+              <a:t>Señalizar y controlar la zona</a:t>
             </a:r>
           </a:p>
           <a:p>
             <a:pPr>
               <a:spcAft>
-                <a:spcPts val="1000"/>
+                <a:spcPts val="1100"/>
               </a:spcAft>
             </a:pPr>
             <a:r>
               <a:rPr sz="1600" b="1" i="0">
                 <a:solidFill>
-                  <a:srgbClr val="2E3A80"/>
-                </a:solidFill>
-                <a:latin typeface="Montserrat"/>
-              </a:rPr>
-              <a:t>•  </a:t>
+                  <a:srgbClr val="E8801A"/>
+                </a:solidFill>
+                <a:latin typeface="Montserrat"/>
+              </a:rPr>
+              <a:t>▸  </a:t>
             </a:r>
             <a:r>
               <a:rPr sz="1600" b="0" i="0">
@@ -5476,14 +5675,14 @@
                 </a:solidFill>
                 <a:latin typeface="Montserrat"/>
               </a:rPr>
-              <a:t>Seguridad y emergencias: mínimo 5 años</a:t>
-            </a:r>
-          </a:p>
-        </p:txBody>
-      </p:sp>
-      <p:sp>
-        <p:nvSpPr>
-          <p:cNvPr id="8" name="imgph" descr="IMGQ:archive folders shelves documents office"/>
+              <a:t>Retirar chispas · extintor a mano</a:t>
+            </a:r>
+          </a:p>
+        </p:txBody>
+      </p:sp>
+      <p:sp>
+        <p:nvSpPr>
+          <p:cNvPr id="9" name="imgph" descr="IMGQ:gas works site safety signage cordon street"/>
           <p:cNvSpPr/>
           <p:nvPr/>
         </p:nvSpPr>
@@ -5529,7 +5728,7 @@
       </p:sp>
       <p:sp>
         <p:nvSpPr>
-          <p:cNvPr id="9" name="TextBox 8"/>
+          <p:cNvPr id="10" name="TextBox 9"/>
           <p:cNvSpPr txBox="1"/>
           <p:nvPr/>
         </p:nvSpPr>
@@ -5569,7 +5768,7 @@
                 </a:solidFill>
                 <a:latin typeface="Montserrat"/>
               </a:rPr>
-              <a:t>archive folders shelves documents office</a:t>
+              <a:t>gas works site safety signage cordon street</a:t>
             </a:r>
           </a:p>
         </p:txBody>
@@ -5666,7 +5865,7 @@
                 </a:solidFill>
                 <a:latin typeface="Montserrat"/>
               </a:rPr>
-              <a:t>012 / 015</a:t>
+              <a:t>012 / 016</a:t>
             </a:r>
           </a:p>
         </p:txBody>
@@ -5714,7 +5913,7 @@
         <p:spPr>
           <a:xfrm>
             <a:off x="822960" y="457200"/>
-            <a:ext cx="8229600" cy="365760"/>
+            <a:ext cx="10058400" cy="365760"/>
           </a:xfrm>
           <a:prstGeom prst="rect">
             <a:avLst/>
@@ -5728,13 +5927,13 @@
           <a:lstStyle/>
           <a:p>
             <a:r>
-              <a:rPr sz="1200" b="1" i="0">
-                <a:solidFill>
-                  <a:srgbClr val="64748B"/>
-                </a:solidFill>
-                <a:latin typeface="Montserrat"/>
-              </a:rPr>
-              <a:t>APARTADO 8 · AFECCIONES POR TERCEROS</a:t>
+              <a:rPr sz="1300" b="1" i="0">
+                <a:solidFill>
+                  <a:srgbClr val="E8801A"/>
+                </a:solidFill>
+                <a:latin typeface="Montserrat"/>
+              </a:rPr>
+              <a:t>APARTADO 7 · REGISTRO Y ARCHIVO</a:t>
             </a:r>
           </a:p>
         </p:txBody>
@@ -5762,26 +5961,70 @@
           <a:lstStyle/>
           <a:p>
             <a:r>
-              <a:rPr sz="2700" b="1" i="0">
+              <a:rPr sz="2800" b="1" i="0">
                 <a:solidFill>
                   <a:srgbClr val="1E2761"/>
                 </a:solidFill>
                 <a:latin typeface="Montserrat"/>
               </a:rPr>
-              <a:t>Antes de picar, pregunta</a:t>
-            </a:r>
-          </a:p>
-        </p:txBody>
-      </p:sp>
-      <p:sp>
-        <p:nvSpPr>
-          <p:cNvPr id="7" name="TextBox 6"/>
+              <a:t>Los papeles que se guardan</a:t>
+            </a:r>
+          </a:p>
+        </p:txBody>
+      </p:sp>
+      <p:sp>
+        <p:nvSpPr>
+          <p:cNvPr id="7" name="Rounded Rectangle 6"/>
+          <p:cNvSpPr/>
+          <p:nvPr/>
+        </p:nvSpPr>
+        <p:spPr>
+          <a:xfrm>
+            <a:off x="868680" y="1627632"/>
+            <a:ext cx="2011680" cy="73152"/>
+          </a:xfrm>
+          <a:prstGeom prst="roundRect">
+            <a:avLst/>
+          </a:prstGeom>
+          <a:solidFill>
+            <a:srgbClr val="E8801A"/>
+          </a:solidFill>
+          <a:ln>
+            <a:noFill/>
+          </a:ln>
+          <a:effectLst/>
+        </p:spPr>
+        <p:style>
+          <a:lnRef idx="1">
+            <a:schemeClr val="accent1"/>
+          </a:lnRef>
+          <a:fillRef idx="3">
+            <a:schemeClr val="accent1"/>
+          </a:fillRef>
+          <a:effectRef idx="2">
+            <a:schemeClr val="accent1"/>
+          </a:effectRef>
+          <a:fontRef idx="minor">
+            <a:schemeClr val="lt1"/>
+          </a:fontRef>
+        </p:style>
+        <p:txBody>
+          <a:bodyPr rtlCol="0" anchor="ctr"/>
+          <a:lstStyle/>
+          <a:p>
+            <a:pPr algn="ctr"/>
+          </a:p>
+        </p:txBody>
+      </p:sp>
+      <p:sp>
+        <p:nvSpPr>
+          <p:cNvPr id="8" name="TextBox 7"/>
           <p:cNvSpPr txBox="1"/>
           <p:nvPr/>
         </p:nvSpPr>
         <p:spPr>
           <a:xfrm>
-            <a:off x="822960" y="1920240"/>
+            <a:off x="822960" y="1965960"/>
             <a:ext cx="4983480" cy="4206240"/>
           </a:xfrm>
           <a:prstGeom prst="rect">
@@ -5797,17 +6040,17 @@
           <a:p>
             <a:pPr>
               <a:spcAft>
-                <a:spcPts val="1000"/>
+                <a:spcPts val="1100"/>
               </a:spcAft>
             </a:pPr>
             <a:r>
               <a:rPr sz="1600" b="1" i="0">
                 <a:solidFill>
-                  <a:srgbClr val="2E3A80"/>
-                </a:solidFill>
-                <a:latin typeface="Montserrat"/>
-              </a:rPr>
-              <a:t>•  </a:t>
+                  <a:srgbClr val="E8801A"/>
+                </a:solidFill>
+                <a:latin typeface="Montserrat"/>
+              </a:rPr>
+              <a:t>▸  </a:t>
             </a:r>
             <a:r>
               <a:rPr sz="1600" b="0" i="0">
@@ -5816,23 +6059,23 @@
                 </a:solidFill>
                 <a:latin typeface="Montserrat"/>
               </a:rPr>
-              <a:t>Aviso al distribuidor: 30 días antes</a:t>
+              <a:t>Cartografía siempre actualizada</a:t>
             </a:r>
           </a:p>
           <a:p>
             <a:pPr>
               <a:spcAft>
-                <a:spcPts val="1000"/>
+                <a:spcPts val="1100"/>
               </a:spcAft>
             </a:pPr>
             <a:r>
               <a:rPr sz="1600" b="1" i="0">
                 <a:solidFill>
-                  <a:srgbClr val="2E3A80"/>
-                </a:solidFill>
-                <a:latin typeface="Montserrat"/>
-              </a:rPr>
-              <a:t>•  </a:t>
+                  <a:srgbClr val="E8801A"/>
+                </a:solidFill>
+                <a:latin typeface="Montserrat"/>
+              </a:rPr>
+              <a:t>▸  </a:t>
             </a:r>
             <a:r>
               <a:rPr sz="1600" b="0" i="0">
@@ -5841,23 +6084,23 @@
                 </a:solidFill>
                 <a:latin typeface="Montserrat"/>
               </a:rPr>
-              <a:t>El distribuidor contesta en 20 días</a:t>
+              <a:t>Autorizaciones y proyectos con sus pruebas</a:t>
             </a:r>
           </a:p>
           <a:p>
             <a:pPr>
               <a:spcAft>
-                <a:spcPts val="1000"/>
+                <a:spcPts val="1100"/>
               </a:spcAft>
             </a:pPr>
             <a:r>
               <a:rPr sz="1600" b="1" i="0">
                 <a:solidFill>
-                  <a:srgbClr val="2E3A80"/>
-                </a:solidFill>
-                <a:latin typeface="Montserrat"/>
-              </a:rPr>
-              <a:t>•  </a:t>
+                  <a:srgbClr val="E8801A"/>
+                </a:solidFill>
+                <a:latin typeface="Montserrat"/>
+              </a:rPr>
+              <a:t>▸  </a:t>
             </a:r>
             <a:r>
               <a:rPr sz="1600" b="0" i="0">
@@ -5866,23 +6109,23 @@
                 </a:solidFill>
                 <a:latin typeface="Montserrat"/>
               </a:rPr>
-              <a:t>Inicio de obra: aviso 24 horas antes</a:t>
+              <a:t>Estanquidad: las dos últimas</a:t>
             </a:r>
           </a:p>
           <a:p>
             <a:pPr>
               <a:spcAft>
-                <a:spcPts val="1000"/>
+                <a:spcPts val="1100"/>
               </a:spcAft>
             </a:pPr>
             <a:r>
               <a:rPr sz="1600" b="1" i="0">
                 <a:solidFill>
-                  <a:srgbClr val="2E3A80"/>
-                </a:solidFill>
-                <a:latin typeface="Montserrat"/>
-              </a:rPr>
-              <a:t>•  </a:t>
+                  <a:srgbClr val="E8801A"/>
+                </a:solidFill>
+                <a:latin typeface="Montserrat"/>
+              </a:rPr>
+              <a:t>▸  </a:t>
             </a:r>
             <a:r>
               <a:rPr sz="1600" b="0" i="0">
@@ -5891,14 +6134,14 @@
                 </a:solidFill>
                 <a:latin typeface="Montserrat"/>
               </a:rPr>
-              <a:t>Todo por escrito, con la localización</a:t>
-            </a:r>
-          </a:p>
-        </p:txBody>
-      </p:sp>
-      <p:sp>
-        <p:nvSpPr>
-          <p:cNvPr id="8" name="imgph" descr="IMGQ:road excavation works underground utility pipes"/>
+              <a:t>Seguridad y emergencias: mínimo 5 años</a:t>
+            </a:r>
+          </a:p>
+        </p:txBody>
+      </p:sp>
+      <p:sp>
+        <p:nvSpPr>
+          <p:cNvPr id="9" name="imgph" descr="IMGQ:archive folders shelves documents office"/>
           <p:cNvSpPr/>
           <p:nvPr/>
         </p:nvSpPr>
@@ -5944,7 +6187,7 @@
       </p:sp>
       <p:sp>
         <p:nvSpPr>
-          <p:cNvPr id="9" name="TextBox 8"/>
+          <p:cNvPr id="10" name="TextBox 9"/>
           <p:cNvSpPr txBox="1"/>
           <p:nvPr/>
         </p:nvSpPr>
@@ -5984,7 +6227,7 @@
                 </a:solidFill>
                 <a:latin typeface="Montserrat"/>
               </a:rPr>
-              <a:t>road excavation works underground utility pipes</a:t>
+              <a:t>archive folders shelves documents office</a:t>
             </a:r>
           </a:p>
         </p:txBody>
@@ -6081,7 +6324,7 @@
                 </a:solidFill>
                 <a:latin typeface="Montserrat"/>
               </a:rPr>
-              <a:t>013 / 015</a:t>
+              <a:t>013 / 016</a:t>
             </a:r>
           </a:p>
         </p:txBody>
@@ -6129,7 +6372,7 @@
         <p:spPr>
           <a:xfrm>
             <a:off x="822960" y="457200"/>
-            <a:ext cx="8229600" cy="365760"/>
+            <a:ext cx="10058400" cy="365760"/>
           </a:xfrm>
           <a:prstGeom prst="rect">
             <a:avLst/>
@@ -6143,13 +6386,13 @@
           <a:lstStyle/>
           <a:p>
             <a:r>
-              <a:rPr sz="1200" b="1" i="0">
-                <a:solidFill>
-                  <a:srgbClr val="64748B"/>
-                </a:solidFill>
-                <a:latin typeface="Montserrat"/>
-              </a:rPr>
-              <a:t>APARTADO 8 · QUIÉN DECIDE</a:t>
+              <a:rPr sz="1300" b="1" i="0">
+                <a:solidFill>
+                  <a:srgbClr val="E8801A"/>
+                </a:solidFill>
+                <a:latin typeface="Montserrat"/>
+              </a:rPr>
+              <a:t>APARTADO 8 · AFECCIONES POR TERCEROS</a:t>
             </a:r>
           </a:p>
         </p:txBody>
@@ -6177,26 +6420,70 @@
           <a:lstStyle/>
           <a:p>
             <a:r>
-              <a:rPr sz="2700" b="1" i="0">
+              <a:rPr sz="2800" b="1" i="0">
                 <a:solidFill>
                   <a:srgbClr val="1E2761"/>
                 </a:solidFill>
                 <a:latin typeface="Montserrat"/>
               </a:rPr>
-              <a:t>Si hay pelea, manda la CA</a:t>
-            </a:r>
-          </a:p>
-        </p:txBody>
-      </p:sp>
-      <p:sp>
-        <p:nvSpPr>
-          <p:cNvPr id="7" name="TextBox 6"/>
+              <a:t>Antes de picar, pregunta</a:t>
+            </a:r>
+          </a:p>
+        </p:txBody>
+      </p:sp>
+      <p:sp>
+        <p:nvSpPr>
+          <p:cNvPr id="7" name="Rounded Rectangle 6"/>
+          <p:cNvSpPr/>
+          <p:nvPr/>
+        </p:nvSpPr>
+        <p:spPr>
+          <a:xfrm>
+            <a:off x="868680" y="1627632"/>
+            <a:ext cx="2011680" cy="73152"/>
+          </a:xfrm>
+          <a:prstGeom prst="roundRect">
+            <a:avLst/>
+          </a:prstGeom>
+          <a:solidFill>
+            <a:srgbClr val="E8801A"/>
+          </a:solidFill>
+          <a:ln>
+            <a:noFill/>
+          </a:ln>
+          <a:effectLst/>
+        </p:spPr>
+        <p:style>
+          <a:lnRef idx="1">
+            <a:schemeClr val="accent1"/>
+          </a:lnRef>
+          <a:fillRef idx="3">
+            <a:schemeClr val="accent1"/>
+          </a:fillRef>
+          <a:effectRef idx="2">
+            <a:schemeClr val="accent1"/>
+          </a:effectRef>
+          <a:fontRef idx="minor">
+            <a:schemeClr val="lt1"/>
+          </a:fontRef>
+        </p:style>
+        <p:txBody>
+          <a:bodyPr rtlCol="0" anchor="ctr"/>
+          <a:lstStyle/>
+          <a:p>
+            <a:pPr algn="ctr"/>
+          </a:p>
+        </p:txBody>
+      </p:sp>
+      <p:sp>
+        <p:nvSpPr>
+          <p:cNvPr id="8" name="TextBox 7"/>
           <p:cNvSpPr txBox="1"/>
           <p:nvPr/>
         </p:nvSpPr>
         <p:spPr>
           <a:xfrm>
-            <a:off x="822960" y="1920240"/>
+            <a:off x="822960" y="1965960"/>
             <a:ext cx="4983480" cy="4206240"/>
           </a:xfrm>
           <a:prstGeom prst="rect">
@@ -6212,17 +6499,17 @@
           <a:p>
             <a:pPr>
               <a:spcAft>
-                <a:spcPts val="1000"/>
+                <a:spcPts val="1100"/>
               </a:spcAft>
             </a:pPr>
             <a:r>
               <a:rPr sz="1600" b="1" i="0">
                 <a:solidFill>
-                  <a:srgbClr val="2E3A80"/>
-                </a:solidFill>
-                <a:latin typeface="Montserrat"/>
-              </a:rPr>
-              <a:t>•  </a:t>
+                  <a:srgbClr val="E8801A"/>
+                </a:solidFill>
+                <a:latin typeface="Montserrat"/>
+              </a:rPr>
+              <a:t>▸  </a:t>
             </a:r>
             <a:r>
               <a:rPr sz="1600" b="0" i="0">
@@ -6231,23 +6518,23 @@
                 </a:solidFill>
                 <a:latin typeface="Montserrat"/>
               </a:rPr>
-              <a:t>Afecta al trazado: distribuidor puede negarse</a:t>
+              <a:t>Aviso al distribuidor: 30 días antes</a:t>
             </a:r>
           </a:p>
           <a:p>
             <a:pPr>
               <a:spcAft>
-                <a:spcPts val="1000"/>
+                <a:spcPts val="1100"/>
               </a:spcAft>
             </a:pPr>
             <a:r>
               <a:rPr sz="1600" b="1" i="0">
                 <a:solidFill>
-                  <a:srgbClr val="2E3A80"/>
-                </a:solidFill>
-                <a:latin typeface="Montserrat"/>
-              </a:rPr>
-              <a:t>•  </a:t>
+                  <a:srgbClr val="E8801A"/>
+                </a:solidFill>
+                <a:latin typeface="Montserrat"/>
+              </a:rPr>
+              <a:t>▸  </a:t>
             </a:r>
             <a:r>
               <a:rPr sz="1600" b="0" i="0">
@@ -6256,23 +6543,23 @@
                 </a:solidFill>
                 <a:latin typeface="Montserrat"/>
               </a:rPr>
-              <a:t>Solo por razones técnicas o de seguridad</a:t>
+              <a:t>El distribuidor contesta en 20 días</a:t>
             </a:r>
           </a:p>
           <a:p>
             <a:pPr>
               <a:spcAft>
-                <a:spcPts val="1000"/>
+                <a:spcPts val="1100"/>
               </a:spcAft>
             </a:pPr>
             <a:r>
               <a:rPr sz="1600" b="1" i="0">
                 <a:solidFill>
-                  <a:srgbClr val="2E3A80"/>
-                </a:solidFill>
-                <a:latin typeface="Montserrat"/>
-              </a:rPr>
-              <a:t>•  </a:t>
+                  <a:srgbClr val="E8801A"/>
+                </a:solidFill>
+                <a:latin typeface="Montserrat"/>
+              </a:rPr>
+              <a:t>▸  </a:t>
             </a:r>
             <a:r>
               <a:rPr sz="1600" b="0" i="0">
@@ -6281,23 +6568,23 @@
                 </a:solidFill>
                 <a:latin typeface="Montserrat"/>
               </a:rPr>
-              <a:t>Desacuerdo: resuelve la Comunidad Autónoma</a:t>
+              <a:t>Inicio de obra: aviso 24 horas antes</a:t>
             </a:r>
           </a:p>
           <a:p>
             <a:pPr>
               <a:spcAft>
-                <a:spcPts val="1000"/>
+                <a:spcPts val="1100"/>
               </a:spcAft>
             </a:pPr>
             <a:r>
               <a:rPr sz="1600" b="1" i="0">
                 <a:solidFill>
-                  <a:srgbClr val="2E3A80"/>
-                </a:solidFill>
-                <a:latin typeface="Montserrat"/>
-              </a:rPr>
-              <a:t>•  </a:t>
+                  <a:srgbClr val="E8801A"/>
+                </a:solidFill>
+                <a:latin typeface="Montserrat"/>
+              </a:rPr>
+              <a:t>▸  </a:t>
             </a:r>
             <a:r>
               <a:rPr sz="1600" b="0" i="0">
@@ -6306,14 +6593,14 @@
                 </a:solidFill>
                 <a:latin typeface="Montserrat"/>
               </a:rPr>
-              <a:t>La carga de probar es del solicitante</a:t>
-            </a:r>
-          </a:p>
-        </p:txBody>
-      </p:sp>
-      <p:sp>
-        <p:nvSpPr>
-          <p:cNvPr id="8" name="imgph" descr="IMGQ:two engineers discussing plans construction site"/>
+              <a:t>Todo por escrito, con la localización</a:t>
+            </a:r>
+          </a:p>
+        </p:txBody>
+      </p:sp>
+      <p:sp>
+        <p:nvSpPr>
+          <p:cNvPr id="9" name="imgph" descr="IMGQ:road excavation works underground utility pipes"/>
           <p:cNvSpPr/>
           <p:nvPr/>
         </p:nvSpPr>
@@ -6359,7 +6646,7 @@
       </p:sp>
       <p:sp>
         <p:nvSpPr>
-          <p:cNvPr id="9" name="TextBox 8"/>
+          <p:cNvPr id="10" name="TextBox 9"/>
           <p:cNvSpPr txBox="1"/>
           <p:nvPr/>
         </p:nvSpPr>
@@ -6399,7 +6686,7 @@
                 </a:solidFill>
                 <a:latin typeface="Montserrat"/>
               </a:rPr>
-              <a:t>two engineers discussing plans construction site</a:t>
+              <a:t>road excavation works underground utility pipes</a:t>
             </a:r>
           </a:p>
         </p:txBody>
@@ -6496,7 +6783,7 @@
                 </a:solidFill>
                 <a:latin typeface="Montserrat"/>
               </a:rPr>
-              <a:t>014 / 015</a:t>
+              <a:t>014 / 016</a:t>
             </a:r>
           </a:p>
         </p:txBody>
@@ -6544,7 +6831,7 @@
         <p:spPr>
           <a:xfrm>
             <a:off x="822960" y="457200"/>
-            <a:ext cx="8229600" cy="365760"/>
+            <a:ext cx="10058400" cy="365760"/>
           </a:xfrm>
           <a:prstGeom prst="rect">
             <a:avLst/>
@@ -6558,13 +6845,13 @@
           <a:lstStyle/>
           <a:p>
             <a:r>
-              <a:rPr sz="1200" b="1" i="0">
-                <a:solidFill>
-                  <a:srgbClr val="64748B"/>
-                </a:solidFill>
-                <a:latin typeface="Montserrat"/>
-              </a:rPr>
-              <a:t>REPASO RELÁMPAGO</a:t>
+              <a:rPr sz="1300" b="1" i="0">
+                <a:solidFill>
+                  <a:srgbClr val="E8801A"/>
+                </a:solidFill>
+                <a:latin typeface="Montserrat"/>
+              </a:rPr>
+              <a:t>APARTADO 8 · QUIÉN DECIDE</a:t>
             </a:r>
           </a:p>
         </p:txBody>
@@ -6592,26 +6879,70 @@
           <a:lstStyle/>
           <a:p>
             <a:r>
-              <a:rPr sz="2700" b="1" i="0">
+              <a:rPr sz="2800" b="1" i="0">
                 <a:solidFill>
                   <a:srgbClr val="1E2761"/>
                 </a:solidFill>
                 <a:latin typeface="Montserrat"/>
               </a:rPr>
-              <a:t>Lo que no se te puede olvidar</a:t>
-            </a:r>
-          </a:p>
-        </p:txBody>
-      </p:sp>
-      <p:sp>
-        <p:nvSpPr>
-          <p:cNvPr id="7" name="TextBox 6"/>
+              <a:t>Si hay pelea, manda la CA</a:t>
+            </a:r>
+          </a:p>
+        </p:txBody>
+      </p:sp>
+      <p:sp>
+        <p:nvSpPr>
+          <p:cNvPr id="7" name="Rounded Rectangle 6"/>
+          <p:cNvSpPr/>
+          <p:nvPr/>
+        </p:nvSpPr>
+        <p:spPr>
+          <a:xfrm>
+            <a:off x="868680" y="1627632"/>
+            <a:ext cx="2011680" cy="73152"/>
+          </a:xfrm>
+          <a:prstGeom prst="roundRect">
+            <a:avLst/>
+          </a:prstGeom>
+          <a:solidFill>
+            <a:srgbClr val="E8801A"/>
+          </a:solidFill>
+          <a:ln>
+            <a:noFill/>
+          </a:ln>
+          <a:effectLst/>
+        </p:spPr>
+        <p:style>
+          <a:lnRef idx="1">
+            <a:schemeClr val="accent1"/>
+          </a:lnRef>
+          <a:fillRef idx="3">
+            <a:schemeClr val="accent1"/>
+          </a:fillRef>
+          <a:effectRef idx="2">
+            <a:schemeClr val="accent1"/>
+          </a:effectRef>
+          <a:fontRef idx="minor">
+            <a:schemeClr val="lt1"/>
+          </a:fontRef>
+        </p:style>
+        <p:txBody>
+          <a:bodyPr rtlCol="0" anchor="ctr"/>
+          <a:lstStyle/>
+          <a:p>
+            <a:pPr algn="ctr"/>
+          </a:p>
+        </p:txBody>
+      </p:sp>
+      <p:sp>
+        <p:nvSpPr>
+          <p:cNvPr id="8" name="TextBox 7"/>
           <p:cNvSpPr txBox="1"/>
           <p:nvPr/>
         </p:nvSpPr>
         <p:spPr>
           <a:xfrm>
-            <a:off x="822960" y="1920240"/>
+            <a:off x="822960" y="1965960"/>
             <a:ext cx="4983480" cy="4206240"/>
           </a:xfrm>
           <a:prstGeom prst="rect">
@@ -6627,17 +6958,17 @@
           <a:p>
             <a:pPr>
               <a:spcAft>
-                <a:spcPts val="1000"/>
+                <a:spcPts val="1100"/>
               </a:spcAft>
             </a:pPr>
             <a:r>
               <a:rPr sz="1600" b="1" i="0">
                 <a:solidFill>
-                  <a:srgbClr val="2E3A80"/>
-                </a:solidFill>
-                <a:latin typeface="Montserrat"/>
-              </a:rPr>
-              <a:t>•  </a:t>
+                  <a:srgbClr val="E8801A"/>
+                </a:solidFill>
+                <a:latin typeface="Montserrat"/>
+              </a:rPr>
+              <a:t>▸  </a:t>
             </a:r>
             <a:r>
               <a:rPr sz="1600" b="0" i="0">
@@ -6646,23 +6977,23 @@
                 </a:solidFill>
                 <a:latin typeface="Montserrat"/>
               </a:rPr>
-              <a:t>Dos parámetros: presión y odorizante</a:t>
+              <a:t>Afecta al trazado: distribuidor puede negarse</a:t>
             </a:r>
           </a:p>
           <a:p>
             <a:pPr>
               <a:spcAft>
-                <a:spcPts val="1000"/>
+                <a:spcPts val="1100"/>
               </a:spcAft>
             </a:pPr>
             <a:r>
               <a:rPr sz="1600" b="1" i="0">
                 <a:solidFill>
-                  <a:srgbClr val="2E3A80"/>
-                </a:solidFill>
-                <a:latin typeface="Montserrat"/>
-              </a:rPr>
-              <a:t>•  </a:t>
+                  <a:srgbClr val="E8801A"/>
+                </a:solidFill>
+                <a:latin typeface="Montserrat"/>
+              </a:rPr>
+              <a:t>▸  </a:t>
             </a:r>
             <a:r>
               <a:rPr sz="1600" b="0" i="0">
@@ -6671,23 +7002,23 @@
                 </a:solidFill>
                 <a:latin typeface="Montserrat"/>
               </a:rPr>
-              <a:t>Urgencias: olor, incendio, explosión</a:t>
+              <a:t>Solo por razones técnicas o de seguridad</a:t>
             </a:r>
           </a:p>
           <a:p>
             <a:pPr>
               <a:spcAft>
-                <a:spcPts val="1000"/>
+                <a:spcPts val="1100"/>
               </a:spcAft>
             </a:pPr>
             <a:r>
               <a:rPr sz="1600" b="1" i="0">
                 <a:solidFill>
-                  <a:srgbClr val="2E3A80"/>
-                </a:solidFill>
-                <a:latin typeface="Montserrat"/>
-              </a:rPr>
-              <a:t>•  </a:t>
+                  <a:srgbClr val="E8801A"/>
+                </a:solidFill>
+                <a:latin typeface="Montserrat"/>
+              </a:rPr>
+              <a:t>▸  </a:t>
             </a:r>
             <a:r>
               <a:rPr sz="1600" b="0" i="0">
@@ -6696,23 +7027,23 @@
                 </a:solidFill>
                 <a:latin typeface="Montserrat"/>
               </a:rPr>
-              <a:t>Fugas: urgente, programada, vigilancia</a:t>
+              <a:t>Desacuerdo: resuelve la Comunidad Autónoma</a:t>
             </a:r>
           </a:p>
           <a:p>
             <a:pPr>
               <a:spcAft>
-                <a:spcPts val="1000"/>
+                <a:spcPts val="1100"/>
               </a:spcAft>
             </a:pPr>
             <a:r>
               <a:rPr sz="1600" b="1" i="0">
                 <a:solidFill>
-                  <a:srgbClr val="2E3A80"/>
-                </a:solidFill>
-                <a:latin typeface="Montserrat"/>
-              </a:rPr>
-              <a:t>•  </a:t>
+                  <a:srgbClr val="E8801A"/>
+                </a:solidFill>
+                <a:latin typeface="Montserrat"/>
+              </a:rPr>
+              <a:t>▸  </a:t>
             </a:r>
             <a:r>
               <a:rPr sz="1600" b="0" i="0">
@@ -6721,39 +7052,14 @@
                 </a:solidFill>
                 <a:latin typeface="Montserrat"/>
               </a:rPr>
-              <a:t>Plazos de terceros: 30 · 20 · 24</a:t>
-            </a:r>
-          </a:p>
-          <a:p>
-            <a:pPr>
-              <a:spcAft>
-                <a:spcPts val="1000"/>
-              </a:spcAft>
-            </a:pPr>
-            <a:r>
-              <a:rPr sz="1600" b="1" i="0">
-                <a:solidFill>
-                  <a:srgbClr val="2E3A80"/>
-                </a:solidFill>
-                <a:latin typeface="Montserrat"/>
-              </a:rPr>
-              <a:t>•  </a:t>
-            </a:r>
-            <a:r>
-              <a:rPr sz="1600" b="0" i="0">
-                <a:solidFill>
-                  <a:srgbClr val="1B2330"/>
-                </a:solidFill>
-                <a:latin typeface="Montserrat"/>
-              </a:rPr>
-              <a:t>Archivo: dos últimas y cinco años</a:t>
-            </a:r>
-          </a:p>
-        </p:txBody>
-      </p:sp>
-      <p:sp>
-        <p:nvSpPr>
-          <p:cNvPr id="8" name="imgph" descr="IMGQ:gas cylinder cabinet outdoor building wall"/>
+              <a:t>La carga de probar es del solicitante</a:t>
+            </a:r>
+          </a:p>
+        </p:txBody>
+      </p:sp>
+      <p:sp>
+        <p:nvSpPr>
+          <p:cNvPr id="9" name="imgph" descr="IMGQ:two engineers discussing plans construction site"/>
           <p:cNvSpPr/>
           <p:nvPr/>
         </p:nvSpPr>
@@ -6799,7 +7105,7 @@
       </p:sp>
       <p:sp>
         <p:nvSpPr>
-          <p:cNvPr id="9" name="TextBox 8"/>
+          <p:cNvPr id="10" name="TextBox 9"/>
           <p:cNvSpPr txBox="1"/>
           <p:nvPr/>
         </p:nvSpPr>
@@ -6839,7 +7145,7 @@
                 </a:solidFill>
                 <a:latin typeface="Montserrat"/>
               </a:rPr>
-              <a:t>gas cylinder cabinet outdoor building wall</a:t>
+              <a:t>two engineers discussing plans construction site</a:t>
             </a:r>
           </a:p>
         </p:txBody>
@@ -6877,6 +7183,490 @@
             <a:avLst/>
           </a:prstGeom>
           <a:solidFill>
+            <a:srgbClr val="FFFFFF"/>
+          </a:solidFill>
+          <a:ln>
+            <a:noFill/>
+          </a:ln>
+          <a:effectLst/>
+        </p:spPr>
+        <p:style>
+          <a:lnRef idx="1">
+            <a:schemeClr val="accent1"/>
+          </a:lnRef>
+          <a:fillRef idx="3">
+            <a:schemeClr val="accent1"/>
+          </a:fillRef>
+          <a:effectRef idx="2">
+            <a:schemeClr val="accent1"/>
+          </a:effectRef>
+          <a:fontRef idx="minor">
+            <a:schemeClr val="lt1"/>
+          </a:fontRef>
+        </p:style>
+        <p:txBody>
+          <a:bodyPr rtlCol="0" anchor="ctr"/>
+          <a:lstStyle/>
+          <a:p>
+            <a:pPr algn="ctr"/>
+          </a:p>
+        </p:txBody>
+      </p:sp>
+      <p:sp>
+        <p:nvSpPr>
+          <p:cNvPr id="3" name="TextBox 2"/>
+          <p:cNvSpPr txBox="1"/>
+          <p:nvPr/>
+        </p:nvSpPr>
+        <p:spPr>
+          <a:xfrm>
+            <a:off x="10607040" y="320040"/>
+            <a:ext cx="1371600" cy="365760"/>
+          </a:xfrm>
+          <a:prstGeom prst="rect">
+            <a:avLst/>
+          </a:prstGeom>
+          <a:noFill/>
+        </p:spPr>
+        <p:txBody>
+          <a:bodyPr wrap="square">
+            <a:spAutoFit/>
+          </a:bodyPr>
+          <a:lstStyle/>
+          <a:p>
+            <a:pPr algn="r"/>
+            <a:r>
+              <a:rPr sz="1000" b="1" i="0">
+                <a:solidFill>
+                  <a:srgbClr val="64748B"/>
+                </a:solidFill>
+                <a:latin typeface="Montserrat"/>
+              </a:rPr>
+              <a:t>015 / 016</a:t>
+            </a:r>
+          </a:p>
+        </p:txBody>
+      </p:sp>
+      <p:sp>
+        <p:nvSpPr>
+          <p:cNvPr id="4" name="TextBox 3"/>
+          <p:cNvSpPr txBox="1"/>
+          <p:nvPr/>
+        </p:nvSpPr>
+        <p:spPr>
+          <a:xfrm>
+            <a:off x="457200" y="6419088"/>
+            <a:ext cx="8229600" cy="365760"/>
+          </a:xfrm>
+          <a:prstGeom prst="rect">
+            <a:avLst/>
+          </a:prstGeom>
+          <a:noFill/>
+        </p:spPr>
+        <p:txBody>
+          <a:bodyPr wrap="square">
+            <a:spAutoFit/>
+          </a:bodyPr>
+          <a:lstStyle/>
+          <a:p>
+            <a:r>
+              <a:rPr sz="900" b="0" i="0">
+                <a:solidFill>
+                  <a:srgbClr val="64748B"/>
+                </a:solidFill>
+                <a:latin typeface="Montserrat"/>
+              </a:rPr>
+              <a:t>Curso Gas B · Tema 01 · Distribución por canalización</a:t>
+            </a:r>
+          </a:p>
+        </p:txBody>
+      </p:sp>
+      <p:sp>
+        <p:nvSpPr>
+          <p:cNvPr id="5" name="TextBox 4"/>
+          <p:cNvSpPr txBox="1"/>
+          <p:nvPr/>
+        </p:nvSpPr>
+        <p:spPr>
+          <a:xfrm>
+            <a:off x="822960" y="457200"/>
+            <a:ext cx="10058400" cy="365760"/>
+          </a:xfrm>
+          <a:prstGeom prst="rect">
+            <a:avLst/>
+          </a:prstGeom>
+          <a:noFill/>
+        </p:spPr>
+        <p:txBody>
+          <a:bodyPr wrap="square">
+            <a:spAutoFit/>
+          </a:bodyPr>
+          <a:lstStyle/>
+          <a:p>
+            <a:r>
+              <a:rPr sz="1300" b="1" i="0">
+                <a:solidFill>
+                  <a:srgbClr val="E8801A"/>
+                </a:solidFill>
+                <a:latin typeface="Montserrat"/>
+              </a:rPr>
+              <a:t>REPASO RELÁMPAGO</a:t>
+            </a:r>
+          </a:p>
+        </p:txBody>
+      </p:sp>
+      <p:sp>
+        <p:nvSpPr>
+          <p:cNvPr id="6" name="TextBox 5"/>
+          <p:cNvSpPr txBox="1"/>
+          <p:nvPr/>
+        </p:nvSpPr>
+        <p:spPr>
+          <a:xfrm>
+            <a:off x="822960" y="868680"/>
+            <a:ext cx="10515600" cy="914400"/>
+          </a:xfrm>
+          <a:prstGeom prst="rect">
+            <a:avLst/>
+          </a:prstGeom>
+          <a:noFill/>
+        </p:spPr>
+        <p:txBody>
+          <a:bodyPr wrap="square">
+            <a:spAutoFit/>
+          </a:bodyPr>
+          <a:lstStyle/>
+          <a:p>
+            <a:r>
+              <a:rPr sz="2800" b="1" i="0">
+                <a:solidFill>
+                  <a:srgbClr val="1E2761"/>
+                </a:solidFill>
+                <a:latin typeface="Montserrat"/>
+              </a:rPr>
+              <a:t>Lo que no se te puede olvidar</a:t>
+            </a:r>
+          </a:p>
+        </p:txBody>
+      </p:sp>
+      <p:sp>
+        <p:nvSpPr>
+          <p:cNvPr id="7" name="Rounded Rectangle 6"/>
+          <p:cNvSpPr/>
+          <p:nvPr/>
+        </p:nvSpPr>
+        <p:spPr>
+          <a:xfrm>
+            <a:off x="868680" y="1627632"/>
+            <a:ext cx="2011680" cy="73152"/>
+          </a:xfrm>
+          <a:prstGeom prst="roundRect">
+            <a:avLst/>
+          </a:prstGeom>
+          <a:solidFill>
+            <a:srgbClr val="E8801A"/>
+          </a:solidFill>
+          <a:ln>
+            <a:noFill/>
+          </a:ln>
+          <a:effectLst/>
+        </p:spPr>
+        <p:style>
+          <a:lnRef idx="1">
+            <a:schemeClr val="accent1"/>
+          </a:lnRef>
+          <a:fillRef idx="3">
+            <a:schemeClr val="accent1"/>
+          </a:fillRef>
+          <a:effectRef idx="2">
+            <a:schemeClr val="accent1"/>
+          </a:effectRef>
+          <a:fontRef idx="minor">
+            <a:schemeClr val="lt1"/>
+          </a:fontRef>
+        </p:style>
+        <p:txBody>
+          <a:bodyPr rtlCol="0" anchor="ctr"/>
+          <a:lstStyle/>
+          <a:p>
+            <a:pPr algn="ctr"/>
+          </a:p>
+        </p:txBody>
+      </p:sp>
+      <p:sp>
+        <p:nvSpPr>
+          <p:cNvPr id="8" name="TextBox 7"/>
+          <p:cNvSpPr txBox="1"/>
+          <p:nvPr/>
+        </p:nvSpPr>
+        <p:spPr>
+          <a:xfrm>
+            <a:off x="822960" y="1965960"/>
+            <a:ext cx="4983480" cy="4206240"/>
+          </a:xfrm>
+          <a:prstGeom prst="rect">
+            <a:avLst/>
+          </a:prstGeom>
+          <a:noFill/>
+        </p:spPr>
+        <p:txBody>
+          <a:bodyPr wrap="square">
+            <a:spAutoFit/>
+          </a:bodyPr>
+          <a:lstStyle/>
+          <a:p>
+            <a:pPr>
+              <a:spcAft>
+                <a:spcPts val="1100"/>
+              </a:spcAft>
+            </a:pPr>
+            <a:r>
+              <a:rPr sz="1600" b="1" i="0">
+                <a:solidFill>
+                  <a:srgbClr val="E8801A"/>
+                </a:solidFill>
+                <a:latin typeface="Montserrat"/>
+              </a:rPr>
+              <a:t>▸  </a:t>
+            </a:r>
+            <a:r>
+              <a:rPr sz="1600" b="0" i="0">
+                <a:solidFill>
+                  <a:srgbClr val="1B2330"/>
+                </a:solidFill>
+                <a:latin typeface="Montserrat"/>
+              </a:rPr>
+              <a:t>Dos parámetros: presión y odorizante</a:t>
+            </a:r>
+          </a:p>
+          <a:p>
+            <a:pPr>
+              <a:spcAft>
+                <a:spcPts val="1100"/>
+              </a:spcAft>
+            </a:pPr>
+            <a:r>
+              <a:rPr sz="1600" b="1" i="0">
+                <a:solidFill>
+                  <a:srgbClr val="E8801A"/>
+                </a:solidFill>
+                <a:latin typeface="Montserrat"/>
+              </a:rPr>
+              <a:t>▸  </a:t>
+            </a:r>
+            <a:r>
+              <a:rPr sz="1600" b="0" i="0">
+                <a:solidFill>
+                  <a:srgbClr val="1B2330"/>
+                </a:solidFill>
+                <a:latin typeface="Montserrat"/>
+              </a:rPr>
+              <a:t>Urgencias: olor, incendio, explosión</a:t>
+            </a:r>
+          </a:p>
+          <a:p>
+            <a:pPr>
+              <a:spcAft>
+                <a:spcPts val="1100"/>
+              </a:spcAft>
+            </a:pPr>
+            <a:r>
+              <a:rPr sz="1600" b="1" i="0">
+                <a:solidFill>
+                  <a:srgbClr val="E8801A"/>
+                </a:solidFill>
+                <a:latin typeface="Montserrat"/>
+              </a:rPr>
+              <a:t>▸  </a:t>
+            </a:r>
+            <a:r>
+              <a:rPr sz="1600" b="0" i="0">
+                <a:solidFill>
+                  <a:srgbClr val="1B2330"/>
+                </a:solidFill>
+                <a:latin typeface="Montserrat"/>
+              </a:rPr>
+              <a:t>Fugas: urgente, programada, vigilancia</a:t>
+            </a:r>
+          </a:p>
+          <a:p>
+            <a:pPr>
+              <a:spcAft>
+                <a:spcPts val="1100"/>
+              </a:spcAft>
+            </a:pPr>
+            <a:r>
+              <a:rPr sz="1600" b="1" i="0">
+                <a:solidFill>
+                  <a:srgbClr val="E8801A"/>
+                </a:solidFill>
+                <a:latin typeface="Montserrat"/>
+              </a:rPr>
+              <a:t>▸  </a:t>
+            </a:r>
+            <a:r>
+              <a:rPr sz="1600" b="0" i="0">
+                <a:solidFill>
+                  <a:srgbClr val="1B2330"/>
+                </a:solidFill>
+                <a:latin typeface="Montserrat"/>
+              </a:rPr>
+              <a:t>Plazos de terceros: 30 · 20 · 24</a:t>
+            </a:r>
+          </a:p>
+          <a:p>
+            <a:pPr>
+              <a:spcAft>
+                <a:spcPts val="1100"/>
+              </a:spcAft>
+            </a:pPr>
+            <a:r>
+              <a:rPr sz="1600" b="1" i="0">
+                <a:solidFill>
+                  <a:srgbClr val="E8801A"/>
+                </a:solidFill>
+                <a:latin typeface="Montserrat"/>
+              </a:rPr>
+              <a:t>▸  </a:t>
+            </a:r>
+            <a:r>
+              <a:rPr sz="1600" b="0" i="0">
+                <a:solidFill>
+                  <a:srgbClr val="1B2330"/>
+                </a:solidFill>
+                <a:latin typeface="Montserrat"/>
+              </a:rPr>
+              <a:t>Archivo: dos últimas y cinco años</a:t>
+            </a:r>
+          </a:p>
+        </p:txBody>
+      </p:sp>
+      <p:sp>
+        <p:nvSpPr>
+          <p:cNvPr id="9" name="imgph" descr="IMGQ:gas cylinder cabinet outdoor building wall"/>
+          <p:cNvSpPr/>
+          <p:nvPr/>
+        </p:nvSpPr>
+        <p:spPr>
+          <a:xfrm>
+            <a:off x="5806440" y="1051560"/>
+            <a:ext cx="5298947" cy="4629150"/>
+          </a:xfrm>
+          <a:prstGeom prst="roundRect">
+            <a:avLst/>
+          </a:prstGeom>
+          <a:solidFill>
+            <a:srgbClr val="F3F6FB"/>
+          </a:solidFill>
+          <a:ln w="12700">
+            <a:solidFill>
+              <a:srgbClr val="C7D2E6"/>
+            </a:solidFill>
+          </a:ln>
+          <a:effectLst/>
+        </p:spPr>
+        <p:style>
+          <a:lnRef idx="1">
+            <a:schemeClr val="accent1"/>
+          </a:lnRef>
+          <a:fillRef idx="3">
+            <a:schemeClr val="accent1"/>
+          </a:fillRef>
+          <a:effectRef idx="2">
+            <a:schemeClr val="accent1"/>
+          </a:effectRef>
+          <a:fontRef idx="minor">
+            <a:schemeClr val="lt1"/>
+          </a:fontRef>
+        </p:style>
+        <p:txBody>
+          <a:bodyPr rtlCol="0" anchor="ctr"/>
+          <a:lstStyle/>
+          <a:p>
+            <a:pPr algn="ctr"/>
+          </a:p>
+        </p:txBody>
+      </p:sp>
+      <p:sp>
+        <p:nvSpPr>
+          <p:cNvPr id="10" name="TextBox 9"/>
+          <p:cNvSpPr txBox="1"/>
+          <p:nvPr/>
+        </p:nvSpPr>
+        <p:spPr>
+          <a:xfrm>
+            <a:off x="6080760" y="2726055"/>
+            <a:ext cx="4750307" cy="1280160"/>
+          </a:xfrm>
+          <a:prstGeom prst="rect">
+            <a:avLst/>
+          </a:prstGeom>
+          <a:noFill/>
+        </p:spPr>
+        <p:txBody>
+          <a:bodyPr wrap="square">
+            <a:spAutoFit/>
+          </a:bodyPr>
+          <a:lstStyle/>
+          <a:p>
+            <a:pPr algn="ctr"/>
+            <a:r>
+              <a:rPr sz="1400" b="1" i="0">
+                <a:solidFill>
+                  <a:srgbClr val="64748B"/>
+                </a:solidFill>
+                <a:latin typeface="Montserrat"/>
+              </a:rPr>
+              <a:t>IMAGEN REALISTA</a:t>
+            </a:r>
+          </a:p>
+          <a:p>
+            <a:pPr algn="ctr"/>
+            <a:r>
+              <a:rPr sz="1100" b="0" i="1">
+                <a:solidFill>
+                  <a:srgbClr val="64748B"/>
+                </a:solidFill>
+                <a:latin typeface="Montserrat"/>
+              </a:rPr>
+              <a:t>gas cylinder cabinet outdoor building wall</a:t>
+            </a:r>
+          </a:p>
+        </p:txBody>
+      </p:sp>
+    </p:spTree>
+  </p:cSld>
+  <p:clrMapOvr>
+    <a:masterClrMapping/>
+  </p:clrMapOvr>
+</p:sld>
+</file>
+
+<file path=ppt/slides/slide16.xml><?xml version="1.0" encoding="utf-8"?>
+<p:sld xmlns:a="http://schemas.openxmlformats.org/drawingml/2006/main" xmlns:p="http://schemas.openxmlformats.org/presentationml/2006/main" xmlns:r="http://schemas.openxmlformats.org/officeDocument/2006/relationships">
+  <p:cSld>
+    <p:spTree>
+      <p:nvGrpSpPr>
+        <p:cNvPr id="1" name=""/>
+        <p:cNvGrpSpPr/>
+        <p:nvPr/>
+      </p:nvGrpSpPr>
+      <p:grpSpPr/>
+      <p:sp>
+        <p:nvSpPr>
+          <p:cNvPr id="2" name="Rectangle 1"/>
+          <p:cNvSpPr/>
+          <p:nvPr/>
+        </p:nvSpPr>
+        <p:spPr>
+          <a:xfrm>
+            <a:off x="0" y="0"/>
+            <a:ext cx="12191695" cy="6858000"/>
+          </a:xfrm>
+          <a:prstGeom prst="rect">
+            <a:avLst/>
+          </a:prstGeom>
+          <a:solidFill>
             <a:srgbClr val="1E2761"/>
           </a:solidFill>
           <a:ln>
@@ -6931,7 +7721,7 @@
             <a:r>
               <a:rPr sz="1400" b="1" i="0">
                 <a:solidFill>
-                  <a:srgbClr val="CADCFC"/>
+                  <a:srgbClr val="F4A24C"/>
                 </a:solidFill>
                 <a:latin typeface="Montserrat"/>
               </a:rPr>
@@ -6942,13 +7732,57 @@
       </p:sp>
       <p:sp>
         <p:nvSpPr>
-          <p:cNvPr id="4" name="TextBox 3"/>
+          <p:cNvPr id="4" name="Rounded Rectangle 3"/>
+          <p:cNvSpPr/>
+          <p:nvPr/>
+        </p:nvSpPr>
+        <p:spPr>
+          <a:xfrm>
+            <a:off x="868680" y="1051560"/>
+            <a:ext cx="1463040" cy="82296"/>
+          </a:xfrm>
+          <a:prstGeom prst="roundRect">
+            <a:avLst/>
+          </a:prstGeom>
+          <a:solidFill>
+            <a:srgbClr val="E8801A"/>
+          </a:solidFill>
+          <a:ln>
+            <a:noFill/>
+          </a:ln>
+          <a:effectLst/>
+        </p:spPr>
+        <p:style>
+          <a:lnRef idx="1">
+            <a:schemeClr val="accent1"/>
+          </a:lnRef>
+          <a:fillRef idx="3">
+            <a:schemeClr val="accent1"/>
+          </a:fillRef>
+          <a:effectRef idx="2">
+            <a:schemeClr val="accent1"/>
+          </a:effectRef>
+          <a:fontRef idx="minor">
+            <a:schemeClr val="lt1"/>
+          </a:fontRef>
+        </p:style>
+        <p:txBody>
+          <a:bodyPr rtlCol="0" anchor="ctr"/>
+          <a:lstStyle/>
+          <a:p>
+            <a:pPr algn="ctr"/>
+          </a:p>
+        </p:txBody>
+      </p:sp>
+      <p:sp>
+        <p:nvSpPr>
+          <p:cNvPr id="5" name="TextBox 4"/>
           <p:cNvSpPr txBox="1"/>
           <p:nvPr/>
         </p:nvSpPr>
         <p:spPr>
           <a:xfrm>
-            <a:off x="822960" y="1143000"/>
+            <a:off x="822960" y="1234440"/>
             <a:ext cx="10515600" cy="1097280"/>
           </a:xfrm>
           <a:prstGeom prst="rect">
@@ -6976,14 +7810,14 @@
       </p:sp>
       <p:sp>
         <p:nvSpPr>
-          <p:cNvPr id="5" name="TextBox 4"/>
+          <p:cNvPr id="6" name="TextBox 5"/>
           <p:cNvSpPr txBox="1"/>
           <p:nvPr/>
         </p:nvSpPr>
         <p:spPr>
           <a:xfrm>
-            <a:off x="822960" y="2514600"/>
-            <a:ext cx="10515600" cy="2834640"/>
+            <a:off x="822960" y="2606040"/>
+            <a:ext cx="10515600" cy="2743200"/>
           </a:xfrm>
           <a:prstGeom prst="rect">
             <a:avLst/>
@@ -7004,7 +7838,7 @@
             <a:r>
               <a:rPr sz="2000" b="1" i="0">
                 <a:solidFill>
-                  <a:srgbClr val="CADCFC"/>
+                  <a:srgbClr val="F4A24C"/>
                 </a:solidFill>
                 <a:latin typeface="Montserrat"/>
               </a:rPr>
@@ -7029,7 +7863,7 @@
             <a:r>
               <a:rPr sz="2000" b="1" i="0">
                 <a:solidFill>
-                  <a:srgbClr val="CADCFC"/>
+                  <a:srgbClr val="F4A24C"/>
                 </a:solidFill>
                 <a:latin typeface="Montserrat"/>
               </a:rPr>
@@ -7054,7 +7888,7 @@
             <a:r>
               <a:rPr sz="2000" b="1" i="0">
                 <a:solidFill>
-                  <a:srgbClr val="CADCFC"/>
+                  <a:srgbClr val="F4A24C"/>
                 </a:solidFill>
                 <a:latin typeface="Montserrat"/>
               </a:rPr>
@@ -7079,7 +7913,7 @@
             <a:r>
               <a:rPr sz="2000" b="1" i="0">
                 <a:solidFill>
-                  <a:srgbClr val="CADCFC"/>
+                  <a:srgbClr val="F4A24C"/>
                 </a:solidFill>
                 <a:latin typeface="Montserrat"/>
               </a:rPr>
@@ -7099,20 +7933,20 @@
       </p:sp>
       <p:sp>
         <p:nvSpPr>
-          <p:cNvPr id="6" name="Rounded Rectangle 5"/>
+          <p:cNvPr id="7" name="Rounded Rectangle 6"/>
           <p:cNvSpPr/>
           <p:nvPr/>
         </p:nvSpPr>
         <p:spPr>
           <a:xfrm>
             <a:off x="822960" y="5532120"/>
-            <a:ext cx="10515600" cy="777240"/>
+            <a:ext cx="10515600" cy="822960"/>
           </a:xfrm>
           <a:prstGeom prst="roundRect">
             <a:avLst/>
           </a:prstGeom>
           <a:solidFill>
-            <a:srgbClr val="2E3A80"/>
+            <a:srgbClr val="E8801A"/>
           </a:solidFill>
           <a:ln>
             <a:noFill/>
@@ -7143,13 +7977,13 @@
       </p:sp>
       <p:sp>
         <p:nvSpPr>
-          <p:cNvPr id="7" name="TextBox 6"/>
+          <p:cNvPr id="8" name="TextBox 7"/>
           <p:cNvSpPr txBox="1"/>
           <p:nvPr/>
         </p:nvSpPr>
         <p:spPr>
           <a:xfrm>
-            <a:off x="1051560" y="5605272"/>
+            <a:off x="1051560" y="5623560"/>
             <a:ext cx="10058400" cy="640080"/>
           </a:xfrm>
           <a:prstGeom prst="rect">
@@ -7166,7 +8000,7 @@
             <a:r>
               <a:rPr sz="1500" b="1" i="1">
                 <a:solidFill>
-                  <a:srgbClr val="CADCFC"/>
+                  <a:srgbClr val="1E2761"/>
                 </a:solidFill>
                 <a:latin typeface="Montserrat"/>
               </a:rPr>
@@ -7267,7 +8101,7 @@
                 </a:solidFill>
                 <a:latin typeface="Montserrat"/>
               </a:rPr>
-              <a:t>002 / 015</a:t>
+              <a:t>002 / 016</a:t>
             </a:r>
           </a:p>
         </p:txBody>
@@ -7331,7 +8165,7 @@
             <a:r>
               <a:rPr sz="2700" b="1" i="0">
                 <a:solidFill>
-                  <a:srgbClr val="1E2761"/>
+                  <a:srgbClr val="E8801A"/>
                 </a:solidFill>
                 <a:latin typeface="Montserrat"/>
               </a:rPr>
@@ -7343,6 +8177,50 @@
       <p:sp>
         <p:nvSpPr>
           <p:cNvPr id="6" name="Rounded Rectangle 5"/>
+          <p:cNvSpPr/>
+          <p:nvPr/>
+        </p:nvSpPr>
+        <p:spPr>
+          <a:xfrm>
+            <a:off x="868680" y="1234440"/>
+            <a:ext cx="1463040" cy="73152"/>
+          </a:xfrm>
+          <a:prstGeom prst="roundRect">
+            <a:avLst/>
+          </a:prstGeom>
+          <a:solidFill>
+            <a:srgbClr val="1E2761"/>
+          </a:solidFill>
+          <a:ln>
+            <a:noFill/>
+          </a:ln>
+          <a:effectLst/>
+        </p:spPr>
+        <p:style>
+          <a:lnRef idx="1">
+            <a:schemeClr val="accent1"/>
+          </a:lnRef>
+          <a:fillRef idx="3">
+            <a:schemeClr val="accent1"/>
+          </a:fillRef>
+          <a:effectRef idx="2">
+            <a:schemeClr val="accent1"/>
+          </a:effectRef>
+          <a:fontRef idx="minor">
+            <a:schemeClr val="lt1"/>
+          </a:fontRef>
+        </p:style>
+        <p:txBody>
+          <a:bodyPr rtlCol="0" anchor="ctr"/>
+          <a:lstStyle/>
+          <a:p>
+            <a:pPr algn="ctr"/>
+          </a:p>
+        </p:txBody>
+      </p:sp>
+      <p:sp>
+        <p:nvSpPr>
+          <p:cNvPr id="7" name="Rounded Rectangle 6"/>
           <p:cNvSpPr/>
           <p:nvPr/>
         </p:nvSpPr>
@@ -7388,7 +8266,7 @@
       </p:sp>
       <p:sp>
         <p:nvSpPr>
-          <p:cNvPr id="7" name="TextBox 6"/>
+          <p:cNvPr id="8" name="TextBox 7"/>
           <p:cNvSpPr txBox="1"/>
           <p:nvPr/>
         </p:nvSpPr>
@@ -7423,7 +8301,7 @@
       </p:sp>
       <p:sp>
         <p:nvSpPr>
-          <p:cNvPr id="8" name="TextBox 7"/>
+          <p:cNvPr id="9" name="TextBox 8"/>
           <p:cNvSpPr txBox="1"/>
           <p:nvPr/>
         </p:nvSpPr>
@@ -7458,7 +8336,7 @@
       </p:sp>
       <p:sp>
         <p:nvSpPr>
-          <p:cNvPr id="9" name="Rounded Rectangle 8"/>
+          <p:cNvPr id="10" name="Rounded Rectangle 9"/>
           <p:cNvSpPr/>
           <p:nvPr/>
         </p:nvSpPr>
@@ -7504,7 +8382,7 @@
       </p:sp>
       <p:sp>
         <p:nvSpPr>
-          <p:cNvPr id="10" name="TextBox 9"/>
+          <p:cNvPr id="11" name="TextBox 10"/>
           <p:cNvSpPr txBox="1"/>
           <p:nvPr/>
         </p:nvSpPr>
@@ -7539,7 +8417,7 @@
       </p:sp>
       <p:sp>
         <p:nvSpPr>
-          <p:cNvPr id="11" name="TextBox 10"/>
+          <p:cNvPr id="12" name="TextBox 11"/>
           <p:cNvSpPr txBox="1"/>
           <p:nvPr/>
         </p:nvSpPr>
@@ -7574,7 +8452,7 @@
       </p:sp>
       <p:sp>
         <p:nvSpPr>
-          <p:cNvPr id="12" name="Rounded Rectangle 11"/>
+          <p:cNvPr id="13" name="Rounded Rectangle 12"/>
           <p:cNvSpPr/>
           <p:nvPr/>
         </p:nvSpPr>
@@ -7620,7 +8498,7 @@
       </p:sp>
       <p:sp>
         <p:nvSpPr>
-          <p:cNvPr id="13" name="TextBox 12"/>
+          <p:cNvPr id="14" name="TextBox 13"/>
           <p:cNvSpPr txBox="1"/>
           <p:nvPr/>
         </p:nvSpPr>
@@ -7655,7 +8533,7 @@
       </p:sp>
       <p:sp>
         <p:nvSpPr>
-          <p:cNvPr id="14" name="TextBox 13"/>
+          <p:cNvPr id="15" name="TextBox 14"/>
           <p:cNvSpPr txBox="1"/>
           <p:nvPr/>
         </p:nvSpPr>
@@ -7780,7 +8658,7 @@
                 </a:solidFill>
                 <a:latin typeface="Montserrat"/>
               </a:rPr>
-              <a:t>003 / 015</a:t>
+              <a:t>003 / 016</a:t>
             </a:r>
           </a:p>
         </p:txBody>
@@ -7827,7 +8705,7 @@
         </p:nvSpPr>
         <p:spPr>
           <a:xfrm>
-            <a:off x="822960" y="457200"/>
+            <a:off x="822960" y="502920"/>
             <a:ext cx="8229600" cy="365760"/>
           </a:xfrm>
           <a:prstGeom prst="rect">
@@ -7842,13 +8720,13 @@
           <a:lstStyle/>
           <a:p>
             <a:r>
-              <a:rPr sz="1200" b="1" i="0">
-                <a:solidFill>
-                  <a:srgbClr val="64748B"/>
-                </a:solidFill>
-                <a:latin typeface="Montserrat"/>
-              </a:rPr>
-              <a:t>APARTADO 6 · OPERACIÓN Y MANTENIMIENTO</a:t>
+              <a:rPr sz="1300" b="1" i="0">
+                <a:solidFill>
+                  <a:srgbClr val="E8801A"/>
+                </a:solidFill>
+                <a:latin typeface="Montserrat"/>
+              </a:rPr>
+              <a:t>PARTES DE ESTE VÍDEO</a:t>
             </a:r>
           </a:p>
         </p:txBody>
@@ -7861,7 +8739,7 @@
         </p:nvSpPr>
         <p:spPr>
           <a:xfrm>
-            <a:off x="822960" y="868680"/>
+            <a:off x="822960" y="914400"/>
             <a:ext cx="10515600" cy="914400"/>
           </a:xfrm>
           <a:prstGeom prst="rect">
@@ -7882,155 +8760,30 @@
                 </a:solidFill>
                 <a:latin typeface="Montserrat"/>
               </a:rPr>
-              <a:t>Operar y mantener la red</a:t>
-            </a:r>
-          </a:p>
-        </p:txBody>
-      </p:sp>
-      <p:sp>
-        <p:nvSpPr>
-          <p:cNvPr id="7" name="TextBox 6"/>
-          <p:cNvSpPr txBox="1"/>
-          <p:nvPr/>
-        </p:nvSpPr>
-        <p:spPr>
-          <a:xfrm>
-            <a:off x="822960" y="1920240"/>
-            <a:ext cx="4983480" cy="4206240"/>
-          </a:xfrm>
-          <a:prstGeom prst="rect">
-            <a:avLst/>
-          </a:prstGeom>
-          <a:noFill/>
-        </p:spPr>
-        <p:txBody>
-          <a:bodyPr wrap="square">
-            <a:spAutoFit/>
-          </a:bodyPr>
-          <a:lstStyle/>
-          <a:p>
-            <a:pPr>
-              <a:spcAft>
-                <a:spcPts val="1000"/>
-              </a:spcAft>
-            </a:pPr>
-            <a:r>
-              <a:rPr sz="1600" b="1" i="0">
-                <a:solidFill>
-                  <a:srgbClr val="2E3A80"/>
-                </a:solidFill>
-                <a:latin typeface="Montserrat"/>
-              </a:rPr>
-              <a:t>•  </a:t>
-            </a:r>
-            <a:r>
-              <a:rPr sz="1600" b="0" i="0">
-                <a:solidFill>
-                  <a:srgbClr val="1B2330"/>
-                </a:solidFill>
-                <a:latin typeface="Montserrat"/>
-              </a:rPr>
-              <a:t>Criterio de fondo: seguridad pública</a:t>
-            </a:r>
-          </a:p>
-          <a:p>
-            <a:pPr>
-              <a:spcAft>
-                <a:spcPts val="1000"/>
-              </a:spcAft>
-            </a:pPr>
-            <a:r>
-              <a:rPr sz="1600" b="1" i="0">
-                <a:solidFill>
-                  <a:srgbClr val="2E3A80"/>
-                </a:solidFill>
-                <a:latin typeface="Montserrat"/>
-              </a:rPr>
-              <a:t>•  </a:t>
-            </a:r>
-            <a:r>
-              <a:rPr sz="1600" b="0" i="0">
-                <a:solidFill>
-                  <a:srgbClr val="1B2330"/>
-                </a:solidFill>
-                <a:latin typeface="Montserrat"/>
-              </a:rPr>
-              <a:t>Responsabilidad del titular</a:t>
-            </a:r>
-          </a:p>
-          <a:p>
-            <a:pPr>
-              <a:spcAft>
-                <a:spcPts val="1000"/>
-              </a:spcAft>
-            </a:pPr>
-            <a:r>
-              <a:rPr sz="1600" b="1" i="0">
-                <a:solidFill>
-                  <a:srgbClr val="2E3A80"/>
-                </a:solidFill>
-                <a:latin typeface="Montserrat"/>
-              </a:rPr>
-              <a:t>•  </a:t>
-            </a:r>
-            <a:r>
-              <a:rPr sz="1600" b="0" i="0">
-                <a:solidFill>
-                  <a:srgbClr val="1B2330"/>
-                </a:solidFill>
-                <a:latin typeface="Montserrat"/>
-              </a:rPr>
-              <a:t>Personal cualificado, propio o ajeno</a:t>
-            </a:r>
-          </a:p>
-          <a:p>
-            <a:pPr>
-              <a:spcAft>
-                <a:spcPts val="1000"/>
-              </a:spcAft>
-            </a:pPr>
-            <a:r>
-              <a:rPr sz="1600" b="1" i="0">
-                <a:solidFill>
-                  <a:srgbClr val="2E3A80"/>
-                </a:solidFill>
-                <a:latin typeface="Montserrat"/>
-              </a:rPr>
-              <a:t>•  </a:t>
-            </a:r>
-            <a:r>
-              <a:rPr sz="1600" b="0" i="0">
-                <a:solidFill>
-                  <a:srgbClr val="1B2330"/>
-                </a:solidFill>
-                <a:latin typeface="Montserrat"/>
-              </a:rPr>
-              <a:t>Procedimientos: al Ministerio y a la CA</a:t>
-            </a:r>
-          </a:p>
-        </p:txBody>
-      </p:sp>
-      <p:sp>
-        <p:nvSpPr>
-          <p:cNvPr id="8" name="imgph" descr="IMGQ:gas control room operators monitors screens"/>
+              <a:t>En este vídeo</a:t>
+            </a:r>
+          </a:p>
+        </p:txBody>
+      </p:sp>
+      <p:sp>
+        <p:nvSpPr>
+          <p:cNvPr id="7" name="Rounded Rectangle 6"/>
           <p:cNvSpPr/>
           <p:nvPr/>
         </p:nvSpPr>
         <p:spPr>
           <a:xfrm>
-            <a:off x="5806440" y="1051560"/>
-            <a:ext cx="5298947" cy="4629150"/>
+            <a:off x="868680" y="1673352"/>
+            <a:ext cx="2011680" cy="73152"/>
           </a:xfrm>
           <a:prstGeom prst="roundRect">
             <a:avLst/>
           </a:prstGeom>
           <a:solidFill>
-            <a:srgbClr val="F3F6FB"/>
+            <a:srgbClr val="E8801A"/>
           </a:solidFill>
-          <a:ln w="12700">
-            <a:solidFill>
-              <a:srgbClr val="C7D2E6"/>
-            </a:solidFill>
+          <a:ln>
+            <a:noFill/>
           </a:ln>
           <a:effectLst/>
         </p:spPr>
@@ -8058,14 +8811,14 @@
       </p:sp>
       <p:sp>
         <p:nvSpPr>
-          <p:cNvPr id="9" name="TextBox 8"/>
+          <p:cNvPr id="8" name="TextBox 7"/>
           <p:cNvSpPr txBox="1"/>
           <p:nvPr/>
         </p:nvSpPr>
         <p:spPr>
           <a:xfrm>
-            <a:off x="6080760" y="2726055"/>
-            <a:ext cx="4750307" cy="1280160"/>
+            <a:off x="822960" y="2103120"/>
+            <a:ext cx="10515600" cy="4023360"/>
           </a:xfrm>
           <a:prstGeom prst="rect">
             <a:avLst/>
@@ -8078,27 +8831,203 @@
           </a:bodyPr>
           <a:lstStyle/>
           <a:p>
-            <a:pPr algn="ctr"/>
-            <a:r>
-              <a:rPr sz="1400" b="1" i="0">
-                <a:solidFill>
-                  <a:srgbClr val="64748B"/>
-                </a:solidFill>
-                <a:latin typeface="Montserrat"/>
-              </a:rPr>
-              <a:t>IMAGEN REALISTA</a:t>
-            </a:r>
-          </a:p>
-          <a:p>
-            <a:pPr algn="ctr"/>
-            <a:r>
-              <a:rPr sz="1100" b="0" i="1">
-                <a:solidFill>
-                  <a:srgbClr val="64748B"/>
-                </a:solidFill>
-                <a:latin typeface="Montserrat"/>
-              </a:rPr>
-              <a:t>gas control room operators monitors screens</a:t>
+            <a:pPr>
+              <a:spcAft>
+                <a:spcPts val="900"/>
+              </a:spcAft>
+            </a:pPr>
+            <a:r>
+              <a:rPr sz="1800" b="1" i="0">
+                <a:solidFill>
+                  <a:srgbClr val="E8801A"/>
+                </a:solidFill>
+                <a:latin typeface="Montserrat"/>
+              </a:rPr>
+              <a:t>01   </a:t>
+            </a:r>
+            <a:r>
+              <a:rPr sz="1700" b="0" i="0">
+                <a:solidFill>
+                  <a:srgbClr val="1B2330"/>
+                </a:solidFill>
+                <a:latin typeface="Montserrat"/>
+              </a:rPr>
+              <a:t>Apartado 6</a:t>
+            </a:r>
+          </a:p>
+          <a:p>
+            <a:pPr>
+              <a:spcAft>
+                <a:spcPts val="900"/>
+              </a:spcAft>
+            </a:pPr>
+            <a:r>
+              <a:rPr sz="1800" b="1" i="0">
+                <a:solidFill>
+                  <a:srgbClr val="E8801A"/>
+                </a:solidFill>
+                <a:latin typeface="Montserrat"/>
+              </a:rPr>
+              <a:t>02   </a:t>
+            </a:r>
+            <a:r>
+              <a:rPr sz="1700" b="0" i="0">
+                <a:solidFill>
+                  <a:srgbClr val="1B2330"/>
+                </a:solidFill>
+                <a:latin typeface="Montserrat"/>
+              </a:rPr>
+              <a:t>Apartado 6.1</a:t>
+            </a:r>
+          </a:p>
+          <a:p>
+            <a:pPr>
+              <a:spcAft>
+                <a:spcPts val="900"/>
+              </a:spcAft>
+            </a:pPr>
+            <a:r>
+              <a:rPr sz="1800" b="1" i="0">
+                <a:solidFill>
+                  <a:srgbClr val="E8801A"/>
+                </a:solidFill>
+                <a:latin typeface="Montserrat"/>
+              </a:rPr>
+              <a:t>03   </a:t>
+            </a:r>
+            <a:r>
+              <a:rPr sz="1700" b="0" i="0">
+                <a:solidFill>
+                  <a:srgbClr val="1B2330"/>
+                </a:solidFill>
+                <a:latin typeface="Montserrat"/>
+              </a:rPr>
+              <a:t>Apartado 6.2</a:t>
+            </a:r>
+          </a:p>
+          <a:p>
+            <a:pPr>
+              <a:spcAft>
+                <a:spcPts val="900"/>
+              </a:spcAft>
+            </a:pPr>
+            <a:r>
+              <a:rPr sz="1800" b="1" i="0">
+                <a:solidFill>
+                  <a:srgbClr val="E8801A"/>
+                </a:solidFill>
+                <a:latin typeface="Montserrat"/>
+              </a:rPr>
+              <a:t>04   </a:t>
+            </a:r>
+            <a:r>
+              <a:rPr sz="1700" b="0" i="0">
+                <a:solidFill>
+                  <a:srgbClr val="1B2330"/>
+                </a:solidFill>
+                <a:latin typeface="Montserrat"/>
+              </a:rPr>
+              <a:t>Apartado 6.3</a:t>
+            </a:r>
+          </a:p>
+          <a:p>
+            <a:pPr>
+              <a:spcAft>
+                <a:spcPts val="900"/>
+              </a:spcAft>
+            </a:pPr>
+            <a:r>
+              <a:rPr sz="1800" b="1" i="0">
+                <a:solidFill>
+                  <a:srgbClr val="E8801A"/>
+                </a:solidFill>
+                <a:latin typeface="Montserrat"/>
+              </a:rPr>
+              <a:t>05   </a:t>
+            </a:r>
+            <a:r>
+              <a:rPr sz="1700" b="0" i="0">
+                <a:solidFill>
+                  <a:srgbClr val="1B2330"/>
+                </a:solidFill>
+                <a:latin typeface="Montserrat"/>
+              </a:rPr>
+              <a:t>Apartado 6.4</a:t>
+            </a:r>
+          </a:p>
+          <a:p>
+            <a:pPr>
+              <a:spcAft>
+                <a:spcPts val="900"/>
+              </a:spcAft>
+            </a:pPr>
+            <a:r>
+              <a:rPr sz="1800" b="1" i="0">
+                <a:solidFill>
+                  <a:srgbClr val="E8801A"/>
+                </a:solidFill>
+                <a:latin typeface="Montserrat"/>
+              </a:rPr>
+              <a:t>06   </a:t>
+            </a:r>
+            <a:r>
+              <a:rPr sz="1700" b="0" i="0">
+                <a:solidFill>
+                  <a:srgbClr val="1B2330"/>
+                </a:solidFill>
+                <a:latin typeface="Montserrat"/>
+              </a:rPr>
+              <a:t>Apartado 7</a:t>
+            </a:r>
+          </a:p>
+          <a:p>
+            <a:pPr>
+              <a:spcAft>
+                <a:spcPts val="900"/>
+              </a:spcAft>
+            </a:pPr>
+            <a:r>
+              <a:rPr sz="1800" b="1" i="0">
+                <a:solidFill>
+                  <a:srgbClr val="E8801A"/>
+                </a:solidFill>
+                <a:latin typeface="Montserrat"/>
+              </a:rPr>
+              <a:t>07   </a:t>
+            </a:r>
+            <a:r>
+              <a:rPr sz="1700" b="0" i="0">
+                <a:solidFill>
+                  <a:srgbClr val="1B2330"/>
+                </a:solidFill>
+                <a:latin typeface="Montserrat"/>
+              </a:rPr>
+              <a:t>Apartado 8</a:t>
+            </a:r>
+          </a:p>
+          <a:p>
+            <a:pPr>
+              <a:spcAft>
+                <a:spcPts val="900"/>
+              </a:spcAft>
+            </a:pPr>
+            <a:r>
+              <a:rPr sz="1800" b="1" i="0">
+                <a:solidFill>
+                  <a:srgbClr val="E8801A"/>
+                </a:solidFill>
+                <a:latin typeface="Montserrat"/>
+              </a:rPr>
+              <a:t>08   </a:t>
+            </a:r>
+            <a:r>
+              <a:rPr sz="1700" b="0" i="0">
+                <a:solidFill>
+                  <a:srgbClr val="1B2330"/>
+                </a:solidFill>
+                <a:latin typeface="Montserrat"/>
+              </a:rPr>
+              <a:t>Repaso relámpago</a:t>
             </a:r>
           </a:p>
         </p:txBody>
@@ -8195,7 +9124,7 @@
                 </a:solidFill>
                 <a:latin typeface="Montserrat"/>
               </a:rPr>
-              <a:t>004 / 015</a:t>
+              <a:t>004 / 016</a:t>
             </a:r>
           </a:p>
         </p:txBody>
@@ -8243,7 +9172,7 @@
         <p:spPr>
           <a:xfrm>
             <a:off x="822960" y="457200"/>
-            <a:ext cx="8229600" cy="365760"/>
+            <a:ext cx="10058400" cy="365760"/>
           </a:xfrm>
           <a:prstGeom prst="rect">
             <a:avLst/>
@@ -8257,13 +9186,13 @@
           <a:lstStyle/>
           <a:p>
             <a:r>
-              <a:rPr sz="1200" b="1" i="0">
-                <a:solidFill>
-                  <a:srgbClr val="64748B"/>
-                </a:solidFill>
-                <a:latin typeface="Montserrat"/>
-              </a:rPr>
-              <a:t>APARTADO 6.1 · CENTROS DE OPERACIÓN</a:t>
+              <a:rPr sz="1300" b="1" i="0">
+                <a:solidFill>
+                  <a:srgbClr val="E8801A"/>
+                </a:solidFill>
+                <a:latin typeface="Montserrat"/>
+              </a:rPr>
+              <a:t>APARTADO 6 · OPERACIÓN Y MANTENIMIENTO</a:t>
             </a:r>
           </a:p>
         </p:txBody>
@@ -8291,26 +9220,70 @@
           <a:lstStyle/>
           <a:p>
             <a:r>
-              <a:rPr sz="2700" b="1" i="0">
+              <a:rPr sz="2800" b="1" i="0">
                 <a:solidFill>
                   <a:srgbClr val="1E2761"/>
                 </a:solidFill>
                 <a:latin typeface="Montserrat"/>
               </a:rPr>
-              <a:t>La torre de control</a:t>
-            </a:r>
-          </a:p>
-        </p:txBody>
-      </p:sp>
-      <p:sp>
-        <p:nvSpPr>
-          <p:cNvPr id="7" name="TextBox 6"/>
+              <a:t>Operar y mantener la red</a:t>
+            </a:r>
+          </a:p>
+        </p:txBody>
+      </p:sp>
+      <p:sp>
+        <p:nvSpPr>
+          <p:cNvPr id="7" name="Rounded Rectangle 6"/>
+          <p:cNvSpPr/>
+          <p:nvPr/>
+        </p:nvSpPr>
+        <p:spPr>
+          <a:xfrm>
+            <a:off x="868680" y="1627632"/>
+            <a:ext cx="2011680" cy="73152"/>
+          </a:xfrm>
+          <a:prstGeom prst="roundRect">
+            <a:avLst/>
+          </a:prstGeom>
+          <a:solidFill>
+            <a:srgbClr val="E8801A"/>
+          </a:solidFill>
+          <a:ln>
+            <a:noFill/>
+          </a:ln>
+          <a:effectLst/>
+        </p:spPr>
+        <p:style>
+          <a:lnRef idx="1">
+            <a:schemeClr val="accent1"/>
+          </a:lnRef>
+          <a:fillRef idx="3">
+            <a:schemeClr val="accent1"/>
+          </a:fillRef>
+          <a:effectRef idx="2">
+            <a:schemeClr val="accent1"/>
+          </a:effectRef>
+          <a:fontRef idx="minor">
+            <a:schemeClr val="lt1"/>
+          </a:fontRef>
+        </p:style>
+        <p:txBody>
+          <a:bodyPr rtlCol="0" anchor="ctr"/>
+          <a:lstStyle/>
+          <a:p>
+            <a:pPr algn="ctr"/>
+          </a:p>
+        </p:txBody>
+      </p:sp>
+      <p:sp>
+        <p:nvSpPr>
+          <p:cNvPr id="8" name="TextBox 7"/>
           <p:cNvSpPr txBox="1"/>
           <p:nvPr/>
         </p:nvSpPr>
         <p:spPr>
           <a:xfrm>
-            <a:off x="822960" y="1920240"/>
+            <a:off x="822960" y="1965960"/>
             <a:ext cx="4983480" cy="4206240"/>
           </a:xfrm>
           <a:prstGeom prst="rect">
@@ -8326,17 +9299,17 @@
           <a:p>
             <a:pPr>
               <a:spcAft>
-                <a:spcPts val="1000"/>
+                <a:spcPts val="1100"/>
               </a:spcAft>
             </a:pPr>
             <a:r>
               <a:rPr sz="1600" b="1" i="0">
                 <a:solidFill>
-                  <a:srgbClr val="2E3A80"/>
-                </a:solidFill>
-                <a:latin typeface="Montserrat"/>
-              </a:rPr>
-              <a:t>•  </a:t>
+                  <a:srgbClr val="E8801A"/>
+                </a:solidFill>
+                <a:latin typeface="Montserrat"/>
+              </a:rPr>
+              <a:t>▸  </a:t>
             </a:r>
             <a:r>
               <a:rPr sz="1600" b="0" i="0">
@@ -8345,23 +9318,23 @@
                 </a:solidFill>
                 <a:latin typeface="Montserrat"/>
               </a:rPr>
-              <a:t>Vigila dos parámetros: presión y odorizante</a:t>
+              <a:t>Criterio de fondo: seguridad pública</a:t>
             </a:r>
           </a:p>
           <a:p>
             <a:pPr>
               <a:spcAft>
-                <a:spcPts val="1000"/>
+                <a:spcPts val="1100"/>
               </a:spcAft>
             </a:pPr>
             <a:r>
               <a:rPr sz="1600" b="1" i="0">
                 <a:solidFill>
-                  <a:srgbClr val="2E3A80"/>
-                </a:solidFill>
-                <a:latin typeface="Montserrat"/>
-              </a:rPr>
-              <a:t>•  </a:t>
+                  <a:srgbClr val="E8801A"/>
+                </a:solidFill>
+                <a:latin typeface="Montserrat"/>
+              </a:rPr>
+              <a:t>▸  </a:t>
             </a:r>
             <a:r>
               <a:rPr sz="1600" b="0" i="0">
@@ -8370,23 +9343,23 @@
                 </a:solidFill>
                 <a:latin typeface="Montserrat"/>
               </a:rPr>
-              <a:t>Sin odorante, nadie huele la fuga</a:t>
+              <a:t>Responsabilidad del titular</a:t>
             </a:r>
           </a:p>
           <a:p>
             <a:pPr>
               <a:spcAft>
-                <a:spcPts val="1000"/>
+                <a:spcPts val="1100"/>
               </a:spcAft>
             </a:pPr>
             <a:r>
               <a:rPr sz="1600" b="1" i="0">
                 <a:solidFill>
-                  <a:srgbClr val="2E3A80"/>
-                </a:solidFill>
-                <a:latin typeface="Montserrat"/>
-              </a:rPr>
-              <a:t>•  </a:t>
+                  <a:srgbClr val="E8801A"/>
+                </a:solidFill>
+                <a:latin typeface="Montserrat"/>
+              </a:rPr>
+              <a:t>▸  </a:t>
             </a:r>
             <a:r>
               <a:rPr sz="1600" b="0" i="0">
@@ -8395,14 +9368,39 @@
                 </a:solidFill>
                 <a:latin typeface="Montserrat"/>
               </a:rPr>
-              <a:t>Excepción: redes desde depósitos de GLP</a:t>
-            </a:r>
-          </a:p>
-        </p:txBody>
-      </p:sp>
-      <p:sp>
-        <p:nvSpPr>
-          <p:cNvPr id="8" name="imgph" descr="IMGQ:gas pressure regulation station gauges valves"/>
+              <a:t>Personal cualificado, propio o ajeno</a:t>
+            </a:r>
+          </a:p>
+          <a:p>
+            <a:pPr>
+              <a:spcAft>
+                <a:spcPts val="1100"/>
+              </a:spcAft>
+            </a:pPr>
+            <a:r>
+              <a:rPr sz="1600" b="1" i="0">
+                <a:solidFill>
+                  <a:srgbClr val="E8801A"/>
+                </a:solidFill>
+                <a:latin typeface="Montserrat"/>
+              </a:rPr>
+              <a:t>▸  </a:t>
+            </a:r>
+            <a:r>
+              <a:rPr sz="1600" b="0" i="0">
+                <a:solidFill>
+                  <a:srgbClr val="1B2330"/>
+                </a:solidFill>
+                <a:latin typeface="Montserrat"/>
+              </a:rPr>
+              <a:t>Procedimientos: al Ministerio y a la CA</a:t>
+            </a:r>
+          </a:p>
+        </p:txBody>
+      </p:sp>
+      <p:sp>
+        <p:nvSpPr>
+          <p:cNvPr id="9" name="imgph" descr="IMGQ:gas control room operators monitors screens"/>
           <p:cNvSpPr/>
           <p:nvPr/>
         </p:nvSpPr>
@@ -8448,7 +9446,7 @@
       </p:sp>
       <p:sp>
         <p:nvSpPr>
-          <p:cNvPr id="9" name="TextBox 8"/>
+          <p:cNvPr id="10" name="TextBox 9"/>
           <p:cNvSpPr txBox="1"/>
           <p:nvPr/>
         </p:nvSpPr>
@@ -8488,7 +9486,7 @@
                 </a:solidFill>
                 <a:latin typeface="Montserrat"/>
               </a:rPr>
-              <a:t>gas pressure regulation station gauges valves</a:t>
+              <a:t>gas control room operators monitors screens</a:t>
             </a:r>
           </a:p>
         </p:txBody>
@@ -8585,7 +9583,7 @@
                 </a:solidFill>
                 <a:latin typeface="Montserrat"/>
               </a:rPr>
-              <a:t>005 / 015</a:t>
+              <a:t>005 / 016</a:t>
             </a:r>
           </a:p>
         </p:txBody>
@@ -8633,7 +9631,7 @@
         <p:spPr>
           <a:xfrm>
             <a:off x="822960" y="457200"/>
-            <a:ext cx="8229600" cy="365760"/>
+            <a:ext cx="10058400" cy="365760"/>
           </a:xfrm>
           <a:prstGeom prst="rect">
             <a:avLst/>
@@ -8647,13 +9645,13 @@
           <a:lstStyle/>
           <a:p>
             <a:r>
-              <a:rPr sz="1200" b="1" i="0">
-                <a:solidFill>
-                  <a:srgbClr val="64748B"/>
-                </a:solidFill>
-                <a:latin typeface="Montserrat"/>
-              </a:rPr>
-              <a:t>APARTADO 6.1 · CUATRO FUNCIONES</a:t>
+              <a:rPr sz="1300" b="1" i="0">
+                <a:solidFill>
+                  <a:srgbClr val="E8801A"/>
+                </a:solidFill>
+                <a:latin typeface="Montserrat"/>
+              </a:rPr>
+              <a:t>APARTADO 6.1 · CENTROS DE OPERACIÓN</a:t>
             </a:r>
           </a:p>
         </p:txBody>
@@ -8681,26 +9679,70 @@
           <a:lstStyle/>
           <a:p>
             <a:r>
-              <a:rPr sz="2700" b="1" i="0">
+              <a:rPr sz="2800" b="1" i="0">
                 <a:solidFill>
                   <a:srgbClr val="1E2761"/>
                 </a:solidFill>
                 <a:latin typeface="Montserrat"/>
               </a:rPr>
-              <a:t>Lo que hace el centro</a:t>
-            </a:r>
-          </a:p>
-        </p:txBody>
-      </p:sp>
-      <p:sp>
-        <p:nvSpPr>
-          <p:cNvPr id="7" name="TextBox 6"/>
+              <a:t>La torre de control</a:t>
+            </a:r>
+          </a:p>
+        </p:txBody>
+      </p:sp>
+      <p:sp>
+        <p:nvSpPr>
+          <p:cNvPr id="7" name="Rounded Rectangle 6"/>
+          <p:cNvSpPr/>
+          <p:nvPr/>
+        </p:nvSpPr>
+        <p:spPr>
+          <a:xfrm>
+            <a:off x="868680" y="1627632"/>
+            <a:ext cx="2011680" cy="73152"/>
+          </a:xfrm>
+          <a:prstGeom prst="roundRect">
+            <a:avLst/>
+          </a:prstGeom>
+          <a:solidFill>
+            <a:srgbClr val="E8801A"/>
+          </a:solidFill>
+          <a:ln>
+            <a:noFill/>
+          </a:ln>
+          <a:effectLst/>
+        </p:spPr>
+        <p:style>
+          <a:lnRef idx="1">
+            <a:schemeClr val="accent1"/>
+          </a:lnRef>
+          <a:fillRef idx="3">
+            <a:schemeClr val="accent1"/>
+          </a:fillRef>
+          <a:effectRef idx="2">
+            <a:schemeClr val="accent1"/>
+          </a:effectRef>
+          <a:fontRef idx="minor">
+            <a:schemeClr val="lt1"/>
+          </a:fontRef>
+        </p:style>
+        <p:txBody>
+          <a:bodyPr rtlCol="0" anchor="ctr"/>
+          <a:lstStyle/>
+          <a:p>
+            <a:pPr algn="ctr"/>
+          </a:p>
+        </p:txBody>
+      </p:sp>
+      <p:sp>
+        <p:nvSpPr>
+          <p:cNvPr id="8" name="TextBox 7"/>
           <p:cNvSpPr txBox="1"/>
           <p:nvPr/>
         </p:nvSpPr>
         <p:spPr>
           <a:xfrm>
-            <a:off x="822960" y="1920240"/>
+            <a:off x="822960" y="1965960"/>
             <a:ext cx="4983480" cy="4206240"/>
           </a:xfrm>
           <a:prstGeom prst="rect">
@@ -8716,17 +9758,17 @@
           <a:p>
             <a:pPr>
               <a:spcAft>
-                <a:spcPts val="1000"/>
+                <a:spcPts val="1100"/>
               </a:spcAft>
             </a:pPr>
             <a:r>
               <a:rPr sz="1600" b="1" i="0">
                 <a:solidFill>
-                  <a:srgbClr val="2E3A80"/>
-                </a:solidFill>
-                <a:latin typeface="Montserrat"/>
-              </a:rPr>
-              <a:t>•  </a:t>
+                  <a:srgbClr val="E8801A"/>
+                </a:solidFill>
+                <a:latin typeface="Montserrat"/>
+              </a:rPr>
+              <a:t>▸  </a:t>
             </a:r>
             <a:r>
               <a:rPr sz="1600" b="0" i="0">
@@ -8735,23 +9777,23 @@
                 </a:solidFill>
                 <a:latin typeface="Montserrat"/>
               </a:rPr>
-              <a:t>Controlar: presión y odorante ahora</a:t>
+              <a:t>Vigila dos parámetros: presión y odorizante</a:t>
             </a:r>
           </a:p>
           <a:p>
             <a:pPr>
               <a:spcAft>
-                <a:spcPts val="1000"/>
+                <a:spcPts val="1100"/>
               </a:spcAft>
             </a:pPr>
             <a:r>
               <a:rPr sz="1600" b="1" i="0">
                 <a:solidFill>
-                  <a:srgbClr val="2E3A80"/>
-                </a:solidFill>
-                <a:latin typeface="Montserrat"/>
-              </a:rPr>
-              <a:t>•  </a:t>
+                  <a:srgbClr val="E8801A"/>
+                </a:solidFill>
+                <a:latin typeface="Montserrat"/>
+              </a:rPr>
+              <a:t>▸  </a:t>
             </a:r>
             <a:r>
               <a:rPr sz="1600" b="0" i="0">
@@ -8760,23 +9802,23 @@
                 </a:solidFill>
                 <a:latin typeface="Montserrat"/>
               </a:rPr>
-              <a:t>Planificar: plan de operación</a:t>
+              <a:t>Sin odorante, nadie huele la fuga</a:t>
             </a:r>
           </a:p>
           <a:p>
             <a:pPr>
               <a:spcAft>
-                <a:spcPts val="1000"/>
+                <a:spcPts val="1100"/>
               </a:spcAft>
             </a:pPr>
             <a:r>
               <a:rPr sz="1600" b="1" i="0">
                 <a:solidFill>
-                  <a:srgbClr val="2E3A80"/>
-                </a:solidFill>
-                <a:latin typeface="Montserrat"/>
-              </a:rPr>
-              <a:t>•  </a:t>
+                  <a:srgbClr val="E8801A"/>
+                </a:solidFill>
+                <a:latin typeface="Montserrat"/>
+              </a:rPr>
+              <a:t>▸  </a:t>
             </a:r>
             <a:r>
               <a:rPr sz="1600" b="0" i="0">
@@ -8785,39 +9827,14 @@
                 </a:solidFill>
                 <a:latin typeface="Montserrat"/>
               </a:rPr>
-              <a:t>Informar: informe mensual de calidad</a:t>
-            </a:r>
-          </a:p>
-          <a:p>
-            <a:pPr>
-              <a:spcAft>
-                <a:spcPts val="1000"/>
-              </a:spcAft>
-            </a:pPr>
-            <a:r>
-              <a:rPr sz="1600" b="1" i="0">
-                <a:solidFill>
-                  <a:srgbClr val="2E3A80"/>
-                </a:solidFill>
-                <a:latin typeface="Montserrat"/>
-              </a:rPr>
-              <a:t>•  </a:t>
-            </a:r>
-            <a:r>
-              <a:rPr sz="1600" b="0" i="0">
-                <a:solidFill>
-                  <a:srgbClr val="1B2330"/>
-                </a:solidFill>
-                <a:latin typeface="Montserrat"/>
-              </a:rPr>
-              <a:t>Programar: actuaciones en redes principales</a:t>
-            </a:r>
-          </a:p>
-        </p:txBody>
-      </p:sp>
-      <p:sp>
-        <p:nvSpPr>
-          <p:cNvPr id="8" name="imgph" descr="IMGQ:engineer analyzing data screens control center"/>
+              <a:t>Excepción: redes desde depósitos de GLP</a:t>
+            </a:r>
+          </a:p>
+        </p:txBody>
+      </p:sp>
+      <p:sp>
+        <p:nvSpPr>
+          <p:cNvPr id="9" name="imgph" descr="IMGQ:gas pressure regulation station gauges valves"/>
           <p:cNvSpPr/>
           <p:nvPr/>
         </p:nvSpPr>
@@ -8863,7 +9880,7 @@
       </p:sp>
       <p:sp>
         <p:nvSpPr>
-          <p:cNvPr id="9" name="TextBox 8"/>
+          <p:cNvPr id="10" name="TextBox 9"/>
           <p:cNvSpPr txBox="1"/>
           <p:nvPr/>
         </p:nvSpPr>
@@ -8903,7 +9920,7 @@
                 </a:solidFill>
                 <a:latin typeface="Montserrat"/>
               </a:rPr>
-              <a:t>engineer analyzing data screens control center</a:t>
+              <a:t>gas pressure regulation station gauges valves</a:t>
             </a:r>
           </a:p>
         </p:txBody>
@@ -9000,7 +10017,7 @@
                 </a:solidFill>
                 <a:latin typeface="Montserrat"/>
               </a:rPr>
-              <a:t>006 / 015</a:t>
+              <a:t>006 / 016</a:t>
             </a:r>
           </a:p>
         </p:txBody>
@@ -9048,7 +10065,7 @@
         <p:spPr>
           <a:xfrm>
             <a:off x="822960" y="457200"/>
-            <a:ext cx="8229600" cy="365760"/>
+            <a:ext cx="10058400" cy="365760"/>
           </a:xfrm>
           <a:prstGeom prst="rect">
             <a:avLst/>
@@ -9062,13 +10079,13 @@
           <a:lstStyle/>
           <a:p>
             <a:r>
-              <a:rPr sz="1200" b="1" i="0">
-                <a:solidFill>
-                  <a:srgbClr val="64748B"/>
-                </a:solidFill>
-                <a:latin typeface="Montserrat"/>
-              </a:rPr>
-              <a:t>APARTADO 6.2 · EMERGENCIAS</a:t>
+              <a:rPr sz="1300" b="1" i="0">
+                <a:solidFill>
+                  <a:srgbClr val="E8801A"/>
+                </a:solidFill>
+                <a:latin typeface="Montserrat"/>
+              </a:rPr>
+              <a:t>APARTADO 6.1 · CUATRO FUNCIONES</a:t>
             </a:r>
           </a:p>
         </p:txBody>
@@ -9096,26 +10113,70 @@
           <a:lstStyle/>
           <a:p>
             <a:r>
-              <a:rPr sz="2700" b="1" i="0">
+              <a:rPr sz="2800" b="1" i="0">
                 <a:solidFill>
                   <a:srgbClr val="1E2761"/>
                 </a:solidFill>
                 <a:latin typeface="Montserrat"/>
               </a:rPr>
-              <a:t>Plan escrito y teléfono 24 h</a:t>
-            </a:r>
-          </a:p>
-        </p:txBody>
-      </p:sp>
-      <p:sp>
-        <p:nvSpPr>
-          <p:cNvPr id="7" name="TextBox 6"/>
+              <a:t>Lo que hace el centro</a:t>
+            </a:r>
+          </a:p>
+        </p:txBody>
+      </p:sp>
+      <p:sp>
+        <p:nvSpPr>
+          <p:cNvPr id="7" name="Rounded Rectangle 6"/>
+          <p:cNvSpPr/>
+          <p:nvPr/>
+        </p:nvSpPr>
+        <p:spPr>
+          <a:xfrm>
+            <a:off x="868680" y="1627632"/>
+            <a:ext cx="2011680" cy="73152"/>
+          </a:xfrm>
+          <a:prstGeom prst="roundRect">
+            <a:avLst/>
+          </a:prstGeom>
+          <a:solidFill>
+            <a:srgbClr val="E8801A"/>
+          </a:solidFill>
+          <a:ln>
+            <a:noFill/>
+          </a:ln>
+          <a:effectLst/>
+        </p:spPr>
+        <p:style>
+          <a:lnRef idx="1">
+            <a:schemeClr val="accent1"/>
+          </a:lnRef>
+          <a:fillRef idx="3">
+            <a:schemeClr val="accent1"/>
+          </a:fillRef>
+          <a:effectRef idx="2">
+            <a:schemeClr val="accent1"/>
+          </a:effectRef>
+          <a:fontRef idx="minor">
+            <a:schemeClr val="lt1"/>
+          </a:fontRef>
+        </p:style>
+        <p:txBody>
+          <a:bodyPr rtlCol="0" anchor="ctr"/>
+          <a:lstStyle/>
+          <a:p>
+            <a:pPr algn="ctr"/>
+          </a:p>
+        </p:txBody>
+      </p:sp>
+      <p:sp>
+        <p:nvSpPr>
+          <p:cNvPr id="8" name="TextBox 7"/>
           <p:cNvSpPr txBox="1"/>
           <p:nvPr/>
         </p:nvSpPr>
         <p:spPr>
           <a:xfrm>
-            <a:off x="822960" y="1920240"/>
+            <a:off x="822960" y="1965960"/>
             <a:ext cx="4983480" cy="4206240"/>
           </a:xfrm>
           <a:prstGeom prst="rect">
@@ -9131,17 +10192,17 @@
           <a:p>
             <a:pPr>
               <a:spcAft>
-                <a:spcPts val="1000"/>
+                <a:spcPts val="1100"/>
               </a:spcAft>
             </a:pPr>
             <a:r>
               <a:rPr sz="1600" b="1" i="0">
                 <a:solidFill>
-                  <a:srgbClr val="2E3A80"/>
-                </a:solidFill>
-                <a:latin typeface="Montserrat"/>
-              </a:rPr>
-              <a:t>•  </a:t>
+                  <a:srgbClr val="E8801A"/>
+                </a:solidFill>
+                <a:latin typeface="Montserrat"/>
+              </a:rPr>
+              <a:t>▸  </a:t>
             </a:r>
             <a:r>
               <a:rPr sz="1600" b="0" i="0">
@@ -9150,23 +10211,23 @@
                 </a:solidFill>
                 <a:latin typeface="Montserrat"/>
               </a:rPr>
-              <a:t>Plan de emergencia: documento de 8 puntos</a:t>
+              <a:t>Controlar: presión y odorante ahora</a:t>
             </a:r>
           </a:p>
           <a:p>
             <a:pPr>
               <a:spcAft>
-                <a:spcPts val="1000"/>
+                <a:spcPts val="1100"/>
               </a:spcAft>
             </a:pPr>
             <a:r>
               <a:rPr sz="1600" b="1" i="0">
                 <a:solidFill>
-                  <a:srgbClr val="2E3A80"/>
-                </a:solidFill>
-                <a:latin typeface="Montserrat"/>
-              </a:rPr>
-              <a:t>•  </a:t>
+                  <a:srgbClr val="E8801A"/>
+                </a:solidFill>
+                <a:latin typeface="Montserrat"/>
+              </a:rPr>
+              <a:t>▸  </a:t>
             </a:r>
             <a:r>
               <a:rPr sz="1600" b="0" i="0">
@@ -9175,23 +10236,23 @@
                 </a:solidFill>
                 <a:latin typeface="Montserrat"/>
               </a:rPr>
-              <a:t>Servicio de urgencias: teléfono y campo</a:t>
+              <a:t>Planificar: plan de operación</a:t>
             </a:r>
           </a:p>
           <a:p>
             <a:pPr>
               <a:spcAft>
-                <a:spcPts val="1000"/>
+                <a:spcPts val="1100"/>
               </a:spcAft>
             </a:pPr>
             <a:r>
               <a:rPr sz="1600" b="1" i="0">
                 <a:solidFill>
-                  <a:srgbClr val="2E3A80"/>
-                </a:solidFill>
-                <a:latin typeface="Montserrat"/>
-              </a:rPr>
-              <a:t>•  </a:t>
+                  <a:srgbClr val="E8801A"/>
+                </a:solidFill>
+                <a:latin typeface="Montserrat"/>
+              </a:rPr>
+              <a:t>▸  </a:t>
             </a:r>
             <a:r>
               <a:rPr sz="1600" b="0" i="0">
@@ -9200,23 +10261,23 @@
                 </a:solidFill>
                 <a:latin typeface="Montserrat"/>
               </a:rPr>
-              <a:t>Permanente y capaz de activar el plan</a:t>
+              <a:t>Informar: informe mensual de calidad</a:t>
             </a:r>
           </a:p>
           <a:p>
             <a:pPr>
               <a:spcAft>
-                <a:spcPts val="1000"/>
+                <a:spcPts val="1100"/>
               </a:spcAft>
             </a:pPr>
             <a:r>
               <a:rPr sz="1600" b="1" i="0">
                 <a:solidFill>
-                  <a:srgbClr val="2E3A80"/>
-                </a:solidFill>
-                <a:latin typeface="Montserrat"/>
-              </a:rPr>
-              <a:t>•  </a:t>
+                  <a:srgbClr val="E8801A"/>
+                </a:solidFill>
+                <a:latin typeface="Montserrat"/>
+              </a:rPr>
+              <a:t>▸  </a:t>
             </a:r>
             <a:r>
               <a:rPr sz="1600" b="0" i="0">
@@ -9225,14 +10286,14 @@
                 </a:solidFill>
                 <a:latin typeface="Montserrat"/>
               </a:rPr>
-              <a:t>Avisa a policía, bomberos y sanitarios</a:t>
-            </a:r>
-          </a:p>
-        </p:txBody>
-      </p:sp>
-      <p:sp>
-        <p:nvSpPr>
-          <p:cNvPr id="8" name="imgph" descr="IMGQ:emergency call center operator headset"/>
+              <a:t>Programar: actuaciones en redes principales</a:t>
+            </a:r>
+          </a:p>
+        </p:txBody>
+      </p:sp>
+      <p:sp>
+        <p:nvSpPr>
+          <p:cNvPr id="9" name="imgph" descr="IMGQ:engineer analyzing data screens control center"/>
           <p:cNvSpPr/>
           <p:nvPr/>
         </p:nvSpPr>
@@ -9278,7 +10339,7 @@
       </p:sp>
       <p:sp>
         <p:nvSpPr>
-          <p:cNvPr id="9" name="TextBox 8"/>
+          <p:cNvPr id="10" name="TextBox 9"/>
           <p:cNvSpPr txBox="1"/>
           <p:nvPr/>
         </p:nvSpPr>
@@ -9318,7 +10379,7 @@
                 </a:solidFill>
                 <a:latin typeface="Montserrat"/>
               </a:rPr>
-              <a:t>emergency call center operator headset</a:t>
+              <a:t>engineer analyzing data screens control center</a:t>
             </a:r>
           </a:p>
         </p:txBody>
@@ -9415,7 +10476,7 @@
                 </a:solidFill>
                 <a:latin typeface="Montserrat"/>
               </a:rPr>
-              <a:t>007 / 015</a:t>
+              <a:t>007 / 016</a:t>
             </a:r>
           </a:p>
         </p:txBody>
@@ -9463,7 +10524,7 @@
         <p:spPr>
           <a:xfrm>
             <a:off x="822960" y="457200"/>
-            <a:ext cx="8229600" cy="365760"/>
+            <a:ext cx="10058400" cy="365760"/>
           </a:xfrm>
           <a:prstGeom prst="rect">
             <a:avLst/>
@@ -9477,13 +10538,13 @@
           <a:lstStyle/>
           <a:p>
             <a:r>
-              <a:rPr sz="1200" b="1" i="0">
-                <a:solidFill>
-                  <a:srgbClr val="64748B"/>
-                </a:solidFill>
-                <a:latin typeface="Montserrat"/>
-              </a:rPr>
-              <a:t>APARTADO 6.2 · URGENCIAS DE SEGURIDAD</a:t>
+              <a:rPr sz="1300" b="1" i="0">
+                <a:solidFill>
+                  <a:srgbClr val="E8801A"/>
+                </a:solidFill>
+                <a:latin typeface="Montserrat"/>
+              </a:rPr>
+              <a:t>APARTADO 6.2 · EMERGENCIAS</a:t>
             </a:r>
           </a:p>
         </p:txBody>
@@ -9511,26 +10572,70 @@
           <a:lstStyle/>
           <a:p>
             <a:r>
-              <a:rPr sz="2700" b="1" i="0">
+              <a:rPr sz="2800" b="1" i="0">
                 <a:solidFill>
                   <a:srgbClr val="1E2761"/>
                 </a:solidFill>
                 <a:latin typeface="Montserrat"/>
               </a:rPr>
-              <a:t>Olor, incendio o explosión</a:t>
-            </a:r>
-          </a:p>
-        </p:txBody>
-      </p:sp>
-      <p:sp>
-        <p:nvSpPr>
-          <p:cNvPr id="7" name="TextBox 6"/>
+              <a:t>Plan escrito y teléfono 24 h</a:t>
+            </a:r>
+          </a:p>
+        </p:txBody>
+      </p:sp>
+      <p:sp>
+        <p:nvSpPr>
+          <p:cNvPr id="7" name="Rounded Rectangle 6"/>
+          <p:cNvSpPr/>
+          <p:nvPr/>
+        </p:nvSpPr>
+        <p:spPr>
+          <a:xfrm>
+            <a:off x="868680" y="1627632"/>
+            <a:ext cx="2011680" cy="73152"/>
+          </a:xfrm>
+          <a:prstGeom prst="roundRect">
+            <a:avLst/>
+          </a:prstGeom>
+          <a:solidFill>
+            <a:srgbClr val="E8801A"/>
+          </a:solidFill>
+          <a:ln>
+            <a:noFill/>
+          </a:ln>
+          <a:effectLst/>
+        </p:spPr>
+        <p:style>
+          <a:lnRef idx="1">
+            <a:schemeClr val="accent1"/>
+          </a:lnRef>
+          <a:fillRef idx="3">
+            <a:schemeClr val="accent1"/>
+          </a:fillRef>
+          <a:effectRef idx="2">
+            <a:schemeClr val="accent1"/>
+          </a:effectRef>
+          <a:fontRef idx="minor">
+            <a:schemeClr val="lt1"/>
+          </a:fontRef>
+        </p:style>
+        <p:txBody>
+          <a:bodyPr rtlCol="0" anchor="ctr"/>
+          <a:lstStyle/>
+          <a:p>
+            <a:pPr algn="ctr"/>
+          </a:p>
+        </p:txBody>
+      </p:sp>
+      <p:sp>
+        <p:nvSpPr>
+          <p:cNvPr id="8" name="TextBox 7"/>
           <p:cNvSpPr txBox="1"/>
           <p:nvPr/>
         </p:nvSpPr>
         <p:spPr>
           <a:xfrm>
-            <a:off x="822960" y="1920240"/>
+            <a:off x="822960" y="1965960"/>
             <a:ext cx="4983480" cy="4206240"/>
           </a:xfrm>
           <a:prstGeom prst="rect">
@@ -9546,17 +10651,17 @@
           <a:p>
             <a:pPr>
               <a:spcAft>
-                <a:spcPts val="1000"/>
+                <a:spcPts val="1100"/>
               </a:spcAft>
             </a:pPr>
             <a:r>
               <a:rPr sz="1600" b="1" i="0">
                 <a:solidFill>
-                  <a:srgbClr val="2E3A80"/>
-                </a:solidFill>
-                <a:latin typeface="Montserrat"/>
-              </a:rPr>
-              <a:t>•  </a:t>
+                  <a:srgbClr val="E8801A"/>
+                </a:solidFill>
+                <a:latin typeface="Montserrat"/>
+              </a:rPr>
+              <a:t>▸  </a:t>
             </a:r>
             <a:r>
               <a:rPr sz="1600" b="0" i="0">
@@ -9565,23 +10670,23 @@
                 </a:solidFill>
                 <a:latin typeface="Montserrat"/>
               </a:rPr>
-              <a:t>Lista cerrada: olor, incendio, explosión</a:t>
+              <a:t>Plan de emergencia: documento de 8 puntos</a:t>
             </a:r>
           </a:p>
           <a:p>
             <a:pPr>
               <a:spcAft>
-                <a:spcPts val="1000"/>
+                <a:spcPts val="1100"/>
               </a:spcAft>
             </a:pPr>
             <a:r>
               <a:rPr sz="1600" b="1" i="0">
                 <a:solidFill>
-                  <a:srgbClr val="2E3A80"/>
-                </a:solidFill>
-                <a:latin typeface="Montserrat"/>
-              </a:rPr>
-              <a:t>•  </a:t>
+                  <a:srgbClr val="E8801A"/>
+                </a:solidFill>
+                <a:latin typeface="Montserrat"/>
+              </a:rPr>
+              <a:t>▸  </a:t>
             </a:r>
             <a:r>
               <a:rPr sz="1600" b="0" i="0">
@@ -9590,23 +10695,23 @@
                 </a:solidFill>
                 <a:latin typeface="Montserrat"/>
               </a:rPr>
-              <a:t>Fuga de gas: máxima prioridad</a:t>
+              <a:t>Servicio de urgencias: teléfono y campo</a:t>
             </a:r>
           </a:p>
           <a:p>
             <a:pPr>
               <a:spcAft>
-                <a:spcPts val="1000"/>
+                <a:spcPts val="1100"/>
               </a:spcAft>
             </a:pPr>
             <a:r>
               <a:rPr sz="1600" b="1" i="0">
                 <a:solidFill>
-                  <a:srgbClr val="2E3A80"/>
-                </a:solidFill>
-                <a:latin typeface="Montserrat"/>
-              </a:rPr>
-              <a:t>•  </a:t>
+                  <a:srgbClr val="E8801A"/>
+                </a:solidFill>
+                <a:latin typeface="Montserrat"/>
+              </a:rPr>
+              <a:t>▸  </a:t>
             </a:r>
             <a:r>
               <a:rPr sz="1600" b="0" i="0">
@@ -9615,23 +10720,23 @@
                 </a:solidFill>
                 <a:latin typeface="Montserrat"/>
               </a:rPr>
-              <a:t>Avisos clasificados por prioridades</a:t>
+              <a:t>Permanente y capaz de activar el plan</a:t>
             </a:r>
           </a:p>
           <a:p>
             <a:pPr>
               <a:spcAft>
-                <a:spcPts val="1000"/>
+                <a:spcPts val="1100"/>
               </a:spcAft>
             </a:pPr>
             <a:r>
               <a:rPr sz="1600" b="1" i="0">
                 <a:solidFill>
-                  <a:srgbClr val="2E3A80"/>
-                </a:solidFill>
-                <a:latin typeface="Montserrat"/>
-              </a:rPr>
-              <a:t>•  </a:t>
+                  <a:srgbClr val="E8801A"/>
+                </a:solidFill>
+                <a:latin typeface="Montserrat"/>
+              </a:rPr>
+              <a:t>▸  </a:t>
             </a:r>
             <a:r>
               <a:rPr sz="1600" b="0" i="0">
@@ -9640,14 +10745,14 @@
                 </a:solidFill>
                 <a:latin typeface="Montserrat"/>
               </a:rPr>
-              <a:t>El coste se repercute al usuario</a:t>
-            </a:r>
-          </a:p>
-        </p:txBody>
-      </p:sp>
-      <p:sp>
-        <p:nvSpPr>
-          <p:cNvPr id="8" name="imgph" descr="IMGQ:person smelling gas leak kitchen worried"/>
+              <a:t>Avisa a policía, bomberos y sanitarios</a:t>
+            </a:r>
+          </a:p>
+        </p:txBody>
+      </p:sp>
+      <p:sp>
+        <p:nvSpPr>
+          <p:cNvPr id="9" name="imgph" descr="IMGQ:emergency call center operator headset"/>
           <p:cNvSpPr/>
           <p:nvPr/>
         </p:nvSpPr>
@@ -9693,7 +10798,7 @@
       </p:sp>
       <p:sp>
         <p:nvSpPr>
-          <p:cNvPr id="9" name="TextBox 8"/>
+          <p:cNvPr id="10" name="TextBox 9"/>
           <p:cNvSpPr txBox="1"/>
           <p:nvPr/>
         </p:nvSpPr>
@@ -9733,7 +10838,7 @@
                 </a:solidFill>
                 <a:latin typeface="Montserrat"/>
               </a:rPr>
-              <a:t>person smelling gas leak kitchen worried</a:t>
+              <a:t>emergency call center operator headset</a:t>
             </a:r>
           </a:p>
         </p:txBody>
@@ -9830,7 +10935,7 @@
                 </a:solidFill>
                 <a:latin typeface="Montserrat"/>
               </a:rPr>
-              <a:t>008 / 015</a:t>
+              <a:t>008 / 016</a:t>
             </a:r>
           </a:p>
         </p:txBody>
@@ -9878,7 +10983,7 @@
         <p:spPr>
           <a:xfrm>
             <a:off x="822960" y="457200"/>
-            <a:ext cx="8229600" cy="365760"/>
+            <a:ext cx="10058400" cy="365760"/>
           </a:xfrm>
           <a:prstGeom prst="rect">
             <a:avLst/>
@@ -9892,13 +10997,13 @@
           <a:lstStyle/>
           <a:p>
             <a:r>
-              <a:rPr sz="1200" b="1" i="0">
-                <a:solidFill>
-                  <a:srgbClr val="64748B"/>
-                </a:solidFill>
-                <a:latin typeface="Montserrat"/>
-              </a:rPr>
-              <a:t>APARTADO 6.3 · CONTROL DE ESTANQUIDAD</a:t>
+              <a:rPr sz="1300" b="1" i="0">
+                <a:solidFill>
+                  <a:srgbClr val="E8801A"/>
+                </a:solidFill>
+                <a:latin typeface="Montserrat"/>
+              </a:rPr>
+              <a:t>APARTADO 6.2 · URGENCIAS DE SEGURIDAD</a:t>
             </a:r>
           </a:p>
         </p:txBody>
@@ -9926,26 +11031,70 @@
           <a:lstStyle/>
           <a:p>
             <a:r>
-              <a:rPr sz="2700" b="1" i="0">
+              <a:rPr sz="2800" b="1" i="0">
                 <a:solidFill>
                   <a:srgbClr val="1E2761"/>
                 </a:solidFill>
                 <a:latin typeface="Montserrat"/>
               </a:rPr>
-              <a:t>Cazar y clasificar fugas</a:t>
-            </a:r>
-          </a:p>
-        </p:txBody>
-      </p:sp>
-      <p:sp>
-        <p:nvSpPr>
-          <p:cNvPr id="7" name="TextBox 6"/>
+              <a:t>Olor, incendio o explosión</a:t>
+            </a:r>
+          </a:p>
+        </p:txBody>
+      </p:sp>
+      <p:sp>
+        <p:nvSpPr>
+          <p:cNvPr id="7" name="Rounded Rectangle 6"/>
+          <p:cNvSpPr/>
+          <p:nvPr/>
+        </p:nvSpPr>
+        <p:spPr>
+          <a:xfrm>
+            <a:off x="868680" y="1627632"/>
+            <a:ext cx="2011680" cy="73152"/>
+          </a:xfrm>
+          <a:prstGeom prst="roundRect">
+            <a:avLst/>
+          </a:prstGeom>
+          <a:solidFill>
+            <a:srgbClr val="E8801A"/>
+          </a:solidFill>
+          <a:ln>
+            <a:noFill/>
+          </a:ln>
+          <a:effectLst/>
+        </p:spPr>
+        <p:style>
+          <a:lnRef idx="1">
+            <a:schemeClr val="accent1"/>
+          </a:lnRef>
+          <a:fillRef idx="3">
+            <a:schemeClr val="accent1"/>
+          </a:fillRef>
+          <a:effectRef idx="2">
+            <a:schemeClr val="accent1"/>
+          </a:effectRef>
+          <a:fontRef idx="minor">
+            <a:schemeClr val="lt1"/>
+          </a:fontRef>
+        </p:style>
+        <p:txBody>
+          <a:bodyPr rtlCol="0" anchor="ctr"/>
+          <a:lstStyle/>
+          <a:p>
+            <a:pPr algn="ctr"/>
+          </a:p>
+        </p:txBody>
+      </p:sp>
+      <p:sp>
+        <p:nvSpPr>
+          <p:cNvPr id="8" name="TextBox 7"/>
           <p:cNvSpPr txBox="1"/>
           <p:nvPr/>
         </p:nvSpPr>
         <p:spPr>
           <a:xfrm>
-            <a:off x="822960" y="1920240"/>
+            <a:off x="822960" y="1965960"/>
             <a:ext cx="4983480" cy="4206240"/>
           </a:xfrm>
           <a:prstGeom prst="rect">
@@ -9961,17 +11110,17 @@
           <a:p>
             <a:pPr>
               <a:spcAft>
-                <a:spcPts val="1000"/>
+                <a:spcPts val="1100"/>
               </a:spcAft>
             </a:pPr>
             <a:r>
               <a:rPr sz="1600" b="1" i="0">
                 <a:solidFill>
-                  <a:srgbClr val="2E3A80"/>
-                </a:solidFill>
-                <a:latin typeface="Montserrat"/>
-              </a:rPr>
-              <a:t>•  </a:t>
+                  <a:srgbClr val="E8801A"/>
+                </a:solidFill>
+                <a:latin typeface="Montserrat"/>
+              </a:rPr>
+              <a:t>▸  </a:t>
             </a:r>
             <a:r>
               <a:rPr sz="1600" b="0" i="0">
@@ -9980,23 +11129,23 @@
                 </a:solidFill>
                 <a:latin typeface="Montserrat"/>
               </a:rPr>
-              <a:t>Urgente: voy ya</a:t>
+              <a:t>Lista cerrada: olor, incendio, explosión</a:t>
             </a:r>
           </a:p>
           <a:p>
             <a:pPr>
               <a:spcAft>
-                <a:spcPts val="1000"/>
+                <a:spcPts val="1100"/>
               </a:spcAft>
             </a:pPr>
             <a:r>
               <a:rPr sz="1600" b="1" i="0">
                 <a:solidFill>
-                  <a:srgbClr val="2E3A80"/>
-                </a:solidFill>
-                <a:latin typeface="Montserrat"/>
-              </a:rPr>
-              <a:t>•  </a:t>
+                  <a:srgbClr val="E8801A"/>
+                </a:solidFill>
+                <a:latin typeface="Montserrat"/>
+              </a:rPr>
+              <a:t>▸  </a:t>
             </a:r>
             <a:r>
               <a:rPr sz="1600" b="0" i="0">
@@ -10005,23 +11154,23 @@
                 </a:solidFill>
                 <a:latin typeface="Montserrat"/>
               </a:rPr>
-              <a:t>Programada: la planifico</a:t>
+              <a:t>Fuga de gas: máxima prioridad</a:t>
             </a:r>
           </a:p>
           <a:p>
             <a:pPr>
               <a:spcAft>
-                <a:spcPts val="1000"/>
+                <a:spcPts val="1100"/>
               </a:spcAft>
             </a:pPr>
             <a:r>
               <a:rPr sz="1600" b="1" i="0">
                 <a:solidFill>
-                  <a:srgbClr val="2E3A80"/>
-                </a:solidFill>
-                <a:latin typeface="Montserrat"/>
-              </a:rPr>
-              <a:t>•  </a:t>
+                  <a:srgbClr val="E8801A"/>
+                </a:solidFill>
+                <a:latin typeface="Montserrat"/>
+              </a:rPr>
+              <a:t>▸  </a:t>
             </a:r>
             <a:r>
               <a:rPr sz="1600" b="0" i="0">
@@ -10030,23 +11179,23 @@
                 </a:solidFill>
                 <a:latin typeface="Montserrat"/>
               </a:rPr>
-              <a:t>Vigilancia de progresión: la vigilo</a:t>
+              <a:t>Avisos clasificados por prioridades</a:t>
             </a:r>
           </a:p>
           <a:p>
             <a:pPr>
               <a:spcAft>
-                <a:spcPts val="1000"/>
+                <a:spcPts val="1100"/>
               </a:spcAft>
             </a:pPr>
             <a:r>
               <a:rPr sz="1600" b="1" i="0">
                 <a:solidFill>
-                  <a:srgbClr val="2E3A80"/>
-                </a:solidFill>
-                <a:latin typeface="Montserrat"/>
-              </a:rPr>
-              <a:t>•  </a:t>
+                  <a:srgbClr val="E8801A"/>
+                </a:solidFill>
+                <a:latin typeface="Montserrat"/>
+              </a:rPr>
+              <a:t>▸  </a:t>
             </a:r>
             <a:r>
               <a:rPr sz="1600" b="0" i="0">
@@ -10055,14 +11204,14 @@
                 </a:solidFill>
                 <a:latin typeface="Montserrat"/>
               </a:rPr>
-              <a:t>Lo que decide: la proximidad a edificios</a:t>
-            </a:r>
-          </a:p>
-        </p:txBody>
-      </p:sp>
-      <p:sp>
-        <p:nvSpPr>
-          <p:cNvPr id="8" name="imgph" descr="IMGQ:technician gas leak detector survey pipe"/>
+              <a:t>El coste se repercute al usuario</a:t>
+            </a:r>
+          </a:p>
+        </p:txBody>
+      </p:sp>
+      <p:sp>
+        <p:nvSpPr>
+          <p:cNvPr id="9" name="imgph" descr="IMGQ:person smelling gas leak kitchen worried"/>
           <p:cNvSpPr/>
           <p:nvPr/>
         </p:nvSpPr>
@@ -10108,7 +11257,7 @@
       </p:sp>
       <p:sp>
         <p:nvSpPr>
-          <p:cNvPr id="9" name="TextBox 8"/>
+          <p:cNvPr id="10" name="TextBox 9"/>
           <p:cNvSpPr txBox="1"/>
           <p:nvPr/>
         </p:nvSpPr>
@@ -10148,7 +11297,7 @@
                 </a:solidFill>
                 <a:latin typeface="Montserrat"/>
               </a:rPr>
-              <a:t>technician gas leak detector survey pipe</a:t>
+              <a:t>person smelling gas leak kitchen worried</a:t>
             </a:r>
           </a:p>
         </p:txBody>
@@ -10245,7 +11394,7 @@
                 </a:solidFill>
                 <a:latin typeface="Montserrat"/>
               </a:rPr>
-              <a:t>009 / 015</a:t>
+              <a:t>009 / 016</a:t>
             </a:r>
           </a:p>
         </p:txBody>
@@ -10293,7 +11442,7 @@
         <p:spPr>
           <a:xfrm>
             <a:off x="822960" y="457200"/>
-            <a:ext cx="8229600" cy="365760"/>
+            <a:ext cx="10058400" cy="365760"/>
           </a:xfrm>
           <a:prstGeom prst="rect">
             <a:avLst/>
@@ -10307,13 +11456,13 @@
           <a:lstStyle/>
           <a:p>
             <a:r>
-              <a:rPr sz="1200" b="1" i="0">
-                <a:solidFill>
-                  <a:srgbClr val="64748B"/>
-                </a:solidFill>
-                <a:latin typeface="Montserrat"/>
-              </a:rPr>
-              <a:t>APARTADO 6.4 · MANTENIMIENTO</a:t>
+              <a:rPr sz="1300" b="1" i="0">
+                <a:solidFill>
+                  <a:srgbClr val="E8801A"/>
+                </a:solidFill>
+                <a:latin typeface="Montserrat"/>
+              </a:rPr>
+              <a:t>APARTADO 6.3 · CONTROL DE ESTANQUIDAD</a:t>
             </a:r>
           </a:p>
         </p:txBody>
@@ -10341,26 +11490,70 @@
           <a:lstStyle/>
           <a:p>
             <a:r>
-              <a:rPr sz="2700" b="1" i="0">
+              <a:rPr sz="2800" b="1" i="0">
                 <a:solidFill>
                   <a:srgbClr val="1E2761"/>
                 </a:solidFill>
                 <a:latin typeface="Montserrat"/>
               </a:rPr>
-              <a:t>Parche primero, reparación después</a:t>
-            </a:r>
-          </a:p>
-        </p:txBody>
-      </p:sp>
-      <p:sp>
-        <p:nvSpPr>
-          <p:cNvPr id="7" name="TextBox 6"/>
+              <a:t>Cazar y clasificar fugas</a:t>
+            </a:r>
+          </a:p>
+        </p:txBody>
+      </p:sp>
+      <p:sp>
+        <p:nvSpPr>
+          <p:cNvPr id="7" name="Rounded Rectangle 6"/>
+          <p:cNvSpPr/>
+          <p:nvPr/>
+        </p:nvSpPr>
+        <p:spPr>
+          <a:xfrm>
+            <a:off x="868680" y="1627632"/>
+            <a:ext cx="2011680" cy="73152"/>
+          </a:xfrm>
+          <a:prstGeom prst="roundRect">
+            <a:avLst/>
+          </a:prstGeom>
+          <a:solidFill>
+            <a:srgbClr val="E8801A"/>
+          </a:solidFill>
+          <a:ln>
+            <a:noFill/>
+          </a:ln>
+          <a:effectLst/>
+        </p:spPr>
+        <p:style>
+          <a:lnRef idx="1">
+            <a:schemeClr val="accent1"/>
+          </a:lnRef>
+          <a:fillRef idx="3">
+            <a:schemeClr val="accent1"/>
+          </a:fillRef>
+          <a:effectRef idx="2">
+            <a:schemeClr val="accent1"/>
+          </a:effectRef>
+          <a:fontRef idx="minor">
+            <a:schemeClr val="lt1"/>
+          </a:fontRef>
+        </p:style>
+        <p:txBody>
+          <a:bodyPr rtlCol="0" anchor="ctr"/>
+          <a:lstStyle/>
+          <a:p>
+            <a:pPr algn="ctr"/>
+          </a:p>
+        </p:txBody>
+      </p:sp>
+      <p:sp>
+        <p:nvSpPr>
+          <p:cNvPr id="8" name="TextBox 7"/>
           <p:cNvSpPr txBox="1"/>
           <p:nvPr/>
         </p:nvSpPr>
         <p:spPr>
           <a:xfrm>
-            <a:off x="822960" y="1920240"/>
+            <a:off x="822960" y="1965960"/>
             <a:ext cx="4983480" cy="4206240"/>
           </a:xfrm>
           <a:prstGeom prst="rect">
@@ -10376,17 +11569,17 @@
           <a:p>
             <a:pPr>
               <a:spcAft>
-                <a:spcPts val="1000"/>
+                <a:spcPts val="1100"/>
               </a:spcAft>
             </a:pPr>
             <a:r>
               <a:rPr sz="1600" b="1" i="0">
                 <a:solidFill>
-                  <a:srgbClr val="2E3A80"/>
-                </a:solidFill>
-                <a:latin typeface="Montserrat"/>
-              </a:rPr>
-              <a:t>•  </a:t>
+                  <a:srgbClr val="E8801A"/>
+                </a:solidFill>
+                <a:latin typeface="Montserrat"/>
+              </a:rPr>
+              <a:t>▸  </a:t>
             </a:r>
             <a:r>
               <a:rPr sz="1600" b="0" i="0">
@@ -10395,23 +11588,23 @@
                 </a:solidFill>
                 <a:latin typeface="Montserrat"/>
               </a:rPr>
-              <a:t>Medida temporal si no hay reparación ya</a:t>
+              <a:t>Urgente: voy ya</a:t>
             </a:r>
           </a:p>
           <a:p>
             <a:pPr>
               <a:spcAft>
-                <a:spcPts val="1000"/>
+                <a:spcPts val="1100"/>
               </a:spcAft>
             </a:pPr>
             <a:r>
               <a:rPr sz="1600" b="1" i="0">
                 <a:solidFill>
-                  <a:srgbClr val="2E3A80"/>
-                </a:solidFill>
-                <a:latin typeface="Montserrat"/>
-              </a:rPr>
-              <a:t>•  </a:t>
+                  <a:srgbClr val="E8801A"/>
+                </a:solidFill>
+                <a:latin typeface="Montserrat"/>
+              </a:rPr>
+              <a:t>▸  </a:t>
             </a:r>
             <a:r>
               <a:rPr sz="1600" b="0" i="0">
@@ -10420,23 +11613,23 @@
                 </a:solidFill>
                 <a:latin typeface="Montserrat"/>
               </a:rPr>
-              <a:t>Reparación definitiva en cuanto se pueda</a:t>
+              <a:t>Programada: la planifico</a:t>
             </a:r>
           </a:p>
           <a:p>
             <a:pPr>
               <a:spcAft>
-                <a:spcPts val="1000"/>
+                <a:spcPts val="1100"/>
               </a:spcAft>
             </a:pPr>
             <a:r>
               <a:rPr sz="1600" b="1" i="0">
                 <a:solidFill>
-                  <a:srgbClr val="2E3A80"/>
-                </a:solidFill>
-                <a:latin typeface="Montserrat"/>
-              </a:rPr>
-              <a:t>•  </a:t>
+                  <a:srgbClr val="E8801A"/>
+                </a:solidFill>
+                <a:latin typeface="Montserrat"/>
+              </a:rPr>
+              <a:t>▸  </a:t>
             </a:r>
             <a:r>
               <a:rPr sz="1600" b="0" i="0">
@@ -10445,23 +11638,23 @@
                 </a:solidFill>
                 <a:latin typeface="Montserrat"/>
               </a:rPr>
-              <a:t>Tras intervenir: pruebas en obra</a:t>
+              <a:t>Vigilancia de progresión: la vigilo</a:t>
             </a:r>
           </a:p>
           <a:p>
             <a:pPr>
               <a:spcAft>
-                <a:spcPts val="1000"/>
+                <a:spcPts val="1100"/>
               </a:spcAft>
             </a:pPr>
             <a:r>
               <a:rPr sz="1600" b="1" i="0">
                 <a:solidFill>
-                  <a:srgbClr val="2E3A80"/>
-                </a:solidFill>
-                <a:latin typeface="Montserrat"/>
-              </a:rPr>
-              <a:t>•  </a:t>
+                  <a:srgbClr val="E8801A"/>
+                </a:solidFill>
+                <a:latin typeface="Montserrat"/>
+              </a:rPr>
+              <a:t>▸  </a:t>
             </a:r>
             <a:r>
               <a:rPr sz="1600" b="0" i="0">
@@ -10470,14 +11663,14 @@
                 </a:solidFill>
                 <a:latin typeface="Montserrat"/>
               </a:rPr>
-              <a:t>Puntual o tramo corto: disolución jabonosa</a:t>
-            </a:r>
-          </a:p>
-        </p:txBody>
-      </p:sp>
-      <p:sp>
-        <p:nvSpPr>
-          <p:cNvPr id="8" name="imgph" descr="IMGQ:plumber applying soapy water pipe joint hands"/>
+              <a:t>Lo que decide: la proximidad a edificios</a:t>
+            </a:r>
+          </a:p>
+        </p:txBody>
+      </p:sp>
+      <p:sp>
+        <p:nvSpPr>
+          <p:cNvPr id="9" name="imgph" descr="IMGQ:technician gas leak detector survey pipe"/>
           <p:cNvSpPr/>
           <p:nvPr/>
         </p:nvSpPr>
@@ -10523,7 +11716,7 @@
       </p:sp>
       <p:sp>
         <p:nvSpPr>
-          <p:cNvPr id="9" name="TextBox 8"/>
+          <p:cNvPr id="10" name="TextBox 9"/>
           <p:cNvSpPr txBox="1"/>
           <p:nvPr/>
         </p:nvSpPr>
@@ -10563,7 +11756,7 @@
                 </a:solidFill>
                 <a:latin typeface="Montserrat"/>
               </a:rPr>
-              <a:t>plumber applying soapy water pipe joint hands</a:t>
+              <a:t>technician gas leak detector survey pipe</a:t>
             </a:r>
           </a:p>
         </p:txBody>

--- a/Curso Gas B/01 - ITC-ICG 01 - Distribucion por canalizacion/01 - ITC-ICG 01 - Distribucion por canalizacion - Vídeo 2.pptx
+++ b/Curso Gas B/01 - ITC-ICG 01 - Distribucion por canalizacion/01 - ITC-ICG 01 - Distribucion por canalizacion - Vídeo 2.pptx
@@ -21,6 +21,12 @@
     <p:sldId id="269" r:id="rId21"/>
     <p:sldId id="270" r:id="rId22"/>
     <p:sldId id="271" r:id="rId23"/>
+    <p:sldId id="272" r:id="rId24"/>
+    <p:sldId id="273" r:id="rId25"/>
+    <p:sldId id="274" r:id="rId26"/>
+    <p:sldId id="275" r:id="rId27"/>
+    <p:sldId id="276" r:id="rId28"/>
+    <p:sldId id="277" r:id="rId29"/>
   </p:sldIdLst>
   <p:sldSz cx="12191695" cy="6858000" type="screen4x3"/>
   <p:notesSz cx="6858000" cy="9144000"/>
@@ -592,12 +598,12 @@
           <a:lstStyle/>
           <a:p>
             <a:r>
-              <a:t>N1: Aparece una fuga o un daño y en ese momento no se puede arreglar bien del todo. ¿Qué se hace, se deja para mañana?</a:t>
-            </a:r>
-          </a:p>
-          <a:p>
-            <a:r>
-              <a:t>N2: Nunca se deja a medias. Lo que manda la norma es tomar una medida temporal, un parche seguro que quite el peligro de inmediato, y en cuanto sea posible hacer la reparación definitiva, la de verdad. El parche no es la solución, es solo un puente hasta la reparación buena, pero mientras tanto la instalación no queda peligrosa. Ahora, la regla sobre las pruebas, que tiene una excepción muy práctica. Regla general: después de tocar la red hay que repetir las pruebas en obra, resistencia y estanquidad, según las normas seiscientas. Excepción: si es una reparación puntual o un tramo de corta extensión, no hace falta montar todo el operativo de pruebas; basta con verificar que las uniones nuevas no fugan, y eso se hace con disolución jabonosa, que es echar agua con jabón sobre la junta: si burbujea, hay fuga. Ese es el truco de gasista que vas a usar toda la vida. Fíjate bien en la condición de la excepción, porque es lo que preguntan: solo vale para reparación puntual o tramo corto; en una intervención grande, pruebas completas.</a:t>
+              <a:t>N1: Si me preguntan qué incidencias de seguridad atiende el distribuidor en casa del usuario, ¿qué contesto?</a:t>
+            </a:r>
+          </a:p>
+          <a:p>
+            <a:r>
+              <a:t>N2: Tres, y es una lista cerrada, así que apréndetela tal cual: olor a gas, incendio o explosión. Ni más ni menos que esas tres. Los centros de atención de urgencias trabajan con procedimientos escritos que clasifican los avisos por prioridades, porque no todo lo que entra por teléfono es igual de grave. ¿Y cuál es el aviso de máxima prioridad, el que se atiende antes que nada? La fuga de gas. Cualquier condición que pueda generar riesgo va a lo más alto de la cola, y la resolución de esos casos de máxima prioridad tiene su sistemática marcada. Un detalle económico que a veces cae y sorprende: tener ese servicio de urgencias siempre disponible cuesta dinero, y ese coste se repercute a los usuarios, es decir, se lo cobran a la gente según diga el reglamento. Y guardan los registros de lo que hacen a disposición de la Administración, para poder demostrar cómo actuaron ante cada incidencia.</a:t>
             </a:r>
           </a:p>
         </p:txBody>
@@ -667,12 +673,12 @@
           <a:lstStyle/>
           <a:p>
             <a:r>
-              <a:t>N1: Cuando se reabre el gas y se trabaja con posible salida de gas, ¿qué reflejos de seguridad no pueden faltar?</a:t>
-            </a:r>
-          </a:p>
-          <a:p>
-            <a:r>
-              <a:t>N2: Empecemos por el momento de reabrir. Si durante la intervención pudo entrar aire en la tubería, antes de volver a dar servicio hay que purgar la red por sus extremos, es decir, echar ese aire fuera por las puntas antes de que se mezcle con el gas. ¿Por qué? Porque, como aprendiste en el vídeo anterior, el peligro es justamente la mezcla aire-gas. Y mientras se trabaja con posible salida de gas, cuatro reflejos que conviene memorizar juntos, como un solo bloque. Uno, detectar la presencia de gas, con el detector, para saber si hay gas en el aire. Dos, señalizar y controlar la zona de trabajo, para que nadie entre por descuido. Tres, retirar las fuentes de ignición que no sean imprescindibles, es decir, todo lo que pueda dar una chispa o una llama. Y cuatro, tener a mano el equipo de extinción específico, el extintor adecuado por si acaso. Detectar, señalizar, retirar chispas y extintor. Esos cuatro gestos te cubren en cualquier intervención con gas, y son exactamente los mismos que vas a repetir tú en obra.</a:t>
+              <a:t>N1: El titular comprueba la estanquidad de la red. Cuando aparece una fuga, ¿cómo se clasifica?</a:t>
+            </a:r>
+          </a:p>
+          <a:p>
+            <a:r>
+              <a:t>N2: En tres clases, ordenadas de más a menos grave, y esta clasificación cae mucho. La primera, fuga de intervención urgente: hay peligro inmediato, hay que ir ya. La segunda, de intervención programada: hay que arreglarla sí o sí, pero se puede planificar la intervención con calma, para dentro de unos días. Y la tercera, de vigilancia de progresión: es tan pequeña o tan poco peligrosa que, de momento, solo se vigila por si va a más. Truco para el orden: urgente ahora, programada pronto, progresión la miro. Y aquí viene lo bueno, la pregunta con miga: ¿por qué la misma fuga puede ser urgente o solo de vigilancia? Porque depende sobre todo de dónde esté. Una fuga pequeña en pleno campo no es lo mismo que esa misma fuga pegada a un edificio habitado, donde el gas se puede acumular y hacer daño a la gente. Por eso, entre los factores que deciden la clase están las características del gas, la presión de operación y lo que diga el detector, pero el que más pesa es la proximidad a propiedades y edificios y el uso que se les da. La documentación de estos controles queda en poder del titular, a disposición de la Comunidad Autónoma.</a:t>
             </a:r>
           </a:p>
         </p:txBody>
@@ -742,12 +748,12 @@
           <a:lstStyle/>
           <a:p>
             <a:r>
-              <a:t>N1: ¿Qué está obligado a archivar el distribuidor, y sobre todo con qué números?</a:t>
-            </a:r>
-          </a:p>
-          <a:p>
-            <a:r>
-              <a:t>N2: Vamos con lo que se guarda y, muy atento, con las cifras, que es lo que cae. Primero, el distribuidor tiene que contar con cartografía detallada de la red, o sea, el mapa de por dónde van todos los tubos, y permanentemente actualizada, siempre al día; un plano viejo puede provocar que alguien pique donde no debe. Segundo, guarda mientras la red esté en explotación la documentación de autorización y los proyectos, incluidos los resultados de las pruebas en obra, resistencia y estanquidad. Y ahora las dos cifras clave. Una: de las vigilancias y controles de estanquidad se guardan las dos últimas, no todo el histórico, las dos últimas. Otra: las intervenciones por motivos de seguridad y las actuaciones en emergencias se archivan un mínimo de cinco años. Truco para memorizarlo: mapa siempre, estanquidad las dos últimas, seguridad cinco años. Y un detalle que a veces intentan colar: el soporte da igual, vale papel o vale informático, con tal de que sea fiable. Si en un examen ves obligatoriamente en papel, es falso: lo que importa es que la información esté y sea de fiar.</a:t>
+              <a:t>N1: Una fuga igual puede ser urgente o de simple vigilancia. ¿De qué depende?</a:t>
+            </a:r>
+          </a:p>
+          <a:p>
+            <a:r>
+              <a:t>N2: No es solo el tamaño. Piensa dónde está la fuga y quién vive al lado.</a:t>
             </a:r>
           </a:p>
         </p:txBody>
@@ -817,12 +823,12 @@
           <a:lstStyle/>
           <a:p>
             <a:r>
-              <a:t>N1: Imagina una empresa que va a abrir zanja en la calle para poner fibra y no sabe que justo debajo pasa el gas. ¿Qué manda la ITC?</a:t>
-            </a:r>
-          </a:p>
-          <a:p>
-            <a:r>
-              <a:t>N2: Aquí está una de las preguntas más golosas del tema, porque son tres plazos seguidos y hay que decirlos en orden. La idea de fondo es de puro sentido común: antes de tocar la vía pública donde hay red de gas, hay que preguntar a la compañía dónde están sus tubos. Ahora los tres números. Primero, esa empresa avisa y solicita información al distribuidor con una antelación mínima de treinta días antes de empezar; y lo hace por escrito, por carta, fax o correo, indicando la localización concreta. Segundo, el distribuidor tiene un plazo máximo de veinte días para contestar con la mejor información disponible de dónde están sus instalaciones, qué normas hay que respetar cerca y cómo contactar con el servicio de urgencias. Y tercero, cuando la empresa ya va a arrancar de verdad, comunica el inicio de los trabajos con al menos veinticuatro horas de antelación. El truco temporal para clavarlo: pido con treinta, me contestan en veinte, aviso con veinticuatro horas. Y ojo, el solicitante no puede empezar a picar hasta haber recibido y aceptado formalmente esa información.</a:t>
+              <a:t>N1: ¿Por qué la a?</a:t>
+            </a:r>
+          </a:p>
+          <a:p>
+            <a:r>
+              <a:t>N2: Porque lo que dispara la urgencia es la proximidad a propiedades y edificios y el uso que se les da: junto a una vivienda el gas se acumula y hace daño. También cuentan el tipo de gas, la presión de operación y el detector, pero la cercanía es la que más pesa.</a:t>
             </a:r>
           </a:p>
         </p:txBody>
@@ -892,12 +898,12 @@
           <a:lstStyle/>
           <a:p>
             <a:r>
-              <a:t>N1: ¿Y si la obra que quiere hacer ese tercero choca de frente con la tubería de gas? ¿Quién decide entonces?</a:t>
-            </a:r>
-          </a:p>
-          <a:p>
-            <a:r>
-              <a:t>N2: Vamos por pasos, porque hay tres piezas. Primera: si la obra prevista afecta directamente al trazado o a la localización de la red de gas, el distribuidor puede negarse a que se haga. Segunda, y muy importante, no se puede negar por capricho ni porque le moleste: solo por razones técnicas o de seguridad. Tercera: si el que quiere hacer la obra no está de acuerdo con esa negativa, no decide ninguno de los dos por su cuenta; resuelve el órgano competente de la Comunidad Autónoma, que hace de árbitro. Y hay un matiz que cae en el examen y que mucha gente falla: la carga de probar que de verdad hay que hacer esa obra tocando el gas es del solicitante, del que quiere hacer la obra, no del distribuidor. Es decir, el que quiere picar es quien tiene que demostrar que no le queda otra. Todo este apartado, en el fondo, va de lo mismo: meter la excavadora a ciegas es reventar el tubo y provocar la fuga, así que la ley obliga a preguntar antes.</a:t>
+              <a:t>N1: Aparece una fuga o un daño y en ese momento no se puede arreglar bien del todo. ¿Qué se hace, se deja para mañana?</a:t>
+            </a:r>
+          </a:p>
+          <a:p>
+            <a:r>
+              <a:t>N2: Nunca se deja a medias. Lo que manda la norma es tomar una medida temporal, un parche seguro que quite el peligro de inmediato, y en cuanto sea posible hacer la reparación definitiva, la de verdad. El parche no es la solución, es solo un puente hasta la reparación buena, pero mientras tanto la instalación no queda peligrosa. Ahora, la regla sobre las pruebas, que tiene una excepción muy práctica. Regla general: después de tocar la red hay que repetir las pruebas en obra, resistencia y estanquidad, según las normas seiscientas. Excepción: si es una reparación puntual o un tramo de corta extensión, no hace falta montar todo el operativo de pruebas; basta con verificar que las uniones nuevas no fugan, y eso se hace con disolución jabonosa, que es echar agua con jabón sobre la junta: si burbujea, hay fuga. Ese es el truco de gasista que vas a usar toda la vida. Fíjate bien en la condición de la excepción, porque es lo que preguntan: solo vale para reparación puntual o tramo corto; en una intervención grande, pruebas completas.</a:t>
             </a:r>
           </a:p>
         </p:txBody>
@@ -967,12 +973,12 @@
           <a:lstStyle/>
           <a:p>
             <a:r>
-              <a:t>N1: Antes del gran cierre, ¿me das los golpes rápidos para comprobar que lo tengo todo?</a:t>
-            </a:r>
-          </a:p>
-          <a:p>
-            <a:r>
-              <a:t>N2: Cinco, y si los sueltas de carrerilla tienes el vídeo ganado. Uno: el centro de operación vigila dos parámetros de calidad, presión y odorizante, y sin odorante nadie huele la fuga. Dos: las urgencias de seguridad en casa del usuario son tres y forman lista cerrada, olor a gas, incendio o explosión, y la fuga de gas es de máxima prioridad. Tres: las fugas se clasifican en tres clases, urgente, programada y de vigilancia de progresión, y lo que más pesa para decidir es la proximidad a edificios. Cuatro: los plazos de las obras de terceros, treinta días para avisar, veinte para que el distribuidor conteste y veinticuatro horas antes de empezar. Y cinco, del archivo, las dos últimas estanquidades y cinco años para las intervenciones de seguridad y emergencias. Presión y odorante; olor, incendio y explosión; urgente, programada y vigilancia; treinta, veinte y veinticuatro; dos últimas y cinco años. Con esos cinco bloques vas sobrado.</a:t>
+              <a:t>N1: Cuando se reabre el gas y se trabaja con posible salida de gas, ¿qué reflejos de seguridad no pueden faltar?</a:t>
+            </a:r>
+          </a:p>
+          <a:p>
+            <a:r>
+              <a:t>N2: Empecemos por el momento de reabrir. Si durante la intervención pudo entrar aire en la tubería, antes de volver a dar servicio hay que purgar la red por sus extremos, es decir, echar ese aire fuera por las puntas antes de que se mezcle con el gas. ¿Por qué? Porque, como aprendiste en el vídeo anterior, el peligro es justamente la mezcla aire-gas. Y mientras se trabaja con posible salida de gas, cuatro reflejos que conviene memorizar juntos, como un solo bloque. Uno, detectar la presencia de gas, con el detector, para saber si hay gas en el aire. Dos, señalizar y controlar la zona de trabajo, para que nadie entre por descuido. Tres, retirar las fuentes de ignición que no sean imprescindibles, es decir, todo lo que pueda dar una chispa o una llama. Y cuatro, tener a mano el equipo de extinción específico, el extintor adecuado por si acaso. Detectar, señalizar, retirar chispas y extintor. Esos cuatro gestos te cubren en cualquier intervención con gas, y son exactamente los mismos que vas a repetir tú en obra.</a:t>
             </a:r>
           </a:p>
         </p:txBody>
@@ -1042,22 +1048,237 @@
           <a:lstStyle/>
           <a:p>
             <a:r>
-              <a:t>N1: Y con esto cerramos no solo el vídeo, sino el tema entero. Si me llevo cuatro conquistas, ¿cuáles?</a:t>
-            </a:r>
-          </a:p>
-          <a:p>
-            <a:r>
-              <a:t>N2: Estas cuatro, y deja que te reconstruya el hilo, porque cada una tiene su porqué. Una: reconoces los tres plazos de las obras de terceros, treinta días para avisar, veinte para que el distribuidor conteste y veinticuatro horas antes de arrancar; y entiendes que existen para lo mismo, que nadie pique a ciegas sobre el gas. Dos: clasificas una fuga por su gravedad, urgente, programada o de vigilancia, y sabes que lo que la vuelve urgente no es tanto su tamaño como su cercanía a un edificio habitado, porque ahí el gas se acumula y hace daño. Tres: ante un daño aplicas primero el parche seguro y dejas la reparación definitiva para cuanto antes, sin dejar nada a medias, porque una instalación de gas a medias es un peligro. Y cuatro: cierras cualquier reparación puntual con el truco que usarás toda la vida, la disolución jabonosa, agua con jabón sobre la junta, y si burbujea, fuga.</a:t>
-            </a:r>
-          </a:p>
-          <a:p>
-            <a:r>
-              <a:t>N1: ¿Y por qué es tan potente terminar aquí?</a:t>
-            </a:r>
-          </a:p>
-          <a:p>
-            <a:r>
-              <a:t>N2: Por dos motivos que se dan la mano. En el examen, estos plazos y estas listas cerradas son de las preguntas que más caen, casi un regalo si te las sabes. Y en la obra son tu día a día de verdad: desde el vecino que llama porque huele a gas hasta la excavadora que hay que parar antes de que reviente un tubo. Piensa en el camino que has recorrido: en el primer vídeo vimos nacer la red, del papel a la puesta en servicio; en este la hemos mantenido viva, operándola, archivándola y protegiéndola las veinticuatro horas. Has cruzado entera la ITC-ICG cero uno, de principio a fin, justo la red de la calle que empalma con las instalaciones que vas a firmar tú. Hoy eres mucho más gasista que ayer, y no es un decir: dominas de arriba abajo la tubería que da de comer a todo un barrio. Enhorabuena, cierras el tema con nota. Nos vemos en la siguiente ITC.</a:t>
+              <a:t>N1: ¿Qué está obligado a archivar el distribuidor, y sobre todo con qué números?</a:t>
+            </a:r>
+          </a:p>
+          <a:p>
+            <a:r>
+              <a:t>N2: Vamos con lo que se guarda y, muy atento, con las cifras, que es lo que cae. Primero, el distribuidor tiene que contar con cartografía detallada de la red, o sea, el mapa de por dónde van todos los tubos, y permanentemente actualizada, siempre al día; un plano viejo puede provocar que alguien pique donde no debe. Segundo, guarda mientras la red esté en explotación la documentación de autorización y los proyectos, incluidos los resultados de las pruebas en obra, resistencia y estanquidad. Y ahora las dos cifras clave. Una: de las vigilancias y controles de estanquidad se guardan las dos últimas, no todo el histórico, las dos últimas. Otra: las intervenciones por motivos de seguridad y las actuaciones en emergencias se archivan un mínimo de cinco años. Truco para memorizarlo: mapa siempre, estanquidad las dos últimas, seguridad cinco años. Y un detalle que a veces intentan colar: el soporte da igual, vale papel o vale informático, con tal de que sea fiable. Si en un examen ves obligatoriamente en papel, es falso: lo que importa es que la información esté y sea de fiar.</a:t>
+            </a:r>
+          </a:p>
+        </p:txBody>
+      </p:sp>
+      <p:sp>
+        <p:nvSpPr>
+          <p:cNvPr id="4" name="Slide Number Placeholder 3"/>
+          <p:cNvSpPr>
+            <a:spLocks noGrp="1"/>
+          </p:cNvSpPr>
+          <p:nvPr>
+            <p:ph type="sldNum" idx="5" sz="quarter"/>
+          </p:nvPr>
+        </p:nvSpPr>
+        <p:spPr/>
+      </p:sp>
+    </p:spTree>
+  </p:cSld>
+  <p:clrMapOvr>
+    <a:masterClrMapping/>
+  </p:clrMapOvr>
+</p:notes>
+</file>
+
+<file path=ppt/notesSlides/notesSlide17.xml><?xml version="1.0" encoding="utf-8"?>
+<p:notes xmlns:a="http://schemas.openxmlformats.org/drawingml/2006/main" xmlns:p="http://schemas.openxmlformats.org/presentationml/2006/main" xmlns:r="http://schemas.openxmlformats.org/officeDocument/2006/relationships">
+  <p:cSld>
+    <p:spTree>
+      <p:nvGrpSpPr>
+        <p:cNvPr id="1" name=""/>
+        <p:cNvGrpSpPr/>
+        <p:nvPr/>
+      </p:nvGrpSpPr>
+      <p:grpSpPr>
+        <a:xfrm>
+          <a:off x="0" y="0"/>
+          <a:ext cx="0" cy="0"/>
+          <a:chOff x="0" y="0"/>
+          <a:chExt cx="0" cy="0"/>
+        </a:xfrm>
+      </p:grpSpPr>
+      <p:sp>
+        <p:nvSpPr>
+          <p:cNvPr id="2" name="Slide Image Placeholder 1"/>
+          <p:cNvSpPr>
+            <a:spLocks noGrp="1"/>
+          </p:cNvSpPr>
+          <p:nvPr>
+            <p:ph type="sldImg" idx="2"/>
+          </p:nvPr>
+        </p:nvSpPr>
+        <p:spPr/>
+      </p:sp>
+      <p:sp>
+        <p:nvSpPr>
+          <p:cNvPr id="3" name="Notes Placeholder 2"/>
+          <p:cNvSpPr>
+            <a:spLocks noGrp="1"/>
+          </p:cNvSpPr>
+          <p:nvPr>
+            <p:ph type="body" idx="3" sz="quarter"/>
+          </p:nvPr>
+        </p:nvSpPr>
+        <p:spPr/>
+        <p:txBody>
+          <a:bodyPr/>
+          <a:lstStyle/>
+          <a:p>
+            <a:r>
+              <a:t>N1: Imagina una empresa que va a abrir zanja en la calle para poner fibra y no sabe que justo debajo pasa el gas. ¿Qué manda la ITC?</a:t>
+            </a:r>
+          </a:p>
+          <a:p>
+            <a:r>
+              <a:t>N2: Aquí está una de las preguntas más golosas del tema, porque son tres plazos seguidos y hay que decirlos en orden. La idea de fondo es de puro sentido común: antes de tocar la vía pública donde hay red de gas, hay que preguntar a la compañía dónde están sus tubos. Ahora los tres números. Primero, esa empresa avisa y solicita información al distribuidor con una antelación mínima de treinta días antes de empezar; y lo hace por escrito, por carta, fax o correo, indicando la localización concreta. Segundo, el distribuidor tiene un plazo máximo de veinte días para contestar con la mejor información disponible de dónde están sus instalaciones, qué normas hay que respetar cerca y cómo contactar con el servicio de urgencias. Y tercero, cuando la empresa ya va a arrancar de verdad, comunica el inicio de los trabajos con al menos veinticuatro horas de antelación. El truco temporal para clavarlo: pido con treinta, me contestan en veinte, aviso con veinticuatro horas. Y ojo, el solicitante no puede empezar a picar hasta haber recibido y aceptado formalmente esa información.</a:t>
+            </a:r>
+          </a:p>
+        </p:txBody>
+      </p:sp>
+      <p:sp>
+        <p:nvSpPr>
+          <p:cNvPr id="4" name="Slide Number Placeholder 3"/>
+          <p:cNvSpPr>
+            <a:spLocks noGrp="1"/>
+          </p:cNvSpPr>
+          <p:nvPr>
+            <p:ph type="sldNum" idx="5" sz="quarter"/>
+          </p:nvPr>
+        </p:nvSpPr>
+        <p:spPr/>
+      </p:sp>
+    </p:spTree>
+  </p:cSld>
+  <p:clrMapOvr>
+    <a:masterClrMapping/>
+  </p:clrMapOvr>
+</p:notes>
+</file>
+
+<file path=ppt/notesSlides/notesSlide18.xml><?xml version="1.0" encoding="utf-8"?>
+<p:notes xmlns:a="http://schemas.openxmlformats.org/drawingml/2006/main" xmlns:p="http://schemas.openxmlformats.org/presentationml/2006/main" xmlns:r="http://schemas.openxmlformats.org/officeDocument/2006/relationships">
+  <p:cSld>
+    <p:spTree>
+      <p:nvGrpSpPr>
+        <p:cNvPr id="1" name=""/>
+        <p:cNvGrpSpPr/>
+        <p:nvPr/>
+      </p:nvGrpSpPr>
+      <p:grpSpPr>
+        <a:xfrm>
+          <a:off x="0" y="0"/>
+          <a:ext cx="0" cy="0"/>
+          <a:chOff x="0" y="0"/>
+          <a:chExt cx="0" cy="0"/>
+        </a:xfrm>
+      </p:grpSpPr>
+      <p:sp>
+        <p:nvSpPr>
+          <p:cNvPr id="2" name="Slide Image Placeholder 1"/>
+          <p:cNvSpPr>
+            <a:spLocks noGrp="1"/>
+          </p:cNvSpPr>
+          <p:nvPr>
+            <p:ph type="sldImg" idx="2"/>
+          </p:nvPr>
+        </p:nvSpPr>
+        <p:spPr/>
+      </p:sp>
+      <p:sp>
+        <p:nvSpPr>
+          <p:cNvPr id="3" name="Notes Placeholder 2"/>
+          <p:cNvSpPr>
+            <a:spLocks noGrp="1"/>
+          </p:cNvSpPr>
+          <p:nvPr>
+            <p:ph type="body" idx="3" sz="quarter"/>
+          </p:nvPr>
+        </p:nvSpPr>
+        <p:spPr/>
+        <p:txBody>
+          <a:bodyPr/>
+          <a:lstStyle/>
+          <a:p>
+            <a:r>
+              <a:t>N1: Tres números seguidos, y el orden importa.</a:t>
+            </a:r>
+          </a:p>
+          <a:p>
+            <a:r>
+              <a:t>N2: Pido con antelación larga, me contestan algo más rápido y el arranque lo aviso con un día justo. ¿Cuántos días y horas exactos?</a:t>
+            </a:r>
+          </a:p>
+        </p:txBody>
+      </p:sp>
+      <p:sp>
+        <p:nvSpPr>
+          <p:cNvPr id="4" name="Slide Number Placeholder 3"/>
+          <p:cNvSpPr>
+            <a:spLocks noGrp="1"/>
+          </p:cNvSpPr>
+          <p:nvPr>
+            <p:ph type="sldNum" idx="5" sz="quarter"/>
+          </p:nvPr>
+        </p:nvSpPr>
+        <p:spPr/>
+      </p:sp>
+    </p:spTree>
+  </p:cSld>
+  <p:clrMapOvr>
+    <a:masterClrMapping/>
+  </p:clrMapOvr>
+</p:notes>
+</file>
+
+<file path=ppt/notesSlides/notesSlide19.xml><?xml version="1.0" encoding="utf-8"?>
+<p:notes xmlns:a="http://schemas.openxmlformats.org/drawingml/2006/main" xmlns:p="http://schemas.openxmlformats.org/presentationml/2006/main" xmlns:r="http://schemas.openxmlformats.org/officeDocument/2006/relationships">
+  <p:cSld>
+    <p:spTree>
+      <p:nvGrpSpPr>
+        <p:cNvPr id="1" name=""/>
+        <p:cNvGrpSpPr/>
+        <p:nvPr/>
+      </p:nvGrpSpPr>
+      <p:grpSpPr>
+        <a:xfrm>
+          <a:off x="0" y="0"/>
+          <a:ext cx="0" cy="0"/>
+          <a:chOff x="0" y="0"/>
+          <a:chExt cx="0" cy="0"/>
+        </a:xfrm>
+      </p:grpSpPr>
+      <p:sp>
+        <p:nvSpPr>
+          <p:cNvPr id="2" name="Slide Image Placeholder 1"/>
+          <p:cNvSpPr>
+            <a:spLocks noGrp="1"/>
+          </p:cNvSpPr>
+          <p:nvPr>
+            <p:ph type="sldImg" idx="2"/>
+          </p:nvPr>
+        </p:nvSpPr>
+        <p:spPr/>
+      </p:sp>
+      <p:sp>
+        <p:nvSpPr>
+          <p:cNvPr id="3" name="Notes Placeholder 2"/>
+          <p:cNvSpPr>
+            <a:spLocks noGrp="1"/>
+          </p:cNvSpPr>
+          <p:nvPr>
+            <p:ph type="body" idx="3" sz="quarter"/>
+          </p:nvPr>
+        </p:nvSpPr>
+        <p:spPr/>
+        <p:txBody>
+          <a:bodyPr/>
+          <a:lstStyle/>
+          <a:p>
+            <a:r>
+              <a:t>N1: ¿Por qué la a?</a:t>
+            </a:r>
+          </a:p>
+          <a:p>
+            <a:r>
+              <a:t>N2: Porque el truco temporal es: pido con treinta, me contestan en veinte, aviso con veinticuatro horas. Las demás bailan los números. Y ojo, no se puede empezar hasta recibir y aceptar formalmente la información.</a:t>
             </a:r>
           </a:p>
         </p:txBody>
@@ -1157,6 +1378,241 @@
 </p:notes>
 </file>
 
+<file path=ppt/notesSlides/notesSlide20.xml><?xml version="1.0" encoding="utf-8"?>
+<p:notes xmlns:a="http://schemas.openxmlformats.org/drawingml/2006/main" xmlns:p="http://schemas.openxmlformats.org/presentationml/2006/main" xmlns:r="http://schemas.openxmlformats.org/officeDocument/2006/relationships">
+  <p:cSld>
+    <p:spTree>
+      <p:nvGrpSpPr>
+        <p:cNvPr id="1" name=""/>
+        <p:cNvGrpSpPr/>
+        <p:nvPr/>
+      </p:nvGrpSpPr>
+      <p:grpSpPr>
+        <a:xfrm>
+          <a:off x="0" y="0"/>
+          <a:ext cx="0" cy="0"/>
+          <a:chOff x="0" y="0"/>
+          <a:chExt cx="0" cy="0"/>
+        </a:xfrm>
+      </p:grpSpPr>
+      <p:sp>
+        <p:nvSpPr>
+          <p:cNvPr id="2" name="Slide Image Placeholder 1"/>
+          <p:cNvSpPr>
+            <a:spLocks noGrp="1"/>
+          </p:cNvSpPr>
+          <p:nvPr>
+            <p:ph type="sldImg" idx="2"/>
+          </p:nvPr>
+        </p:nvSpPr>
+        <p:spPr/>
+      </p:sp>
+      <p:sp>
+        <p:nvSpPr>
+          <p:cNvPr id="3" name="Notes Placeholder 2"/>
+          <p:cNvSpPr>
+            <a:spLocks noGrp="1"/>
+          </p:cNvSpPr>
+          <p:nvPr>
+            <p:ph type="body" idx="3" sz="quarter"/>
+          </p:nvPr>
+        </p:nvSpPr>
+        <p:spPr/>
+        <p:txBody>
+          <a:bodyPr/>
+          <a:lstStyle/>
+          <a:p>
+            <a:r>
+              <a:t>N1: ¿Y si la obra que quiere hacer ese tercero choca de frente con la tubería de gas? ¿Quién decide entonces?</a:t>
+            </a:r>
+          </a:p>
+          <a:p>
+            <a:r>
+              <a:t>N2: Vamos por pasos, porque hay tres piezas. Primera: si la obra prevista afecta directamente al trazado o a la localización de la red de gas, el distribuidor puede negarse a que se haga. Segunda, y muy importante, no se puede negar por capricho ni porque le moleste: solo por razones técnicas o de seguridad. Tercera: si el que quiere hacer la obra no está de acuerdo con esa negativa, no decide ninguno de los dos por su cuenta; resuelve el órgano competente de la Comunidad Autónoma, que hace de árbitro. Y hay un matiz que cae en el examen y que mucha gente falla: la carga de probar que de verdad hay que hacer esa obra tocando el gas es del solicitante, del que quiere hacer la obra, no del distribuidor. Es decir, el que quiere picar es quien tiene que demostrar que no le queda otra. Todo este apartado, en el fondo, va de lo mismo: meter la excavadora a ciegas es reventar el tubo y provocar la fuga, así que la ley obliga a preguntar antes.</a:t>
+            </a:r>
+          </a:p>
+        </p:txBody>
+      </p:sp>
+      <p:sp>
+        <p:nvSpPr>
+          <p:cNvPr id="4" name="Slide Number Placeholder 3"/>
+          <p:cNvSpPr>
+            <a:spLocks noGrp="1"/>
+          </p:cNvSpPr>
+          <p:nvPr>
+            <p:ph type="sldNum" idx="5" sz="quarter"/>
+          </p:nvPr>
+        </p:nvSpPr>
+        <p:spPr/>
+      </p:sp>
+    </p:spTree>
+  </p:cSld>
+  <p:clrMapOvr>
+    <a:masterClrMapping/>
+  </p:clrMapOvr>
+</p:notes>
+</file>
+
+<file path=ppt/notesSlides/notesSlide21.xml><?xml version="1.0" encoding="utf-8"?>
+<p:notes xmlns:a="http://schemas.openxmlformats.org/drawingml/2006/main" xmlns:p="http://schemas.openxmlformats.org/presentationml/2006/main" xmlns:r="http://schemas.openxmlformats.org/officeDocument/2006/relationships">
+  <p:cSld>
+    <p:spTree>
+      <p:nvGrpSpPr>
+        <p:cNvPr id="1" name=""/>
+        <p:cNvGrpSpPr/>
+        <p:nvPr/>
+      </p:nvGrpSpPr>
+      <p:grpSpPr>
+        <a:xfrm>
+          <a:off x="0" y="0"/>
+          <a:ext cx="0" cy="0"/>
+          <a:chOff x="0" y="0"/>
+          <a:chExt cx="0" cy="0"/>
+        </a:xfrm>
+      </p:grpSpPr>
+      <p:sp>
+        <p:nvSpPr>
+          <p:cNvPr id="2" name="Slide Image Placeholder 1"/>
+          <p:cNvSpPr>
+            <a:spLocks noGrp="1"/>
+          </p:cNvSpPr>
+          <p:nvPr>
+            <p:ph type="sldImg" idx="2"/>
+          </p:nvPr>
+        </p:nvSpPr>
+        <p:spPr/>
+      </p:sp>
+      <p:sp>
+        <p:nvSpPr>
+          <p:cNvPr id="3" name="Notes Placeholder 2"/>
+          <p:cNvSpPr>
+            <a:spLocks noGrp="1"/>
+          </p:cNvSpPr>
+          <p:nvPr>
+            <p:ph type="body" idx="3" sz="quarter"/>
+          </p:nvPr>
+        </p:nvSpPr>
+        <p:spPr/>
+        <p:txBody>
+          <a:bodyPr/>
+          <a:lstStyle/>
+          <a:p>
+            <a:r>
+              <a:t>N1: Antes del gran cierre, ¿me das los golpes rápidos para comprobar que lo tengo todo?</a:t>
+            </a:r>
+          </a:p>
+          <a:p>
+            <a:r>
+              <a:t>N2: Cinco, y si los sueltas de carrerilla tienes el vídeo ganado. Uno: el centro de operación vigila dos parámetros de calidad, presión y odorizante, y sin odorante nadie huele la fuga. Dos: las urgencias de seguridad en casa del usuario son tres y forman lista cerrada, olor a gas, incendio o explosión, y la fuga de gas es de máxima prioridad. Tres: las fugas se clasifican en tres clases, urgente, programada y de vigilancia de progresión, y lo que más pesa para decidir es la proximidad a edificios. Cuatro: los plazos de las obras de terceros, treinta días para avisar, veinte para que el distribuidor conteste y veinticuatro horas antes de empezar. Y cinco, del archivo, las dos últimas estanquidades y cinco años para las intervenciones de seguridad y emergencias. Presión y odorante; olor, incendio y explosión; urgente, programada y vigilancia; treinta, veinte y veinticuatro; dos últimas y cinco años. Con esos cinco bloques vas sobrado.</a:t>
+            </a:r>
+          </a:p>
+        </p:txBody>
+      </p:sp>
+      <p:sp>
+        <p:nvSpPr>
+          <p:cNvPr id="4" name="Slide Number Placeholder 3"/>
+          <p:cNvSpPr>
+            <a:spLocks noGrp="1"/>
+          </p:cNvSpPr>
+          <p:nvPr>
+            <p:ph type="sldNum" idx="5" sz="quarter"/>
+          </p:nvPr>
+        </p:nvSpPr>
+        <p:spPr/>
+      </p:sp>
+    </p:spTree>
+  </p:cSld>
+  <p:clrMapOvr>
+    <a:masterClrMapping/>
+  </p:clrMapOvr>
+</p:notes>
+</file>
+
+<file path=ppt/notesSlides/notesSlide22.xml><?xml version="1.0" encoding="utf-8"?>
+<p:notes xmlns:a="http://schemas.openxmlformats.org/drawingml/2006/main" xmlns:p="http://schemas.openxmlformats.org/presentationml/2006/main" xmlns:r="http://schemas.openxmlformats.org/officeDocument/2006/relationships">
+  <p:cSld>
+    <p:spTree>
+      <p:nvGrpSpPr>
+        <p:cNvPr id="1" name=""/>
+        <p:cNvGrpSpPr/>
+        <p:nvPr/>
+      </p:nvGrpSpPr>
+      <p:grpSpPr>
+        <a:xfrm>
+          <a:off x="0" y="0"/>
+          <a:ext cx="0" cy="0"/>
+          <a:chOff x="0" y="0"/>
+          <a:chExt cx="0" cy="0"/>
+        </a:xfrm>
+      </p:grpSpPr>
+      <p:sp>
+        <p:nvSpPr>
+          <p:cNvPr id="2" name="Slide Image Placeholder 1"/>
+          <p:cNvSpPr>
+            <a:spLocks noGrp="1"/>
+          </p:cNvSpPr>
+          <p:nvPr>
+            <p:ph type="sldImg" idx="2"/>
+          </p:nvPr>
+        </p:nvSpPr>
+        <p:spPr/>
+      </p:sp>
+      <p:sp>
+        <p:nvSpPr>
+          <p:cNvPr id="3" name="Notes Placeholder 2"/>
+          <p:cNvSpPr>
+            <a:spLocks noGrp="1"/>
+          </p:cNvSpPr>
+          <p:nvPr>
+            <p:ph type="body" idx="3" sz="quarter"/>
+          </p:nvPr>
+        </p:nvSpPr>
+        <p:spPr/>
+        <p:txBody>
+          <a:bodyPr/>
+          <a:lstStyle/>
+          <a:p>
+            <a:r>
+              <a:t>N1: Y con esto cerramos no solo el vídeo, sino el tema entero. Si me llevo cuatro conquistas, ¿cuáles?</a:t>
+            </a:r>
+          </a:p>
+          <a:p>
+            <a:r>
+              <a:t>N2: Estas cuatro, y deja que te reconstruya el hilo, porque cada una tiene su porqué. Una: reconoces los tres plazos de las obras de terceros, treinta días para avisar, veinte para que el distribuidor conteste y veinticuatro horas antes de arrancar; y entiendes que existen para lo mismo, que nadie pique a ciegas sobre el gas. Dos: clasificas una fuga por su gravedad, urgente, programada o de vigilancia, y sabes que lo que la vuelve urgente no es tanto su tamaño como su cercanía a un edificio habitado, porque ahí el gas se acumula y hace daño. Tres: ante un daño aplicas primero el parche seguro y dejas la reparación definitiva para cuanto antes, sin dejar nada a medias, porque una instalación de gas a medias es un peligro. Y cuatro: cierras cualquier reparación puntual con el truco que usarás toda la vida, la disolución jabonosa, agua con jabón sobre la junta, y si burbujea, fuga.</a:t>
+            </a:r>
+          </a:p>
+          <a:p>
+            <a:r>
+              <a:t>N1: ¿Y por qué es tan potente terminar aquí?</a:t>
+            </a:r>
+          </a:p>
+          <a:p>
+            <a:r>
+              <a:t>N2: Por dos motivos que se dan la mano. En el examen, estos plazos y estas listas cerradas son de las preguntas que más caen, casi un regalo si te las sabes. Y en la obra son tu día a día de verdad: desde el vecino que llama porque huele a gas hasta la excavadora que hay que parar antes de que reviente un tubo. Piensa en el camino que has recorrido: en el primer vídeo vimos nacer la red, del papel a la puesta en servicio; en este la hemos mantenido viva, operándola, archivándola y protegiéndola las veinticuatro horas. Has cruzado entera la ITC-ICG cero uno, de principio a fin, justo la red de la calle que empalma con las instalaciones que vas a firmar tú. Hoy eres mucho más gasista que ayer, y no es un decir: dominas de arriba abajo la tubería que da de comer a todo un barrio. Enhorabuena, cierras el tema con nota. Nos vemos en la siguiente ITC.</a:t>
+            </a:r>
+          </a:p>
+        </p:txBody>
+      </p:sp>
+      <p:sp>
+        <p:nvSpPr>
+          <p:cNvPr id="4" name="Slide Number Placeholder 3"/>
+          <p:cNvSpPr>
+            <a:spLocks noGrp="1"/>
+          </p:cNvSpPr>
+          <p:nvPr>
+            <p:ph type="sldNum" idx="5" sz="quarter"/>
+          </p:nvPr>
+        </p:nvSpPr>
+        <p:spPr/>
+      </p:sp>
+    </p:spTree>
+  </p:cSld>
+  <p:clrMapOvr>
+    <a:masterClrMapping/>
+  </p:clrMapOvr>
+</p:notes>
+</file>
+
 <file path=ppt/notesSlides/notesSlide3.xml><?xml version="1.0" encoding="utf-8"?>
 <p:notes xmlns:a="http://schemas.openxmlformats.org/drawingml/2006/main" xmlns:p="http://schemas.openxmlformats.org/presentationml/2006/main" xmlns:r="http://schemas.openxmlformats.org/officeDocument/2006/relationships">
   <p:cSld>
@@ -1418,12 +1874,12 @@
           <a:lstStyle/>
           <a:p>
             <a:r>
-              <a:t>N1: El centro de operación tiene cuatro funciones. ¿Cómo las ordeno para no liarme?</a:t>
-            </a:r>
-          </a:p>
-          <a:p>
-            <a:r>
-              <a:t>N2: Con una secuencia lógica en el tiempo, así no se te caen. Primera función, controlar: vigilar lo que pasa ahora mismo, presión y odorante, recopilar los registros de presión y los datos que llegan teleinformados desde las estaciones. Segunda, planificar: mirar al futuro con un plan de operación que garantice la continuidad del suministro para la próxima campaña, contando con el crecimiento previsto de la demanda. Tercera, informar: cada mes elabora un informe de calidad del gas donde resume los niveles de odorización y el valor medio del poder calorífico superior, que es la energía que lleva el gas, cuánto calienta. Y cuarta, programar: organiza los trabajos sobre las redes principales. Controlar, planificar, informar, programar. Y ojo a un detalle de examen que se cruza mucho: el dato del poder calorífico no se lo inventa el centro, se lo facilita el Gestor Técnico del Sistema, y con frecuencia horaria, cada hora, aunque el informe de calidad se elabore una sola vez al mes. No confundas el ritmo del dato, horario, con el ritmo del informe, mensual.</a:t>
+              <a:t>N1: Dos parámetros, ni uno más para esta pregunta.</a:t>
+            </a:r>
+          </a:p>
+          <a:p>
+            <a:r>
+              <a:t>N2: Uno hace que el gas llegue con fuerza; el otro hace que puedas olerlo si se escapa. Esos dos.</a:t>
             </a:r>
           </a:p>
         </p:txBody>
@@ -1493,12 +1949,12 @@
           <a:lstStyle/>
           <a:p>
             <a:r>
-              <a:t>N1: Aquí hay dos cosas que suenan casi igual y me lío: plan de emergencia y servicio de urgencias. ¿En qué se diferencian?</a:t>
-            </a:r>
-          </a:p>
-          <a:p>
-            <a:r>
-              <a:t>N2: Muy buena, porque es una trampa clásica. Una es un papel y la otra es un teléfono, quédate con eso. El plan de emergencia es el documento escrito que dice, con antelación y por escrito, qué hay que hacer y quién hace cada cosa cuando pasa algo gordo. Tiene ocho puntos que te conviene memorizar como una checklist: objeto y ámbito de aplicación, grados de emergencia, desarrollo de la emergencia, determinación de los responsables, etapas, notificación a los servicios públicos como policía, bomberos y sanitarios, análisis de emergencias y difusión del plan. La otra cosa es el servicio de atención de urgencias, que es el teléfono real que coge la llamada del vecino que dice huele a gas. Ese servicio tiene que estar permanente, las veinticuatro horas, con gente capaz de ir en campo y, si hace falta, activar el plan de emergencia y hacerlo en el menor tiempo posible. Resumen para no confundirlos: el plan es el papel que dice qué hacer; el servicio de urgencias es el teléfono y la furgoneta que lo hacen.</a:t>
+              <a:t>N1: ¿Por qué la a?</a:t>
+            </a:r>
+          </a:p>
+          <a:p>
+            <a:r>
+              <a:t>N2: Porque los dos parámetros de calidad que se vigilan siempre son la presión y el odorizante. El odorante es el que huele a huevo podrido: si falta, hay fuga y nadie la nota hasta que es tarde.</a:t>
             </a:r>
           </a:p>
         </p:txBody>
@@ -1568,12 +2024,12 @@
           <a:lstStyle/>
           <a:p>
             <a:r>
-              <a:t>N1: Si me preguntan qué incidencias de seguridad atiende el distribuidor en casa del usuario, ¿qué contesto?</a:t>
-            </a:r>
-          </a:p>
-          <a:p>
-            <a:r>
-              <a:t>N2: Tres, y es una lista cerrada, así que apréndetela tal cual: olor a gas, incendio o explosión. Ni más ni menos que esas tres. Los centros de atención de urgencias trabajan con procedimientos escritos que clasifican los avisos por prioridades, porque no todo lo que entra por teléfono es igual de grave. ¿Y cuál es el aviso de máxima prioridad, el que se atiende antes que nada? La fuga de gas. Cualquier condición que pueda generar riesgo va a lo más alto de la cola, y la resolución de esos casos de máxima prioridad tiene su sistemática marcada. Un detalle económico que a veces cae y sorprende: tener ese servicio de urgencias siempre disponible cuesta dinero, y ese coste se repercute a los usuarios, es decir, se lo cobran a la gente según diga el reglamento. Y guardan los registros de lo que hacen a disposición de la Administración, para poder demostrar cómo actuaron ante cada incidencia.</a:t>
+              <a:t>N1: El centro de operación tiene cuatro funciones. ¿Cómo las ordeno para no liarme?</a:t>
+            </a:r>
+          </a:p>
+          <a:p>
+            <a:r>
+              <a:t>N2: Con una secuencia lógica en el tiempo, así no se te caen. Primera función, controlar: vigilar lo que pasa ahora mismo, presión y odorante, recopilar los registros de presión y los datos que llegan teleinformados desde las estaciones. Segunda, planificar: mirar al futuro con un plan de operación que garantice la continuidad del suministro para la próxima campaña, contando con el crecimiento previsto de la demanda. Tercera, informar: cada mes elabora un informe de calidad del gas donde resume los niveles de odorización y el valor medio del poder calorífico superior, que es la energía que lleva el gas, cuánto calienta. Y cuarta, programar: organiza los trabajos sobre las redes principales. Controlar, planificar, informar, programar. Y ojo a un detalle de examen que se cruza mucho: el dato del poder calorífico no se lo inventa el centro, se lo facilita el Gestor Técnico del Sistema, y con frecuencia horaria, cada hora, aunque el informe de calidad se elabore una sola vez al mes. No confundas el ritmo del dato, horario, con el ritmo del informe, mensual.</a:t>
             </a:r>
           </a:p>
         </p:txBody>
@@ -1643,12 +2099,12 @@
           <a:lstStyle/>
           <a:p>
             <a:r>
-              <a:t>N1: El titular comprueba la estanquidad de la red. Cuando aparece una fuga, ¿cómo se clasifica?</a:t>
-            </a:r>
-          </a:p>
-          <a:p>
-            <a:r>
-              <a:t>N2: En tres clases, ordenadas de más a menos grave, y esta clasificación cae mucho. La primera, fuga de intervención urgente: hay peligro inmediato, hay que ir ya. La segunda, de intervención programada: hay que arreglarla sí o sí, pero se puede planificar la intervención con calma, para dentro de unos días. Y la tercera, de vigilancia de progresión: es tan pequeña o tan poco peligrosa que, de momento, solo se vigila por si va a más. Truco para el orden: urgente ahora, programada pronto, progresión la miro. Y aquí viene lo bueno, la pregunta con miga: ¿por qué la misma fuga puede ser urgente o solo de vigilancia? Porque depende sobre todo de dónde esté. Una fuga pequeña en pleno campo no es lo mismo que esa misma fuga pegada a un edificio habitado, donde el gas se puede acumular y hacer daño a la gente. Por eso, entre los factores que deciden la clase están las características del gas, la presión de operación y lo que diga el detector, pero el que más pesa es la proximidad a propiedades y edificios y el uso que se les da. La documentación de estos controles queda en poder del titular, a disposición de la Comunidad Autónoma.</a:t>
+              <a:t>N1: Aquí hay dos cosas que suenan casi igual y me lío: plan de emergencia y servicio de urgencias. ¿En qué se diferencian?</a:t>
+            </a:r>
+          </a:p>
+          <a:p>
+            <a:r>
+              <a:t>N2: Muy buena, porque es una trampa clásica. Una es un papel y la otra es un teléfono, quédate con eso. El plan de emergencia es el documento escrito que dice, con antelación y por escrito, qué hay que hacer y quién hace cada cosa cuando pasa algo gordo. Tiene ocho puntos que te conviene memorizar como una checklist: objeto y ámbito de aplicación, grados de emergencia, desarrollo de la emergencia, determinación de los responsables, etapas, notificación a los servicios públicos como policía, bomberos y sanitarios, análisis de emergencias y difusión del plan. La otra cosa es el servicio de atención de urgencias, que es el teléfono real que coge la llamada del vecino que dice huele a gas. Ese servicio tiene que estar permanente, las veinticuatro horas, con gente capaz de ir en campo y, si hace falta, activar el plan de emergencia y hacerlo en el menor tiempo posible. Resumen para no confundirlos: el plan es el papel que dice qué hacer; el servicio de urgencias es el teléfono y la furgoneta que lo hacen.</a:t>
             </a:r>
           </a:p>
         </p:txBody>
@@ -4734,7 +5190,7 @@
       </p:sp>
       <p:sp>
         <p:nvSpPr>
-          <p:cNvPr id="4" name="Rounded Rectangle 3"/>
+          <p:cNvPr id="4" name="Rectangle 3"/>
           <p:cNvSpPr/>
           <p:nvPr/>
         </p:nvSpPr>
@@ -4743,7 +5199,7 @@
             <a:off x="868680" y="2057400"/>
             <a:ext cx="1463040" cy="82296"/>
           </a:xfrm>
-          <a:prstGeom prst="roundRect">
+          <a:prstGeom prst="rect">
             <a:avLst/>
           </a:prstGeom>
           <a:solidFill>
@@ -4860,6 +5316,18 @@
   <p:clrMapOvr>
     <a:masterClrMapping/>
   </p:clrMapOvr>
+  <mc:AlternateContent xmlns:mc="http://schemas.openxmlformats.org/markup-compatibility/2006">
+    <mc:Choice xmlns:p14="http://schemas.microsoft.com/office/powerpoint/2010/main" Requires="p14">
+      <p:transition spd="med" p14:dur="700">
+        <p14:cube dir="l"/>
+      </p:transition>
+    </mc:Choice>
+    <mc:Fallback>
+      <p:transition spd="med">
+        <p:push dir="l"/>
+      </p:transition>
+    </mc:Fallback>
+  </mc:AlternateContent>
 </p:sld>
 </file>
 
@@ -4947,7 +5415,7 @@
                 </a:solidFill>
                 <a:latin typeface="Montserrat"/>
               </a:rPr>
-              <a:t>010 / 016</a:t>
+              <a:t>010 / 022</a:t>
             </a:r>
           </a:p>
         </p:txBody>
@@ -5015,7 +5483,7 @@
                 </a:solidFill>
                 <a:latin typeface="Montserrat"/>
               </a:rPr>
-              <a:t>APARTADO 6.4 · MANTENIMIENTO</a:t>
+              <a:t>APARTADO 6.2 · URGENCIAS DE SEGURIDAD</a:t>
             </a:r>
           </a:p>
         </p:txBody>
@@ -5049,14 +5517,14 @@
                 </a:solidFill>
                 <a:latin typeface="Montserrat"/>
               </a:rPr>
-              <a:t>Parche primero, reparación después</a:t>
-            </a:r>
-          </a:p>
-        </p:txBody>
-      </p:sp>
-      <p:sp>
-        <p:nvSpPr>
-          <p:cNvPr id="7" name="Rounded Rectangle 6"/>
+              <a:t>Olor, incendio o explosión</a:t>
+            </a:r>
+          </a:p>
+        </p:txBody>
+      </p:sp>
+      <p:sp>
+        <p:nvSpPr>
+          <p:cNvPr id="7" name="Rectangle 6"/>
           <p:cNvSpPr/>
           <p:nvPr/>
         </p:nvSpPr>
@@ -5065,7 +5533,7 @@
             <a:off x="868680" y="1627632"/>
             <a:ext cx="2011680" cy="73152"/>
           </a:xfrm>
-          <a:prstGeom prst="roundRect">
+          <a:prstGeom prst="rect">
             <a:avLst/>
           </a:prstGeom>
           <a:solidFill>
@@ -5107,7 +5575,7 @@
         <p:spPr>
           <a:xfrm>
             <a:off x="822960" y="1965960"/>
-            <a:ext cx="4983480" cy="4206240"/>
+            <a:ext cx="5029200" cy="4206240"/>
           </a:xfrm>
           <a:prstGeom prst="rect">
             <a:avLst/>
@@ -5141,7 +5609,7 @@
                 </a:solidFill>
                 <a:latin typeface="Montserrat"/>
               </a:rPr>
-              <a:t>Medida temporal si no hay reparación ya</a:t>
+              <a:t>Lista cerrada: olor, incendio, explosión</a:t>
             </a:r>
           </a:p>
           <a:p>
@@ -5166,7 +5634,7 @@
                 </a:solidFill>
                 <a:latin typeface="Montserrat"/>
               </a:rPr>
-              <a:t>Reparación definitiva en cuanto se pueda</a:t>
+              <a:t>Fuga de gas: máxima prioridad</a:t>
             </a:r>
           </a:p>
           <a:p>
@@ -5191,7 +5659,7 @@
                 </a:solidFill>
                 <a:latin typeface="Montserrat"/>
               </a:rPr>
-              <a:t>Tras intervenir: pruebas en obra</a:t>
+              <a:t>Avisos clasificados por prioridades</a:t>
             </a:r>
           </a:p>
           <a:p>
@@ -5216,21 +5684,21 @@
                 </a:solidFill>
                 <a:latin typeface="Montserrat"/>
               </a:rPr>
-              <a:t>Puntual o tramo corto: disolución jabonosa</a:t>
-            </a:r>
-          </a:p>
-        </p:txBody>
-      </p:sp>
-      <p:sp>
-        <p:nvSpPr>
-          <p:cNvPr id="9" name="imgph" descr="IMGQ:plumber applying soapy water pipe joint hands"/>
+              <a:t>El coste se repercute al usuario</a:t>
+            </a:r>
+          </a:p>
+        </p:txBody>
+      </p:sp>
+      <p:sp>
+        <p:nvSpPr>
+          <p:cNvPr id="9" name="imgph" descr="IMGQ:person smelling gas leak kitchen worried"/>
           <p:cNvSpPr/>
           <p:nvPr/>
         </p:nvSpPr>
         <p:spPr>
           <a:xfrm>
-            <a:off x="5806440" y="1051560"/>
-            <a:ext cx="5298947" cy="4629150"/>
+            <a:off x="6080760" y="1965960"/>
+            <a:ext cx="5303520" cy="4572000"/>
           </a:xfrm>
           <a:prstGeom prst="roundRect">
             <a:avLst/>
@@ -5275,8 +5743,8 @@
         </p:nvSpPr>
         <p:spPr>
           <a:xfrm>
-            <a:off x="6080760" y="2726055"/>
-            <a:ext cx="4750307" cy="1280160"/>
+            <a:off x="6355080" y="3611880"/>
+            <a:ext cx="4754880" cy="1280160"/>
           </a:xfrm>
           <a:prstGeom prst="rect">
             <a:avLst/>
@@ -5297,7 +5765,7 @@
                 </a:solidFill>
                 <a:latin typeface="Montserrat"/>
               </a:rPr>
-              <a:t>IMAGEN REALISTA</a:t>
+              <a:t>IMAGEN</a:t>
             </a:r>
           </a:p>
           <a:p>
@@ -5309,7 +5777,7 @@
                 </a:solidFill>
                 <a:latin typeface="Montserrat"/>
               </a:rPr>
-              <a:t>plumber applying soapy water pipe joint hands</a:t>
+              <a:t>person smelling gas leak kitchen worried</a:t>
             </a:r>
           </a:p>
         </p:txBody>
@@ -5319,6 +5787,18 @@
   <p:clrMapOvr>
     <a:masterClrMapping/>
   </p:clrMapOvr>
+  <mc:AlternateContent xmlns:mc="http://schemas.openxmlformats.org/markup-compatibility/2006">
+    <mc:Choice xmlns:p14="http://schemas.microsoft.com/office/powerpoint/2010/main" Requires="p14">
+      <p:transition spd="med" p14:dur="700">
+        <p14:cube dir="r"/>
+      </p:transition>
+    </mc:Choice>
+    <mc:Fallback>
+      <p:transition spd="med">
+        <p:push dir="r"/>
+      </p:transition>
+    </mc:Fallback>
+  </mc:AlternateContent>
 </p:sld>
 </file>
 
@@ -5406,7 +5886,7 @@
                 </a:solidFill>
                 <a:latin typeface="Montserrat"/>
               </a:rPr>
-              <a:t>011 / 016</a:t>
+              <a:t>011 / 022</a:t>
             </a:r>
           </a:p>
         </p:txBody>
@@ -5474,7 +5954,7 @@
                 </a:solidFill>
                 <a:latin typeface="Montserrat"/>
               </a:rPr>
-              <a:t>APARTADO 6.4 · SEGURIDAD AL INTERVENIR</a:t>
+              <a:t>APARTADO 6.3 · CONTROL DE ESTANQUIDAD</a:t>
             </a:r>
           </a:p>
         </p:txBody>
@@ -5508,14 +5988,14 @@
                 </a:solidFill>
                 <a:latin typeface="Montserrat"/>
               </a:rPr>
-              <a:t>Reflejos con gas fuera</a:t>
-            </a:r>
-          </a:p>
-        </p:txBody>
-      </p:sp>
-      <p:sp>
-        <p:nvSpPr>
-          <p:cNvPr id="7" name="Rounded Rectangle 6"/>
+              <a:t>Cazar y clasificar fugas</a:t>
+            </a:r>
+          </a:p>
+        </p:txBody>
+      </p:sp>
+      <p:sp>
+        <p:nvSpPr>
+          <p:cNvPr id="7" name="Rectangle 6"/>
           <p:cNvSpPr/>
           <p:nvPr/>
         </p:nvSpPr>
@@ -5524,7 +6004,7 @@
             <a:off x="868680" y="1627632"/>
             <a:ext cx="2011680" cy="73152"/>
           </a:xfrm>
-          <a:prstGeom prst="roundRect">
+          <a:prstGeom prst="rect">
             <a:avLst/>
           </a:prstGeom>
           <a:solidFill>
@@ -5565,8 +6045,8 @@
         </p:nvSpPr>
         <p:spPr>
           <a:xfrm>
-            <a:off x="822960" y="1965960"/>
-            <a:ext cx="4983480" cy="4206240"/>
+            <a:off x="6355080" y="1965960"/>
+            <a:ext cx="5029200" cy="4206240"/>
           </a:xfrm>
           <a:prstGeom prst="rect">
             <a:avLst/>
@@ -5600,7 +6080,7 @@
                 </a:solidFill>
                 <a:latin typeface="Montserrat"/>
               </a:rPr>
-              <a:t>Al reabrir: purga por los extremos</a:t>
+              <a:t>Urgente: voy ya</a:t>
             </a:r>
           </a:p>
           <a:p>
@@ -5625,7 +6105,7 @@
                 </a:solidFill>
                 <a:latin typeface="Montserrat"/>
               </a:rPr>
-              <a:t>Detectar presencia de gas</a:t>
+              <a:t>Programada: la planifico</a:t>
             </a:r>
           </a:p>
           <a:p>
@@ -5650,7 +6130,7 @@
                 </a:solidFill>
                 <a:latin typeface="Montserrat"/>
               </a:rPr>
-              <a:t>Señalizar y controlar la zona</a:t>
+              <a:t>Vigilancia de progresión: la vigilo</a:t>
             </a:r>
           </a:p>
           <a:p>
@@ -5675,21 +6155,21 @@
                 </a:solidFill>
                 <a:latin typeface="Montserrat"/>
               </a:rPr>
-              <a:t>Retirar chispas · extintor a mano</a:t>
-            </a:r>
-          </a:p>
-        </p:txBody>
-      </p:sp>
-      <p:sp>
-        <p:nvSpPr>
-          <p:cNvPr id="9" name="imgph" descr="IMGQ:gas works site safety signage cordon street"/>
+              <a:t>Lo que decide: la proximidad a edificios</a:t>
+            </a:r>
+          </a:p>
+        </p:txBody>
+      </p:sp>
+      <p:sp>
+        <p:nvSpPr>
+          <p:cNvPr id="9" name="imgph" descr="IMGQ:technician gas leak detector survey pipe"/>
           <p:cNvSpPr/>
           <p:nvPr/>
         </p:nvSpPr>
         <p:spPr>
           <a:xfrm>
-            <a:off x="5806440" y="1051560"/>
-            <a:ext cx="5298947" cy="4629150"/>
+            <a:off x="822960" y="1965960"/>
+            <a:ext cx="5303520" cy="4572000"/>
           </a:xfrm>
           <a:prstGeom prst="roundRect">
             <a:avLst/>
@@ -5734,8 +6214,8 @@
         </p:nvSpPr>
         <p:spPr>
           <a:xfrm>
-            <a:off x="6080760" y="2726055"/>
-            <a:ext cx="4750307" cy="1280160"/>
+            <a:off x="1097280" y="3611880"/>
+            <a:ext cx="4754880" cy="1280160"/>
           </a:xfrm>
           <a:prstGeom prst="rect">
             <a:avLst/>
@@ -5756,7 +6236,7 @@
                 </a:solidFill>
                 <a:latin typeface="Montserrat"/>
               </a:rPr>
-              <a:t>IMAGEN REALISTA</a:t>
+              <a:t>IMAGEN</a:t>
             </a:r>
           </a:p>
           <a:p>
@@ -5768,7 +6248,7 @@
                 </a:solidFill>
                 <a:latin typeface="Montserrat"/>
               </a:rPr>
-              <a:t>gas works site safety signage cordon street</a:t>
+              <a:t>technician gas leak detector survey pipe</a:t>
             </a:r>
           </a:p>
         </p:txBody>
@@ -5778,6 +6258,18 @@
   <p:clrMapOvr>
     <a:masterClrMapping/>
   </p:clrMapOvr>
+  <mc:AlternateContent xmlns:mc="http://schemas.openxmlformats.org/markup-compatibility/2006">
+    <mc:Choice xmlns:p14="http://schemas.microsoft.com/office/powerpoint/2010/main" Requires="p14">
+      <p:transition spd="med" p14:dur="700">
+        <p14:cube dir="l"/>
+      </p:transition>
+    </mc:Choice>
+    <mc:Fallback>
+      <p:transition spd="med">
+        <p:push dir="l"/>
+      </p:transition>
+    </mc:Fallback>
+  </mc:AlternateContent>
 </p:sld>
 </file>
 
@@ -5865,7 +6357,7 @@
                 </a:solidFill>
                 <a:latin typeface="Montserrat"/>
               </a:rPr>
-              <a:t>012 / 016</a:t>
+              <a:t>012 / 022</a:t>
             </a:r>
           </a:p>
         </p:txBody>
@@ -5906,84 +6398,16 @@
       </p:sp>
       <p:sp>
         <p:nvSpPr>
-          <p:cNvPr id="5" name="TextBox 4"/>
-          <p:cNvSpPr txBox="1"/>
-          <p:nvPr/>
-        </p:nvSpPr>
-        <p:spPr>
-          <a:xfrm>
-            <a:off x="822960" y="457200"/>
-            <a:ext cx="10058400" cy="365760"/>
-          </a:xfrm>
-          <a:prstGeom prst="rect">
-            <a:avLst/>
-          </a:prstGeom>
-          <a:noFill/>
-        </p:spPr>
-        <p:txBody>
-          <a:bodyPr wrap="square">
-            <a:spAutoFit/>
-          </a:bodyPr>
-          <a:lstStyle/>
-          <a:p>
-            <a:r>
-              <a:rPr sz="1300" b="1" i="0">
-                <a:solidFill>
-                  <a:srgbClr val="E8801A"/>
-                </a:solidFill>
-                <a:latin typeface="Montserrat"/>
-              </a:rPr>
-              <a:t>APARTADO 7 · REGISTRO Y ARCHIVO</a:t>
-            </a:r>
-          </a:p>
-        </p:txBody>
-      </p:sp>
-      <p:sp>
-        <p:nvSpPr>
-          <p:cNvPr id="6" name="TextBox 5"/>
-          <p:cNvSpPr txBox="1"/>
-          <p:nvPr/>
-        </p:nvSpPr>
-        <p:spPr>
-          <a:xfrm>
-            <a:off x="822960" y="868680"/>
-            <a:ext cx="10515600" cy="914400"/>
-          </a:xfrm>
-          <a:prstGeom prst="rect">
-            <a:avLst/>
-          </a:prstGeom>
-          <a:noFill/>
-        </p:spPr>
-        <p:txBody>
-          <a:bodyPr wrap="square">
-            <a:spAutoFit/>
-          </a:bodyPr>
-          <a:lstStyle/>
-          <a:p>
-            <a:r>
-              <a:rPr sz="2800" b="1" i="0">
-                <a:solidFill>
-                  <a:srgbClr val="1E2761"/>
-                </a:solidFill>
-                <a:latin typeface="Montserrat"/>
-              </a:rPr>
-              <a:t>Los papeles que se guardan</a:t>
-            </a:r>
-          </a:p>
-        </p:txBody>
-      </p:sp>
-      <p:sp>
-        <p:nvSpPr>
-          <p:cNvPr id="7" name="Rounded Rectangle 6"/>
+          <p:cNvPr id="5" name="Rectangle 4"/>
           <p:cNvSpPr/>
           <p:nvPr/>
         </p:nvSpPr>
         <p:spPr>
           <a:xfrm>
-            <a:off x="868680" y="1627632"/>
-            <a:ext cx="2011680" cy="73152"/>
-          </a:xfrm>
-          <a:prstGeom prst="roundRect">
+            <a:off x="0" y="0"/>
+            <a:ext cx="12191695" cy="1143000"/>
+          </a:xfrm>
+          <a:prstGeom prst="rect">
             <a:avLst/>
           </a:prstGeom>
           <a:solidFill>
@@ -6018,14 +6442,14 @@
       </p:sp>
       <p:sp>
         <p:nvSpPr>
-          <p:cNvPr id="8" name="TextBox 7"/>
+          <p:cNvPr id="6" name="TextBox 5"/>
           <p:cNvSpPr txBox="1"/>
           <p:nvPr/>
         </p:nvSpPr>
         <p:spPr>
           <a:xfrm>
-            <a:off x="822960" y="1965960"/>
-            <a:ext cx="4983480" cy="4206240"/>
+            <a:off x="822960" y="274320"/>
+            <a:ext cx="10515600" cy="640080"/>
           </a:xfrm>
           <a:prstGeom prst="rect">
             <a:avLst/>
@@ -6038,117 +6462,62 @@
           </a:bodyPr>
           <a:lstStyle/>
           <a:p>
-            <a:pPr>
-              <a:spcAft>
-                <a:spcPts val="1100"/>
-              </a:spcAft>
-            </a:pPr>
-            <a:r>
-              <a:rPr sz="1600" b="1" i="0">
-                <a:solidFill>
-                  <a:srgbClr val="E8801A"/>
-                </a:solidFill>
-                <a:latin typeface="Montserrat"/>
-              </a:rPr>
-              <a:t>▸  </a:t>
-            </a:r>
-            <a:r>
-              <a:rPr sz="1600" b="0" i="0">
-                <a:solidFill>
-                  <a:srgbClr val="1B2330"/>
-                </a:solidFill>
-                <a:latin typeface="Montserrat"/>
-              </a:rPr>
-              <a:t>Cartografía siempre actualizada</a:t>
-            </a:r>
-          </a:p>
-          <a:p>
-            <a:pPr>
-              <a:spcAft>
-                <a:spcPts val="1100"/>
-              </a:spcAft>
-            </a:pPr>
-            <a:r>
-              <a:rPr sz="1600" b="1" i="0">
-                <a:solidFill>
-                  <a:srgbClr val="E8801A"/>
-                </a:solidFill>
-                <a:latin typeface="Montserrat"/>
-              </a:rPr>
-              <a:t>▸  </a:t>
-            </a:r>
-            <a:r>
-              <a:rPr sz="1600" b="0" i="0">
-                <a:solidFill>
-                  <a:srgbClr val="1B2330"/>
-                </a:solidFill>
-                <a:latin typeface="Montserrat"/>
-              </a:rPr>
-              <a:t>Autorizaciones y proyectos con sus pruebas</a:t>
-            </a:r>
-          </a:p>
-          <a:p>
-            <a:pPr>
-              <a:spcAft>
-                <a:spcPts val="1100"/>
-              </a:spcAft>
-            </a:pPr>
-            <a:r>
-              <a:rPr sz="1600" b="1" i="0">
-                <a:solidFill>
-                  <a:srgbClr val="E8801A"/>
-                </a:solidFill>
-                <a:latin typeface="Montserrat"/>
-              </a:rPr>
-              <a:t>▸  </a:t>
-            </a:r>
-            <a:r>
-              <a:rPr sz="1600" b="0" i="0">
-                <a:solidFill>
-                  <a:srgbClr val="1B2330"/>
-                </a:solidFill>
-                <a:latin typeface="Montserrat"/>
-              </a:rPr>
-              <a:t>Estanquidad: las dos últimas</a:t>
-            </a:r>
-          </a:p>
-          <a:p>
-            <a:pPr>
-              <a:spcAft>
-                <a:spcPts val="1100"/>
-              </a:spcAft>
-            </a:pPr>
-            <a:r>
-              <a:rPr sz="1600" b="1" i="0">
-                <a:solidFill>
-                  <a:srgbClr val="E8801A"/>
-                </a:solidFill>
-                <a:latin typeface="Montserrat"/>
-              </a:rPr>
-              <a:t>▸  </a:t>
-            </a:r>
-            <a:r>
-              <a:rPr sz="1600" b="0" i="0">
-                <a:solidFill>
-                  <a:srgbClr val="1B2330"/>
-                </a:solidFill>
-                <a:latin typeface="Montserrat"/>
-              </a:rPr>
-              <a:t>Seguridad y emergencias: mínimo 5 años</a:t>
-            </a:r>
-          </a:p>
-        </p:txBody>
-      </p:sp>
-      <p:sp>
-        <p:nvSpPr>
-          <p:cNvPr id="9" name="imgph" descr="IMGQ:archive folders shelves documents office"/>
+            <a:r>
+              <a:rPr sz="2400" b="1" i="0">
+                <a:solidFill>
+                  <a:srgbClr val="FFFFFF"/>
+                </a:solidFill>
+                <a:latin typeface="Montserrat"/>
+              </a:rPr>
+              <a:t>⚡  PREGUNTA RÁPIDA</a:t>
+            </a:r>
+          </a:p>
+        </p:txBody>
+      </p:sp>
+      <p:sp>
+        <p:nvSpPr>
+          <p:cNvPr id="7" name="TextBox 6"/>
+          <p:cNvSpPr txBox="1"/>
+          <p:nvPr/>
+        </p:nvSpPr>
+        <p:spPr>
+          <a:xfrm>
+            <a:off x="822960" y="1508760"/>
+            <a:ext cx="10515600" cy="1371600"/>
+          </a:xfrm>
+          <a:prstGeom prst="rect">
+            <a:avLst/>
+          </a:prstGeom>
+          <a:noFill/>
+        </p:spPr>
+        <p:txBody>
+          <a:bodyPr wrap="square">
+            <a:spAutoFit/>
+          </a:bodyPr>
+          <a:lstStyle/>
+          <a:p>
+            <a:r>
+              <a:rPr sz="2400" b="1" i="0">
+                <a:solidFill>
+                  <a:srgbClr val="1E2761"/>
+                </a:solidFill>
+                <a:latin typeface="Montserrat"/>
+              </a:rPr>
+              <a:t>¿Qué factor pesa más para clasificar una fuga como urgente?</a:t>
+            </a:r>
+          </a:p>
+        </p:txBody>
+      </p:sp>
+      <p:sp>
+        <p:nvSpPr>
+          <p:cNvPr id="8" name="Rounded Rectangle 7"/>
           <p:cNvSpPr/>
           <p:nvPr/>
         </p:nvSpPr>
         <p:spPr>
           <a:xfrm>
-            <a:off x="5806440" y="1051560"/>
-            <a:ext cx="5298947" cy="4629150"/>
+            <a:off x="822960" y="3291840"/>
+            <a:ext cx="4983480" cy="1143000"/>
           </a:xfrm>
           <a:prstGeom prst="roundRect">
             <a:avLst/>
@@ -6187,14 +6556,58 @@
       </p:sp>
       <p:sp>
         <p:nvSpPr>
+          <p:cNvPr id="9" name="Rectangle 8"/>
+          <p:cNvSpPr/>
+          <p:nvPr/>
+        </p:nvSpPr>
+        <p:spPr>
+          <a:xfrm>
+            <a:off x="822960" y="3291840"/>
+            <a:ext cx="640080" cy="1143000"/>
+          </a:xfrm>
+          <a:prstGeom prst="rect">
+            <a:avLst/>
+          </a:prstGeom>
+          <a:solidFill>
+            <a:srgbClr val="1E2761"/>
+          </a:solidFill>
+          <a:ln>
+            <a:noFill/>
+          </a:ln>
+          <a:effectLst/>
+        </p:spPr>
+        <p:style>
+          <a:lnRef idx="1">
+            <a:schemeClr val="accent1"/>
+          </a:lnRef>
+          <a:fillRef idx="3">
+            <a:schemeClr val="accent1"/>
+          </a:fillRef>
+          <a:effectRef idx="2">
+            <a:schemeClr val="accent1"/>
+          </a:effectRef>
+          <a:fontRef idx="minor">
+            <a:schemeClr val="lt1"/>
+          </a:fontRef>
+        </p:style>
+        <p:txBody>
+          <a:bodyPr rtlCol="0" anchor="ctr"/>
+          <a:lstStyle/>
+          <a:p>
+            <a:pPr algn="ctr"/>
+          </a:p>
+        </p:txBody>
+      </p:sp>
+      <p:sp>
+        <p:nvSpPr>
           <p:cNvPr id="10" name="TextBox 9"/>
           <p:cNvSpPr txBox="1"/>
           <p:nvPr/>
         </p:nvSpPr>
         <p:spPr>
           <a:xfrm>
-            <a:off x="6080760" y="2726055"/>
-            <a:ext cx="4750307" cy="1280160"/>
+            <a:off x="822960" y="3611880"/>
+            <a:ext cx="640080" cy="548640"/>
           </a:xfrm>
           <a:prstGeom prst="rect">
             <a:avLst/>
@@ -6209,25 +6622,524 @@
           <a:p>
             <a:pPr algn="ctr"/>
             <a:r>
-              <a:rPr sz="1400" b="1" i="0">
-                <a:solidFill>
-                  <a:srgbClr val="64748B"/>
-                </a:solidFill>
-                <a:latin typeface="Montserrat"/>
-              </a:rPr>
-              <a:t>IMAGEN REALISTA</a:t>
-            </a:r>
-          </a:p>
+              <a:rPr sz="2200" b="1" i="0">
+                <a:solidFill>
+                  <a:srgbClr val="FFFFFF"/>
+                </a:solidFill>
+                <a:latin typeface="Montserrat"/>
+              </a:rPr>
+              <a:t>A</a:t>
+            </a:r>
+          </a:p>
+        </p:txBody>
+      </p:sp>
+      <p:sp>
+        <p:nvSpPr>
+          <p:cNvPr id="11" name="TextBox 10"/>
+          <p:cNvSpPr txBox="1"/>
+          <p:nvPr/>
+        </p:nvSpPr>
+        <p:spPr>
+          <a:xfrm>
+            <a:off x="1600200" y="3474720"/>
+            <a:ext cx="4114800" cy="868680"/>
+          </a:xfrm>
+          <a:prstGeom prst="rect">
+            <a:avLst/>
+          </a:prstGeom>
+          <a:noFill/>
+        </p:spPr>
+        <p:txBody>
+          <a:bodyPr wrap="square">
+            <a:spAutoFit/>
+          </a:bodyPr>
+          <a:lstStyle/>
+          <a:p>
+            <a:r>
+              <a:rPr sz="1400" b="0" i="0">
+                <a:solidFill>
+                  <a:srgbClr val="1B2330"/>
+                </a:solidFill>
+                <a:latin typeface="Montserrat"/>
+              </a:rPr>
+              <a:t>La proximidad de la fuga a edificios habitados</a:t>
+            </a:r>
+          </a:p>
+        </p:txBody>
+      </p:sp>
+      <p:sp>
+        <p:nvSpPr>
+          <p:cNvPr id="12" name="Rounded Rectangle 11"/>
+          <p:cNvSpPr/>
+          <p:nvPr/>
+        </p:nvSpPr>
+        <p:spPr>
+          <a:xfrm>
+            <a:off x="6355080" y="3291840"/>
+            <a:ext cx="4983480" cy="1143000"/>
+          </a:xfrm>
+          <a:prstGeom prst="roundRect">
+            <a:avLst/>
+          </a:prstGeom>
+          <a:solidFill>
+            <a:srgbClr val="F3F6FB"/>
+          </a:solidFill>
+          <a:ln w="12700">
+            <a:solidFill>
+              <a:srgbClr val="C7D2E6"/>
+            </a:solidFill>
+          </a:ln>
+          <a:effectLst/>
+        </p:spPr>
+        <p:style>
+          <a:lnRef idx="1">
+            <a:schemeClr val="accent1"/>
+          </a:lnRef>
+          <a:fillRef idx="3">
+            <a:schemeClr val="accent1"/>
+          </a:fillRef>
+          <a:effectRef idx="2">
+            <a:schemeClr val="accent1"/>
+          </a:effectRef>
+          <a:fontRef idx="minor">
+            <a:schemeClr val="lt1"/>
+          </a:fontRef>
+        </p:style>
+        <p:txBody>
+          <a:bodyPr rtlCol="0" anchor="ctr"/>
+          <a:lstStyle/>
           <a:p>
             <a:pPr algn="ctr"/>
-            <a:r>
-              <a:rPr sz="1100" b="0" i="1">
-                <a:solidFill>
-                  <a:srgbClr val="64748B"/>
-                </a:solidFill>
-                <a:latin typeface="Montserrat"/>
-              </a:rPr>
-              <a:t>archive folders shelves documents office</a:t>
+          </a:p>
+        </p:txBody>
+      </p:sp>
+      <p:sp>
+        <p:nvSpPr>
+          <p:cNvPr id="13" name="Rectangle 12"/>
+          <p:cNvSpPr/>
+          <p:nvPr/>
+        </p:nvSpPr>
+        <p:spPr>
+          <a:xfrm>
+            <a:off x="6355080" y="3291840"/>
+            <a:ext cx="640080" cy="1143000"/>
+          </a:xfrm>
+          <a:prstGeom prst="rect">
+            <a:avLst/>
+          </a:prstGeom>
+          <a:solidFill>
+            <a:srgbClr val="1E2761"/>
+          </a:solidFill>
+          <a:ln>
+            <a:noFill/>
+          </a:ln>
+          <a:effectLst/>
+        </p:spPr>
+        <p:style>
+          <a:lnRef idx="1">
+            <a:schemeClr val="accent1"/>
+          </a:lnRef>
+          <a:fillRef idx="3">
+            <a:schemeClr val="accent1"/>
+          </a:fillRef>
+          <a:effectRef idx="2">
+            <a:schemeClr val="accent1"/>
+          </a:effectRef>
+          <a:fontRef idx="minor">
+            <a:schemeClr val="lt1"/>
+          </a:fontRef>
+        </p:style>
+        <p:txBody>
+          <a:bodyPr rtlCol="0" anchor="ctr"/>
+          <a:lstStyle/>
+          <a:p>
+            <a:pPr algn="ctr"/>
+          </a:p>
+        </p:txBody>
+      </p:sp>
+      <p:sp>
+        <p:nvSpPr>
+          <p:cNvPr id="14" name="TextBox 13"/>
+          <p:cNvSpPr txBox="1"/>
+          <p:nvPr/>
+        </p:nvSpPr>
+        <p:spPr>
+          <a:xfrm>
+            <a:off x="6355080" y="3611880"/>
+            <a:ext cx="640080" cy="548640"/>
+          </a:xfrm>
+          <a:prstGeom prst="rect">
+            <a:avLst/>
+          </a:prstGeom>
+          <a:noFill/>
+        </p:spPr>
+        <p:txBody>
+          <a:bodyPr wrap="square">
+            <a:spAutoFit/>
+          </a:bodyPr>
+          <a:lstStyle/>
+          <a:p>
+            <a:pPr algn="ctr"/>
+            <a:r>
+              <a:rPr sz="2200" b="1" i="0">
+                <a:solidFill>
+                  <a:srgbClr val="FFFFFF"/>
+                </a:solidFill>
+                <a:latin typeface="Montserrat"/>
+              </a:rPr>
+              <a:t>B</a:t>
+            </a:r>
+          </a:p>
+        </p:txBody>
+      </p:sp>
+      <p:sp>
+        <p:nvSpPr>
+          <p:cNvPr id="15" name="TextBox 14"/>
+          <p:cNvSpPr txBox="1"/>
+          <p:nvPr/>
+        </p:nvSpPr>
+        <p:spPr>
+          <a:xfrm>
+            <a:off x="7132320" y="3474720"/>
+            <a:ext cx="4114800" cy="868680"/>
+          </a:xfrm>
+          <a:prstGeom prst="rect">
+            <a:avLst/>
+          </a:prstGeom>
+          <a:noFill/>
+        </p:spPr>
+        <p:txBody>
+          <a:bodyPr wrap="square">
+            <a:spAutoFit/>
+          </a:bodyPr>
+          <a:lstStyle/>
+          <a:p>
+            <a:r>
+              <a:rPr sz="1400" b="0" i="0">
+                <a:solidFill>
+                  <a:srgbClr val="1B2330"/>
+                </a:solidFill>
+                <a:latin typeface="Montserrat"/>
+              </a:rPr>
+              <a:t>El color de la llama en los aparatos cercanos</a:t>
+            </a:r>
+          </a:p>
+        </p:txBody>
+      </p:sp>
+      <p:sp>
+        <p:nvSpPr>
+          <p:cNvPr id="16" name="Rounded Rectangle 15"/>
+          <p:cNvSpPr/>
+          <p:nvPr/>
+        </p:nvSpPr>
+        <p:spPr>
+          <a:xfrm>
+            <a:off x="822960" y="4617720"/>
+            <a:ext cx="4983480" cy="1143000"/>
+          </a:xfrm>
+          <a:prstGeom prst="roundRect">
+            <a:avLst/>
+          </a:prstGeom>
+          <a:solidFill>
+            <a:srgbClr val="F3F6FB"/>
+          </a:solidFill>
+          <a:ln w="12700">
+            <a:solidFill>
+              <a:srgbClr val="C7D2E6"/>
+            </a:solidFill>
+          </a:ln>
+          <a:effectLst/>
+        </p:spPr>
+        <p:style>
+          <a:lnRef idx="1">
+            <a:schemeClr val="accent1"/>
+          </a:lnRef>
+          <a:fillRef idx="3">
+            <a:schemeClr val="accent1"/>
+          </a:fillRef>
+          <a:effectRef idx="2">
+            <a:schemeClr val="accent1"/>
+          </a:effectRef>
+          <a:fontRef idx="minor">
+            <a:schemeClr val="lt1"/>
+          </a:fontRef>
+        </p:style>
+        <p:txBody>
+          <a:bodyPr rtlCol="0" anchor="ctr"/>
+          <a:lstStyle/>
+          <a:p>
+            <a:pPr algn="ctr"/>
+          </a:p>
+        </p:txBody>
+      </p:sp>
+      <p:sp>
+        <p:nvSpPr>
+          <p:cNvPr id="17" name="Rectangle 16"/>
+          <p:cNvSpPr/>
+          <p:nvPr/>
+        </p:nvSpPr>
+        <p:spPr>
+          <a:xfrm>
+            <a:off x="822960" y="4617720"/>
+            <a:ext cx="640080" cy="1143000"/>
+          </a:xfrm>
+          <a:prstGeom prst="rect">
+            <a:avLst/>
+          </a:prstGeom>
+          <a:solidFill>
+            <a:srgbClr val="1E2761"/>
+          </a:solidFill>
+          <a:ln>
+            <a:noFill/>
+          </a:ln>
+          <a:effectLst/>
+        </p:spPr>
+        <p:style>
+          <a:lnRef idx="1">
+            <a:schemeClr val="accent1"/>
+          </a:lnRef>
+          <a:fillRef idx="3">
+            <a:schemeClr val="accent1"/>
+          </a:fillRef>
+          <a:effectRef idx="2">
+            <a:schemeClr val="accent1"/>
+          </a:effectRef>
+          <a:fontRef idx="minor">
+            <a:schemeClr val="lt1"/>
+          </a:fontRef>
+        </p:style>
+        <p:txBody>
+          <a:bodyPr rtlCol="0" anchor="ctr"/>
+          <a:lstStyle/>
+          <a:p>
+            <a:pPr algn="ctr"/>
+          </a:p>
+        </p:txBody>
+      </p:sp>
+      <p:sp>
+        <p:nvSpPr>
+          <p:cNvPr id="18" name="TextBox 17"/>
+          <p:cNvSpPr txBox="1"/>
+          <p:nvPr/>
+        </p:nvSpPr>
+        <p:spPr>
+          <a:xfrm>
+            <a:off x="822960" y="4937760"/>
+            <a:ext cx="640080" cy="548640"/>
+          </a:xfrm>
+          <a:prstGeom prst="rect">
+            <a:avLst/>
+          </a:prstGeom>
+          <a:noFill/>
+        </p:spPr>
+        <p:txBody>
+          <a:bodyPr wrap="square">
+            <a:spAutoFit/>
+          </a:bodyPr>
+          <a:lstStyle/>
+          <a:p>
+            <a:pPr algn="ctr"/>
+            <a:r>
+              <a:rPr sz="2200" b="1" i="0">
+                <a:solidFill>
+                  <a:srgbClr val="FFFFFF"/>
+                </a:solidFill>
+                <a:latin typeface="Montserrat"/>
+              </a:rPr>
+              <a:t>C</a:t>
+            </a:r>
+          </a:p>
+        </p:txBody>
+      </p:sp>
+      <p:sp>
+        <p:nvSpPr>
+          <p:cNvPr id="19" name="TextBox 18"/>
+          <p:cNvSpPr txBox="1"/>
+          <p:nvPr/>
+        </p:nvSpPr>
+        <p:spPr>
+          <a:xfrm>
+            <a:off x="1600200" y="4800600"/>
+            <a:ext cx="4114800" cy="868680"/>
+          </a:xfrm>
+          <a:prstGeom prst="rect">
+            <a:avLst/>
+          </a:prstGeom>
+          <a:noFill/>
+        </p:spPr>
+        <p:txBody>
+          <a:bodyPr wrap="square">
+            <a:spAutoFit/>
+          </a:bodyPr>
+          <a:lstStyle/>
+          <a:p>
+            <a:r>
+              <a:rPr sz="1400" b="0" i="0">
+                <a:solidFill>
+                  <a:srgbClr val="1B2330"/>
+                </a:solidFill>
+                <a:latin typeface="Montserrat"/>
+              </a:rPr>
+              <a:t>La antigüedad de la tubería afectada</a:t>
+            </a:r>
+          </a:p>
+        </p:txBody>
+      </p:sp>
+      <p:sp>
+        <p:nvSpPr>
+          <p:cNvPr id="20" name="Rounded Rectangle 19"/>
+          <p:cNvSpPr/>
+          <p:nvPr/>
+        </p:nvSpPr>
+        <p:spPr>
+          <a:xfrm>
+            <a:off x="6355080" y="4617720"/>
+            <a:ext cx="4983480" cy="1143000"/>
+          </a:xfrm>
+          <a:prstGeom prst="roundRect">
+            <a:avLst/>
+          </a:prstGeom>
+          <a:solidFill>
+            <a:srgbClr val="F3F6FB"/>
+          </a:solidFill>
+          <a:ln w="12700">
+            <a:solidFill>
+              <a:srgbClr val="C7D2E6"/>
+            </a:solidFill>
+          </a:ln>
+          <a:effectLst/>
+        </p:spPr>
+        <p:style>
+          <a:lnRef idx="1">
+            <a:schemeClr val="accent1"/>
+          </a:lnRef>
+          <a:fillRef idx="3">
+            <a:schemeClr val="accent1"/>
+          </a:fillRef>
+          <a:effectRef idx="2">
+            <a:schemeClr val="accent1"/>
+          </a:effectRef>
+          <a:fontRef idx="minor">
+            <a:schemeClr val="lt1"/>
+          </a:fontRef>
+        </p:style>
+        <p:txBody>
+          <a:bodyPr rtlCol="0" anchor="ctr"/>
+          <a:lstStyle/>
+          <a:p>
+            <a:pPr algn="ctr"/>
+          </a:p>
+        </p:txBody>
+      </p:sp>
+      <p:sp>
+        <p:nvSpPr>
+          <p:cNvPr id="21" name="Rectangle 20"/>
+          <p:cNvSpPr/>
+          <p:nvPr/>
+        </p:nvSpPr>
+        <p:spPr>
+          <a:xfrm>
+            <a:off x="6355080" y="4617720"/>
+            <a:ext cx="640080" cy="1143000"/>
+          </a:xfrm>
+          <a:prstGeom prst="rect">
+            <a:avLst/>
+          </a:prstGeom>
+          <a:solidFill>
+            <a:srgbClr val="1E2761"/>
+          </a:solidFill>
+          <a:ln>
+            <a:noFill/>
+          </a:ln>
+          <a:effectLst/>
+        </p:spPr>
+        <p:style>
+          <a:lnRef idx="1">
+            <a:schemeClr val="accent1"/>
+          </a:lnRef>
+          <a:fillRef idx="3">
+            <a:schemeClr val="accent1"/>
+          </a:fillRef>
+          <a:effectRef idx="2">
+            <a:schemeClr val="accent1"/>
+          </a:effectRef>
+          <a:fontRef idx="minor">
+            <a:schemeClr val="lt1"/>
+          </a:fontRef>
+        </p:style>
+        <p:txBody>
+          <a:bodyPr rtlCol="0" anchor="ctr"/>
+          <a:lstStyle/>
+          <a:p>
+            <a:pPr algn="ctr"/>
+          </a:p>
+        </p:txBody>
+      </p:sp>
+      <p:sp>
+        <p:nvSpPr>
+          <p:cNvPr id="22" name="TextBox 21"/>
+          <p:cNvSpPr txBox="1"/>
+          <p:nvPr/>
+        </p:nvSpPr>
+        <p:spPr>
+          <a:xfrm>
+            <a:off x="6355080" y="4937760"/>
+            <a:ext cx="640080" cy="548640"/>
+          </a:xfrm>
+          <a:prstGeom prst="rect">
+            <a:avLst/>
+          </a:prstGeom>
+          <a:noFill/>
+        </p:spPr>
+        <p:txBody>
+          <a:bodyPr wrap="square">
+            <a:spAutoFit/>
+          </a:bodyPr>
+          <a:lstStyle/>
+          <a:p>
+            <a:pPr algn="ctr"/>
+            <a:r>
+              <a:rPr sz="2200" b="1" i="0">
+                <a:solidFill>
+                  <a:srgbClr val="FFFFFF"/>
+                </a:solidFill>
+                <a:latin typeface="Montserrat"/>
+              </a:rPr>
+              <a:t>D</a:t>
+            </a:r>
+          </a:p>
+        </p:txBody>
+      </p:sp>
+      <p:sp>
+        <p:nvSpPr>
+          <p:cNvPr id="23" name="TextBox 22"/>
+          <p:cNvSpPr txBox="1"/>
+          <p:nvPr/>
+        </p:nvSpPr>
+        <p:spPr>
+          <a:xfrm>
+            <a:off x="7132320" y="4800600"/>
+            <a:ext cx="4114800" cy="868680"/>
+          </a:xfrm>
+          <a:prstGeom prst="rect">
+            <a:avLst/>
+          </a:prstGeom>
+          <a:noFill/>
+        </p:spPr>
+        <p:txBody>
+          <a:bodyPr wrap="square">
+            <a:spAutoFit/>
+          </a:bodyPr>
+          <a:lstStyle/>
+          <a:p>
+            <a:r>
+              <a:rPr sz="1400" b="0" i="0">
+                <a:solidFill>
+                  <a:srgbClr val="1B2330"/>
+                </a:solidFill>
+                <a:latin typeface="Montserrat"/>
+              </a:rPr>
+              <a:t>El día de la semana en que se detecta</a:t>
             </a:r>
           </a:p>
         </p:txBody>
@@ -6237,6 +7149,18 @@
   <p:clrMapOvr>
     <a:masterClrMapping/>
   </p:clrMapOvr>
+  <mc:AlternateContent xmlns:mc="http://schemas.openxmlformats.org/markup-compatibility/2006">
+    <mc:Choice xmlns:p14="http://schemas.microsoft.com/office/powerpoint/2010/main" Requires="p14">
+      <p:transition spd="med" p14:dur="700">
+        <p14:cube dir="r"/>
+      </p:transition>
+    </mc:Choice>
+    <mc:Fallback>
+      <p:transition spd="med">
+        <p:push dir="r"/>
+      </p:transition>
+    </mc:Fallback>
+  </mc:AlternateContent>
 </p:sld>
 </file>
 
@@ -6324,7 +7248,7 @@
                 </a:solidFill>
                 <a:latin typeface="Montserrat"/>
               </a:rPr>
-              <a:t>013 / 016</a:t>
+              <a:t>013 / 022</a:t>
             </a:r>
           </a:p>
         </p:txBody>
@@ -6365,88 +7289,20 @@
       </p:sp>
       <p:sp>
         <p:nvSpPr>
-          <p:cNvPr id="5" name="TextBox 4"/>
-          <p:cNvSpPr txBox="1"/>
-          <p:nvPr/>
-        </p:nvSpPr>
-        <p:spPr>
-          <a:xfrm>
-            <a:off x="822960" y="457200"/>
-            <a:ext cx="10058400" cy="365760"/>
-          </a:xfrm>
-          <a:prstGeom prst="rect">
-            <a:avLst/>
-          </a:prstGeom>
-          <a:noFill/>
-        </p:spPr>
-        <p:txBody>
-          <a:bodyPr wrap="square">
-            <a:spAutoFit/>
-          </a:bodyPr>
-          <a:lstStyle/>
-          <a:p>
-            <a:r>
-              <a:rPr sz="1300" b="1" i="0">
-                <a:solidFill>
-                  <a:srgbClr val="E8801A"/>
-                </a:solidFill>
-                <a:latin typeface="Montserrat"/>
-              </a:rPr>
-              <a:t>APARTADO 8 · AFECCIONES POR TERCEROS</a:t>
-            </a:r>
-          </a:p>
-        </p:txBody>
-      </p:sp>
-      <p:sp>
-        <p:nvSpPr>
-          <p:cNvPr id="6" name="TextBox 5"/>
-          <p:cNvSpPr txBox="1"/>
-          <p:nvPr/>
-        </p:nvSpPr>
-        <p:spPr>
-          <a:xfrm>
-            <a:off x="822960" y="868680"/>
-            <a:ext cx="10515600" cy="914400"/>
-          </a:xfrm>
-          <a:prstGeom prst="rect">
-            <a:avLst/>
-          </a:prstGeom>
-          <a:noFill/>
-        </p:spPr>
-        <p:txBody>
-          <a:bodyPr wrap="square">
-            <a:spAutoFit/>
-          </a:bodyPr>
-          <a:lstStyle/>
-          <a:p>
-            <a:r>
-              <a:rPr sz="2800" b="1" i="0">
-                <a:solidFill>
-                  <a:srgbClr val="1E2761"/>
-                </a:solidFill>
-                <a:latin typeface="Montserrat"/>
-              </a:rPr>
-              <a:t>Antes de picar, pregunta</a:t>
-            </a:r>
-          </a:p>
-        </p:txBody>
-      </p:sp>
-      <p:sp>
-        <p:nvSpPr>
-          <p:cNvPr id="7" name="Rounded Rectangle 6"/>
+          <p:cNvPr id="5" name="Rectangle 4"/>
           <p:cNvSpPr/>
           <p:nvPr/>
         </p:nvSpPr>
         <p:spPr>
           <a:xfrm>
-            <a:off x="868680" y="1627632"/>
-            <a:ext cx="2011680" cy="73152"/>
-          </a:xfrm>
-          <a:prstGeom prst="roundRect">
+            <a:off x="0" y="0"/>
+            <a:ext cx="12191695" cy="1143000"/>
+          </a:xfrm>
+          <a:prstGeom prst="rect">
             <a:avLst/>
           </a:prstGeom>
           <a:solidFill>
-            <a:srgbClr val="E8801A"/>
+            <a:srgbClr val="1E8E4B"/>
           </a:solidFill>
           <a:ln>
             <a:noFill/>
@@ -6477,14 +7333,14 @@
       </p:sp>
       <p:sp>
         <p:nvSpPr>
-          <p:cNvPr id="8" name="TextBox 7"/>
+          <p:cNvPr id="6" name="TextBox 5"/>
           <p:cNvSpPr txBox="1"/>
           <p:nvPr/>
         </p:nvSpPr>
         <p:spPr>
           <a:xfrm>
-            <a:off x="822960" y="1965960"/>
-            <a:ext cx="4983480" cy="4206240"/>
+            <a:off x="822960" y="274320"/>
+            <a:ext cx="10515600" cy="640080"/>
           </a:xfrm>
           <a:prstGeom prst="rect">
             <a:avLst/>
@@ -6497,127 +7353,72 @@
           </a:bodyPr>
           <a:lstStyle/>
           <a:p>
-            <a:pPr>
-              <a:spcAft>
-                <a:spcPts val="1100"/>
-              </a:spcAft>
-            </a:pPr>
-            <a:r>
-              <a:rPr sz="1600" b="1" i="0">
-                <a:solidFill>
-                  <a:srgbClr val="E8801A"/>
-                </a:solidFill>
-                <a:latin typeface="Montserrat"/>
-              </a:rPr>
-              <a:t>▸  </a:t>
-            </a:r>
-            <a:r>
-              <a:rPr sz="1600" b="0" i="0">
-                <a:solidFill>
-                  <a:srgbClr val="1B2330"/>
-                </a:solidFill>
-                <a:latin typeface="Montserrat"/>
-              </a:rPr>
-              <a:t>Aviso al distribuidor: 30 días antes</a:t>
-            </a:r>
-          </a:p>
-          <a:p>
-            <a:pPr>
-              <a:spcAft>
-                <a:spcPts val="1100"/>
-              </a:spcAft>
-            </a:pPr>
-            <a:r>
-              <a:rPr sz="1600" b="1" i="0">
-                <a:solidFill>
-                  <a:srgbClr val="E8801A"/>
-                </a:solidFill>
-                <a:latin typeface="Montserrat"/>
-              </a:rPr>
-              <a:t>▸  </a:t>
-            </a:r>
-            <a:r>
-              <a:rPr sz="1600" b="0" i="0">
-                <a:solidFill>
-                  <a:srgbClr val="1B2330"/>
-                </a:solidFill>
-                <a:latin typeface="Montserrat"/>
-              </a:rPr>
-              <a:t>El distribuidor contesta en 20 días</a:t>
-            </a:r>
-          </a:p>
-          <a:p>
-            <a:pPr>
-              <a:spcAft>
-                <a:spcPts val="1100"/>
-              </a:spcAft>
-            </a:pPr>
-            <a:r>
-              <a:rPr sz="1600" b="1" i="0">
-                <a:solidFill>
-                  <a:srgbClr val="E8801A"/>
-                </a:solidFill>
-                <a:latin typeface="Montserrat"/>
-              </a:rPr>
-              <a:t>▸  </a:t>
-            </a:r>
-            <a:r>
-              <a:rPr sz="1600" b="0" i="0">
-                <a:solidFill>
-                  <a:srgbClr val="1B2330"/>
-                </a:solidFill>
-                <a:latin typeface="Montserrat"/>
-              </a:rPr>
-              <a:t>Inicio de obra: aviso 24 horas antes</a:t>
-            </a:r>
-          </a:p>
-          <a:p>
-            <a:pPr>
-              <a:spcAft>
-                <a:spcPts val="1100"/>
-              </a:spcAft>
-            </a:pPr>
-            <a:r>
-              <a:rPr sz="1600" b="1" i="0">
-                <a:solidFill>
-                  <a:srgbClr val="E8801A"/>
-                </a:solidFill>
-                <a:latin typeface="Montserrat"/>
-              </a:rPr>
-              <a:t>▸  </a:t>
-            </a:r>
-            <a:r>
-              <a:rPr sz="1600" b="0" i="0">
-                <a:solidFill>
-                  <a:srgbClr val="1B2330"/>
-                </a:solidFill>
-                <a:latin typeface="Montserrat"/>
-              </a:rPr>
-              <a:t>Todo por escrito, con la localización</a:t>
-            </a:r>
-          </a:p>
-        </p:txBody>
-      </p:sp>
-      <p:sp>
-        <p:nvSpPr>
-          <p:cNvPr id="9" name="imgph" descr="IMGQ:road excavation works underground utility pipes"/>
+            <a:r>
+              <a:rPr sz="2400" b="1" i="0">
+                <a:solidFill>
+                  <a:srgbClr val="FFFFFF"/>
+                </a:solidFill>
+                <a:latin typeface="Montserrat"/>
+              </a:rPr>
+              <a:t>✔  RESPUESTA:  A</a:t>
+            </a:r>
+          </a:p>
+        </p:txBody>
+      </p:sp>
+      <p:sp>
+        <p:nvSpPr>
+          <p:cNvPr id="7" name="TextBox 6"/>
+          <p:cNvSpPr txBox="1"/>
+          <p:nvPr/>
+        </p:nvSpPr>
+        <p:spPr>
+          <a:xfrm>
+            <a:off x="822960" y="1417320"/>
+            <a:ext cx="10515600" cy="914400"/>
+          </a:xfrm>
+          <a:prstGeom prst="rect">
+            <a:avLst/>
+          </a:prstGeom>
+          <a:noFill/>
+        </p:spPr>
+        <p:txBody>
+          <a:bodyPr wrap="square">
+            <a:spAutoFit/>
+          </a:bodyPr>
+          <a:lstStyle/>
+          <a:p>
+            <a:r>
+              <a:rPr sz="1800" b="1" i="0">
+                <a:solidFill>
+                  <a:srgbClr val="64748B"/>
+                </a:solidFill>
+                <a:latin typeface="Montserrat"/>
+              </a:rPr>
+              <a:t>¿Qué factor pesa más para clasificar una fuga como urgente?</a:t>
+            </a:r>
+          </a:p>
+        </p:txBody>
+      </p:sp>
+      <p:sp>
+        <p:nvSpPr>
+          <p:cNvPr id="8" name="Rounded Rectangle 7"/>
           <p:cNvSpPr/>
           <p:nvPr/>
         </p:nvSpPr>
         <p:spPr>
           <a:xfrm>
-            <a:off x="5806440" y="1051560"/>
-            <a:ext cx="5298947" cy="4629150"/>
+            <a:off x="822960" y="2514600"/>
+            <a:ext cx="10515600" cy="914400"/>
           </a:xfrm>
           <a:prstGeom prst="roundRect">
             <a:avLst/>
           </a:prstGeom>
           <a:solidFill>
-            <a:srgbClr val="F3F6FB"/>
+            <a:srgbClr val="E9F6EE"/>
           </a:solidFill>
           <a:ln w="12700">
             <a:solidFill>
-              <a:srgbClr val="C7D2E6"/>
+              <a:srgbClr val="1E8E4B"/>
             </a:solidFill>
           </a:ln>
           <a:effectLst/>
@@ -6646,14 +7447,14 @@
       </p:sp>
       <p:sp>
         <p:nvSpPr>
-          <p:cNvPr id="10" name="TextBox 9"/>
+          <p:cNvPr id="9" name="TextBox 8"/>
           <p:cNvSpPr txBox="1"/>
           <p:nvPr/>
         </p:nvSpPr>
         <p:spPr>
           <a:xfrm>
-            <a:off x="6080760" y="2726055"/>
-            <a:ext cx="4750307" cy="1280160"/>
+            <a:off x="1097280" y="2697480"/>
+            <a:ext cx="10058400" cy="640080"/>
           </a:xfrm>
           <a:prstGeom prst="rect">
             <a:avLst/>
@@ -6666,27 +7467,66 @@
           </a:bodyPr>
           <a:lstStyle/>
           <a:p>
-            <a:pPr algn="ctr"/>
-            <a:r>
-              <a:rPr sz="1400" b="1" i="0">
-                <a:solidFill>
-                  <a:srgbClr val="64748B"/>
-                </a:solidFill>
-                <a:latin typeface="Montserrat"/>
-              </a:rPr>
-              <a:t>IMAGEN REALISTA</a:t>
-            </a:r>
-          </a:p>
-          <a:p>
-            <a:pPr algn="ctr"/>
-            <a:r>
-              <a:rPr sz="1100" b="0" i="1">
-                <a:solidFill>
-                  <a:srgbClr val="64748B"/>
-                </a:solidFill>
-                <a:latin typeface="Montserrat"/>
-              </a:rPr>
-              <a:t>road excavation works underground utility pipes</a:t>
+            <a:r>
+              <a:rPr sz="1800" b="1" i="0">
+                <a:solidFill>
+                  <a:srgbClr val="1E8E4B"/>
+                </a:solidFill>
+                <a:latin typeface="Montserrat"/>
+              </a:rPr>
+              <a:t>A.  </a:t>
+            </a:r>
+            <a:r>
+              <a:rPr sz="1800" b="1" i="0">
+                <a:solidFill>
+                  <a:srgbClr val="1E2761"/>
+                </a:solidFill>
+                <a:latin typeface="Montserrat"/>
+              </a:rPr>
+              <a:t>La proximidad de la fuga a edificios habitados</a:t>
+            </a:r>
+          </a:p>
+        </p:txBody>
+      </p:sp>
+      <p:sp>
+        <p:nvSpPr>
+          <p:cNvPr id="10" name="TextBox 9"/>
+          <p:cNvSpPr txBox="1"/>
+          <p:nvPr/>
+        </p:nvSpPr>
+        <p:spPr>
+          <a:xfrm>
+            <a:off x="822960" y="3749039"/>
+            <a:ext cx="10515600" cy="2194560"/>
+          </a:xfrm>
+          <a:prstGeom prst="rect">
+            <a:avLst/>
+          </a:prstGeom>
+          <a:noFill/>
+        </p:spPr>
+        <p:txBody>
+          <a:bodyPr wrap="square">
+            <a:spAutoFit/>
+          </a:bodyPr>
+          <a:lstStyle/>
+          <a:p>
+            <a:r>
+              <a:rPr sz="1500" b="1" i="0">
+                <a:solidFill>
+                  <a:srgbClr val="E8801A"/>
+                </a:solidFill>
+                <a:latin typeface="Montserrat"/>
+              </a:rPr>
+              <a:t>Por qué:  </a:t>
+            </a:r>
+            <a:r>
+              <a:rPr sz="1500" b="0" i="0">
+                <a:solidFill>
+                  <a:srgbClr val="1B2330"/>
+                </a:solidFill>
+                <a:latin typeface="Montserrat"/>
+              </a:rPr>
+              <a:t>La misma fuga es urgente pegada a una vivienda y solo de vigilancia en campo abierto; decide la cercanía a propiedades y su uso.</a:t>
             </a:r>
           </a:p>
         </p:txBody>
@@ -6696,6 +7536,18 @@
   <p:clrMapOvr>
     <a:masterClrMapping/>
   </p:clrMapOvr>
+  <mc:AlternateContent xmlns:mc="http://schemas.openxmlformats.org/markup-compatibility/2006">
+    <mc:Choice xmlns:p14="http://schemas.microsoft.com/office/powerpoint/2010/main" Requires="p14">
+      <p:transition spd="med" p14:dur="700">
+        <p14:cube dir="l"/>
+      </p:transition>
+    </mc:Choice>
+    <mc:Fallback>
+      <p:transition spd="med">
+        <p:push dir="l"/>
+      </p:transition>
+    </mc:Fallback>
+  </mc:AlternateContent>
 </p:sld>
 </file>
 
@@ -6783,7 +7635,7 @@
                 </a:solidFill>
                 <a:latin typeface="Montserrat"/>
               </a:rPr>
-              <a:t>014 / 016</a:t>
+              <a:t>014 / 022</a:t>
             </a:r>
           </a:p>
         </p:txBody>
@@ -6851,7 +7703,7 @@
                 </a:solidFill>
                 <a:latin typeface="Montserrat"/>
               </a:rPr>
-              <a:t>APARTADO 8 · QUIÉN DECIDE</a:t>
+              <a:t>APARTADO 6.4 · MANTENIMIENTO</a:t>
             </a:r>
           </a:p>
         </p:txBody>
@@ -6885,14 +7737,14 @@
                 </a:solidFill>
                 <a:latin typeface="Montserrat"/>
               </a:rPr>
-              <a:t>Si hay pelea, manda la CA</a:t>
-            </a:r>
-          </a:p>
-        </p:txBody>
-      </p:sp>
-      <p:sp>
-        <p:nvSpPr>
-          <p:cNvPr id="7" name="Rounded Rectangle 6"/>
+              <a:t>Parche primero, reparación después</a:t>
+            </a:r>
+          </a:p>
+        </p:txBody>
+      </p:sp>
+      <p:sp>
+        <p:nvSpPr>
+          <p:cNvPr id="7" name="Rectangle 6"/>
           <p:cNvSpPr/>
           <p:nvPr/>
         </p:nvSpPr>
@@ -6901,7 +7753,7 @@
             <a:off x="868680" y="1627632"/>
             <a:ext cx="2011680" cy="73152"/>
           </a:xfrm>
-          <a:prstGeom prst="roundRect">
+          <a:prstGeom prst="rect">
             <a:avLst/>
           </a:prstGeom>
           <a:solidFill>
@@ -6943,7 +7795,7 @@
         <p:spPr>
           <a:xfrm>
             <a:off x="822960" y="1965960"/>
-            <a:ext cx="4983480" cy="4206240"/>
+            <a:ext cx="5029200" cy="4206240"/>
           </a:xfrm>
           <a:prstGeom prst="rect">
             <a:avLst/>
@@ -6977,7 +7829,7 @@
                 </a:solidFill>
                 <a:latin typeface="Montserrat"/>
               </a:rPr>
-              <a:t>Afecta al trazado: distribuidor puede negarse</a:t>
+              <a:t>Medida temporal si no hay reparación ya</a:t>
             </a:r>
           </a:p>
           <a:p>
@@ -7002,7 +7854,7 @@
                 </a:solidFill>
                 <a:latin typeface="Montserrat"/>
               </a:rPr>
-              <a:t>Solo por razones técnicas o de seguridad</a:t>
+              <a:t>Reparación definitiva en cuanto se pueda</a:t>
             </a:r>
           </a:p>
           <a:p>
@@ -7027,7 +7879,7 @@
                 </a:solidFill>
                 <a:latin typeface="Montserrat"/>
               </a:rPr>
-              <a:t>Desacuerdo: resuelve la Comunidad Autónoma</a:t>
+              <a:t>Tras intervenir: pruebas en obra</a:t>
             </a:r>
           </a:p>
           <a:p>
@@ -7052,21 +7904,21 @@
                 </a:solidFill>
                 <a:latin typeface="Montserrat"/>
               </a:rPr>
-              <a:t>La carga de probar es del solicitante</a:t>
-            </a:r>
-          </a:p>
-        </p:txBody>
-      </p:sp>
-      <p:sp>
-        <p:nvSpPr>
-          <p:cNvPr id="9" name="imgph" descr="IMGQ:two engineers discussing plans construction site"/>
+              <a:t>Puntual o tramo corto: disolución jabonosa</a:t>
+            </a:r>
+          </a:p>
+        </p:txBody>
+      </p:sp>
+      <p:sp>
+        <p:nvSpPr>
+          <p:cNvPr id="9" name="imgph" descr="IMGQ:plumber applying soapy water pipe joint hands"/>
           <p:cNvSpPr/>
           <p:nvPr/>
         </p:nvSpPr>
         <p:spPr>
           <a:xfrm>
-            <a:off x="5806440" y="1051560"/>
-            <a:ext cx="5298947" cy="4629150"/>
+            <a:off x="6080760" y="1965960"/>
+            <a:ext cx="5303520" cy="4572000"/>
           </a:xfrm>
           <a:prstGeom prst="roundRect">
             <a:avLst/>
@@ -7111,8 +7963,8 @@
         </p:nvSpPr>
         <p:spPr>
           <a:xfrm>
-            <a:off x="6080760" y="2726055"/>
-            <a:ext cx="4750307" cy="1280160"/>
+            <a:off x="6355080" y="3611880"/>
+            <a:ext cx="4754880" cy="1280160"/>
           </a:xfrm>
           <a:prstGeom prst="rect">
             <a:avLst/>
@@ -7133,7 +7985,7 @@
                 </a:solidFill>
                 <a:latin typeface="Montserrat"/>
               </a:rPr>
-              <a:t>IMAGEN REALISTA</a:t>
+              <a:t>IMAGEN</a:t>
             </a:r>
           </a:p>
           <a:p>
@@ -7145,7 +7997,7 @@
                 </a:solidFill>
                 <a:latin typeface="Montserrat"/>
               </a:rPr>
-              <a:t>two engineers discussing plans construction site</a:t>
+              <a:t>plumber applying soapy water pipe joint hands</a:t>
             </a:r>
           </a:p>
         </p:txBody>
@@ -7155,6 +8007,18 @@
   <p:clrMapOvr>
     <a:masterClrMapping/>
   </p:clrMapOvr>
+  <mc:AlternateContent xmlns:mc="http://schemas.openxmlformats.org/markup-compatibility/2006">
+    <mc:Choice xmlns:p14="http://schemas.microsoft.com/office/powerpoint/2010/main" Requires="p14">
+      <p:transition spd="med" p14:dur="700">
+        <p14:cube dir="r"/>
+      </p:transition>
+    </mc:Choice>
+    <mc:Fallback>
+      <p:transition spd="med">
+        <p:push dir="r"/>
+      </p:transition>
+    </mc:Fallback>
+  </mc:AlternateContent>
 </p:sld>
 </file>
 
@@ -7242,7 +8106,7 @@
                 </a:solidFill>
                 <a:latin typeface="Montserrat"/>
               </a:rPr>
-              <a:t>015 / 016</a:t>
+              <a:t>015 / 022</a:t>
             </a:r>
           </a:p>
         </p:txBody>
@@ -7310,7 +8174,7 @@
                 </a:solidFill>
                 <a:latin typeface="Montserrat"/>
               </a:rPr>
-              <a:t>REPASO RELÁMPAGO</a:t>
+              <a:t>APARTADO 6.4 · SEGURIDAD AL INTERVENIR</a:t>
             </a:r>
           </a:p>
         </p:txBody>
@@ -7344,14 +8208,14 @@
                 </a:solidFill>
                 <a:latin typeface="Montserrat"/>
               </a:rPr>
-              <a:t>Lo que no se te puede olvidar</a:t>
-            </a:r>
-          </a:p>
-        </p:txBody>
-      </p:sp>
-      <p:sp>
-        <p:nvSpPr>
-          <p:cNvPr id="7" name="Rounded Rectangle 6"/>
+              <a:t>Reflejos con gas fuera</a:t>
+            </a:r>
+          </a:p>
+        </p:txBody>
+      </p:sp>
+      <p:sp>
+        <p:nvSpPr>
+          <p:cNvPr id="7" name="Rectangle 6"/>
           <p:cNvSpPr/>
           <p:nvPr/>
         </p:nvSpPr>
@@ -7360,7 +8224,7 @@
             <a:off x="868680" y="1627632"/>
             <a:ext cx="2011680" cy="73152"/>
           </a:xfrm>
-          <a:prstGeom prst="roundRect">
+          <a:prstGeom prst="rect">
             <a:avLst/>
           </a:prstGeom>
           <a:solidFill>
@@ -7401,8 +8265,8 @@
         </p:nvSpPr>
         <p:spPr>
           <a:xfrm>
-            <a:off x="822960" y="1965960"/>
-            <a:ext cx="4983480" cy="4206240"/>
+            <a:off x="6355080" y="1965960"/>
+            <a:ext cx="5029200" cy="4206240"/>
           </a:xfrm>
           <a:prstGeom prst="rect">
             <a:avLst/>
@@ -7436,7 +8300,7 @@
                 </a:solidFill>
                 <a:latin typeface="Montserrat"/>
               </a:rPr>
-              <a:t>Dos parámetros: presión y odorizante</a:t>
+              <a:t>Al reabrir: purga por los extremos</a:t>
             </a:r>
           </a:p>
           <a:p>
@@ -7461,7 +8325,7 @@
                 </a:solidFill>
                 <a:latin typeface="Montserrat"/>
               </a:rPr>
-              <a:t>Urgencias: olor, incendio, explosión</a:t>
+              <a:t>Detectar presencia de gas</a:t>
             </a:r>
           </a:p>
           <a:p>
@@ -7486,7 +8350,7 @@
                 </a:solidFill>
                 <a:latin typeface="Montserrat"/>
               </a:rPr>
-              <a:t>Fugas: urgente, programada, vigilancia</a:t>
+              <a:t>Señalizar y controlar la zona</a:t>
             </a:r>
           </a:p>
           <a:p>
@@ -7511,46 +8375,21 @@
                 </a:solidFill>
                 <a:latin typeface="Montserrat"/>
               </a:rPr>
-              <a:t>Plazos de terceros: 30 · 20 · 24</a:t>
-            </a:r>
-          </a:p>
-          <a:p>
-            <a:pPr>
-              <a:spcAft>
-                <a:spcPts val="1100"/>
-              </a:spcAft>
-            </a:pPr>
-            <a:r>
-              <a:rPr sz="1600" b="1" i="0">
-                <a:solidFill>
-                  <a:srgbClr val="E8801A"/>
-                </a:solidFill>
-                <a:latin typeface="Montserrat"/>
-              </a:rPr>
-              <a:t>▸  </a:t>
-            </a:r>
-            <a:r>
-              <a:rPr sz="1600" b="0" i="0">
-                <a:solidFill>
-                  <a:srgbClr val="1B2330"/>
-                </a:solidFill>
-                <a:latin typeface="Montserrat"/>
-              </a:rPr>
-              <a:t>Archivo: dos últimas y cinco años</a:t>
-            </a:r>
-          </a:p>
-        </p:txBody>
-      </p:sp>
-      <p:sp>
-        <p:nvSpPr>
-          <p:cNvPr id="9" name="imgph" descr="IMGQ:gas cylinder cabinet outdoor building wall"/>
+              <a:t>Retirar chispas · extintor a mano</a:t>
+            </a:r>
+          </a:p>
+        </p:txBody>
+      </p:sp>
+      <p:sp>
+        <p:nvSpPr>
+          <p:cNvPr id="9" name="imgph" descr="IMGQ:gas works site safety signage cordon street"/>
           <p:cNvSpPr/>
           <p:nvPr/>
         </p:nvSpPr>
         <p:spPr>
           <a:xfrm>
-            <a:off x="5806440" y="1051560"/>
-            <a:ext cx="5298947" cy="4629150"/>
+            <a:off x="822960" y="1965960"/>
+            <a:ext cx="5303520" cy="4572000"/>
           </a:xfrm>
           <a:prstGeom prst="roundRect">
             <a:avLst/>
@@ -7595,8 +8434,8 @@
         </p:nvSpPr>
         <p:spPr>
           <a:xfrm>
-            <a:off x="6080760" y="2726055"/>
-            <a:ext cx="4750307" cy="1280160"/>
+            <a:off x="1097280" y="3611880"/>
+            <a:ext cx="4754880" cy="1280160"/>
           </a:xfrm>
           <a:prstGeom prst="rect">
             <a:avLst/>
@@ -7617,7 +8456,7 @@
                 </a:solidFill>
                 <a:latin typeface="Montserrat"/>
               </a:rPr>
-              <a:t>IMAGEN REALISTA</a:t>
+              <a:t>IMAGEN</a:t>
             </a:r>
           </a:p>
           <a:p>
@@ -7629,7 +8468,7 @@
                 </a:solidFill>
                 <a:latin typeface="Montserrat"/>
               </a:rPr>
-              <a:t>gas cylinder cabinet outdoor building wall</a:t>
+              <a:t>gas works site safety signage cordon street</a:t>
             </a:r>
           </a:p>
         </p:txBody>
@@ -7639,6 +8478,18 @@
   <p:clrMapOvr>
     <a:masterClrMapping/>
   </p:clrMapOvr>
+  <mc:AlternateContent xmlns:mc="http://schemas.openxmlformats.org/markup-compatibility/2006">
+    <mc:Choice xmlns:p14="http://schemas.microsoft.com/office/powerpoint/2010/main" Requires="p14">
+      <p:transition spd="med" p14:dur="700">
+        <p14:cube dir="l"/>
+      </p:transition>
+    </mc:Choice>
+    <mc:Fallback>
+      <p:transition spd="med">
+        <p:push dir="l"/>
+      </p:transition>
+    </mc:Fallback>
+  </mc:AlternateContent>
 </p:sld>
 </file>
 
@@ -7667,7 +8518,7 @@
             <a:avLst/>
           </a:prstGeom>
           <a:solidFill>
-            <a:srgbClr val="1E2761"/>
+            <a:srgbClr val="FFFFFF"/>
           </a:solidFill>
           <a:ln>
             <a:noFill/>
@@ -7704,8 +8555,8 @@
         </p:nvSpPr>
         <p:spPr>
           <a:xfrm>
-            <a:off x="822960" y="640080"/>
-            <a:ext cx="10515600" cy="457200"/>
+            <a:off x="10607040" y="320040"/>
+            <a:ext cx="1371600" cy="365760"/>
           </a:xfrm>
           <a:prstGeom prst="rect">
             <a:avLst/>
@@ -7718,30 +8569,133 @@
           </a:bodyPr>
           <a:lstStyle/>
           <a:p>
-            <a:r>
-              <a:rPr sz="1400" b="1" i="0">
-                <a:solidFill>
-                  <a:srgbClr val="F4A24C"/>
-                </a:solidFill>
-                <a:latin typeface="Montserrat"/>
-              </a:rPr>
-              <a:t>LO QUE YA DOMINAS</a:t>
-            </a:r>
-          </a:p>
-        </p:txBody>
-      </p:sp>
-      <p:sp>
-        <p:nvSpPr>
-          <p:cNvPr id="4" name="Rounded Rectangle 3"/>
+            <a:pPr algn="r"/>
+            <a:r>
+              <a:rPr sz="1000" b="1" i="0">
+                <a:solidFill>
+                  <a:srgbClr val="64748B"/>
+                </a:solidFill>
+                <a:latin typeface="Montserrat"/>
+              </a:rPr>
+              <a:t>016 / 022</a:t>
+            </a:r>
+          </a:p>
+        </p:txBody>
+      </p:sp>
+      <p:sp>
+        <p:nvSpPr>
+          <p:cNvPr id="4" name="TextBox 3"/>
+          <p:cNvSpPr txBox="1"/>
+          <p:nvPr/>
+        </p:nvSpPr>
+        <p:spPr>
+          <a:xfrm>
+            <a:off x="457200" y="6419088"/>
+            <a:ext cx="8229600" cy="365760"/>
+          </a:xfrm>
+          <a:prstGeom prst="rect">
+            <a:avLst/>
+          </a:prstGeom>
+          <a:noFill/>
+        </p:spPr>
+        <p:txBody>
+          <a:bodyPr wrap="square">
+            <a:spAutoFit/>
+          </a:bodyPr>
+          <a:lstStyle/>
+          <a:p>
+            <a:r>
+              <a:rPr sz="900" b="0" i="0">
+                <a:solidFill>
+                  <a:srgbClr val="64748B"/>
+                </a:solidFill>
+                <a:latin typeface="Montserrat"/>
+              </a:rPr>
+              <a:t>Curso Gas B · Tema 01 · Distribución por canalización</a:t>
+            </a:r>
+          </a:p>
+        </p:txBody>
+      </p:sp>
+      <p:sp>
+        <p:nvSpPr>
+          <p:cNvPr id="5" name="TextBox 4"/>
+          <p:cNvSpPr txBox="1"/>
+          <p:nvPr/>
+        </p:nvSpPr>
+        <p:spPr>
+          <a:xfrm>
+            <a:off x="822960" y="457200"/>
+            <a:ext cx="10058400" cy="365760"/>
+          </a:xfrm>
+          <a:prstGeom prst="rect">
+            <a:avLst/>
+          </a:prstGeom>
+          <a:noFill/>
+        </p:spPr>
+        <p:txBody>
+          <a:bodyPr wrap="square">
+            <a:spAutoFit/>
+          </a:bodyPr>
+          <a:lstStyle/>
+          <a:p>
+            <a:r>
+              <a:rPr sz="1300" b="1" i="0">
+                <a:solidFill>
+                  <a:srgbClr val="E8801A"/>
+                </a:solidFill>
+                <a:latin typeface="Montserrat"/>
+              </a:rPr>
+              <a:t>APARTADO 7 · REGISTRO Y ARCHIVO</a:t>
+            </a:r>
+          </a:p>
+        </p:txBody>
+      </p:sp>
+      <p:sp>
+        <p:nvSpPr>
+          <p:cNvPr id="6" name="TextBox 5"/>
+          <p:cNvSpPr txBox="1"/>
+          <p:nvPr/>
+        </p:nvSpPr>
+        <p:spPr>
+          <a:xfrm>
+            <a:off x="822960" y="868680"/>
+            <a:ext cx="10515600" cy="914400"/>
+          </a:xfrm>
+          <a:prstGeom prst="rect">
+            <a:avLst/>
+          </a:prstGeom>
+          <a:noFill/>
+        </p:spPr>
+        <p:txBody>
+          <a:bodyPr wrap="square">
+            <a:spAutoFit/>
+          </a:bodyPr>
+          <a:lstStyle/>
+          <a:p>
+            <a:r>
+              <a:rPr sz="2800" b="1" i="0">
+                <a:solidFill>
+                  <a:srgbClr val="1E2761"/>
+                </a:solidFill>
+                <a:latin typeface="Montserrat"/>
+              </a:rPr>
+              <a:t>Los papeles que se guardan</a:t>
+            </a:r>
+          </a:p>
+        </p:txBody>
+      </p:sp>
+      <p:sp>
+        <p:nvSpPr>
+          <p:cNvPr id="7" name="Rectangle 6"/>
           <p:cNvSpPr/>
           <p:nvPr/>
         </p:nvSpPr>
         <p:spPr>
           <a:xfrm>
-            <a:off x="868680" y="1051560"/>
-            <a:ext cx="1463040" cy="82296"/>
-          </a:xfrm>
-          <a:prstGeom prst="roundRect">
+            <a:off x="868680" y="1627632"/>
+            <a:ext cx="2011680" cy="73152"/>
+          </a:xfrm>
+          <a:prstGeom prst="rect">
             <a:avLst/>
           </a:prstGeom>
           <a:solidFill>
@@ -7776,14 +8730,14 @@
       </p:sp>
       <p:sp>
         <p:nvSpPr>
-          <p:cNvPr id="5" name="TextBox 4"/>
+          <p:cNvPr id="8" name="TextBox 7"/>
           <p:cNvSpPr txBox="1"/>
           <p:nvPr/>
         </p:nvSpPr>
         <p:spPr>
           <a:xfrm>
-            <a:off x="822960" y="1234440"/>
-            <a:ext cx="10515600" cy="1097280"/>
+            <a:off x="822960" y="1965960"/>
+            <a:ext cx="5029200" cy="4206240"/>
           </a:xfrm>
           <a:prstGeom prst="rect">
             <a:avLst/>
@@ -7796,28 +8750,163 @@
           </a:bodyPr>
           <a:lstStyle/>
           <a:p>
-            <a:r>
-              <a:rPr sz="3400" b="1" i="0">
-                <a:solidFill>
-                  <a:srgbClr val="FFFFFF"/>
-                </a:solidFill>
-                <a:latin typeface="Montserrat"/>
-              </a:rPr>
-              <a:t>Ya sabes mantener viva una red de gas</a:t>
-            </a:r>
-          </a:p>
-        </p:txBody>
-      </p:sp>
-      <p:sp>
-        <p:nvSpPr>
-          <p:cNvPr id="6" name="TextBox 5"/>
+            <a:pPr>
+              <a:spcAft>
+                <a:spcPts val="1100"/>
+              </a:spcAft>
+            </a:pPr>
+            <a:r>
+              <a:rPr sz="1600" b="1" i="0">
+                <a:solidFill>
+                  <a:srgbClr val="E8801A"/>
+                </a:solidFill>
+                <a:latin typeface="Montserrat"/>
+              </a:rPr>
+              <a:t>▸  </a:t>
+            </a:r>
+            <a:r>
+              <a:rPr sz="1600" b="0" i="0">
+                <a:solidFill>
+                  <a:srgbClr val="1B2330"/>
+                </a:solidFill>
+                <a:latin typeface="Montserrat"/>
+              </a:rPr>
+              <a:t>Cartografía siempre actualizada</a:t>
+            </a:r>
+          </a:p>
+          <a:p>
+            <a:pPr>
+              <a:spcAft>
+                <a:spcPts val="1100"/>
+              </a:spcAft>
+            </a:pPr>
+            <a:r>
+              <a:rPr sz="1600" b="1" i="0">
+                <a:solidFill>
+                  <a:srgbClr val="E8801A"/>
+                </a:solidFill>
+                <a:latin typeface="Montserrat"/>
+              </a:rPr>
+              <a:t>▸  </a:t>
+            </a:r>
+            <a:r>
+              <a:rPr sz="1600" b="0" i="0">
+                <a:solidFill>
+                  <a:srgbClr val="1B2330"/>
+                </a:solidFill>
+                <a:latin typeface="Montserrat"/>
+              </a:rPr>
+              <a:t>Autorizaciones y proyectos con sus pruebas</a:t>
+            </a:r>
+          </a:p>
+          <a:p>
+            <a:pPr>
+              <a:spcAft>
+                <a:spcPts val="1100"/>
+              </a:spcAft>
+            </a:pPr>
+            <a:r>
+              <a:rPr sz="1600" b="1" i="0">
+                <a:solidFill>
+                  <a:srgbClr val="E8801A"/>
+                </a:solidFill>
+                <a:latin typeface="Montserrat"/>
+              </a:rPr>
+              <a:t>▸  </a:t>
+            </a:r>
+            <a:r>
+              <a:rPr sz="1600" b="0" i="0">
+                <a:solidFill>
+                  <a:srgbClr val="1B2330"/>
+                </a:solidFill>
+                <a:latin typeface="Montserrat"/>
+              </a:rPr>
+              <a:t>Estanquidad: las dos últimas</a:t>
+            </a:r>
+          </a:p>
+          <a:p>
+            <a:pPr>
+              <a:spcAft>
+                <a:spcPts val="1100"/>
+              </a:spcAft>
+            </a:pPr>
+            <a:r>
+              <a:rPr sz="1600" b="1" i="0">
+                <a:solidFill>
+                  <a:srgbClr val="E8801A"/>
+                </a:solidFill>
+                <a:latin typeface="Montserrat"/>
+              </a:rPr>
+              <a:t>▸  </a:t>
+            </a:r>
+            <a:r>
+              <a:rPr sz="1600" b="0" i="0">
+                <a:solidFill>
+                  <a:srgbClr val="1B2330"/>
+                </a:solidFill>
+                <a:latin typeface="Montserrat"/>
+              </a:rPr>
+              <a:t>Seguridad y emergencias: mínimo 5 años</a:t>
+            </a:r>
+          </a:p>
+        </p:txBody>
+      </p:sp>
+      <p:sp>
+        <p:nvSpPr>
+          <p:cNvPr id="9" name="imgph" descr="IMGQ:archive folders shelves documents office"/>
+          <p:cNvSpPr/>
+          <p:nvPr/>
+        </p:nvSpPr>
+        <p:spPr>
+          <a:xfrm>
+            <a:off x="6080760" y="1965960"/>
+            <a:ext cx="5303520" cy="4572000"/>
+          </a:xfrm>
+          <a:prstGeom prst="roundRect">
+            <a:avLst/>
+          </a:prstGeom>
+          <a:solidFill>
+            <a:srgbClr val="F3F6FB"/>
+          </a:solidFill>
+          <a:ln w="12700">
+            <a:solidFill>
+              <a:srgbClr val="C7D2E6"/>
+            </a:solidFill>
+          </a:ln>
+          <a:effectLst/>
+        </p:spPr>
+        <p:style>
+          <a:lnRef idx="1">
+            <a:schemeClr val="accent1"/>
+          </a:lnRef>
+          <a:fillRef idx="3">
+            <a:schemeClr val="accent1"/>
+          </a:fillRef>
+          <a:effectRef idx="2">
+            <a:schemeClr val="accent1"/>
+          </a:effectRef>
+          <a:fontRef idx="minor">
+            <a:schemeClr val="lt1"/>
+          </a:fontRef>
+        </p:style>
+        <p:txBody>
+          <a:bodyPr rtlCol="0" anchor="ctr"/>
+          <a:lstStyle/>
+          <a:p>
+            <a:pPr algn="ctr"/>
+          </a:p>
+        </p:txBody>
+      </p:sp>
+      <p:sp>
+        <p:nvSpPr>
+          <p:cNvPr id="10" name="TextBox 9"/>
           <p:cNvSpPr txBox="1"/>
           <p:nvPr/>
         </p:nvSpPr>
         <p:spPr>
           <a:xfrm>
-            <a:off x="822960" y="2606040"/>
-            <a:ext cx="10515600" cy="2743200"/>
+            <a:off x="6355080" y="3611880"/>
+            <a:ext cx="4754880" cy="1280160"/>
           </a:xfrm>
           <a:prstGeom prst="rect">
             <a:avLst/>
@@ -7830,119 +8919,254 @@
           </a:bodyPr>
           <a:lstStyle/>
           <a:p>
-            <a:pPr>
-              <a:spcAft>
-                <a:spcPts val="1200"/>
-              </a:spcAft>
-            </a:pPr>
-            <a:r>
-              <a:rPr sz="2000" b="1" i="0">
-                <a:solidFill>
-                  <a:srgbClr val="F4A24C"/>
-                </a:solidFill>
-                <a:latin typeface="Montserrat"/>
-              </a:rPr>
-              <a:t>✓  </a:t>
-            </a:r>
-            <a:r>
-              <a:rPr sz="1900" b="0" i="0">
-                <a:solidFill>
-                  <a:srgbClr val="FFFFFF"/>
-                </a:solidFill>
-                <a:latin typeface="Montserrat"/>
-              </a:rPr>
-              <a:t>Reconoces los tres plazos de terceros: 30, 20 y 24</a:t>
-            </a:r>
-          </a:p>
-          <a:p>
-            <a:pPr>
-              <a:spcAft>
-                <a:spcPts val="1200"/>
-              </a:spcAft>
-            </a:pPr>
-            <a:r>
-              <a:rPr sz="2000" b="1" i="0">
-                <a:solidFill>
-                  <a:srgbClr val="F4A24C"/>
-                </a:solidFill>
-                <a:latin typeface="Montserrat"/>
-              </a:rPr>
-              <a:t>✓  </a:t>
-            </a:r>
-            <a:r>
-              <a:rPr sz="1900" b="0" i="0">
-                <a:solidFill>
-                  <a:srgbClr val="FFFFFF"/>
-                </a:solidFill>
-                <a:latin typeface="Montserrat"/>
-              </a:rPr>
-              <a:t>Clasificas una fuga por su gravedad y por su cercanía</a:t>
-            </a:r>
-          </a:p>
-          <a:p>
-            <a:pPr>
-              <a:spcAft>
-                <a:spcPts val="1200"/>
-              </a:spcAft>
-            </a:pPr>
-            <a:r>
-              <a:rPr sz="2000" b="1" i="0">
-                <a:solidFill>
-                  <a:srgbClr val="F4A24C"/>
-                </a:solidFill>
-                <a:latin typeface="Montserrat"/>
-              </a:rPr>
-              <a:t>✓  </a:t>
-            </a:r>
-            <a:r>
-              <a:rPr sz="1900" b="0" i="0">
-                <a:solidFill>
-                  <a:srgbClr val="FFFFFF"/>
-                </a:solidFill>
-                <a:latin typeface="Montserrat"/>
-              </a:rPr>
-              <a:t>Aplicas el parche seguro antes de la reparación buena</a:t>
-            </a:r>
-          </a:p>
-          <a:p>
-            <a:pPr>
-              <a:spcAft>
-                <a:spcPts val="1200"/>
-              </a:spcAft>
-            </a:pPr>
-            <a:r>
-              <a:rPr sz="2000" b="1" i="0">
-                <a:solidFill>
-                  <a:srgbClr val="F4A24C"/>
-                </a:solidFill>
-                <a:latin typeface="Montserrat"/>
-              </a:rPr>
-              <a:t>✓  </a:t>
-            </a:r>
-            <a:r>
-              <a:rPr sz="1900" b="0" i="0">
-                <a:solidFill>
-                  <a:srgbClr val="FFFFFF"/>
-                </a:solidFill>
-                <a:latin typeface="Montserrat"/>
-              </a:rPr>
-              <a:t>Cierras con el truco de campo: si burbujea, fuga</a:t>
-            </a:r>
-          </a:p>
-        </p:txBody>
-      </p:sp>
-      <p:sp>
-        <p:nvSpPr>
-          <p:cNvPr id="7" name="Rounded Rectangle 6"/>
+            <a:pPr algn="ctr"/>
+            <a:r>
+              <a:rPr sz="1400" b="1" i="0">
+                <a:solidFill>
+                  <a:srgbClr val="64748B"/>
+                </a:solidFill>
+                <a:latin typeface="Montserrat"/>
+              </a:rPr>
+              <a:t>IMAGEN</a:t>
+            </a:r>
+          </a:p>
+          <a:p>
+            <a:pPr algn="ctr"/>
+            <a:r>
+              <a:rPr sz="1100" b="0" i="1">
+                <a:solidFill>
+                  <a:srgbClr val="64748B"/>
+                </a:solidFill>
+                <a:latin typeface="Montserrat"/>
+              </a:rPr>
+              <a:t>archive folders shelves documents office</a:t>
+            </a:r>
+          </a:p>
+        </p:txBody>
+      </p:sp>
+    </p:spTree>
+  </p:cSld>
+  <p:clrMapOvr>
+    <a:masterClrMapping/>
+  </p:clrMapOvr>
+  <mc:AlternateContent xmlns:mc="http://schemas.openxmlformats.org/markup-compatibility/2006">
+    <mc:Choice xmlns:p14="http://schemas.microsoft.com/office/powerpoint/2010/main" Requires="p14">
+      <p:transition spd="med" p14:dur="700">
+        <p14:cube dir="r"/>
+      </p:transition>
+    </mc:Choice>
+    <mc:Fallback>
+      <p:transition spd="med">
+        <p:push dir="r"/>
+      </p:transition>
+    </mc:Fallback>
+  </mc:AlternateContent>
+</p:sld>
+</file>
+
+<file path=ppt/slides/slide17.xml><?xml version="1.0" encoding="utf-8"?>
+<p:sld xmlns:a="http://schemas.openxmlformats.org/drawingml/2006/main" xmlns:p="http://schemas.openxmlformats.org/presentationml/2006/main" xmlns:r="http://schemas.openxmlformats.org/officeDocument/2006/relationships">
+  <p:cSld>
+    <p:spTree>
+      <p:nvGrpSpPr>
+        <p:cNvPr id="1" name=""/>
+        <p:cNvGrpSpPr/>
+        <p:nvPr/>
+      </p:nvGrpSpPr>
+      <p:grpSpPr/>
+      <p:sp>
+        <p:nvSpPr>
+          <p:cNvPr id="2" name="Rectangle 1"/>
           <p:cNvSpPr/>
           <p:nvPr/>
         </p:nvSpPr>
         <p:spPr>
           <a:xfrm>
-            <a:off x="822960" y="5532120"/>
-            <a:ext cx="10515600" cy="822960"/>
-          </a:xfrm>
-          <a:prstGeom prst="roundRect">
+            <a:off x="0" y="0"/>
+            <a:ext cx="12191695" cy="6858000"/>
+          </a:xfrm>
+          <a:prstGeom prst="rect">
+            <a:avLst/>
+          </a:prstGeom>
+          <a:solidFill>
+            <a:srgbClr val="FFFFFF"/>
+          </a:solidFill>
+          <a:ln>
+            <a:noFill/>
+          </a:ln>
+          <a:effectLst/>
+        </p:spPr>
+        <p:style>
+          <a:lnRef idx="1">
+            <a:schemeClr val="accent1"/>
+          </a:lnRef>
+          <a:fillRef idx="3">
+            <a:schemeClr val="accent1"/>
+          </a:fillRef>
+          <a:effectRef idx="2">
+            <a:schemeClr val="accent1"/>
+          </a:effectRef>
+          <a:fontRef idx="minor">
+            <a:schemeClr val="lt1"/>
+          </a:fontRef>
+        </p:style>
+        <p:txBody>
+          <a:bodyPr rtlCol="0" anchor="ctr"/>
+          <a:lstStyle/>
+          <a:p>
+            <a:pPr algn="ctr"/>
+          </a:p>
+        </p:txBody>
+      </p:sp>
+      <p:sp>
+        <p:nvSpPr>
+          <p:cNvPr id="3" name="TextBox 2"/>
+          <p:cNvSpPr txBox="1"/>
+          <p:nvPr/>
+        </p:nvSpPr>
+        <p:spPr>
+          <a:xfrm>
+            <a:off x="10607040" y="320040"/>
+            <a:ext cx="1371600" cy="365760"/>
+          </a:xfrm>
+          <a:prstGeom prst="rect">
+            <a:avLst/>
+          </a:prstGeom>
+          <a:noFill/>
+        </p:spPr>
+        <p:txBody>
+          <a:bodyPr wrap="square">
+            <a:spAutoFit/>
+          </a:bodyPr>
+          <a:lstStyle/>
+          <a:p>
+            <a:pPr algn="r"/>
+            <a:r>
+              <a:rPr sz="1000" b="1" i="0">
+                <a:solidFill>
+                  <a:srgbClr val="64748B"/>
+                </a:solidFill>
+                <a:latin typeface="Montserrat"/>
+              </a:rPr>
+              <a:t>017 / 022</a:t>
+            </a:r>
+          </a:p>
+        </p:txBody>
+      </p:sp>
+      <p:sp>
+        <p:nvSpPr>
+          <p:cNvPr id="4" name="TextBox 3"/>
+          <p:cNvSpPr txBox="1"/>
+          <p:nvPr/>
+        </p:nvSpPr>
+        <p:spPr>
+          <a:xfrm>
+            <a:off x="457200" y="6419088"/>
+            <a:ext cx="8229600" cy="365760"/>
+          </a:xfrm>
+          <a:prstGeom prst="rect">
+            <a:avLst/>
+          </a:prstGeom>
+          <a:noFill/>
+        </p:spPr>
+        <p:txBody>
+          <a:bodyPr wrap="square">
+            <a:spAutoFit/>
+          </a:bodyPr>
+          <a:lstStyle/>
+          <a:p>
+            <a:r>
+              <a:rPr sz="900" b="0" i="0">
+                <a:solidFill>
+                  <a:srgbClr val="64748B"/>
+                </a:solidFill>
+                <a:latin typeface="Montserrat"/>
+              </a:rPr>
+              <a:t>Curso Gas B · Tema 01 · Distribución por canalización</a:t>
+            </a:r>
+          </a:p>
+        </p:txBody>
+      </p:sp>
+      <p:sp>
+        <p:nvSpPr>
+          <p:cNvPr id="5" name="TextBox 4"/>
+          <p:cNvSpPr txBox="1"/>
+          <p:nvPr/>
+        </p:nvSpPr>
+        <p:spPr>
+          <a:xfrm>
+            <a:off x="822960" y="457200"/>
+            <a:ext cx="10058400" cy="365760"/>
+          </a:xfrm>
+          <a:prstGeom prst="rect">
+            <a:avLst/>
+          </a:prstGeom>
+          <a:noFill/>
+        </p:spPr>
+        <p:txBody>
+          <a:bodyPr wrap="square">
+            <a:spAutoFit/>
+          </a:bodyPr>
+          <a:lstStyle/>
+          <a:p>
+            <a:r>
+              <a:rPr sz="1300" b="1" i="0">
+                <a:solidFill>
+                  <a:srgbClr val="E8801A"/>
+                </a:solidFill>
+                <a:latin typeface="Montserrat"/>
+              </a:rPr>
+              <a:t>APARTADO 8 · AFECCIONES POR TERCEROS</a:t>
+            </a:r>
+          </a:p>
+        </p:txBody>
+      </p:sp>
+      <p:sp>
+        <p:nvSpPr>
+          <p:cNvPr id="6" name="TextBox 5"/>
+          <p:cNvSpPr txBox="1"/>
+          <p:nvPr/>
+        </p:nvSpPr>
+        <p:spPr>
+          <a:xfrm>
+            <a:off x="822960" y="868680"/>
+            <a:ext cx="10515600" cy="914400"/>
+          </a:xfrm>
+          <a:prstGeom prst="rect">
+            <a:avLst/>
+          </a:prstGeom>
+          <a:noFill/>
+        </p:spPr>
+        <p:txBody>
+          <a:bodyPr wrap="square">
+            <a:spAutoFit/>
+          </a:bodyPr>
+          <a:lstStyle/>
+          <a:p>
+            <a:r>
+              <a:rPr sz="2800" b="1" i="0">
+                <a:solidFill>
+                  <a:srgbClr val="1E2761"/>
+                </a:solidFill>
+                <a:latin typeface="Montserrat"/>
+              </a:rPr>
+              <a:t>Antes de picar, pregunta</a:t>
+            </a:r>
+          </a:p>
+        </p:txBody>
+      </p:sp>
+      <p:sp>
+        <p:nvSpPr>
+          <p:cNvPr id="7" name="Rectangle 6"/>
+          <p:cNvSpPr/>
+          <p:nvPr/>
+        </p:nvSpPr>
+        <p:spPr>
+          <a:xfrm>
+            <a:off x="868680" y="1627632"/>
+            <a:ext cx="2011680" cy="73152"/>
+          </a:xfrm>
+          <a:prstGeom prst="rect">
             <a:avLst/>
           </a:prstGeom>
           <a:solidFill>
@@ -7983,8 +9207,8 @@
         </p:nvSpPr>
         <p:spPr>
           <a:xfrm>
-            <a:off x="1051560" y="5623560"/>
-            <a:ext cx="10058400" cy="640080"/>
+            <a:off x="6355080" y="1965960"/>
+            <a:ext cx="5029200" cy="4206240"/>
           </a:xfrm>
           <a:prstGeom prst="rect">
             <a:avLst/>
@@ -7997,14 +9221,196 @@
           </a:bodyPr>
           <a:lstStyle/>
           <a:p>
-            <a:r>
-              <a:rPr sz="1500" b="1" i="1">
-                <a:solidFill>
-                  <a:srgbClr val="1E2761"/>
-                </a:solidFill>
-                <a:latin typeface="Montserrat"/>
-              </a:rPr>
-              <a:t>Cierras la ITC-ICG 01 entera: del papel a la calle viva. Ya eres mucho más gasista que ayer.</a:t>
+            <a:pPr>
+              <a:spcAft>
+                <a:spcPts val="1100"/>
+              </a:spcAft>
+            </a:pPr>
+            <a:r>
+              <a:rPr sz="1600" b="1" i="0">
+                <a:solidFill>
+                  <a:srgbClr val="E8801A"/>
+                </a:solidFill>
+                <a:latin typeface="Montserrat"/>
+              </a:rPr>
+              <a:t>▸  </a:t>
+            </a:r>
+            <a:r>
+              <a:rPr sz="1600" b="0" i="0">
+                <a:solidFill>
+                  <a:srgbClr val="1B2330"/>
+                </a:solidFill>
+                <a:latin typeface="Montserrat"/>
+              </a:rPr>
+              <a:t>Aviso al distribuidor: 30 días antes</a:t>
+            </a:r>
+          </a:p>
+          <a:p>
+            <a:pPr>
+              <a:spcAft>
+                <a:spcPts val="1100"/>
+              </a:spcAft>
+            </a:pPr>
+            <a:r>
+              <a:rPr sz="1600" b="1" i="0">
+                <a:solidFill>
+                  <a:srgbClr val="E8801A"/>
+                </a:solidFill>
+                <a:latin typeface="Montserrat"/>
+              </a:rPr>
+              <a:t>▸  </a:t>
+            </a:r>
+            <a:r>
+              <a:rPr sz="1600" b="0" i="0">
+                <a:solidFill>
+                  <a:srgbClr val="1B2330"/>
+                </a:solidFill>
+                <a:latin typeface="Montserrat"/>
+              </a:rPr>
+              <a:t>El distribuidor contesta en 20 días</a:t>
+            </a:r>
+          </a:p>
+          <a:p>
+            <a:pPr>
+              <a:spcAft>
+                <a:spcPts val="1100"/>
+              </a:spcAft>
+            </a:pPr>
+            <a:r>
+              <a:rPr sz="1600" b="1" i="0">
+                <a:solidFill>
+                  <a:srgbClr val="E8801A"/>
+                </a:solidFill>
+                <a:latin typeface="Montserrat"/>
+              </a:rPr>
+              <a:t>▸  </a:t>
+            </a:r>
+            <a:r>
+              <a:rPr sz="1600" b="0" i="0">
+                <a:solidFill>
+                  <a:srgbClr val="1B2330"/>
+                </a:solidFill>
+                <a:latin typeface="Montserrat"/>
+              </a:rPr>
+              <a:t>Inicio de obra: aviso 24 horas antes</a:t>
+            </a:r>
+          </a:p>
+          <a:p>
+            <a:pPr>
+              <a:spcAft>
+                <a:spcPts val="1100"/>
+              </a:spcAft>
+            </a:pPr>
+            <a:r>
+              <a:rPr sz="1600" b="1" i="0">
+                <a:solidFill>
+                  <a:srgbClr val="E8801A"/>
+                </a:solidFill>
+                <a:latin typeface="Montserrat"/>
+              </a:rPr>
+              <a:t>▸  </a:t>
+            </a:r>
+            <a:r>
+              <a:rPr sz="1600" b="0" i="0">
+                <a:solidFill>
+                  <a:srgbClr val="1B2330"/>
+                </a:solidFill>
+                <a:latin typeface="Montserrat"/>
+              </a:rPr>
+              <a:t>Todo por escrito, con la localización</a:t>
+            </a:r>
+          </a:p>
+        </p:txBody>
+      </p:sp>
+      <p:sp>
+        <p:nvSpPr>
+          <p:cNvPr id="9" name="imgph" descr="IMGQ:road excavation works underground utility pipes"/>
+          <p:cNvSpPr/>
+          <p:nvPr/>
+        </p:nvSpPr>
+        <p:spPr>
+          <a:xfrm>
+            <a:off x="822960" y="1965960"/>
+            <a:ext cx="5303520" cy="4572000"/>
+          </a:xfrm>
+          <a:prstGeom prst="roundRect">
+            <a:avLst/>
+          </a:prstGeom>
+          <a:solidFill>
+            <a:srgbClr val="F3F6FB"/>
+          </a:solidFill>
+          <a:ln w="12700">
+            <a:solidFill>
+              <a:srgbClr val="C7D2E6"/>
+            </a:solidFill>
+          </a:ln>
+          <a:effectLst/>
+        </p:spPr>
+        <p:style>
+          <a:lnRef idx="1">
+            <a:schemeClr val="accent1"/>
+          </a:lnRef>
+          <a:fillRef idx="3">
+            <a:schemeClr val="accent1"/>
+          </a:fillRef>
+          <a:effectRef idx="2">
+            <a:schemeClr val="accent1"/>
+          </a:effectRef>
+          <a:fontRef idx="minor">
+            <a:schemeClr val="lt1"/>
+          </a:fontRef>
+        </p:style>
+        <p:txBody>
+          <a:bodyPr rtlCol="0" anchor="ctr"/>
+          <a:lstStyle/>
+          <a:p>
+            <a:pPr algn="ctr"/>
+          </a:p>
+        </p:txBody>
+      </p:sp>
+      <p:sp>
+        <p:nvSpPr>
+          <p:cNvPr id="10" name="TextBox 9"/>
+          <p:cNvSpPr txBox="1"/>
+          <p:nvPr/>
+        </p:nvSpPr>
+        <p:spPr>
+          <a:xfrm>
+            <a:off x="1097280" y="3611880"/>
+            <a:ext cx="4754880" cy="1280160"/>
+          </a:xfrm>
+          <a:prstGeom prst="rect">
+            <a:avLst/>
+          </a:prstGeom>
+          <a:noFill/>
+        </p:spPr>
+        <p:txBody>
+          <a:bodyPr wrap="square">
+            <a:spAutoFit/>
+          </a:bodyPr>
+          <a:lstStyle/>
+          <a:p>
+            <a:pPr algn="ctr"/>
+            <a:r>
+              <a:rPr sz="1400" b="1" i="0">
+                <a:solidFill>
+                  <a:srgbClr val="64748B"/>
+                </a:solidFill>
+                <a:latin typeface="Montserrat"/>
+              </a:rPr>
+              <a:t>IMAGEN</a:t>
+            </a:r>
+          </a:p>
+          <a:p>
+            <a:pPr algn="ctr"/>
+            <a:r>
+              <a:rPr sz="1100" b="0" i="1">
+                <a:solidFill>
+                  <a:srgbClr val="64748B"/>
+                </a:solidFill>
+                <a:latin typeface="Montserrat"/>
+              </a:rPr>
+              <a:t>road excavation works underground utility pipes</a:t>
             </a:r>
           </a:p>
         </p:txBody>
@@ -8014,6 +9420,1296 @@
   <p:clrMapOvr>
     <a:masterClrMapping/>
   </p:clrMapOvr>
+  <mc:AlternateContent xmlns:mc="http://schemas.openxmlformats.org/markup-compatibility/2006">
+    <mc:Choice xmlns:p14="http://schemas.microsoft.com/office/powerpoint/2010/main" Requires="p14">
+      <p:transition spd="med" p14:dur="700">
+        <p14:cube dir="l"/>
+      </p:transition>
+    </mc:Choice>
+    <mc:Fallback>
+      <p:transition spd="med">
+        <p:push dir="l"/>
+      </p:transition>
+    </mc:Fallback>
+  </mc:AlternateContent>
+</p:sld>
+</file>
+
+<file path=ppt/slides/slide18.xml><?xml version="1.0" encoding="utf-8"?>
+<p:sld xmlns:a="http://schemas.openxmlformats.org/drawingml/2006/main" xmlns:p="http://schemas.openxmlformats.org/presentationml/2006/main" xmlns:r="http://schemas.openxmlformats.org/officeDocument/2006/relationships">
+  <p:cSld>
+    <p:spTree>
+      <p:nvGrpSpPr>
+        <p:cNvPr id="1" name=""/>
+        <p:cNvGrpSpPr/>
+        <p:nvPr/>
+      </p:nvGrpSpPr>
+      <p:grpSpPr/>
+      <p:sp>
+        <p:nvSpPr>
+          <p:cNvPr id="2" name="Rectangle 1"/>
+          <p:cNvSpPr/>
+          <p:nvPr/>
+        </p:nvSpPr>
+        <p:spPr>
+          <a:xfrm>
+            <a:off x="0" y="0"/>
+            <a:ext cx="12191695" cy="6858000"/>
+          </a:xfrm>
+          <a:prstGeom prst="rect">
+            <a:avLst/>
+          </a:prstGeom>
+          <a:solidFill>
+            <a:srgbClr val="FFFFFF"/>
+          </a:solidFill>
+          <a:ln>
+            <a:noFill/>
+          </a:ln>
+          <a:effectLst/>
+        </p:spPr>
+        <p:style>
+          <a:lnRef idx="1">
+            <a:schemeClr val="accent1"/>
+          </a:lnRef>
+          <a:fillRef idx="3">
+            <a:schemeClr val="accent1"/>
+          </a:fillRef>
+          <a:effectRef idx="2">
+            <a:schemeClr val="accent1"/>
+          </a:effectRef>
+          <a:fontRef idx="minor">
+            <a:schemeClr val="lt1"/>
+          </a:fontRef>
+        </p:style>
+        <p:txBody>
+          <a:bodyPr rtlCol="0" anchor="ctr"/>
+          <a:lstStyle/>
+          <a:p>
+            <a:pPr algn="ctr"/>
+          </a:p>
+        </p:txBody>
+      </p:sp>
+      <p:sp>
+        <p:nvSpPr>
+          <p:cNvPr id="3" name="TextBox 2"/>
+          <p:cNvSpPr txBox="1"/>
+          <p:nvPr/>
+        </p:nvSpPr>
+        <p:spPr>
+          <a:xfrm>
+            <a:off x="10607040" y="320040"/>
+            <a:ext cx="1371600" cy="365760"/>
+          </a:xfrm>
+          <a:prstGeom prst="rect">
+            <a:avLst/>
+          </a:prstGeom>
+          <a:noFill/>
+        </p:spPr>
+        <p:txBody>
+          <a:bodyPr wrap="square">
+            <a:spAutoFit/>
+          </a:bodyPr>
+          <a:lstStyle/>
+          <a:p>
+            <a:pPr algn="r"/>
+            <a:r>
+              <a:rPr sz="1000" b="1" i="0">
+                <a:solidFill>
+                  <a:srgbClr val="64748B"/>
+                </a:solidFill>
+                <a:latin typeface="Montserrat"/>
+              </a:rPr>
+              <a:t>018 / 022</a:t>
+            </a:r>
+          </a:p>
+        </p:txBody>
+      </p:sp>
+      <p:sp>
+        <p:nvSpPr>
+          <p:cNvPr id="4" name="TextBox 3"/>
+          <p:cNvSpPr txBox="1"/>
+          <p:nvPr/>
+        </p:nvSpPr>
+        <p:spPr>
+          <a:xfrm>
+            <a:off x="457200" y="6419088"/>
+            <a:ext cx="8229600" cy="365760"/>
+          </a:xfrm>
+          <a:prstGeom prst="rect">
+            <a:avLst/>
+          </a:prstGeom>
+          <a:noFill/>
+        </p:spPr>
+        <p:txBody>
+          <a:bodyPr wrap="square">
+            <a:spAutoFit/>
+          </a:bodyPr>
+          <a:lstStyle/>
+          <a:p>
+            <a:r>
+              <a:rPr sz="900" b="0" i="0">
+                <a:solidFill>
+                  <a:srgbClr val="64748B"/>
+                </a:solidFill>
+                <a:latin typeface="Montserrat"/>
+              </a:rPr>
+              <a:t>Curso Gas B · Tema 01 · Distribución por canalización</a:t>
+            </a:r>
+          </a:p>
+        </p:txBody>
+      </p:sp>
+      <p:sp>
+        <p:nvSpPr>
+          <p:cNvPr id="5" name="Rectangle 4"/>
+          <p:cNvSpPr/>
+          <p:nvPr/>
+        </p:nvSpPr>
+        <p:spPr>
+          <a:xfrm>
+            <a:off x="0" y="0"/>
+            <a:ext cx="12191695" cy="1143000"/>
+          </a:xfrm>
+          <a:prstGeom prst="rect">
+            <a:avLst/>
+          </a:prstGeom>
+          <a:solidFill>
+            <a:srgbClr val="E8801A"/>
+          </a:solidFill>
+          <a:ln>
+            <a:noFill/>
+          </a:ln>
+          <a:effectLst/>
+        </p:spPr>
+        <p:style>
+          <a:lnRef idx="1">
+            <a:schemeClr val="accent1"/>
+          </a:lnRef>
+          <a:fillRef idx="3">
+            <a:schemeClr val="accent1"/>
+          </a:fillRef>
+          <a:effectRef idx="2">
+            <a:schemeClr val="accent1"/>
+          </a:effectRef>
+          <a:fontRef idx="minor">
+            <a:schemeClr val="lt1"/>
+          </a:fontRef>
+        </p:style>
+        <p:txBody>
+          <a:bodyPr rtlCol="0" anchor="ctr"/>
+          <a:lstStyle/>
+          <a:p>
+            <a:pPr algn="ctr"/>
+          </a:p>
+        </p:txBody>
+      </p:sp>
+      <p:sp>
+        <p:nvSpPr>
+          <p:cNvPr id="6" name="TextBox 5"/>
+          <p:cNvSpPr txBox="1"/>
+          <p:nvPr/>
+        </p:nvSpPr>
+        <p:spPr>
+          <a:xfrm>
+            <a:off x="822960" y="274320"/>
+            <a:ext cx="10515600" cy="640080"/>
+          </a:xfrm>
+          <a:prstGeom prst="rect">
+            <a:avLst/>
+          </a:prstGeom>
+          <a:noFill/>
+        </p:spPr>
+        <p:txBody>
+          <a:bodyPr wrap="square">
+            <a:spAutoFit/>
+          </a:bodyPr>
+          <a:lstStyle/>
+          <a:p>
+            <a:r>
+              <a:rPr sz="2400" b="1" i="0">
+                <a:solidFill>
+                  <a:srgbClr val="FFFFFF"/>
+                </a:solidFill>
+                <a:latin typeface="Montserrat"/>
+              </a:rPr>
+              <a:t>⚡  PREGUNTA RÁPIDA</a:t>
+            </a:r>
+          </a:p>
+        </p:txBody>
+      </p:sp>
+      <p:sp>
+        <p:nvSpPr>
+          <p:cNvPr id="7" name="TextBox 6"/>
+          <p:cNvSpPr txBox="1"/>
+          <p:nvPr/>
+        </p:nvSpPr>
+        <p:spPr>
+          <a:xfrm>
+            <a:off x="822960" y="1508760"/>
+            <a:ext cx="10515600" cy="1371600"/>
+          </a:xfrm>
+          <a:prstGeom prst="rect">
+            <a:avLst/>
+          </a:prstGeom>
+          <a:noFill/>
+        </p:spPr>
+        <p:txBody>
+          <a:bodyPr wrap="square">
+            <a:spAutoFit/>
+          </a:bodyPr>
+          <a:lstStyle/>
+          <a:p>
+            <a:r>
+              <a:rPr sz="2400" b="1" i="0">
+                <a:solidFill>
+                  <a:srgbClr val="1E2761"/>
+                </a:solidFill>
+                <a:latin typeface="Montserrat"/>
+              </a:rPr>
+              <a:t>Obras de terceros: ¿cuáles son los tres plazos, en orden?</a:t>
+            </a:r>
+          </a:p>
+        </p:txBody>
+      </p:sp>
+      <p:sp>
+        <p:nvSpPr>
+          <p:cNvPr id="8" name="Rounded Rectangle 7"/>
+          <p:cNvSpPr/>
+          <p:nvPr/>
+        </p:nvSpPr>
+        <p:spPr>
+          <a:xfrm>
+            <a:off x="822960" y="3291840"/>
+            <a:ext cx="4983480" cy="1143000"/>
+          </a:xfrm>
+          <a:prstGeom prst="roundRect">
+            <a:avLst/>
+          </a:prstGeom>
+          <a:solidFill>
+            <a:srgbClr val="F3F6FB"/>
+          </a:solidFill>
+          <a:ln w="12700">
+            <a:solidFill>
+              <a:srgbClr val="C7D2E6"/>
+            </a:solidFill>
+          </a:ln>
+          <a:effectLst/>
+        </p:spPr>
+        <p:style>
+          <a:lnRef idx="1">
+            <a:schemeClr val="accent1"/>
+          </a:lnRef>
+          <a:fillRef idx="3">
+            <a:schemeClr val="accent1"/>
+          </a:fillRef>
+          <a:effectRef idx="2">
+            <a:schemeClr val="accent1"/>
+          </a:effectRef>
+          <a:fontRef idx="minor">
+            <a:schemeClr val="lt1"/>
+          </a:fontRef>
+        </p:style>
+        <p:txBody>
+          <a:bodyPr rtlCol="0" anchor="ctr"/>
+          <a:lstStyle/>
+          <a:p>
+            <a:pPr algn="ctr"/>
+          </a:p>
+        </p:txBody>
+      </p:sp>
+      <p:sp>
+        <p:nvSpPr>
+          <p:cNvPr id="9" name="Rectangle 8"/>
+          <p:cNvSpPr/>
+          <p:nvPr/>
+        </p:nvSpPr>
+        <p:spPr>
+          <a:xfrm>
+            <a:off x="822960" y="3291840"/>
+            <a:ext cx="640080" cy="1143000"/>
+          </a:xfrm>
+          <a:prstGeom prst="rect">
+            <a:avLst/>
+          </a:prstGeom>
+          <a:solidFill>
+            <a:srgbClr val="1E2761"/>
+          </a:solidFill>
+          <a:ln>
+            <a:noFill/>
+          </a:ln>
+          <a:effectLst/>
+        </p:spPr>
+        <p:style>
+          <a:lnRef idx="1">
+            <a:schemeClr val="accent1"/>
+          </a:lnRef>
+          <a:fillRef idx="3">
+            <a:schemeClr val="accent1"/>
+          </a:fillRef>
+          <a:effectRef idx="2">
+            <a:schemeClr val="accent1"/>
+          </a:effectRef>
+          <a:fontRef idx="minor">
+            <a:schemeClr val="lt1"/>
+          </a:fontRef>
+        </p:style>
+        <p:txBody>
+          <a:bodyPr rtlCol="0" anchor="ctr"/>
+          <a:lstStyle/>
+          <a:p>
+            <a:pPr algn="ctr"/>
+          </a:p>
+        </p:txBody>
+      </p:sp>
+      <p:sp>
+        <p:nvSpPr>
+          <p:cNvPr id="10" name="TextBox 9"/>
+          <p:cNvSpPr txBox="1"/>
+          <p:nvPr/>
+        </p:nvSpPr>
+        <p:spPr>
+          <a:xfrm>
+            <a:off x="822960" y="3611880"/>
+            <a:ext cx="640080" cy="548640"/>
+          </a:xfrm>
+          <a:prstGeom prst="rect">
+            <a:avLst/>
+          </a:prstGeom>
+          <a:noFill/>
+        </p:spPr>
+        <p:txBody>
+          <a:bodyPr wrap="square">
+            <a:spAutoFit/>
+          </a:bodyPr>
+          <a:lstStyle/>
+          <a:p>
+            <a:pPr algn="ctr"/>
+            <a:r>
+              <a:rPr sz="2200" b="1" i="0">
+                <a:solidFill>
+                  <a:srgbClr val="FFFFFF"/>
+                </a:solidFill>
+                <a:latin typeface="Montserrat"/>
+              </a:rPr>
+              <a:t>A</a:t>
+            </a:r>
+          </a:p>
+        </p:txBody>
+      </p:sp>
+      <p:sp>
+        <p:nvSpPr>
+          <p:cNvPr id="11" name="TextBox 10"/>
+          <p:cNvSpPr txBox="1"/>
+          <p:nvPr/>
+        </p:nvSpPr>
+        <p:spPr>
+          <a:xfrm>
+            <a:off x="1600200" y="3474720"/>
+            <a:ext cx="4114800" cy="868680"/>
+          </a:xfrm>
+          <a:prstGeom prst="rect">
+            <a:avLst/>
+          </a:prstGeom>
+          <a:noFill/>
+        </p:spPr>
+        <p:txBody>
+          <a:bodyPr wrap="square">
+            <a:spAutoFit/>
+          </a:bodyPr>
+          <a:lstStyle/>
+          <a:p>
+            <a:r>
+              <a:rPr sz="1400" b="0" i="0">
+                <a:solidFill>
+                  <a:srgbClr val="1B2330"/>
+                </a:solidFill>
+                <a:latin typeface="Montserrat"/>
+              </a:rPr>
+              <a:t>Aviso 30 días antes; el distribuidor contesta en 20; inicio con 24 horas</a:t>
+            </a:r>
+          </a:p>
+        </p:txBody>
+      </p:sp>
+      <p:sp>
+        <p:nvSpPr>
+          <p:cNvPr id="12" name="Rounded Rectangle 11"/>
+          <p:cNvSpPr/>
+          <p:nvPr/>
+        </p:nvSpPr>
+        <p:spPr>
+          <a:xfrm>
+            <a:off x="6355080" y="3291840"/>
+            <a:ext cx="4983480" cy="1143000"/>
+          </a:xfrm>
+          <a:prstGeom prst="roundRect">
+            <a:avLst/>
+          </a:prstGeom>
+          <a:solidFill>
+            <a:srgbClr val="F3F6FB"/>
+          </a:solidFill>
+          <a:ln w="12700">
+            <a:solidFill>
+              <a:srgbClr val="C7D2E6"/>
+            </a:solidFill>
+          </a:ln>
+          <a:effectLst/>
+        </p:spPr>
+        <p:style>
+          <a:lnRef idx="1">
+            <a:schemeClr val="accent1"/>
+          </a:lnRef>
+          <a:fillRef idx="3">
+            <a:schemeClr val="accent1"/>
+          </a:fillRef>
+          <a:effectRef idx="2">
+            <a:schemeClr val="accent1"/>
+          </a:effectRef>
+          <a:fontRef idx="minor">
+            <a:schemeClr val="lt1"/>
+          </a:fontRef>
+        </p:style>
+        <p:txBody>
+          <a:bodyPr rtlCol="0" anchor="ctr"/>
+          <a:lstStyle/>
+          <a:p>
+            <a:pPr algn="ctr"/>
+          </a:p>
+        </p:txBody>
+      </p:sp>
+      <p:sp>
+        <p:nvSpPr>
+          <p:cNvPr id="13" name="Rectangle 12"/>
+          <p:cNvSpPr/>
+          <p:nvPr/>
+        </p:nvSpPr>
+        <p:spPr>
+          <a:xfrm>
+            <a:off x="6355080" y="3291840"/>
+            <a:ext cx="640080" cy="1143000"/>
+          </a:xfrm>
+          <a:prstGeom prst="rect">
+            <a:avLst/>
+          </a:prstGeom>
+          <a:solidFill>
+            <a:srgbClr val="1E2761"/>
+          </a:solidFill>
+          <a:ln>
+            <a:noFill/>
+          </a:ln>
+          <a:effectLst/>
+        </p:spPr>
+        <p:style>
+          <a:lnRef idx="1">
+            <a:schemeClr val="accent1"/>
+          </a:lnRef>
+          <a:fillRef idx="3">
+            <a:schemeClr val="accent1"/>
+          </a:fillRef>
+          <a:effectRef idx="2">
+            <a:schemeClr val="accent1"/>
+          </a:effectRef>
+          <a:fontRef idx="minor">
+            <a:schemeClr val="lt1"/>
+          </a:fontRef>
+        </p:style>
+        <p:txBody>
+          <a:bodyPr rtlCol="0" anchor="ctr"/>
+          <a:lstStyle/>
+          <a:p>
+            <a:pPr algn="ctr"/>
+          </a:p>
+        </p:txBody>
+      </p:sp>
+      <p:sp>
+        <p:nvSpPr>
+          <p:cNvPr id="14" name="TextBox 13"/>
+          <p:cNvSpPr txBox="1"/>
+          <p:nvPr/>
+        </p:nvSpPr>
+        <p:spPr>
+          <a:xfrm>
+            <a:off x="6355080" y="3611880"/>
+            <a:ext cx="640080" cy="548640"/>
+          </a:xfrm>
+          <a:prstGeom prst="rect">
+            <a:avLst/>
+          </a:prstGeom>
+          <a:noFill/>
+        </p:spPr>
+        <p:txBody>
+          <a:bodyPr wrap="square">
+            <a:spAutoFit/>
+          </a:bodyPr>
+          <a:lstStyle/>
+          <a:p>
+            <a:pPr algn="ctr"/>
+            <a:r>
+              <a:rPr sz="2200" b="1" i="0">
+                <a:solidFill>
+                  <a:srgbClr val="FFFFFF"/>
+                </a:solidFill>
+                <a:latin typeface="Montserrat"/>
+              </a:rPr>
+              <a:t>B</a:t>
+            </a:r>
+          </a:p>
+        </p:txBody>
+      </p:sp>
+      <p:sp>
+        <p:nvSpPr>
+          <p:cNvPr id="15" name="TextBox 14"/>
+          <p:cNvSpPr txBox="1"/>
+          <p:nvPr/>
+        </p:nvSpPr>
+        <p:spPr>
+          <a:xfrm>
+            <a:off x="7132320" y="3474720"/>
+            <a:ext cx="4114800" cy="868680"/>
+          </a:xfrm>
+          <a:prstGeom prst="rect">
+            <a:avLst/>
+          </a:prstGeom>
+          <a:noFill/>
+        </p:spPr>
+        <p:txBody>
+          <a:bodyPr wrap="square">
+            <a:spAutoFit/>
+          </a:bodyPr>
+          <a:lstStyle/>
+          <a:p>
+            <a:r>
+              <a:rPr sz="1400" b="0" i="0">
+                <a:solidFill>
+                  <a:srgbClr val="1B2330"/>
+                </a:solidFill>
+                <a:latin typeface="Montserrat"/>
+              </a:rPr>
+              <a:t>Aviso 20 días antes; el distribuidor contesta en 30; inicio con 48 horas</a:t>
+            </a:r>
+          </a:p>
+        </p:txBody>
+      </p:sp>
+      <p:sp>
+        <p:nvSpPr>
+          <p:cNvPr id="16" name="Rounded Rectangle 15"/>
+          <p:cNvSpPr/>
+          <p:nvPr/>
+        </p:nvSpPr>
+        <p:spPr>
+          <a:xfrm>
+            <a:off x="822960" y="4617720"/>
+            <a:ext cx="4983480" cy="1143000"/>
+          </a:xfrm>
+          <a:prstGeom prst="roundRect">
+            <a:avLst/>
+          </a:prstGeom>
+          <a:solidFill>
+            <a:srgbClr val="F3F6FB"/>
+          </a:solidFill>
+          <a:ln w="12700">
+            <a:solidFill>
+              <a:srgbClr val="C7D2E6"/>
+            </a:solidFill>
+          </a:ln>
+          <a:effectLst/>
+        </p:spPr>
+        <p:style>
+          <a:lnRef idx="1">
+            <a:schemeClr val="accent1"/>
+          </a:lnRef>
+          <a:fillRef idx="3">
+            <a:schemeClr val="accent1"/>
+          </a:fillRef>
+          <a:effectRef idx="2">
+            <a:schemeClr val="accent1"/>
+          </a:effectRef>
+          <a:fontRef idx="minor">
+            <a:schemeClr val="lt1"/>
+          </a:fontRef>
+        </p:style>
+        <p:txBody>
+          <a:bodyPr rtlCol="0" anchor="ctr"/>
+          <a:lstStyle/>
+          <a:p>
+            <a:pPr algn="ctr"/>
+          </a:p>
+        </p:txBody>
+      </p:sp>
+      <p:sp>
+        <p:nvSpPr>
+          <p:cNvPr id="17" name="Rectangle 16"/>
+          <p:cNvSpPr/>
+          <p:nvPr/>
+        </p:nvSpPr>
+        <p:spPr>
+          <a:xfrm>
+            <a:off x="822960" y="4617720"/>
+            <a:ext cx="640080" cy="1143000"/>
+          </a:xfrm>
+          <a:prstGeom prst="rect">
+            <a:avLst/>
+          </a:prstGeom>
+          <a:solidFill>
+            <a:srgbClr val="1E2761"/>
+          </a:solidFill>
+          <a:ln>
+            <a:noFill/>
+          </a:ln>
+          <a:effectLst/>
+        </p:spPr>
+        <p:style>
+          <a:lnRef idx="1">
+            <a:schemeClr val="accent1"/>
+          </a:lnRef>
+          <a:fillRef idx="3">
+            <a:schemeClr val="accent1"/>
+          </a:fillRef>
+          <a:effectRef idx="2">
+            <a:schemeClr val="accent1"/>
+          </a:effectRef>
+          <a:fontRef idx="minor">
+            <a:schemeClr val="lt1"/>
+          </a:fontRef>
+        </p:style>
+        <p:txBody>
+          <a:bodyPr rtlCol="0" anchor="ctr"/>
+          <a:lstStyle/>
+          <a:p>
+            <a:pPr algn="ctr"/>
+          </a:p>
+        </p:txBody>
+      </p:sp>
+      <p:sp>
+        <p:nvSpPr>
+          <p:cNvPr id="18" name="TextBox 17"/>
+          <p:cNvSpPr txBox="1"/>
+          <p:nvPr/>
+        </p:nvSpPr>
+        <p:spPr>
+          <a:xfrm>
+            <a:off x="822960" y="4937760"/>
+            <a:ext cx="640080" cy="548640"/>
+          </a:xfrm>
+          <a:prstGeom prst="rect">
+            <a:avLst/>
+          </a:prstGeom>
+          <a:noFill/>
+        </p:spPr>
+        <p:txBody>
+          <a:bodyPr wrap="square">
+            <a:spAutoFit/>
+          </a:bodyPr>
+          <a:lstStyle/>
+          <a:p>
+            <a:pPr algn="ctr"/>
+            <a:r>
+              <a:rPr sz="2200" b="1" i="0">
+                <a:solidFill>
+                  <a:srgbClr val="FFFFFF"/>
+                </a:solidFill>
+                <a:latin typeface="Montserrat"/>
+              </a:rPr>
+              <a:t>C</a:t>
+            </a:r>
+          </a:p>
+        </p:txBody>
+      </p:sp>
+      <p:sp>
+        <p:nvSpPr>
+          <p:cNvPr id="19" name="TextBox 18"/>
+          <p:cNvSpPr txBox="1"/>
+          <p:nvPr/>
+        </p:nvSpPr>
+        <p:spPr>
+          <a:xfrm>
+            <a:off x="1600200" y="4800600"/>
+            <a:ext cx="4114800" cy="868680"/>
+          </a:xfrm>
+          <a:prstGeom prst="rect">
+            <a:avLst/>
+          </a:prstGeom>
+          <a:noFill/>
+        </p:spPr>
+        <p:txBody>
+          <a:bodyPr wrap="square">
+            <a:spAutoFit/>
+          </a:bodyPr>
+          <a:lstStyle/>
+          <a:p>
+            <a:r>
+              <a:rPr sz="1400" b="0" i="0">
+                <a:solidFill>
+                  <a:srgbClr val="1B2330"/>
+                </a:solidFill>
+                <a:latin typeface="Montserrat"/>
+              </a:rPr>
+              <a:t>Aviso 15 días antes; el distribuidor contesta en 10; inicio con 24 horas</a:t>
+            </a:r>
+          </a:p>
+        </p:txBody>
+      </p:sp>
+      <p:sp>
+        <p:nvSpPr>
+          <p:cNvPr id="20" name="Rounded Rectangle 19"/>
+          <p:cNvSpPr/>
+          <p:nvPr/>
+        </p:nvSpPr>
+        <p:spPr>
+          <a:xfrm>
+            <a:off x="6355080" y="4617720"/>
+            <a:ext cx="4983480" cy="1143000"/>
+          </a:xfrm>
+          <a:prstGeom prst="roundRect">
+            <a:avLst/>
+          </a:prstGeom>
+          <a:solidFill>
+            <a:srgbClr val="F3F6FB"/>
+          </a:solidFill>
+          <a:ln w="12700">
+            <a:solidFill>
+              <a:srgbClr val="C7D2E6"/>
+            </a:solidFill>
+          </a:ln>
+          <a:effectLst/>
+        </p:spPr>
+        <p:style>
+          <a:lnRef idx="1">
+            <a:schemeClr val="accent1"/>
+          </a:lnRef>
+          <a:fillRef idx="3">
+            <a:schemeClr val="accent1"/>
+          </a:fillRef>
+          <a:effectRef idx="2">
+            <a:schemeClr val="accent1"/>
+          </a:effectRef>
+          <a:fontRef idx="minor">
+            <a:schemeClr val="lt1"/>
+          </a:fontRef>
+        </p:style>
+        <p:txBody>
+          <a:bodyPr rtlCol="0" anchor="ctr"/>
+          <a:lstStyle/>
+          <a:p>
+            <a:pPr algn="ctr"/>
+          </a:p>
+        </p:txBody>
+      </p:sp>
+      <p:sp>
+        <p:nvSpPr>
+          <p:cNvPr id="21" name="Rectangle 20"/>
+          <p:cNvSpPr/>
+          <p:nvPr/>
+        </p:nvSpPr>
+        <p:spPr>
+          <a:xfrm>
+            <a:off x="6355080" y="4617720"/>
+            <a:ext cx="640080" cy="1143000"/>
+          </a:xfrm>
+          <a:prstGeom prst="rect">
+            <a:avLst/>
+          </a:prstGeom>
+          <a:solidFill>
+            <a:srgbClr val="1E2761"/>
+          </a:solidFill>
+          <a:ln>
+            <a:noFill/>
+          </a:ln>
+          <a:effectLst/>
+        </p:spPr>
+        <p:style>
+          <a:lnRef idx="1">
+            <a:schemeClr val="accent1"/>
+          </a:lnRef>
+          <a:fillRef idx="3">
+            <a:schemeClr val="accent1"/>
+          </a:fillRef>
+          <a:effectRef idx="2">
+            <a:schemeClr val="accent1"/>
+          </a:effectRef>
+          <a:fontRef idx="minor">
+            <a:schemeClr val="lt1"/>
+          </a:fontRef>
+        </p:style>
+        <p:txBody>
+          <a:bodyPr rtlCol="0" anchor="ctr"/>
+          <a:lstStyle/>
+          <a:p>
+            <a:pPr algn="ctr"/>
+          </a:p>
+        </p:txBody>
+      </p:sp>
+      <p:sp>
+        <p:nvSpPr>
+          <p:cNvPr id="22" name="TextBox 21"/>
+          <p:cNvSpPr txBox="1"/>
+          <p:nvPr/>
+        </p:nvSpPr>
+        <p:spPr>
+          <a:xfrm>
+            <a:off x="6355080" y="4937760"/>
+            <a:ext cx="640080" cy="548640"/>
+          </a:xfrm>
+          <a:prstGeom prst="rect">
+            <a:avLst/>
+          </a:prstGeom>
+          <a:noFill/>
+        </p:spPr>
+        <p:txBody>
+          <a:bodyPr wrap="square">
+            <a:spAutoFit/>
+          </a:bodyPr>
+          <a:lstStyle/>
+          <a:p>
+            <a:pPr algn="ctr"/>
+            <a:r>
+              <a:rPr sz="2200" b="1" i="0">
+                <a:solidFill>
+                  <a:srgbClr val="FFFFFF"/>
+                </a:solidFill>
+                <a:latin typeface="Montserrat"/>
+              </a:rPr>
+              <a:t>D</a:t>
+            </a:r>
+          </a:p>
+        </p:txBody>
+      </p:sp>
+      <p:sp>
+        <p:nvSpPr>
+          <p:cNvPr id="23" name="TextBox 22"/>
+          <p:cNvSpPr txBox="1"/>
+          <p:nvPr/>
+        </p:nvSpPr>
+        <p:spPr>
+          <a:xfrm>
+            <a:off x="7132320" y="4800600"/>
+            <a:ext cx="4114800" cy="868680"/>
+          </a:xfrm>
+          <a:prstGeom prst="rect">
+            <a:avLst/>
+          </a:prstGeom>
+          <a:noFill/>
+        </p:spPr>
+        <p:txBody>
+          <a:bodyPr wrap="square">
+            <a:spAutoFit/>
+          </a:bodyPr>
+          <a:lstStyle/>
+          <a:p>
+            <a:r>
+              <a:rPr sz="1400" b="0" i="0">
+                <a:solidFill>
+                  <a:srgbClr val="1B2330"/>
+                </a:solidFill>
+                <a:latin typeface="Montserrat"/>
+              </a:rPr>
+              <a:t>Aviso 30 días antes; el distribuidor contesta en 24; inicio con 20 horas</a:t>
+            </a:r>
+          </a:p>
+        </p:txBody>
+      </p:sp>
+    </p:spTree>
+  </p:cSld>
+  <p:clrMapOvr>
+    <a:masterClrMapping/>
+  </p:clrMapOvr>
+  <mc:AlternateContent xmlns:mc="http://schemas.openxmlformats.org/markup-compatibility/2006">
+    <mc:Choice xmlns:p14="http://schemas.microsoft.com/office/powerpoint/2010/main" Requires="p14">
+      <p:transition spd="med" p14:dur="700">
+        <p14:cube dir="r"/>
+      </p:transition>
+    </mc:Choice>
+    <mc:Fallback>
+      <p:transition spd="med">
+        <p:push dir="r"/>
+      </p:transition>
+    </mc:Fallback>
+  </mc:AlternateContent>
+</p:sld>
+</file>
+
+<file path=ppt/slides/slide19.xml><?xml version="1.0" encoding="utf-8"?>
+<p:sld xmlns:a="http://schemas.openxmlformats.org/drawingml/2006/main" xmlns:p="http://schemas.openxmlformats.org/presentationml/2006/main" xmlns:r="http://schemas.openxmlformats.org/officeDocument/2006/relationships">
+  <p:cSld>
+    <p:spTree>
+      <p:nvGrpSpPr>
+        <p:cNvPr id="1" name=""/>
+        <p:cNvGrpSpPr/>
+        <p:nvPr/>
+      </p:nvGrpSpPr>
+      <p:grpSpPr/>
+      <p:sp>
+        <p:nvSpPr>
+          <p:cNvPr id="2" name="Rectangle 1"/>
+          <p:cNvSpPr/>
+          <p:nvPr/>
+        </p:nvSpPr>
+        <p:spPr>
+          <a:xfrm>
+            <a:off x="0" y="0"/>
+            <a:ext cx="12191695" cy="6858000"/>
+          </a:xfrm>
+          <a:prstGeom prst="rect">
+            <a:avLst/>
+          </a:prstGeom>
+          <a:solidFill>
+            <a:srgbClr val="FFFFFF"/>
+          </a:solidFill>
+          <a:ln>
+            <a:noFill/>
+          </a:ln>
+          <a:effectLst/>
+        </p:spPr>
+        <p:style>
+          <a:lnRef idx="1">
+            <a:schemeClr val="accent1"/>
+          </a:lnRef>
+          <a:fillRef idx="3">
+            <a:schemeClr val="accent1"/>
+          </a:fillRef>
+          <a:effectRef idx="2">
+            <a:schemeClr val="accent1"/>
+          </a:effectRef>
+          <a:fontRef idx="minor">
+            <a:schemeClr val="lt1"/>
+          </a:fontRef>
+        </p:style>
+        <p:txBody>
+          <a:bodyPr rtlCol="0" anchor="ctr"/>
+          <a:lstStyle/>
+          <a:p>
+            <a:pPr algn="ctr"/>
+          </a:p>
+        </p:txBody>
+      </p:sp>
+      <p:sp>
+        <p:nvSpPr>
+          <p:cNvPr id="3" name="TextBox 2"/>
+          <p:cNvSpPr txBox="1"/>
+          <p:nvPr/>
+        </p:nvSpPr>
+        <p:spPr>
+          <a:xfrm>
+            <a:off x="10607040" y="320040"/>
+            <a:ext cx="1371600" cy="365760"/>
+          </a:xfrm>
+          <a:prstGeom prst="rect">
+            <a:avLst/>
+          </a:prstGeom>
+          <a:noFill/>
+        </p:spPr>
+        <p:txBody>
+          <a:bodyPr wrap="square">
+            <a:spAutoFit/>
+          </a:bodyPr>
+          <a:lstStyle/>
+          <a:p>
+            <a:pPr algn="r"/>
+            <a:r>
+              <a:rPr sz="1000" b="1" i="0">
+                <a:solidFill>
+                  <a:srgbClr val="64748B"/>
+                </a:solidFill>
+                <a:latin typeface="Montserrat"/>
+              </a:rPr>
+              <a:t>019 / 022</a:t>
+            </a:r>
+          </a:p>
+        </p:txBody>
+      </p:sp>
+      <p:sp>
+        <p:nvSpPr>
+          <p:cNvPr id="4" name="TextBox 3"/>
+          <p:cNvSpPr txBox="1"/>
+          <p:nvPr/>
+        </p:nvSpPr>
+        <p:spPr>
+          <a:xfrm>
+            <a:off x="457200" y="6419088"/>
+            <a:ext cx="8229600" cy="365760"/>
+          </a:xfrm>
+          <a:prstGeom prst="rect">
+            <a:avLst/>
+          </a:prstGeom>
+          <a:noFill/>
+        </p:spPr>
+        <p:txBody>
+          <a:bodyPr wrap="square">
+            <a:spAutoFit/>
+          </a:bodyPr>
+          <a:lstStyle/>
+          <a:p>
+            <a:r>
+              <a:rPr sz="900" b="0" i="0">
+                <a:solidFill>
+                  <a:srgbClr val="64748B"/>
+                </a:solidFill>
+                <a:latin typeface="Montserrat"/>
+              </a:rPr>
+              <a:t>Curso Gas B · Tema 01 · Distribución por canalización</a:t>
+            </a:r>
+          </a:p>
+        </p:txBody>
+      </p:sp>
+      <p:sp>
+        <p:nvSpPr>
+          <p:cNvPr id="5" name="Rectangle 4"/>
+          <p:cNvSpPr/>
+          <p:nvPr/>
+        </p:nvSpPr>
+        <p:spPr>
+          <a:xfrm>
+            <a:off x="0" y="0"/>
+            <a:ext cx="12191695" cy="1143000"/>
+          </a:xfrm>
+          <a:prstGeom prst="rect">
+            <a:avLst/>
+          </a:prstGeom>
+          <a:solidFill>
+            <a:srgbClr val="1E8E4B"/>
+          </a:solidFill>
+          <a:ln>
+            <a:noFill/>
+          </a:ln>
+          <a:effectLst/>
+        </p:spPr>
+        <p:style>
+          <a:lnRef idx="1">
+            <a:schemeClr val="accent1"/>
+          </a:lnRef>
+          <a:fillRef idx="3">
+            <a:schemeClr val="accent1"/>
+          </a:fillRef>
+          <a:effectRef idx="2">
+            <a:schemeClr val="accent1"/>
+          </a:effectRef>
+          <a:fontRef idx="minor">
+            <a:schemeClr val="lt1"/>
+          </a:fontRef>
+        </p:style>
+        <p:txBody>
+          <a:bodyPr rtlCol="0" anchor="ctr"/>
+          <a:lstStyle/>
+          <a:p>
+            <a:pPr algn="ctr"/>
+          </a:p>
+        </p:txBody>
+      </p:sp>
+      <p:sp>
+        <p:nvSpPr>
+          <p:cNvPr id="6" name="TextBox 5"/>
+          <p:cNvSpPr txBox="1"/>
+          <p:nvPr/>
+        </p:nvSpPr>
+        <p:spPr>
+          <a:xfrm>
+            <a:off x="822960" y="274320"/>
+            <a:ext cx="10515600" cy="640080"/>
+          </a:xfrm>
+          <a:prstGeom prst="rect">
+            <a:avLst/>
+          </a:prstGeom>
+          <a:noFill/>
+        </p:spPr>
+        <p:txBody>
+          <a:bodyPr wrap="square">
+            <a:spAutoFit/>
+          </a:bodyPr>
+          <a:lstStyle/>
+          <a:p>
+            <a:r>
+              <a:rPr sz="2400" b="1" i="0">
+                <a:solidFill>
+                  <a:srgbClr val="FFFFFF"/>
+                </a:solidFill>
+                <a:latin typeface="Montserrat"/>
+              </a:rPr>
+              <a:t>✔  RESPUESTA:  A</a:t>
+            </a:r>
+          </a:p>
+        </p:txBody>
+      </p:sp>
+      <p:sp>
+        <p:nvSpPr>
+          <p:cNvPr id="7" name="TextBox 6"/>
+          <p:cNvSpPr txBox="1"/>
+          <p:nvPr/>
+        </p:nvSpPr>
+        <p:spPr>
+          <a:xfrm>
+            <a:off x="822960" y="1417320"/>
+            <a:ext cx="10515600" cy="914400"/>
+          </a:xfrm>
+          <a:prstGeom prst="rect">
+            <a:avLst/>
+          </a:prstGeom>
+          <a:noFill/>
+        </p:spPr>
+        <p:txBody>
+          <a:bodyPr wrap="square">
+            <a:spAutoFit/>
+          </a:bodyPr>
+          <a:lstStyle/>
+          <a:p>
+            <a:r>
+              <a:rPr sz="1800" b="1" i="0">
+                <a:solidFill>
+                  <a:srgbClr val="64748B"/>
+                </a:solidFill>
+                <a:latin typeface="Montserrat"/>
+              </a:rPr>
+              <a:t>Obras de terceros: ¿cuáles son los tres plazos, en orden?</a:t>
+            </a:r>
+          </a:p>
+        </p:txBody>
+      </p:sp>
+      <p:sp>
+        <p:nvSpPr>
+          <p:cNvPr id="8" name="Rounded Rectangle 7"/>
+          <p:cNvSpPr/>
+          <p:nvPr/>
+        </p:nvSpPr>
+        <p:spPr>
+          <a:xfrm>
+            <a:off x="822960" y="2514600"/>
+            <a:ext cx="10515600" cy="914400"/>
+          </a:xfrm>
+          <a:prstGeom prst="roundRect">
+            <a:avLst/>
+          </a:prstGeom>
+          <a:solidFill>
+            <a:srgbClr val="E9F6EE"/>
+          </a:solidFill>
+          <a:ln w="12700">
+            <a:solidFill>
+              <a:srgbClr val="1E8E4B"/>
+            </a:solidFill>
+          </a:ln>
+          <a:effectLst/>
+        </p:spPr>
+        <p:style>
+          <a:lnRef idx="1">
+            <a:schemeClr val="accent1"/>
+          </a:lnRef>
+          <a:fillRef idx="3">
+            <a:schemeClr val="accent1"/>
+          </a:fillRef>
+          <a:effectRef idx="2">
+            <a:schemeClr val="accent1"/>
+          </a:effectRef>
+          <a:fontRef idx="minor">
+            <a:schemeClr val="lt1"/>
+          </a:fontRef>
+        </p:style>
+        <p:txBody>
+          <a:bodyPr rtlCol="0" anchor="ctr"/>
+          <a:lstStyle/>
+          <a:p>
+            <a:pPr algn="ctr"/>
+          </a:p>
+        </p:txBody>
+      </p:sp>
+      <p:sp>
+        <p:nvSpPr>
+          <p:cNvPr id="9" name="TextBox 8"/>
+          <p:cNvSpPr txBox="1"/>
+          <p:nvPr/>
+        </p:nvSpPr>
+        <p:spPr>
+          <a:xfrm>
+            <a:off x="1097280" y="2697480"/>
+            <a:ext cx="10058400" cy="640080"/>
+          </a:xfrm>
+          <a:prstGeom prst="rect">
+            <a:avLst/>
+          </a:prstGeom>
+          <a:noFill/>
+        </p:spPr>
+        <p:txBody>
+          <a:bodyPr wrap="square">
+            <a:spAutoFit/>
+          </a:bodyPr>
+          <a:lstStyle/>
+          <a:p>
+            <a:r>
+              <a:rPr sz="1800" b="1" i="0">
+                <a:solidFill>
+                  <a:srgbClr val="1E8E4B"/>
+                </a:solidFill>
+                <a:latin typeface="Montserrat"/>
+              </a:rPr>
+              <a:t>A.  </a:t>
+            </a:r>
+            <a:r>
+              <a:rPr sz="1800" b="1" i="0">
+                <a:solidFill>
+                  <a:srgbClr val="1E2761"/>
+                </a:solidFill>
+                <a:latin typeface="Montserrat"/>
+              </a:rPr>
+              <a:t>Aviso 30 días antes; el distribuidor contesta en 20; inicio con 24 horas</a:t>
+            </a:r>
+          </a:p>
+        </p:txBody>
+      </p:sp>
+      <p:sp>
+        <p:nvSpPr>
+          <p:cNvPr id="10" name="TextBox 9"/>
+          <p:cNvSpPr txBox="1"/>
+          <p:nvPr/>
+        </p:nvSpPr>
+        <p:spPr>
+          <a:xfrm>
+            <a:off x="822960" y="3749039"/>
+            <a:ext cx="10515600" cy="2194560"/>
+          </a:xfrm>
+          <a:prstGeom prst="rect">
+            <a:avLst/>
+          </a:prstGeom>
+          <a:noFill/>
+        </p:spPr>
+        <p:txBody>
+          <a:bodyPr wrap="square">
+            <a:spAutoFit/>
+          </a:bodyPr>
+          <a:lstStyle/>
+          <a:p>
+            <a:r>
+              <a:rPr sz="1500" b="1" i="0">
+                <a:solidFill>
+                  <a:srgbClr val="E8801A"/>
+                </a:solidFill>
+                <a:latin typeface="Montserrat"/>
+              </a:rPr>
+              <a:t>Por qué:  </a:t>
+            </a:r>
+            <a:r>
+              <a:rPr sz="1500" b="0" i="0">
+                <a:solidFill>
+                  <a:srgbClr val="1B2330"/>
+                </a:solidFill>
+                <a:latin typeface="Montserrat"/>
+              </a:rPr>
+              <a:t>Se solicita información con treinta días, el distribuidor responde en veinte y el inicio de la obra se avisa con veinticuatro horas.</a:t>
+            </a:r>
+          </a:p>
+        </p:txBody>
+      </p:sp>
+    </p:spTree>
+  </p:cSld>
+  <p:clrMapOvr>
+    <a:masterClrMapping/>
+  </p:clrMapOvr>
+  <mc:AlternateContent xmlns:mc="http://schemas.openxmlformats.org/markup-compatibility/2006">
+    <mc:Choice xmlns:p14="http://schemas.microsoft.com/office/powerpoint/2010/main" Requires="p14">
+      <p:transition spd="med" p14:dur="700">
+        <p14:cube dir="l"/>
+      </p:transition>
+    </mc:Choice>
+    <mc:Fallback>
+      <p:transition spd="med">
+        <p:push dir="l"/>
+      </p:transition>
+    </mc:Fallback>
+  </mc:AlternateContent>
 </p:sld>
 </file>
 
@@ -8101,7 +10797,7 @@
                 </a:solidFill>
                 <a:latin typeface="Montserrat"/>
               </a:rPr>
-              <a:t>002 / 016</a:t>
+              <a:t>002 / 022</a:t>
             </a:r>
           </a:p>
         </p:txBody>
@@ -8176,7 +10872,7 @@
       </p:sp>
       <p:sp>
         <p:nvSpPr>
-          <p:cNvPr id="6" name="Rounded Rectangle 5"/>
+          <p:cNvPr id="6" name="Rectangle 5"/>
           <p:cNvSpPr/>
           <p:nvPr/>
         </p:nvSpPr>
@@ -8185,7 +10881,7 @@
             <a:off x="868680" y="1234440"/>
             <a:ext cx="1463040" cy="73152"/>
           </a:xfrm>
-          <a:prstGeom prst="roundRect">
+          <a:prstGeom prst="rect">
             <a:avLst/>
           </a:prstGeom>
           <a:solidFill>
@@ -8266,14 +10962,58 @@
       </p:sp>
       <p:sp>
         <p:nvSpPr>
-          <p:cNvPr id="8" name="TextBox 7"/>
+          <p:cNvPr id="8" name="Rectangle 7"/>
+          <p:cNvSpPr/>
+          <p:nvPr/>
+        </p:nvSpPr>
+        <p:spPr>
+          <a:xfrm>
+            <a:off x="822960" y="2011680"/>
+            <a:ext cx="3017520" cy="128016"/>
+          </a:xfrm>
+          <a:prstGeom prst="rect">
+            <a:avLst/>
+          </a:prstGeom>
+          <a:solidFill>
+            <a:srgbClr val="E8801A"/>
+          </a:solidFill>
+          <a:ln>
+            <a:noFill/>
+          </a:ln>
+          <a:effectLst/>
+        </p:spPr>
+        <p:style>
+          <a:lnRef idx="1">
+            <a:schemeClr val="accent1"/>
+          </a:lnRef>
+          <a:fillRef idx="3">
+            <a:schemeClr val="accent1"/>
+          </a:fillRef>
+          <a:effectRef idx="2">
+            <a:schemeClr val="accent1"/>
+          </a:effectRef>
+          <a:fontRef idx="minor">
+            <a:schemeClr val="lt1"/>
+          </a:fontRef>
+        </p:style>
+        <p:txBody>
+          <a:bodyPr rtlCol="0" anchor="ctr"/>
+          <a:lstStyle/>
+          <a:p>
+            <a:pPr algn="ctr"/>
+          </a:p>
+        </p:txBody>
+      </p:sp>
+      <p:sp>
+        <p:nvSpPr>
+          <p:cNvPr id="9" name="TextBox 8"/>
           <p:cNvSpPr txBox="1"/>
           <p:nvPr/>
         </p:nvSpPr>
         <p:spPr>
           <a:xfrm>
-            <a:off x="822960" y="2331720"/>
-            <a:ext cx="3017520" cy="1463040"/>
+            <a:off x="822960" y="2377440"/>
+            <a:ext cx="3017520" cy="1371600"/>
           </a:xfrm>
           <a:prstGeom prst="rect">
             <a:avLst/>
@@ -8288,7 +11028,7 @@
           <a:p>
             <a:pPr algn="ctr"/>
             <a:r>
-              <a:rPr sz="6000" b="1" i="0">
+              <a:rPr sz="5800" b="1" i="0">
                 <a:solidFill>
                   <a:srgbClr val="1E2761"/>
                 </a:solidFill>
@@ -8301,13 +11041,13 @@
       </p:sp>
       <p:sp>
         <p:nvSpPr>
-          <p:cNvPr id="9" name="TextBox 8"/>
+          <p:cNvPr id="10" name="TextBox 9"/>
           <p:cNvSpPr txBox="1"/>
           <p:nvPr/>
         </p:nvSpPr>
         <p:spPr>
           <a:xfrm>
-            <a:off x="1051560" y="3611880"/>
+            <a:off x="1051560" y="3657600"/>
             <a:ext cx="2560320" cy="1005840"/>
           </a:xfrm>
           <a:prstGeom prst="rect">
@@ -8336,7 +11076,7 @@
       </p:sp>
       <p:sp>
         <p:nvSpPr>
-          <p:cNvPr id="10" name="Rounded Rectangle 9"/>
+          <p:cNvPr id="11" name="Rounded Rectangle 10"/>
           <p:cNvSpPr/>
           <p:nvPr/>
         </p:nvSpPr>
@@ -8382,14 +11122,58 @@
       </p:sp>
       <p:sp>
         <p:nvSpPr>
-          <p:cNvPr id="11" name="TextBox 10"/>
+          <p:cNvPr id="12" name="Rectangle 11"/>
+          <p:cNvSpPr/>
+          <p:nvPr/>
+        </p:nvSpPr>
+        <p:spPr>
+          <a:xfrm>
+            <a:off x="4617720" y="2011680"/>
+            <a:ext cx="3017520" cy="128016"/>
+          </a:xfrm>
+          <a:prstGeom prst="rect">
+            <a:avLst/>
+          </a:prstGeom>
+          <a:solidFill>
+            <a:srgbClr val="E8801A"/>
+          </a:solidFill>
+          <a:ln>
+            <a:noFill/>
+          </a:ln>
+          <a:effectLst/>
+        </p:spPr>
+        <p:style>
+          <a:lnRef idx="1">
+            <a:schemeClr val="accent1"/>
+          </a:lnRef>
+          <a:fillRef idx="3">
+            <a:schemeClr val="accent1"/>
+          </a:fillRef>
+          <a:effectRef idx="2">
+            <a:schemeClr val="accent1"/>
+          </a:effectRef>
+          <a:fontRef idx="minor">
+            <a:schemeClr val="lt1"/>
+          </a:fontRef>
+        </p:style>
+        <p:txBody>
+          <a:bodyPr rtlCol="0" anchor="ctr"/>
+          <a:lstStyle/>
+          <a:p>
+            <a:pPr algn="ctr"/>
+          </a:p>
+        </p:txBody>
+      </p:sp>
+      <p:sp>
+        <p:nvSpPr>
+          <p:cNvPr id="13" name="TextBox 12"/>
           <p:cNvSpPr txBox="1"/>
           <p:nvPr/>
         </p:nvSpPr>
         <p:spPr>
           <a:xfrm>
-            <a:off x="4617720" y="2331720"/>
-            <a:ext cx="3017520" cy="1463040"/>
+            <a:off x="4617720" y="2377440"/>
+            <a:ext cx="3017520" cy="1371600"/>
           </a:xfrm>
           <a:prstGeom prst="rect">
             <a:avLst/>
@@ -8404,7 +11188,7 @@
           <a:p>
             <a:pPr algn="ctr"/>
             <a:r>
-              <a:rPr sz="6000" b="1" i="0">
+              <a:rPr sz="5800" b="1" i="0">
                 <a:solidFill>
                   <a:srgbClr val="1E2761"/>
                 </a:solidFill>
@@ -8417,13 +11201,13 @@
       </p:sp>
       <p:sp>
         <p:nvSpPr>
-          <p:cNvPr id="12" name="TextBox 11"/>
+          <p:cNvPr id="14" name="TextBox 13"/>
           <p:cNvSpPr txBox="1"/>
           <p:nvPr/>
         </p:nvSpPr>
         <p:spPr>
           <a:xfrm>
-            <a:off x="4846320" y="3611880"/>
+            <a:off x="4846320" y="3657600"/>
             <a:ext cx="2560320" cy="1005840"/>
           </a:xfrm>
           <a:prstGeom prst="rect">
@@ -8452,7 +11236,7 @@
       </p:sp>
       <p:sp>
         <p:nvSpPr>
-          <p:cNvPr id="13" name="Rounded Rectangle 12"/>
+          <p:cNvPr id="15" name="Rounded Rectangle 14"/>
           <p:cNvSpPr/>
           <p:nvPr/>
         </p:nvSpPr>
@@ -8498,14 +11282,58 @@
       </p:sp>
       <p:sp>
         <p:nvSpPr>
-          <p:cNvPr id="14" name="TextBox 13"/>
+          <p:cNvPr id="16" name="Rectangle 15"/>
+          <p:cNvSpPr/>
+          <p:nvPr/>
+        </p:nvSpPr>
+        <p:spPr>
+          <a:xfrm>
+            <a:off x="8412480" y="2011680"/>
+            <a:ext cx="3017520" cy="128016"/>
+          </a:xfrm>
+          <a:prstGeom prst="rect">
+            <a:avLst/>
+          </a:prstGeom>
+          <a:solidFill>
+            <a:srgbClr val="E8801A"/>
+          </a:solidFill>
+          <a:ln>
+            <a:noFill/>
+          </a:ln>
+          <a:effectLst/>
+        </p:spPr>
+        <p:style>
+          <a:lnRef idx="1">
+            <a:schemeClr val="accent1"/>
+          </a:lnRef>
+          <a:fillRef idx="3">
+            <a:schemeClr val="accent1"/>
+          </a:fillRef>
+          <a:effectRef idx="2">
+            <a:schemeClr val="accent1"/>
+          </a:effectRef>
+          <a:fontRef idx="minor">
+            <a:schemeClr val="lt1"/>
+          </a:fontRef>
+        </p:style>
+        <p:txBody>
+          <a:bodyPr rtlCol="0" anchor="ctr"/>
+          <a:lstStyle/>
+          <a:p>
+            <a:pPr algn="ctr"/>
+          </a:p>
+        </p:txBody>
+      </p:sp>
+      <p:sp>
+        <p:nvSpPr>
+          <p:cNvPr id="17" name="TextBox 16"/>
           <p:cNvSpPr txBox="1"/>
           <p:nvPr/>
         </p:nvSpPr>
         <p:spPr>
           <a:xfrm>
-            <a:off x="8412480" y="2331720"/>
-            <a:ext cx="3017520" cy="1463040"/>
+            <a:off x="8412480" y="2377440"/>
+            <a:ext cx="3017520" cy="1371600"/>
           </a:xfrm>
           <a:prstGeom prst="rect">
             <a:avLst/>
@@ -8520,7 +11348,7 @@
           <a:p>
             <a:pPr algn="ctr"/>
             <a:r>
-              <a:rPr sz="6000" b="1" i="0">
+              <a:rPr sz="5800" b="1" i="0">
                 <a:solidFill>
                   <a:srgbClr val="1E2761"/>
                 </a:solidFill>
@@ -8533,13 +11361,13 @@
       </p:sp>
       <p:sp>
         <p:nvSpPr>
-          <p:cNvPr id="15" name="TextBox 14"/>
+          <p:cNvPr id="18" name="TextBox 17"/>
           <p:cNvSpPr txBox="1"/>
           <p:nvPr/>
         </p:nvSpPr>
         <p:spPr>
           <a:xfrm>
-            <a:off x="8641080" y="3611880"/>
+            <a:off x="8641080" y="3657600"/>
             <a:ext cx="2560320" cy="1005840"/>
           </a:xfrm>
           <a:prstGeom prst="rect">
@@ -8571,6 +11399,1372 @@
   <p:clrMapOvr>
     <a:masterClrMapping/>
   </p:clrMapOvr>
+  <mc:AlternateContent xmlns:mc="http://schemas.openxmlformats.org/markup-compatibility/2006">
+    <mc:Choice xmlns:p14="http://schemas.microsoft.com/office/powerpoint/2010/main" Requires="p14">
+      <p:transition spd="med" p14:dur="700">
+        <p14:cube dir="r"/>
+      </p:transition>
+    </mc:Choice>
+    <mc:Fallback>
+      <p:transition spd="med">
+        <p:push dir="r"/>
+      </p:transition>
+    </mc:Fallback>
+  </mc:AlternateContent>
+</p:sld>
+</file>
+
+<file path=ppt/slides/slide20.xml><?xml version="1.0" encoding="utf-8"?>
+<p:sld xmlns:a="http://schemas.openxmlformats.org/drawingml/2006/main" xmlns:p="http://schemas.openxmlformats.org/presentationml/2006/main" xmlns:r="http://schemas.openxmlformats.org/officeDocument/2006/relationships">
+  <p:cSld>
+    <p:spTree>
+      <p:nvGrpSpPr>
+        <p:cNvPr id="1" name=""/>
+        <p:cNvGrpSpPr/>
+        <p:nvPr/>
+      </p:nvGrpSpPr>
+      <p:grpSpPr/>
+      <p:sp>
+        <p:nvSpPr>
+          <p:cNvPr id="2" name="Rectangle 1"/>
+          <p:cNvSpPr/>
+          <p:nvPr/>
+        </p:nvSpPr>
+        <p:spPr>
+          <a:xfrm>
+            <a:off x="0" y="0"/>
+            <a:ext cx="12191695" cy="6858000"/>
+          </a:xfrm>
+          <a:prstGeom prst="rect">
+            <a:avLst/>
+          </a:prstGeom>
+          <a:solidFill>
+            <a:srgbClr val="FFFFFF"/>
+          </a:solidFill>
+          <a:ln>
+            <a:noFill/>
+          </a:ln>
+          <a:effectLst/>
+        </p:spPr>
+        <p:style>
+          <a:lnRef idx="1">
+            <a:schemeClr val="accent1"/>
+          </a:lnRef>
+          <a:fillRef idx="3">
+            <a:schemeClr val="accent1"/>
+          </a:fillRef>
+          <a:effectRef idx="2">
+            <a:schemeClr val="accent1"/>
+          </a:effectRef>
+          <a:fontRef idx="minor">
+            <a:schemeClr val="lt1"/>
+          </a:fontRef>
+        </p:style>
+        <p:txBody>
+          <a:bodyPr rtlCol="0" anchor="ctr"/>
+          <a:lstStyle/>
+          <a:p>
+            <a:pPr algn="ctr"/>
+          </a:p>
+        </p:txBody>
+      </p:sp>
+      <p:sp>
+        <p:nvSpPr>
+          <p:cNvPr id="3" name="TextBox 2"/>
+          <p:cNvSpPr txBox="1"/>
+          <p:nvPr/>
+        </p:nvSpPr>
+        <p:spPr>
+          <a:xfrm>
+            <a:off x="10607040" y="320040"/>
+            <a:ext cx="1371600" cy="365760"/>
+          </a:xfrm>
+          <a:prstGeom prst="rect">
+            <a:avLst/>
+          </a:prstGeom>
+          <a:noFill/>
+        </p:spPr>
+        <p:txBody>
+          <a:bodyPr wrap="square">
+            <a:spAutoFit/>
+          </a:bodyPr>
+          <a:lstStyle/>
+          <a:p>
+            <a:pPr algn="r"/>
+            <a:r>
+              <a:rPr sz="1000" b="1" i="0">
+                <a:solidFill>
+                  <a:srgbClr val="64748B"/>
+                </a:solidFill>
+                <a:latin typeface="Montserrat"/>
+              </a:rPr>
+              <a:t>020 / 022</a:t>
+            </a:r>
+          </a:p>
+        </p:txBody>
+      </p:sp>
+      <p:sp>
+        <p:nvSpPr>
+          <p:cNvPr id="4" name="TextBox 3"/>
+          <p:cNvSpPr txBox="1"/>
+          <p:nvPr/>
+        </p:nvSpPr>
+        <p:spPr>
+          <a:xfrm>
+            <a:off x="457200" y="6419088"/>
+            <a:ext cx="8229600" cy="365760"/>
+          </a:xfrm>
+          <a:prstGeom prst="rect">
+            <a:avLst/>
+          </a:prstGeom>
+          <a:noFill/>
+        </p:spPr>
+        <p:txBody>
+          <a:bodyPr wrap="square">
+            <a:spAutoFit/>
+          </a:bodyPr>
+          <a:lstStyle/>
+          <a:p>
+            <a:r>
+              <a:rPr sz="900" b="0" i="0">
+                <a:solidFill>
+                  <a:srgbClr val="64748B"/>
+                </a:solidFill>
+                <a:latin typeface="Montserrat"/>
+              </a:rPr>
+              <a:t>Curso Gas B · Tema 01 · Distribución por canalización</a:t>
+            </a:r>
+          </a:p>
+        </p:txBody>
+      </p:sp>
+      <p:sp>
+        <p:nvSpPr>
+          <p:cNvPr id="5" name="TextBox 4"/>
+          <p:cNvSpPr txBox="1"/>
+          <p:nvPr/>
+        </p:nvSpPr>
+        <p:spPr>
+          <a:xfrm>
+            <a:off x="822960" y="457200"/>
+            <a:ext cx="10058400" cy="365760"/>
+          </a:xfrm>
+          <a:prstGeom prst="rect">
+            <a:avLst/>
+          </a:prstGeom>
+          <a:noFill/>
+        </p:spPr>
+        <p:txBody>
+          <a:bodyPr wrap="square">
+            <a:spAutoFit/>
+          </a:bodyPr>
+          <a:lstStyle/>
+          <a:p>
+            <a:r>
+              <a:rPr sz="1300" b="1" i="0">
+                <a:solidFill>
+                  <a:srgbClr val="E8801A"/>
+                </a:solidFill>
+                <a:latin typeface="Montserrat"/>
+              </a:rPr>
+              <a:t>APARTADO 8 · QUIÉN DECIDE</a:t>
+            </a:r>
+          </a:p>
+        </p:txBody>
+      </p:sp>
+      <p:sp>
+        <p:nvSpPr>
+          <p:cNvPr id="6" name="TextBox 5"/>
+          <p:cNvSpPr txBox="1"/>
+          <p:nvPr/>
+        </p:nvSpPr>
+        <p:spPr>
+          <a:xfrm>
+            <a:off x="822960" y="868680"/>
+            <a:ext cx="10515600" cy="914400"/>
+          </a:xfrm>
+          <a:prstGeom prst="rect">
+            <a:avLst/>
+          </a:prstGeom>
+          <a:noFill/>
+        </p:spPr>
+        <p:txBody>
+          <a:bodyPr wrap="square">
+            <a:spAutoFit/>
+          </a:bodyPr>
+          <a:lstStyle/>
+          <a:p>
+            <a:r>
+              <a:rPr sz="2800" b="1" i="0">
+                <a:solidFill>
+                  <a:srgbClr val="1E2761"/>
+                </a:solidFill>
+                <a:latin typeface="Montserrat"/>
+              </a:rPr>
+              <a:t>Si hay pelea, manda la CA</a:t>
+            </a:r>
+          </a:p>
+        </p:txBody>
+      </p:sp>
+      <p:sp>
+        <p:nvSpPr>
+          <p:cNvPr id="7" name="Rectangle 6"/>
+          <p:cNvSpPr/>
+          <p:nvPr/>
+        </p:nvSpPr>
+        <p:spPr>
+          <a:xfrm>
+            <a:off x="868680" y="1627632"/>
+            <a:ext cx="2011680" cy="73152"/>
+          </a:xfrm>
+          <a:prstGeom prst="rect">
+            <a:avLst/>
+          </a:prstGeom>
+          <a:solidFill>
+            <a:srgbClr val="E8801A"/>
+          </a:solidFill>
+          <a:ln>
+            <a:noFill/>
+          </a:ln>
+          <a:effectLst/>
+        </p:spPr>
+        <p:style>
+          <a:lnRef idx="1">
+            <a:schemeClr val="accent1"/>
+          </a:lnRef>
+          <a:fillRef idx="3">
+            <a:schemeClr val="accent1"/>
+          </a:fillRef>
+          <a:effectRef idx="2">
+            <a:schemeClr val="accent1"/>
+          </a:effectRef>
+          <a:fontRef idx="minor">
+            <a:schemeClr val="lt1"/>
+          </a:fontRef>
+        </p:style>
+        <p:txBody>
+          <a:bodyPr rtlCol="0" anchor="ctr"/>
+          <a:lstStyle/>
+          <a:p>
+            <a:pPr algn="ctr"/>
+          </a:p>
+        </p:txBody>
+      </p:sp>
+      <p:sp>
+        <p:nvSpPr>
+          <p:cNvPr id="8" name="TextBox 7"/>
+          <p:cNvSpPr txBox="1"/>
+          <p:nvPr/>
+        </p:nvSpPr>
+        <p:spPr>
+          <a:xfrm>
+            <a:off x="822960" y="1965960"/>
+            <a:ext cx="5029200" cy="4206240"/>
+          </a:xfrm>
+          <a:prstGeom prst="rect">
+            <a:avLst/>
+          </a:prstGeom>
+          <a:noFill/>
+        </p:spPr>
+        <p:txBody>
+          <a:bodyPr wrap="square">
+            <a:spAutoFit/>
+          </a:bodyPr>
+          <a:lstStyle/>
+          <a:p>
+            <a:pPr>
+              <a:spcAft>
+                <a:spcPts val="1100"/>
+              </a:spcAft>
+            </a:pPr>
+            <a:r>
+              <a:rPr sz="1600" b="1" i="0">
+                <a:solidFill>
+                  <a:srgbClr val="E8801A"/>
+                </a:solidFill>
+                <a:latin typeface="Montserrat"/>
+              </a:rPr>
+              <a:t>▸  </a:t>
+            </a:r>
+            <a:r>
+              <a:rPr sz="1600" b="0" i="0">
+                <a:solidFill>
+                  <a:srgbClr val="1B2330"/>
+                </a:solidFill>
+                <a:latin typeface="Montserrat"/>
+              </a:rPr>
+              <a:t>Afecta al trazado: distribuidor puede negarse</a:t>
+            </a:r>
+          </a:p>
+          <a:p>
+            <a:pPr>
+              <a:spcAft>
+                <a:spcPts val="1100"/>
+              </a:spcAft>
+            </a:pPr>
+            <a:r>
+              <a:rPr sz="1600" b="1" i="0">
+                <a:solidFill>
+                  <a:srgbClr val="E8801A"/>
+                </a:solidFill>
+                <a:latin typeface="Montserrat"/>
+              </a:rPr>
+              <a:t>▸  </a:t>
+            </a:r>
+            <a:r>
+              <a:rPr sz="1600" b="0" i="0">
+                <a:solidFill>
+                  <a:srgbClr val="1B2330"/>
+                </a:solidFill>
+                <a:latin typeface="Montserrat"/>
+              </a:rPr>
+              <a:t>Solo por razones técnicas o de seguridad</a:t>
+            </a:r>
+          </a:p>
+          <a:p>
+            <a:pPr>
+              <a:spcAft>
+                <a:spcPts val="1100"/>
+              </a:spcAft>
+            </a:pPr>
+            <a:r>
+              <a:rPr sz="1600" b="1" i="0">
+                <a:solidFill>
+                  <a:srgbClr val="E8801A"/>
+                </a:solidFill>
+                <a:latin typeface="Montserrat"/>
+              </a:rPr>
+              <a:t>▸  </a:t>
+            </a:r>
+            <a:r>
+              <a:rPr sz="1600" b="0" i="0">
+                <a:solidFill>
+                  <a:srgbClr val="1B2330"/>
+                </a:solidFill>
+                <a:latin typeface="Montserrat"/>
+              </a:rPr>
+              <a:t>Desacuerdo: resuelve la Comunidad Autónoma</a:t>
+            </a:r>
+          </a:p>
+          <a:p>
+            <a:pPr>
+              <a:spcAft>
+                <a:spcPts val="1100"/>
+              </a:spcAft>
+            </a:pPr>
+            <a:r>
+              <a:rPr sz="1600" b="1" i="0">
+                <a:solidFill>
+                  <a:srgbClr val="E8801A"/>
+                </a:solidFill>
+                <a:latin typeface="Montserrat"/>
+              </a:rPr>
+              <a:t>▸  </a:t>
+            </a:r>
+            <a:r>
+              <a:rPr sz="1600" b="0" i="0">
+                <a:solidFill>
+                  <a:srgbClr val="1B2330"/>
+                </a:solidFill>
+                <a:latin typeface="Montserrat"/>
+              </a:rPr>
+              <a:t>La carga de probar es del solicitante</a:t>
+            </a:r>
+          </a:p>
+        </p:txBody>
+      </p:sp>
+      <p:sp>
+        <p:nvSpPr>
+          <p:cNvPr id="9" name="imgph" descr="IMGQ:two engineers discussing plans construction site"/>
+          <p:cNvSpPr/>
+          <p:nvPr/>
+        </p:nvSpPr>
+        <p:spPr>
+          <a:xfrm>
+            <a:off x="6080760" y="1965960"/>
+            <a:ext cx="5303520" cy="4572000"/>
+          </a:xfrm>
+          <a:prstGeom prst="roundRect">
+            <a:avLst/>
+          </a:prstGeom>
+          <a:solidFill>
+            <a:srgbClr val="F3F6FB"/>
+          </a:solidFill>
+          <a:ln w="12700">
+            <a:solidFill>
+              <a:srgbClr val="C7D2E6"/>
+            </a:solidFill>
+          </a:ln>
+          <a:effectLst/>
+        </p:spPr>
+        <p:style>
+          <a:lnRef idx="1">
+            <a:schemeClr val="accent1"/>
+          </a:lnRef>
+          <a:fillRef idx="3">
+            <a:schemeClr val="accent1"/>
+          </a:fillRef>
+          <a:effectRef idx="2">
+            <a:schemeClr val="accent1"/>
+          </a:effectRef>
+          <a:fontRef idx="minor">
+            <a:schemeClr val="lt1"/>
+          </a:fontRef>
+        </p:style>
+        <p:txBody>
+          <a:bodyPr rtlCol="0" anchor="ctr"/>
+          <a:lstStyle/>
+          <a:p>
+            <a:pPr algn="ctr"/>
+          </a:p>
+        </p:txBody>
+      </p:sp>
+      <p:sp>
+        <p:nvSpPr>
+          <p:cNvPr id="10" name="TextBox 9"/>
+          <p:cNvSpPr txBox="1"/>
+          <p:nvPr/>
+        </p:nvSpPr>
+        <p:spPr>
+          <a:xfrm>
+            <a:off x="6355080" y="3611880"/>
+            <a:ext cx="4754880" cy="1280160"/>
+          </a:xfrm>
+          <a:prstGeom prst="rect">
+            <a:avLst/>
+          </a:prstGeom>
+          <a:noFill/>
+        </p:spPr>
+        <p:txBody>
+          <a:bodyPr wrap="square">
+            <a:spAutoFit/>
+          </a:bodyPr>
+          <a:lstStyle/>
+          <a:p>
+            <a:pPr algn="ctr"/>
+            <a:r>
+              <a:rPr sz="1400" b="1" i="0">
+                <a:solidFill>
+                  <a:srgbClr val="64748B"/>
+                </a:solidFill>
+                <a:latin typeface="Montserrat"/>
+              </a:rPr>
+              <a:t>IMAGEN</a:t>
+            </a:r>
+          </a:p>
+          <a:p>
+            <a:pPr algn="ctr"/>
+            <a:r>
+              <a:rPr sz="1100" b="0" i="1">
+                <a:solidFill>
+                  <a:srgbClr val="64748B"/>
+                </a:solidFill>
+                <a:latin typeface="Montserrat"/>
+              </a:rPr>
+              <a:t>two engineers discussing plans construction site</a:t>
+            </a:r>
+          </a:p>
+        </p:txBody>
+      </p:sp>
+    </p:spTree>
+  </p:cSld>
+  <p:clrMapOvr>
+    <a:masterClrMapping/>
+  </p:clrMapOvr>
+  <mc:AlternateContent xmlns:mc="http://schemas.openxmlformats.org/markup-compatibility/2006">
+    <mc:Choice xmlns:p14="http://schemas.microsoft.com/office/powerpoint/2010/main" Requires="p14">
+      <p:transition spd="med" p14:dur="700">
+        <p14:cube dir="r"/>
+      </p:transition>
+    </mc:Choice>
+    <mc:Fallback>
+      <p:transition spd="med">
+        <p:push dir="r"/>
+      </p:transition>
+    </mc:Fallback>
+  </mc:AlternateContent>
+</p:sld>
+</file>
+
+<file path=ppt/slides/slide21.xml><?xml version="1.0" encoding="utf-8"?>
+<p:sld xmlns:a="http://schemas.openxmlformats.org/drawingml/2006/main" xmlns:p="http://schemas.openxmlformats.org/presentationml/2006/main" xmlns:r="http://schemas.openxmlformats.org/officeDocument/2006/relationships">
+  <p:cSld>
+    <p:spTree>
+      <p:nvGrpSpPr>
+        <p:cNvPr id="1" name=""/>
+        <p:cNvGrpSpPr/>
+        <p:nvPr/>
+      </p:nvGrpSpPr>
+      <p:grpSpPr/>
+      <p:sp>
+        <p:nvSpPr>
+          <p:cNvPr id="2" name="Rectangle 1"/>
+          <p:cNvSpPr/>
+          <p:nvPr/>
+        </p:nvSpPr>
+        <p:spPr>
+          <a:xfrm>
+            <a:off x="0" y="0"/>
+            <a:ext cx="12191695" cy="6858000"/>
+          </a:xfrm>
+          <a:prstGeom prst="rect">
+            <a:avLst/>
+          </a:prstGeom>
+          <a:solidFill>
+            <a:srgbClr val="FFFFFF"/>
+          </a:solidFill>
+          <a:ln>
+            <a:noFill/>
+          </a:ln>
+          <a:effectLst/>
+        </p:spPr>
+        <p:style>
+          <a:lnRef idx="1">
+            <a:schemeClr val="accent1"/>
+          </a:lnRef>
+          <a:fillRef idx="3">
+            <a:schemeClr val="accent1"/>
+          </a:fillRef>
+          <a:effectRef idx="2">
+            <a:schemeClr val="accent1"/>
+          </a:effectRef>
+          <a:fontRef idx="minor">
+            <a:schemeClr val="lt1"/>
+          </a:fontRef>
+        </p:style>
+        <p:txBody>
+          <a:bodyPr rtlCol="0" anchor="ctr"/>
+          <a:lstStyle/>
+          <a:p>
+            <a:pPr algn="ctr"/>
+          </a:p>
+        </p:txBody>
+      </p:sp>
+      <p:sp>
+        <p:nvSpPr>
+          <p:cNvPr id="3" name="TextBox 2"/>
+          <p:cNvSpPr txBox="1"/>
+          <p:nvPr/>
+        </p:nvSpPr>
+        <p:spPr>
+          <a:xfrm>
+            <a:off x="10607040" y="320040"/>
+            <a:ext cx="1371600" cy="365760"/>
+          </a:xfrm>
+          <a:prstGeom prst="rect">
+            <a:avLst/>
+          </a:prstGeom>
+          <a:noFill/>
+        </p:spPr>
+        <p:txBody>
+          <a:bodyPr wrap="square">
+            <a:spAutoFit/>
+          </a:bodyPr>
+          <a:lstStyle/>
+          <a:p>
+            <a:pPr algn="r"/>
+            <a:r>
+              <a:rPr sz="1000" b="1" i="0">
+                <a:solidFill>
+                  <a:srgbClr val="64748B"/>
+                </a:solidFill>
+                <a:latin typeface="Montserrat"/>
+              </a:rPr>
+              <a:t>021 / 022</a:t>
+            </a:r>
+          </a:p>
+        </p:txBody>
+      </p:sp>
+      <p:sp>
+        <p:nvSpPr>
+          <p:cNvPr id="4" name="TextBox 3"/>
+          <p:cNvSpPr txBox="1"/>
+          <p:nvPr/>
+        </p:nvSpPr>
+        <p:spPr>
+          <a:xfrm>
+            <a:off x="457200" y="6419088"/>
+            <a:ext cx="8229600" cy="365760"/>
+          </a:xfrm>
+          <a:prstGeom prst="rect">
+            <a:avLst/>
+          </a:prstGeom>
+          <a:noFill/>
+        </p:spPr>
+        <p:txBody>
+          <a:bodyPr wrap="square">
+            <a:spAutoFit/>
+          </a:bodyPr>
+          <a:lstStyle/>
+          <a:p>
+            <a:r>
+              <a:rPr sz="900" b="0" i="0">
+                <a:solidFill>
+                  <a:srgbClr val="64748B"/>
+                </a:solidFill>
+                <a:latin typeface="Montserrat"/>
+              </a:rPr>
+              <a:t>Curso Gas B · Tema 01 · Distribución por canalización</a:t>
+            </a:r>
+          </a:p>
+        </p:txBody>
+      </p:sp>
+      <p:sp>
+        <p:nvSpPr>
+          <p:cNvPr id="5" name="TextBox 4"/>
+          <p:cNvSpPr txBox="1"/>
+          <p:nvPr/>
+        </p:nvSpPr>
+        <p:spPr>
+          <a:xfrm>
+            <a:off x="822960" y="457200"/>
+            <a:ext cx="10058400" cy="365760"/>
+          </a:xfrm>
+          <a:prstGeom prst="rect">
+            <a:avLst/>
+          </a:prstGeom>
+          <a:noFill/>
+        </p:spPr>
+        <p:txBody>
+          <a:bodyPr wrap="square">
+            <a:spAutoFit/>
+          </a:bodyPr>
+          <a:lstStyle/>
+          <a:p>
+            <a:r>
+              <a:rPr sz="1300" b="1" i="0">
+                <a:solidFill>
+                  <a:srgbClr val="E8801A"/>
+                </a:solidFill>
+                <a:latin typeface="Montserrat"/>
+              </a:rPr>
+              <a:t>REPASO RELÁMPAGO</a:t>
+            </a:r>
+          </a:p>
+        </p:txBody>
+      </p:sp>
+      <p:sp>
+        <p:nvSpPr>
+          <p:cNvPr id="6" name="TextBox 5"/>
+          <p:cNvSpPr txBox="1"/>
+          <p:nvPr/>
+        </p:nvSpPr>
+        <p:spPr>
+          <a:xfrm>
+            <a:off x="822960" y="868680"/>
+            <a:ext cx="10515600" cy="914400"/>
+          </a:xfrm>
+          <a:prstGeom prst="rect">
+            <a:avLst/>
+          </a:prstGeom>
+          <a:noFill/>
+        </p:spPr>
+        <p:txBody>
+          <a:bodyPr wrap="square">
+            <a:spAutoFit/>
+          </a:bodyPr>
+          <a:lstStyle/>
+          <a:p>
+            <a:r>
+              <a:rPr sz="2800" b="1" i="0">
+                <a:solidFill>
+                  <a:srgbClr val="1E2761"/>
+                </a:solidFill>
+                <a:latin typeface="Montserrat"/>
+              </a:rPr>
+              <a:t>Lo que no se te puede olvidar</a:t>
+            </a:r>
+          </a:p>
+        </p:txBody>
+      </p:sp>
+      <p:sp>
+        <p:nvSpPr>
+          <p:cNvPr id="7" name="Rectangle 6"/>
+          <p:cNvSpPr/>
+          <p:nvPr/>
+        </p:nvSpPr>
+        <p:spPr>
+          <a:xfrm>
+            <a:off x="868680" y="1627632"/>
+            <a:ext cx="2011680" cy="73152"/>
+          </a:xfrm>
+          <a:prstGeom prst="rect">
+            <a:avLst/>
+          </a:prstGeom>
+          <a:solidFill>
+            <a:srgbClr val="E8801A"/>
+          </a:solidFill>
+          <a:ln>
+            <a:noFill/>
+          </a:ln>
+          <a:effectLst/>
+        </p:spPr>
+        <p:style>
+          <a:lnRef idx="1">
+            <a:schemeClr val="accent1"/>
+          </a:lnRef>
+          <a:fillRef idx="3">
+            <a:schemeClr val="accent1"/>
+          </a:fillRef>
+          <a:effectRef idx="2">
+            <a:schemeClr val="accent1"/>
+          </a:effectRef>
+          <a:fontRef idx="minor">
+            <a:schemeClr val="lt1"/>
+          </a:fontRef>
+        </p:style>
+        <p:txBody>
+          <a:bodyPr rtlCol="0" anchor="ctr"/>
+          <a:lstStyle/>
+          <a:p>
+            <a:pPr algn="ctr"/>
+          </a:p>
+        </p:txBody>
+      </p:sp>
+      <p:sp>
+        <p:nvSpPr>
+          <p:cNvPr id="8" name="TextBox 7"/>
+          <p:cNvSpPr txBox="1"/>
+          <p:nvPr/>
+        </p:nvSpPr>
+        <p:spPr>
+          <a:xfrm>
+            <a:off x="6355080" y="1965960"/>
+            <a:ext cx="5029200" cy="4206240"/>
+          </a:xfrm>
+          <a:prstGeom prst="rect">
+            <a:avLst/>
+          </a:prstGeom>
+          <a:noFill/>
+        </p:spPr>
+        <p:txBody>
+          <a:bodyPr wrap="square">
+            <a:spAutoFit/>
+          </a:bodyPr>
+          <a:lstStyle/>
+          <a:p>
+            <a:pPr>
+              <a:spcAft>
+                <a:spcPts val="1100"/>
+              </a:spcAft>
+            </a:pPr>
+            <a:r>
+              <a:rPr sz="1600" b="1" i="0">
+                <a:solidFill>
+                  <a:srgbClr val="E8801A"/>
+                </a:solidFill>
+                <a:latin typeface="Montserrat"/>
+              </a:rPr>
+              <a:t>▸  </a:t>
+            </a:r>
+            <a:r>
+              <a:rPr sz="1600" b="0" i="0">
+                <a:solidFill>
+                  <a:srgbClr val="1B2330"/>
+                </a:solidFill>
+                <a:latin typeface="Montserrat"/>
+              </a:rPr>
+              <a:t>Dos parámetros: presión y odorizante</a:t>
+            </a:r>
+          </a:p>
+          <a:p>
+            <a:pPr>
+              <a:spcAft>
+                <a:spcPts val="1100"/>
+              </a:spcAft>
+            </a:pPr>
+            <a:r>
+              <a:rPr sz="1600" b="1" i="0">
+                <a:solidFill>
+                  <a:srgbClr val="E8801A"/>
+                </a:solidFill>
+                <a:latin typeface="Montserrat"/>
+              </a:rPr>
+              <a:t>▸  </a:t>
+            </a:r>
+            <a:r>
+              <a:rPr sz="1600" b="0" i="0">
+                <a:solidFill>
+                  <a:srgbClr val="1B2330"/>
+                </a:solidFill>
+                <a:latin typeface="Montserrat"/>
+              </a:rPr>
+              <a:t>Urgencias: olor, incendio, explosión</a:t>
+            </a:r>
+          </a:p>
+          <a:p>
+            <a:pPr>
+              <a:spcAft>
+                <a:spcPts val="1100"/>
+              </a:spcAft>
+            </a:pPr>
+            <a:r>
+              <a:rPr sz="1600" b="1" i="0">
+                <a:solidFill>
+                  <a:srgbClr val="E8801A"/>
+                </a:solidFill>
+                <a:latin typeface="Montserrat"/>
+              </a:rPr>
+              <a:t>▸  </a:t>
+            </a:r>
+            <a:r>
+              <a:rPr sz="1600" b="0" i="0">
+                <a:solidFill>
+                  <a:srgbClr val="1B2330"/>
+                </a:solidFill>
+                <a:latin typeface="Montserrat"/>
+              </a:rPr>
+              <a:t>Fugas: urgente, programada, vigilancia</a:t>
+            </a:r>
+          </a:p>
+          <a:p>
+            <a:pPr>
+              <a:spcAft>
+                <a:spcPts val="1100"/>
+              </a:spcAft>
+            </a:pPr>
+            <a:r>
+              <a:rPr sz="1600" b="1" i="0">
+                <a:solidFill>
+                  <a:srgbClr val="E8801A"/>
+                </a:solidFill>
+                <a:latin typeface="Montserrat"/>
+              </a:rPr>
+              <a:t>▸  </a:t>
+            </a:r>
+            <a:r>
+              <a:rPr sz="1600" b="0" i="0">
+                <a:solidFill>
+                  <a:srgbClr val="1B2330"/>
+                </a:solidFill>
+                <a:latin typeface="Montserrat"/>
+              </a:rPr>
+              <a:t>Plazos de terceros: 30 · 20 · 24</a:t>
+            </a:r>
+          </a:p>
+          <a:p>
+            <a:pPr>
+              <a:spcAft>
+                <a:spcPts val="1100"/>
+              </a:spcAft>
+            </a:pPr>
+            <a:r>
+              <a:rPr sz="1600" b="1" i="0">
+                <a:solidFill>
+                  <a:srgbClr val="E8801A"/>
+                </a:solidFill>
+                <a:latin typeface="Montserrat"/>
+              </a:rPr>
+              <a:t>▸  </a:t>
+            </a:r>
+            <a:r>
+              <a:rPr sz="1600" b="0" i="0">
+                <a:solidFill>
+                  <a:srgbClr val="1B2330"/>
+                </a:solidFill>
+                <a:latin typeface="Montserrat"/>
+              </a:rPr>
+              <a:t>Archivo: dos últimas y cinco años</a:t>
+            </a:r>
+          </a:p>
+        </p:txBody>
+      </p:sp>
+      <p:sp>
+        <p:nvSpPr>
+          <p:cNvPr id="9" name="imgph" descr="IMGQ:gas cylinder cabinet outdoor building wall"/>
+          <p:cNvSpPr/>
+          <p:nvPr/>
+        </p:nvSpPr>
+        <p:spPr>
+          <a:xfrm>
+            <a:off x="822960" y="1965960"/>
+            <a:ext cx="5303520" cy="4572000"/>
+          </a:xfrm>
+          <a:prstGeom prst="roundRect">
+            <a:avLst/>
+          </a:prstGeom>
+          <a:solidFill>
+            <a:srgbClr val="F3F6FB"/>
+          </a:solidFill>
+          <a:ln w="12700">
+            <a:solidFill>
+              <a:srgbClr val="C7D2E6"/>
+            </a:solidFill>
+          </a:ln>
+          <a:effectLst/>
+        </p:spPr>
+        <p:style>
+          <a:lnRef idx="1">
+            <a:schemeClr val="accent1"/>
+          </a:lnRef>
+          <a:fillRef idx="3">
+            <a:schemeClr val="accent1"/>
+          </a:fillRef>
+          <a:effectRef idx="2">
+            <a:schemeClr val="accent1"/>
+          </a:effectRef>
+          <a:fontRef idx="minor">
+            <a:schemeClr val="lt1"/>
+          </a:fontRef>
+        </p:style>
+        <p:txBody>
+          <a:bodyPr rtlCol="0" anchor="ctr"/>
+          <a:lstStyle/>
+          <a:p>
+            <a:pPr algn="ctr"/>
+          </a:p>
+        </p:txBody>
+      </p:sp>
+      <p:sp>
+        <p:nvSpPr>
+          <p:cNvPr id="10" name="TextBox 9"/>
+          <p:cNvSpPr txBox="1"/>
+          <p:nvPr/>
+        </p:nvSpPr>
+        <p:spPr>
+          <a:xfrm>
+            <a:off x="1097280" y="3611880"/>
+            <a:ext cx="4754880" cy="1280160"/>
+          </a:xfrm>
+          <a:prstGeom prst="rect">
+            <a:avLst/>
+          </a:prstGeom>
+          <a:noFill/>
+        </p:spPr>
+        <p:txBody>
+          <a:bodyPr wrap="square">
+            <a:spAutoFit/>
+          </a:bodyPr>
+          <a:lstStyle/>
+          <a:p>
+            <a:pPr algn="ctr"/>
+            <a:r>
+              <a:rPr sz="1400" b="1" i="0">
+                <a:solidFill>
+                  <a:srgbClr val="64748B"/>
+                </a:solidFill>
+                <a:latin typeface="Montserrat"/>
+              </a:rPr>
+              <a:t>IMAGEN</a:t>
+            </a:r>
+          </a:p>
+          <a:p>
+            <a:pPr algn="ctr"/>
+            <a:r>
+              <a:rPr sz="1100" b="0" i="1">
+                <a:solidFill>
+                  <a:srgbClr val="64748B"/>
+                </a:solidFill>
+                <a:latin typeface="Montserrat"/>
+              </a:rPr>
+              <a:t>gas cylinder cabinet outdoor building wall</a:t>
+            </a:r>
+          </a:p>
+        </p:txBody>
+      </p:sp>
+    </p:spTree>
+  </p:cSld>
+  <p:clrMapOvr>
+    <a:masterClrMapping/>
+  </p:clrMapOvr>
+  <mc:AlternateContent xmlns:mc="http://schemas.openxmlformats.org/markup-compatibility/2006">
+    <mc:Choice xmlns:p14="http://schemas.microsoft.com/office/powerpoint/2010/main" Requires="p14">
+      <p:transition spd="med" p14:dur="700">
+        <p14:cube dir="l"/>
+      </p:transition>
+    </mc:Choice>
+    <mc:Fallback>
+      <p:transition spd="med">
+        <p:push dir="l"/>
+      </p:transition>
+    </mc:Fallback>
+  </mc:AlternateContent>
+</p:sld>
+</file>
+
+<file path=ppt/slides/slide22.xml><?xml version="1.0" encoding="utf-8"?>
+<p:sld xmlns:a="http://schemas.openxmlformats.org/drawingml/2006/main" xmlns:p="http://schemas.openxmlformats.org/presentationml/2006/main" xmlns:r="http://schemas.openxmlformats.org/officeDocument/2006/relationships">
+  <p:cSld>
+    <p:spTree>
+      <p:nvGrpSpPr>
+        <p:cNvPr id="1" name=""/>
+        <p:cNvGrpSpPr/>
+        <p:nvPr/>
+      </p:nvGrpSpPr>
+      <p:grpSpPr/>
+      <p:sp>
+        <p:nvSpPr>
+          <p:cNvPr id="2" name="Rectangle 1"/>
+          <p:cNvSpPr/>
+          <p:nvPr/>
+        </p:nvSpPr>
+        <p:spPr>
+          <a:xfrm>
+            <a:off x="0" y="0"/>
+            <a:ext cx="12191695" cy="6858000"/>
+          </a:xfrm>
+          <a:prstGeom prst="rect">
+            <a:avLst/>
+          </a:prstGeom>
+          <a:solidFill>
+            <a:srgbClr val="1E2761"/>
+          </a:solidFill>
+          <a:ln>
+            <a:noFill/>
+          </a:ln>
+          <a:effectLst/>
+        </p:spPr>
+        <p:style>
+          <a:lnRef idx="1">
+            <a:schemeClr val="accent1"/>
+          </a:lnRef>
+          <a:fillRef idx="3">
+            <a:schemeClr val="accent1"/>
+          </a:fillRef>
+          <a:effectRef idx="2">
+            <a:schemeClr val="accent1"/>
+          </a:effectRef>
+          <a:fontRef idx="minor">
+            <a:schemeClr val="lt1"/>
+          </a:fontRef>
+        </p:style>
+        <p:txBody>
+          <a:bodyPr rtlCol="0" anchor="ctr"/>
+          <a:lstStyle/>
+          <a:p>
+            <a:pPr algn="ctr"/>
+          </a:p>
+        </p:txBody>
+      </p:sp>
+      <p:sp>
+        <p:nvSpPr>
+          <p:cNvPr id="3" name="TextBox 2"/>
+          <p:cNvSpPr txBox="1"/>
+          <p:nvPr/>
+        </p:nvSpPr>
+        <p:spPr>
+          <a:xfrm>
+            <a:off x="822960" y="640080"/>
+            <a:ext cx="10515600" cy="457200"/>
+          </a:xfrm>
+          <a:prstGeom prst="rect">
+            <a:avLst/>
+          </a:prstGeom>
+          <a:noFill/>
+        </p:spPr>
+        <p:txBody>
+          <a:bodyPr wrap="square">
+            <a:spAutoFit/>
+          </a:bodyPr>
+          <a:lstStyle/>
+          <a:p>
+            <a:r>
+              <a:rPr sz="1400" b="1" i="0">
+                <a:solidFill>
+                  <a:srgbClr val="F4A24C"/>
+                </a:solidFill>
+                <a:latin typeface="Montserrat"/>
+              </a:rPr>
+              <a:t>LO QUE YA DOMINAS</a:t>
+            </a:r>
+          </a:p>
+        </p:txBody>
+      </p:sp>
+      <p:sp>
+        <p:nvSpPr>
+          <p:cNvPr id="4" name="Rectangle 3"/>
+          <p:cNvSpPr/>
+          <p:nvPr/>
+        </p:nvSpPr>
+        <p:spPr>
+          <a:xfrm>
+            <a:off x="868680" y="1051560"/>
+            <a:ext cx="1463040" cy="82296"/>
+          </a:xfrm>
+          <a:prstGeom prst="rect">
+            <a:avLst/>
+          </a:prstGeom>
+          <a:solidFill>
+            <a:srgbClr val="E8801A"/>
+          </a:solidFill>
+          <a:ln>
+            <a:noFill/>
+          </a:ln>
+          <a:effectLst/>
+        </p:spPr>
+        <p:style>
+          <a:lnRef idx="1">
+            <a:schemeClr val="accent1"/>
+          </a:lnRef>
+          <a:fillRef idx="3">
+            <a:schemeClr val="accent1"/>
+          </a:fillRef>
+          <a:effectRef idx="2">
+            <a:schemeClr val="accent1"/>
+          </a:effectRef>
+          <a:fontRef idx="minor">
+            <a:schemeClr val="lt1"/>
+          </a:fontRef>
+        </p:style>
+        <p:txBody>
+          <a:bodyPr rtlCol="0" anchor="ctr"/>
+          <a:lstStyle/>
+          <a:p>
+            <a:pPr algn="ctr"/>
+          </a:p>
+        </p:txBody>
+      </p:sp>
+      <p:sp>
+        <p:nvSpPr>
+          <p:cNvPr id="5" name="TextBox 4"/>
+          <p:cNvSpPr txBox="1"/>
+          <p:nvPr/>
+        </p:nvSpPr>
+        <p:spPr>
+          <a:xfrm>
+            <a:off x="822960" y="1234440"/>
+            <a:ext cx="10515600" cy="1097280"/>
+          </a:xfrm>
+          <a:prstGeom prst="rect">
+            <a:avLst/>
+          </a:prstGeom>
+          <a:noFill/>
+        </p:spPr>
+        <p:txBody>
+          <a:bodyPr wrap="square">
+            <a:spAutoFit/>
+          </a:bodyPr>
+          <a:lstStyle/>
+          <a:p>
+            <a:r>
+              <a:rPr sz="3400" b="1" i="0">
+                <a:solidFill>
+                  <a:srgbClr val="FFFFFF"/>
+                </a:solidFill>
+                <a:latin typeface="Montserrat"/>
+              </a:rPr>
+              <a:t>Ya sabes mantener viva una red de gas</a:t>
+            </a:r>
+          </a:p>
+        </p:txBody>
+      </p:sp>
+      <p:sp>
+        <p:nvSpPr>
+          <p:cNvPr id="6" name="TextBox 5"/>
+          <p:cNvSpPr txBox="1"/>
+          <p:nvPr/>
+        </p:nvSpPr>
+        <p:spPr>
+          <a:xfrm>
+            <a:off x="822960" y="2606040"/>
+            <a:ext cx="10515600" cy="2743200"/>
+          </a:xfrm>
+          <a:prstGeom prst="rect">
+            <a:avLst/>
+          </a:prstGeom>
+          <a:noFill/>
+        </p:spPr>
+        <p:txBody>
+          <a:bodyPr wrap="square">
+            <a:spAutoFit/>
+          </a:bodyPr>
+          <a:lstStyle/>
+          <a:p>
+            <a:pPr>
+              <a:spcAft>
+                <a:spcPts val="1200"/>
+              </a:spcAft>
+            </a:pPr>
+            <a:r>
+              <a:rPr sz="2000" b="1" i="0">
+                <a:solidFill>
+                  <a:srgbClr val="F4A24C"/>
+                </a:solidFill>
+                <a:latin typeface="Montserrat"/>
+              </a:rPr>
+              <a:t>✓  </a:t>
+            </a:r>
+            <a:r>
+              <a:rPr sz="1900" b="0" i="0">
+                <a:solidFill>
+                  <a:srgbClr val="FFFFFF"/>
+                </a:solidFill>
+                <a:latin typeface="Montserrat"/>
+              </a:rPr>
+              <a:t>Reconoces los tres plazos de terceros: 30, 20 y 24</a:t>
+            </a:r>
+          </a:p>
+          <a:p>
+            <a:pPr>
+              <a:spcAft>
+                <a:spcPts val="1200"/>
+              </a:spcAft>
+            </a:pPr>
+            <a:r>
+              <a:rPr sz="2000" b="1" i="0">
+                <a:solidFill>
+                  <a:srgbClr val="F4A24C"/>
+                </a:solidFill>
+                <a:latin typeface="Montserrat"/>
+              </a:rPr>
+              <a:t>✓  </a:t>
+            </a:r>
+            <a:r>
+              <a:rPr sz="1900" b="0" i="0">
+                <a:solidFill>
+                  <a:srgbClr val="FFFFFF"/>
+                </a:solidFill>
+                <a:latin typeface="Montserrat"/>
+              </a:rPr>
+              <a:t>Clasificas una fuga por su gravedad y por su cercanía</a:t>
+            </a:r>
+          </a:p>
+          <a:p>
+            <a:pPr>
+              <a:spcAft>
+                <a:spcPts val="1200"/>
+              </a:spcAft>
+            </a:pPr>
+            <a:r>
+              <a:rPr sz="2000" b="1" i="0">
+                <a:solidFill>
+                  <a:srgbClr val="F4A24C"/>
+                </a:solidFill>
+                <a:latin typeface="Montserrat"/>
+              </a:rPr>
+              <a:t>✓  </a:t>
+            </a:r>
+            <a:r>
+              <a:rPr sz="1900" b="0" i="0">
+                <a:solidFill>
+                  <a:srgbClr val="FFFFFF"/>
+                </a:solidFill>
+                <a:latin typeface="Montserrat"/>
+              </a:rPr>
+              <a:t>Aplicas el parche seguro antes de la reparación buena</a:t>
+            </a:r>
+          </a:p>
+          <a:p>
+            <a:pPr>
+              <a:spcAft>
+                <a:spcPts val="1200"/>
+              </a:spcAft>
+            </a:pPr>
+            <a:r>
+              <a:rPr sz="2000" b="1" i="0">
+                <a:solidFill>
+                  <a:srgbClr val="F4A24C"/>
+                </a:solidFill>
+                <a:latin typeface="Montserrat"/>
+              </a:rPr>
+              <a:t>✓  </a:t>
+            </a:r>
+            <a:r>
+              <a:rPr sz="1900" b="0" i="0">
+                <a:solidFill>
+                  <a:srgbClr val="FFFFFF"/>
+                </a:solidFill>
+                <a:latin typeface="Montserrat"/>
+              </a:rPr>
+              <a:t>Cierras con el truco de campo: si burbujea, fuga</a:t>
+            </a:r>
+          </a:p>
+        </p:txBody>
+      </p:sp>
+      <p:sp>
+        <p:nvSpPr>
+          <p:cNvPr id="7" name="Rounded Rectangle 6"/>
+          <p:cNvSpPr/>
+          <p:nvPr/>
+        </p:nvSpPr>
+        <p:spPr>
+          <a:xfrm>
+            <a:off x="822960" y="5532120"/>
+            <a:ext cx="10515600" cy="822960"/>
+          </a:xfrm>
+          <a:prstGeom prst="roundRect">
+            <a:avLst/>
+          </a:prstGeom>
+          <a:solidFill>
+            <a:srgbClr val="E8801A"/>
+          </a:solidFill>
+          <a:ln>
+            <a:noFill/>
+          </a:ln>
+          <a:effectLst/>
+        </p:spPr>
+        <p:style>
+          <a:lnRef idx="1">
+            <a:schemeClr val="accent1"/>
+          </a:lnRef>
+          <a:fillRef idx="3">
+            <a:schemeClr val="accent1"/>
+          </a:fillRef>
+          <a:effectRef idx="2">
+            <a:schemeClr val="accent1"/>
+          </a:effectRef>
+          <a:fontRef idx="minor">
+            <a:schemeClr val="lt1"/>
+          </a:fontRef>
+        </p:style>
+        <p:txBody>
+          <a:bodyPr rtlCol="0" anchor="ctr"/>
+          <a:lstStyle/>
+          <a:p>
+            <a:pPr algn="ctr"/>
+          </a:p>
+        </p:txBody>
+      </p:sp>
+      <p:sp>
+        <p:nvSpPr>
+          <p:cNvPr id="8" name="TextBox 7"/>
+          <p:cNvSpPr txBox="1"/>
+          <p:nvPr/>
+        </p:nvSpPr>
+        <p:spPr>
+          <a:xfrm>
+            <a:off x="1051560" y="5623560"/>
+            <a:ext cx="10058400" cy="640080"/>
+          </a:xfrm>
+          <a:prstGeom prst="rect">
+            <a:avLst/>
+          </a:prstGeom>
+          <a:noFill/>
+        </p:spPr>
+        <p:txBody>
+          <a:bodyPr wrap="square">
+            <a:spAutoFit/>
+          </a:bodyPr>
+          <a:lstStyle/>
+          <a:p>
+            <a:r>
+              <a:rPr sz="1500" b="1" i="1">
+                <a:solidFill>
+                  <a:srgbClr val="1E2761"/>
+                </a:solidFill>
+                <a:latin typeface="Montserrat"/>
+              </a:rPr>
+              <a:t>Cierras la ITC-ICG 01 entera: del papel a la calle viva. Ya eres mucho más gasista que ayer.</a:t>
+            </a:r>
+          </a:p>
+        </p:txBody>
+      </p:sp>
+    </p:spTree>
+  </p:cSld>
+  <p:clrMapOvr>
+    <a:masterClrMapping/>
+  </p:clrMapOvr>
+  <mc:AlternateContent xmlns:mc="http://schemas.openxmlformats.org/markup-compatibility/2006">
+    <mc:Choice xmlns:p14="http://schemas.microsoft.com/office/powerpoint/2010/main" Requires="p14">
+      <p:transition spd="med" p14:dur="700">
+        <p14:cube dir="r"/>
+      </p:transition>
+    </mc:Choice>
+    <mc:Fallback>
+      <p:transition spd="med">
+        <p:push dir="r"/>
+      </p:transition>
+    </mc:Fallback>
+  </mc:AlternateContent>
 </p:sld>
 </file>
 
@@ -8658,7 +12852,7 @@
                 </a:solidFill>
                 <a:latin typeface="Montserrat"/>
               </a:rPr>
-              <a:t>003 / 016</a:t>
+              <a:t>003 / 022</a:t>
             </a:r>
           </a:p>
         </p:txBody>
@@ -8767,7 +12961,7 @@
       </p:sp>
       <p:sp>
         <p:nvSpPr>
-          <p:cNvPr id="7" name="Rounded Rectangle 6"/>
+          <p:cNvPr id="7" name="Rectangle 6"/>
           <p:cNvSpPr/>
           <p:nvPr/>
         </p:nvSpPr>
@@ -8776,7 +12970,7 @@
             <a:off x="868680" y="1673352"/>
             <a:ext cx="2011680" cy="73152"/>
           </a:xfrm>
-          <a:prstGeom prst="roundRect">
+          <a:prstGeom prst="rect">
             <a:avLst/>
           </a:prstGeom>
           <a:solidFill>
@@ -9037,6 +13231,18 @@
   <p:clrMapOvr>
     <a:masterClrMapping/>
   </p:clrMapOvr>
+  <mc:AlternateContent xmlns:mc="http://schemas.openxmlformats.org/markup-compatibility/2006">
+    <mc:Choice xmlns:p14="http://schemas.microsoft.com/office/powerpoint/2010/main" Requires="p14">
+      <p:transition spd="med" p14:dur="700">
+        <p14:cube dir="l"/>
+      </p:transition>
+    </mc:Choice>
+    <mc:Fallback>
+      <p:transition spd="med">
+        <p:push dir="l"/>
+      </p:transition>
+    </mc:Fallback>
+  </mc:AlternateContent>
 </p:sld>
 </file>
 
@@ -9124,7 +13330,7 @@
                 </a:solidFill>
                 <a:latin typeface="Montserrat"/>
               </a:rPr>
-              <a:t>004 / 016</a:t>
+              <a:t>004 / 022</a:t>
             </a:r>
           </a:p>
         </p:txBody>
@@ -9233,7 +13439,7 @@
       </p:sp>
       <p:sp>
         <p:nvSpPr>
-          <p:cNvPr id="7" name="Rounded Rectangle 6"/>
+          <p:cNvPr id="7" name="Rectangle 6"/>
           <p:cNvSpPr/>
           <p:nvPr/>
         </p:nvSpPr>
@@ -9242,7 +13448,7 @@
             <a:off x="868680" y="1627632"/>
             <a:ext cx="2011680" cy="73152"/>
           </a:xfrm>
-          <a:prstGeom prst="roundRect">
+          <a:prstGeom prst="rect">
             <a:avLst/>
           </a:prstGeom>
           <a:solidFill>
@@ -9284,7 +13490,7 @@
         <p:spPr>
           <a:xfrm>
             <a:off x="822960" y="1965960"/>
-            <a:ext cx="4983480" cy="4206240"/>
+            <a:ext cx="5029200" cy="4206240"/>
           </a:xfrm>
           <a:prstGeom prst="rect">
             <a:avLst/>
@@ -9406,8 +13612,8 @@
         </p:nvSpPr>
         <p:spPr>
           <a:xfrm>
-            <a:off x="5806440" y="1051560"/>
-            <a:ext cx="5298947" cy="4629150"/>
+            <a:off x="6080760" y="1965960"/>
+            <a:ext cx="5303520" cy="4572000"/>
           </a:xfrm>
           <a:prstGeom prst="roundRect">
             <a:avLst/>
@@ -9452,8 +13658,8 @@
         </p:nvSpPr>
         <p:spPr>
           <a:xfrm>
-            <a:off x="6080760" y="2726055"/>
-            <a:ext cx="4750307" cy="1280160"/>
+            <a:off x="6355080" y="3611880"/>
+            <a:ext cx="4754880" cy="1280160"/>
           </a:xfrm>
           <a:prstGeom prst="rect">
             <a:avLst/>
@@ -9474,7 +13680,7 @@
                 </a:solidFill>
                 <a:latin typeface="Montserrat"/>
               </a:rPr>
-              <a:t>IMAGEN REALISTA</a:t>
+              <a:t>IMAGEN</a:t>
             </a:r>
           </a:p>
           <a:p>
@@ -9496,6 +13702,18 @@
   <p:clrMapOvr>
     <a:masterClrMapping/>
   </p:clrMapOvr>
+  <mc:AlternateContent xmlns:mc="http://schemas.openxmlformats.org/markup-compatibility/2006">
+    <mc:Choice xmlns:p14="http://schemas.microsoft.com/office/powerpoint/2010/main" Requires="p14">
+      <p:transition spd="med" p14:dur="700">
+        <p14:cube dir="r"/>
+      </p:transition>
+    </mc:Choice>
+    <mc:Fallback>
+      <p:transition spd="med">
+        <p:push dir="r"/>
+      </p:transition>
+    </mc:Fallback>
+  </mc:AlternateContent>
 </p:sld>
 </file>
 
@@ -9583,7 +13801,7 @@
                 </a:solidFill>
                 <a:latin typeface="Montserrat"/>
               </a:rPr>
-              <a:t>005 / 016</a:t>
+              <a:t>005 / 022</a:t>
             </a:r>
           </a:p>
         </p:txBody>
@@ -9692,7 +13910,7 @@
       </p:sp>
       <p:sp>
         <p:nvSpPr>
-          <p:cNvPr id="7" name="Rounded Rectangle 6"/>
+          <p:cNvPr id="7" name="Rectangle 6"/>
           <p:cNvSpPr/>
           <p:nvPr/>
         </p:nvSpPr>
@@ -9701,7 +13919,7 @@
             <a:off x="868680" y="1627632"/>
             <a:ext cx="2011680" cy="73152"/>
           </a:xfrm>
-          <a:prstGeom prst="roundRect">
+          <a:prstGeom prst="rect">
             <a:avLst/>
           </a:prstGeom>
           <a:solidFill>
@@ -9742,8 +13960,8 @@
         </p:nvSpPr>
         <p:spPr>
           <a:xfrm>
-            <a:off x="822960" y="1965960"/>
-            <a:ext cx="4983480" cy="4206240"/>
+            <a:off x="6355080" y="1965960"/>
+            <a:ext cx="5029200" cy="4206240"/>
           </a:xfrm>
           <a:prstGeom prst="rect">
             <a:avLst/>
@@ -9840,8 +14058,8 @@
         </p:nvSpPr>
         <p:spPr>
           <a:xfrm>
-            <a:off x="5806440" y="1051560"/>
-            <a:ext cx="5298947" cy="4629150"/>
+            <a:off x="822960" y="1965960"/>
+            <a:ext cx="5303520" cy="4572000"/>
           </a:xfrm>
           <a:prstGeom prst="roundRect">
             <a:avLst/>
@@ -9886,8 +14104,8 @@
         </p:nvSpPr>
         <p:spPr>
           <a:xfrm>
-            <a:off x="6080760" y="2726055"/>
-            <a:ext cx="4750307" cy="1280160"/>
+            <a:off x="1097280" y="3611880"/>
+            <a:ext cx="4754880" cy="1280160"/>
           </a:xfrm>
           <a:prstGeom prst="rect">
             <a:avLst/>
@@ -9908,7 +14126,7 @@
                 </a:solidFill>
                 <a:latin typeface="Montserrat"/>
               </a:rPr>
-              <a:t>IMAGEN REALISTA</a:t>
+              <a:t>IMAGEN</a:t>
             </a:r>
           </a:p>
           <a:p>
@@ -9930,6 +14148,18 @@
   <p:clrMapOvr>
     <a:masterClrMapping/>
   </p:clrMapOvr>
+  <mc:AlternateContent xmlns:mc="http://schemas.openxmlformats.org/markup-compatibility/2006">
+    <mc:Choice xmlns:p14="http://schemas.microsoft.com/office/powerpoint/2010/main" Requires="p14">
+      <p:transition spd="med" p14:dur="700">
+        <p14:cube dir="l"/>
+      </p:transition>
+    </mc:Choice>
+    <mc:Fallback>
+      <p:transition spd="med">
+        <p:push dir="l"/>
+      </p:transition>
+    </mc:Fallback>
+  </mc:AlternateContent>
 </p:sld>
 </file>
 
@@ -10017,7 +14247,7 @@
                 </a:solidFill>
                 <a:latin typeface="Montserrat"/>
               </a:rPr>
-              <a:t>006 / 016</a:t>
+              <a:t>006 / 022</a:t>
             </a:r>
           </a:p>
         </p:txBody>
@@ -10058,84 +14288,16 @@
       </p:sp>
       <p:sp>
         <p:nvSpPr>
-          <p:cNvPr id="5" name="TextBox 4"/>
-          <p:cNvSpPr txBox="1"/>
-          <p:nvPr/>
-        </p:nvSpPr>
-        <p:spPr>
-          <a:xfrm>
-            <a:off x="822960" y="457200"/>
-            <a:ext cx="10058400" cy="365760"/>
-          </a:xfrm>
-          <a:prstGeom prst="rect">
-            <a:avLst/>
-          </a:prstGeom>
-          <a:noFill/>
-        </p:spPr>
-        <p:txBody>
-          <a:bodyPr wrap="square">
-            <a:spAutoFit/>
-          </a:bodyPr>
-          <a:lstStyle/>
-          <a:p>
-            <a:r>
-              <a:rPr sz="1300" b="1" i="0">
-                <a:solidFill>
-                  <a:srgbClr val="E8801A"/>
-                </a:solidFill>
-                <a:latin typeface="Montserrat"/>
-              </a:rPr>
-              <a:t>APARTADO 6.1 · CUATRO FUNCIONES</a:t>
-            </a:r>
-          </a:p>
-        </p:txBody>
-      </p:sp>
-      <p:sp>
-        <p:nvSpPr>
-          <p:cNvPr id="6" name="TextBox 5"/>
-          <p:cNvSpPr txBox="1"/>
-          <p:nvPr/>
-        </p:nvSpPr>
-        <p:spPr>
-          <a:xfrm>
-            <a:off x="822960" y="868680"/>
-            <a:ext cx="10515600" cy="914400"/>
-          </a:xfrm>
-          <a:prstGeom prst="rect">
-            <a:avLst/>
-          </a:prstGeom>
-          <a:noFill/>
-        </p:spPr>
-        <p:txBody>
-          <a:bodyPr wrap="square">
-            <a:spAutoFit/>
-          </a:bodyPr>
-          <a:lstStyle/>
-          <a:p>
-            <a:r>
-              <a:rPr sz="2800" b="1" i="0">
-                <a:solidFill>
-                  <a:srgbClr val="1E2761"/>
-                </a:solidFill>
-                <a:latin typeface="Montserrat"/>
-              </a:rPr>
-              <a:t>Lo que hace el centro</a:t>
-            </a:r>
-          </a:p>
-        </p:txBody>
-      </p:sp>
-      <p:sp>
-        <p:nvSpPr>
-          <p:cNvPr id="7" name="Rounded Rectangle 6"/>
+          <p:cNvPr id="5" name="Rectangle 4"/>
           <p:cNvSpPr/>
           <p:nvPr/>
         </p:nvSpPr>
         <p:spPr>
           <a:xfrm>
-            <a:off x="868680" y="1627632"/>
-            <a:ext cx="2011680" cy="73152"/>
-          </a:xfrm>
-          <a:prstGeom prst="roundRect">
+            <a:off x="0" y="0"/>
+            <a:ext cx="12191695" cy="1143000"/>
+          </a:xfrm>
+          <a:prstGeom prst="rect">
             <a:avLst/>
           </a:prstGeom>
           <a:solidFill>
@@ -10170,14 +14332,14 @@
       </p:sp>
       <p:sp>
         <p:nvSpPr>
-          <p:cNvPr id="8" name="TextBox 7"/>
+          <p:cNvPr id="6" name="TextBox 5"/>
           <p:cNvSpPr txBox="1"/>
           <p:nvPr/>
         </p:nvSpPr>
         <p:spPr>
           <a:xfrm>
-            <a:off x="822960" y="1965960"/>
-            <a:ext cx="4983480" cy="4206240"/>
+            <a:off x="822960" y="274320"/>
+            <a:ext cx="10515600" cy="640080"/>
           </a:xfrm>
           <a:prstGeom prst="rect">
             <a:avLst/>
@@ -10190,117 +14352,62 @@
           </a:bodyPr>
           <a:lstStyle/>
           <a:p>
-            <a:pPr>
-              <a:spcAft>
-                <a:spcPts val="1100"/>
-              </a:spcAft>
-            </a:pPr>
-            <a:r>
-              <a:rPr sz="1600" b="1" i="0">
-                <a:solidFill>
-                  <a:srgbClr val="E8801A"/>
-                </a:solidFill>
-                <a:latin typeface="Montserrat"/>
-              </a:rPr>
-              <a:t>▸  </a:t>
-            </a:r>
-            <a:r>
-              <a:rPr sz="1600" b="0" i="0">
-                <a:solidFill>
-                  <a:srgbClr val="1B2330"/>
-                </a:solidFill>
-                <a:latin typeface="Montserrat"/>
-              </a:rPr>
-              <a:t>Controlar: presión y odorante ahora</a:t>
-            </a:r>
-          </a:p>
-          <a:p>
-            <a:pPr>
-              <a:spcAft>
-                <a:spcPts val="1100"/>
-              </a:spcAft>
-            </a:pPr>
-            <a:r>
-              <a:rPr sz="1600" b="1" i="0">
-                <a:solidFill>
-                  <a:srgbClr val="E8801A"/>
-                </a:solidFill>
-                <a:latin typeface="Montserrat"/>
-              </a:rPr>
-              <a:t>▸  </a:t>
-            </a:r>
-            <a:r>
-              <a:rPr sz="1600" b="0" i="0">
-                <a:solidFill>
-                  <a:srgbClr val="1B2330"/>
-                </a:solidFill>
-                <a:latin typeface="Montserrat"/>
-              </a:rPr>
-              <a:t>Planificar: plan de operación</a:t>
-            </a:r>
-          </a:p>
-          <a:p>
-            <a:pPr>
-              <a:spcAft>
-                <a:spcPts val="1100"/>
-              </a:spcAft>
-            </a:pPr>
-            <a:r>
-              <a:rPr sz="1600" b="1" i="0">
-                <a:solidFill>
-                  <a:srgbClr val="E8801A"/>
-                </a:solidFill>
-                <a:latin typeface="Montserrat"/>
-              </a:rPr>
-              <a:t>▸  </a:t>
-            </a:r>
-            <a:r>
-              <a:rPr sz="1600" b="0" i="0">
-                <a:solidFill>
-                  <a:srgbClr val="1B2330"/>
-                </a:solidFill>
-                <a:latin typeface="Montserrat"/>
-              </a:rPr>
-              <a:t>Informar: informe mensual de calidad</a:t>
-            </a:r>
-          </a:p>
-          <a:p>
-            <a:pPr>
-              <a:spcAft>
-                <a:spcPts val="1100"/>
-              </a:spcAft>
-            </a:pPr>
-            <a:r>
-              <a:rPr sz="1600" b="1" i="0">
-                <a:solidFill>
-                  <a:srgbClr val="E8801A"/>
-                </a:solidFill>
-                <a:latin typeface="Montserrat"/>
-              </a:rPr>
-              <a:t>▸  </a:t>
-            </a:r>
-            <a:r>
-              <a:rPr sz="1600" b="0" i="0">
-                <a:solidFill>
-                  <a:srgbClr val="1B2330"/>
-                </a:solidFill>
-                <a:latin typeface="Montserrat"/>
-              </a:rPr>
-              <a:t>Programar: actuaciones en redes principales</a:t>
-            </a:r>
-          </a:p>
-        </p:txBody>
-      </p:sp>
-      <p:sp>
-        <p:nvSpPr>
-          <p:cNvPr id="9" name="imgph" descr="IMGQ:engineer analyzing data screens control center"/>
+            <a:r>
+              <a:rPr sz="2400" b="1" i="0">
+                <a:solidFill>
+                  <a:srgbClr val="FFFFFF"/>
+                </a:solidFill>
+                <a:latin typeface="Montserrat"/>
+              </a:rPr>
+              <a:t>⚡  PREGUNTA RÁPIDA</a:t>
+            </a:r>
+          </a:p>
+        </p:txBody>
+      </p:sp>
+      <p:sp>
+        <p:nvSpPr>
+          <p:cNvPr id="7" name="TextBox 6"/>
+          <p:cNvSpPr txBox="1"/>
+          <p:nvPr/>
+        </p:nvSpPr>
+        <p:spPr>
+          <a:xfrm>
+            <a:off x="822960" y="1508760"/>
+            <a:ext cx="10515600" cy="1371600"/>
+          </a:xfrm>
+          <a:prstGeom prst="rect">
+            <a:avLst/>
+          </a:prstGeom>
+          <a:noFill/>
+        </p:spPr>
+        <p:txBody>
+          <a:bodyPr wrap="square">
+            <a:spAutoFit/>
+          </a:bodyPr>
+          <a:lstStyle/>
+          <a:p>
+            <a:r>
+              <a:rPr sz="2400" b="1" i="0">
+                <a:solidFill>
+                  <a:srgbClr val="1E2761"/>
+                </a:solidFill>
+                <a:latin typeface="Montserrat"/>
+              </a:rPr>
+              <a:t>¿Cuáles son los dos parámetros de calidad que vigila el centro de operación?</a:t>
+            </a:r>
+          </a:p>
+        </p:txBody>
+      </p:sp>
+      <p:sp>
+        <p:nvSpPr>
+          <p:cNvPr id="8" name="Rounded Rectangle 7"/>
           <p:cNvSpPr/>
           <p:nvPr/>
         </p:nvSpPr>
         <p:spPr>
           <a:xfrm>
-            <a:off x="5806440" y="1051560"/>
-            <a:ext cx="5298947" cy="4629150"/>
+            <a:off x="822960" y="3291840"/>
+            <a:ext cx="4983480" cy="1143000"/>
           </a:xfrm>
           <a:prstGeom prst="roundRect">
             <a:avLst/>
@@ -10339,14 +14446,58 @@
       </p:sp>
       <p:sp>
         <p:nvSpPr>
+          <p:cNvPr id="9" name="Rectangle 8"/>
+          <p:cNvSpPr/>
+          <p:nvPr/>
+        </p:nvSpPr>
+        <p:spPr>
+          <a:xfrm>
+            <a:off x="822960" y="3291840"/>
+            <a:ext cx="640080" cy="1143000"/>
+          </a:xfrm>
+          <a:prstGeom prst="rect">
+            <a:avLst/>
+          </a:prstGeom>
+          <a:solidFill>
+            <a:srgbClr val="1E2761"/>
+          </a:solidFill>
+          <a:ln>
+            <a:noFill/>
+          </a:ln>
+          <a:effectLst/>
+        </p:spPr>
+        <p:style>
+          <a:lnRef idx="1">
+            <a:schemeClr val="accent1"/>
+          </a:lnRef>
+          <a:fillRef idx="3">
+            <a:schemeClr val="accent1"/>
+          </a:fillRef>
+          <a:effectRef idx="2">
+            <a:schemeClr val="accent1"/>
+          </a:effectRef>
+          <a:fontRef idx="minor">
+            <a:schemeClr val="lt1"/>
+          </a:fontRef>
+        </p:style>
+        <p:txBody>
+          <a:bodyPr rtlCol="0" anchor="ctr"/>
+          <a:lstStyle/>
+          <a:p>
+            <a:pPr algn="ctr"/>
+          </a:p>
+        </p:txBody>
+      </p:sp>
+      <p:sp>
+        <p:nvSpPr>
           <p:cNvPr id="10" name="TextBox 9"/>
           <p:cNvSpPr txBox="1"/>
           <p:nvPr/>
         </p:nvSpPr>
         <p:spPr>
           <a:xfrm>
-            <a:off x="6080760" y="2726055"/>
-            <a:ext cx="4750307" cy="1280160"/>
+            <a:off x="822960" y="3611880"/>
+            <a:ext cx="640080" cy="548640"/>
           </a:xfrm>
           <a:prstGeom prst="rect">
             <a:avLst/>
@@ -10361,25 +14512,524 @@
           <a:p>
             <a:pPr algn="ctr"/>
             <a:r>
-              <a:rPr sz="1400" b="1" i="0">
-                <a:solidFill>
-                  <a:srgbClr val="64748B"/>
-                </a:solidFill>
-                <a:latin typeface="Montserrat"/>
-              </a:rPr>
-              <a:t>IMAGEN REALISTA</a:t>
-            </a:r>
-          </a:p>
+              <a:rPr sz="2200" b="1" i="0">
+                <a:solidFill>
+                  <a:srgbClr val="FFFFFF"/>
+                </a:solidFill>
+                <a:latin typeface="Montserrat"/>
+              </a:rPr>
+              <a:t>A</a:t>
+            </a:r>
+          </a:p>
+        </p:txBody>
+      </p:sp>
+      <p:sp>
+        <p:nvSpPr>
+          <p:cNvPr id="11" name="TextBox 10"/>
+          <p:cNvSpPr txBox="1"/>
+          <p:nvPr/>
+        </p:nvSpPr>
+        <p:spPr>
+          <a:xfrm>
+            <a:off x="1600200" y="3474720"/>
+            <a:ext cx="4114800" cy="868680"/>
+          </a:xfrm>
+          <a:prstGeom prst="rect">
+            <a:avLst/>
+          </a:prstGeom>
+          <a:noFill/>
+        </p:spPr>
+        <p:txBody>
+          <a:bodyPr wrap="square">
+            <a:spAutoFit/>
+          </a:bodyPr>
+          <a:lstStyle/>
+          <a:p>
+            <a:r>
+              <a:rPr sz="1400" b="0" i="0">
+                <a:solidFill>
+                  <a:srgbClr val="1B2330"/>
+                </a:solidFill>
+                <a:latin typeface="Montserrat"/>
+              </a:rPr>
+              <a:t>La presión y la concentración de odorizante</a:t>
+            </a:r>
+          </a:p>
+        </p:txBody>
+      </p:sp>
+      <p:sp>
+        <p:nvSpPr>
+          <p:cNvPr id="12" name="Rounded Rectangle 11"/>
+          <p:cNvSpPr/>
+          <p:nvPr/>
+        </p:nvSpPr>
+        <p:spPr>
+          <a:xfrm>
+            <a:off x="6355080" y="3291840"/>
+            <a:ext cx="4983480" cy="1143000"/>
+          </a:xfrm>
+          <a:prstGeom prst="roundRect">
+            <a:avLst/>
+          </a:prstGeom>
+          <a:solidFill>
+            <a:srgbClr val="F3F6FB"/>
+          </a:solidFill>
+          <a:ln w="12700">
+            <a:solidFill>
+              <a:srgbClr val="C7D2E6"/>
+            </a:solidFill>
+          </a:ln>
+          <a:effectLst/>
+        </p:spPr>
+        <p:style>
+          <a:lnRef idx="1">
+            <a:schemeClr val="accent1"/>
+          </a:lnRef>
+          <a:fillRef idx="3">
+            <a:schemeClr val="accent1"/>
+          </a:fillRef>
+          <a:effectRef idx="2">
+            <a:schemeClr val="accent1"/>
+          </a:effectRef>
+          <a:fontRef idx="minor">
+            <a:schemeClr val="lt1"/>
+          </a:fontRef>
+        </p:style>
+        <p:txBody>
+          <a:bodyPr rtlCol="0" anchor="ctr"/>
+          <a:lstStyle/>
           <a:p>
             <a:pPr algn="ctr"/>
-            <a:r>
-              <a:rPr sz="1100" b="0" i="1">
-                <a:solidFill>
-                  <a:srgbClr val="64748B"/>
-                </a:solidFill>
-                <a:latin typeface="Montserrat"/>
-              </a:rPr>
-              <a:t>engineer analyzing data screens control center</a:t>
+          </a:p>
+        </p:txBody>
+      </p:sp>
+      <p:sp>
+        <p:nvSpPr>
+          <p:cNvPr id="13" name="Rectangle 12"/>
+          <p:cNvSpPr/>
+          <p:nvPr/>
+        </p:nvSpPr>
+        <p:spPr>
+          <a:xfrm>
+            <a:off x="6355080" y="3291840"/>
+            <a:ext cx="640080" cy="1143000"/>
+          </a:xfrm>
+          <a:prstGeom prst="rect">
+            <a:avLst/>
+          </a:prstGeom>
+          <a:solidFill>
+            <a:srgbClr val="1E2761"/>
+          </a:solidFill>
+          <a:ln>
+            <a:noFill/>
+          </a:ln>
+          <a:effectLst/>
+        </p:spPr>
+        <p:style>
+          <a:lnRef idx="1">
+            <a:schemeClr val="accent1"/>
+          </a:lnRef>
+          <a:fillRef idx="3">
+            <a:schemeClr val="accent1"/>
+          </a:fillRef>
+          <a:effectRef idx="2">
+            <a:schemeClr val="accent1"/>
+          </a:effectRef>
+          <a:fontRef idx="minor">
+            <a:schemeClr val="lt1"/>
+          </a:fontRef>
+        </p:style>
+        <p:txBody>
+          <a:bodyPr rtlCol="0" anchor="ctr"/>
+          <a:lstStyle/>
+          <a:p>
+            <a:pPr algn="ctr"/>
+          </a:p>
+        </p:txBody>
+      </p:sp>
+      <p:sp>
+        <p:nvSpPr>
+          <p:cNvPr id="14" name="TextBox 13"/>
+          <p:cNvSpPr txBox="1"/>
+          <p:nvPr/>
+        </p:nvSpPr>
+        <p:spPr>
+          <a:xfrm>
+            <a:off x="6355080" y="3611880"/>
+            <a:ext cx="640080" cy="548640"/>
+          </a:xfrm>
+          <a:prstGeom prst="rect">
+            <a:avLst/>
+          </a:prstGeom>
+          <a:noFill/>
+        </p:spPr>
+        <p:txBody>
+          <a:bodyPr wrap="square">
+            <a:spAutoFit/>
+          </a:bodyPr>
+          <a:lstStyle/>
+          <a:p>
+            <a:pPr algn="ctr"/>
+            <a:r>
+              <a:rPr sz="2200" b="1" i="0">
+                <a:solidFill>
+                  <a:srgbClr val="FFFFFF"/>
+                </a:solidFill>
+                <a:latin typeface="Montserrat"/>
+              </a:rPr>
+              <a:t>B</a:t>
+            </a:r>
+          </a:p>
+        </p:txBody>
+      </p:sp>
+      <p:sp>
+        <p:nvSpPr>
+          <p:cNvPr id="15" name="TextBox 14"/>
+          <p:cNvSpPr txBox="1"/>
+          <p:nvPr/>
+        </p:nvSpPr>
+        <p:spPr>
+          <a:xfrm>
+            <a:off x="7132320" y="3474720"/>
+            <a:ext cx="4114800" cy="868680"/>
+          </a:xfrm>
+          <a:prstGeom prst="rect">
+            <a:avLst/>
+          </a:prstGeom>
+          <a:noFill/>
+        </p:spPr>
+        <p:txBody>
+          <a:bodyPr wrap="square">
+            <a:spAutoFit/>
+          </a:bodyPr>
+          <a:lstStyle/>
+          <a:p>
+            <a:r>
+              <a:rPr sz="1400" b="0" i="0">
+                <a:solidFill>
+                  <a:srgbClr val="1B2330"/>
+                </a:solidFill>
+                <a:latin typeface="Montserrat"/>
+              </a:rPr>
+              <a:t>La temperatura y el caudal del gas</a:t>
+            </a:r>
+          </a:p>
+        </p:txBody>
+      </p:sp>
+      <p:sp>
+        <p:nvSpPr>
+          <p:cNvPr id="16" name="Rounded Rectangle 15"/>
+          <p:cNvSpPr/>
+          <p:nvPr/>
+        </p:nvSpPr>
+        <p:spPr>
+          <a:xfrm>
+            <a:off x="822960" y="4617720"/>
+            <a:ext cx="4983480" cy="1143000"/>
+          </a:xfrm>
+          <a:prstGeom prst="roundRect">
+            <a:avLst/>
+          </a:prstGeom>
+          <a:solidFill>
+            <a:srgbClr val="F3F6FB"/>
+          </a:solidFill>
+          <a:ln w="12700">
+            <a:solidFill>
+              <a:srgbClr val="C7D2E6"/>
+            </a:solidFill>
+          </a:ln>
+          <a:effectLst/>
+        </p:spPr>
+        <p:style>
+          <a:lnRef idx="1">
+            <a:schemeClr val="accent1"/>
+          </a:lnRef>
+          <a:fillRef idx="3">
+            <a:schemeClr val="accent1"/>
+          </a:fillRef>
+          <a:effectRef idx="2">
+            <a:schemeClr val="accent1"/>
+          </a:effectRef>
+          <a:fontRef idx="minor">
+            <a:schemeClr val="lt1"/>
+          </a:fontRef>
+        </p:style>
+        <p:txBody>
+          <a:bodyPr rtlCol="0" anchor="ctr"/>
+          <a:lstStyle/>
+          <a:p>
+            <a:pPr algn="ctr"/>
+          </a:p>
+        </p:txBody>
+      </p:sp>
+      <p:sp>
+        <p:nvSpPr>
+          <p:cNvPr id="17" name="Rectangle 16"/>
+          <p:cNvSpPr/>
+          <p:nvPr/>
+        </p:nvSpPr>
+        <p:spPr>
+          <a:xfrm>
+            <a:off x="822960" y="4617720"/>
+            <a:ext cx="640080" cy="1143000"/>
+          </a:xfrm>
+          <a:prstGeom prst="rect">
+            <a:avLst/>
+          </a:prstGeom>
+          <a:solidFill>
+            <a:srgbClr val="1E2761"/>
+          </a:solidFill>
+          <a:ln>
+            <a:noFill/>
+          </a:ln>
+          <a:effectLst/>
+        </p:spPr>
+        <p:style>
+          <a:lnRef idx="1">
+            <a:schemeClr val="accent1"/>
+          </a:lnRef>
+          <a:fillRef idx="3">
+            <a:schemeClr val="accent1"/>
+          </a:fillRef>
+          <a:effectRef idx="2">
+            <a:schemeClr val="accent1"/>
+          </a:effectRef>
+          <a:fontRef idx="minor">
+            <a:schemeClr val="lt1"/>
+          </a:fontRef>
+        </p:style>
+        <p:txBody>
+          <a:bodyPr rtlCol="0" anchor="ctr"/>
+          <a:lstStyle/>
+          <a:p>
+            <a:pPr algn="ctr"/>
+          </a:p>
+        </p:txBody>
+      </p:sp>
+      <p:sp>
+        <p:nvSpPr>
+          <p:cNvPr id="18" name="TextBox 17"/>
+          <p:cNvSpPr txBox="1"/>
+          <p:nvPr/>
+        </p:nvSpPr>
+        <p:spPr>
+          <a:xfrm>
+            <a:off x="822960" y="4937760"/>
+            <a:ext cx="640080" cy="548640"/>
+          </a:xfrm>
+          <a:prstGeom prst="rect">
+            <a:avLst/>
+          </a:prstGeom>
+          <a:noFill/>
+        </p:spPr>
+        <p:txBody>
+          <a:bodyPr wrap="square">
+            <a:spAutoFit/>
+          </a:bodyPr>
+          <a:lstStyle/>
+          <a:p>
+            <a:pPr algn="ctr"/>
+            <a:r>
+              <a:rPr sz="2200" b="1" i="0">
+                <a:solidFill>
+                  <a:srgbClr val="FFFFFF"/>
+                </a:solidFill>
+                <a:latin typeface="Montserrat"/>
+              </a:rPr>
+              <a:t>C</a:t>
+            </a:r>
+          </a:p>
+        </p:txBody>
+      </p:sp>
+      <p:sp>
+        <p:nvSpPr>
+          <p:cNvPr id="19" name="TextBox 18"/>
+          <p:cNvSpPr txBox="1"/>
+          <p:nvPr/>
+        </p:nvSpPr>
+        <p:spPr>
+          <a:xfrm>
+            <a:off x="1600200" y="4800600"/>
+            <a:ext cx="4114800" cy="868680"/>
+          </a:xfrm>
+          <a:prstGeom prst="rect">
+            <a:avLst/>
+          </a:prstGeom>
+          <a:noFill/>
+        </p:spPr>
+        <p:txBody>
+          <a:bodyPr wrap="square">
+            <a:spAutoFit/>
+          </a:bodyPr>
+          <a:lstStyle/>
+          <a:p>
+            <a:r>
+              <a:rPr sz="1400" b="0" i="0">
+                <a:solidFill>
+                  <a:srgbClr val="1B2330"/>
+                </a:solidFill>
+                <a:latin typeface="Montserrat"/>
+              </a:rPr>
+              <a:t>La humedad y el poder calorífico</a:t>
+            </a:r>
+          </a:p>
+        </p:txBody>
+      </p:sp>
+      <p:sp>
+        <p:nvSpPr>
+          <p:cNvPr id="20" name="Rounded Rectangle 19"/>
+          <p:cNvSpPr/>
+          <p:nvPr/>
+        </p:nvSpPr>
+        <p:spPr>
+          <a:xfrm>
+            <a:off x="6355080" y="4617720"/>
+            <a:ext cx="4983480" cy="1143000"/>
+          </a:xfrm>
+          <a:prstGeom prst="roundRect">
+            <a:avLst/>
+          </a:prstGeom>
+          <a:solidFill>
+            <a:srgbClr val="F3F6FB"/>
+          </a:solidFill>
+          <a:ln w="12700">
+            <a:solidFill>
+              <a:srgbClr val="C7D2E6"/>
+            </a:solidFill>
+          </a:ln>
+          <a:effectLst/>
+        </p:spPr>
+        <p:style>
+          <a:lnRef idx="1">
+            <a:schemeClr val="accent1"/>
+          </a:lnRef>
+          <a:fillRef idx="3">
+            <a:schemeClr val="accent1"/>
+          </a:fillRef>
+          <a:effectRef idx="2">
+            <a:schemeClr val="accent1"/>
+          </a:effectRef>
+          <a:fontRef idx="minor">
+            <a:schemeClr val="lt1"/>
+          </a:fontRef>
+        </p:style>
+        <p:txBody>
+          <a:bodyPr rtlCol="0" anchor="ctr"/>
+          <a:lstStyle/>
+          <a:p>
+            <a:pPr algn="ctr"/>
+          </a:p>
+        </p:txBody>
+      </p:sp>
+      <p:sp>
+        <p:nvSpPr>
+          <p:cNvPr id="21" name="Rectangle 20"/>
+          <p:cNvSpPr/>
+          <p:nvPr/>
+        </p:nvSpPr>
+        <p:spPr>
+          <a:xfrm>
+            <a:off x="6355080" y="4617720"/>
+            <a:ext cx="640080" cy="1143000"/>
+          </a:xfrm>
+          <a:prstGeom prst="rect">
+            <a:avLst/>
+          </a:prstGeom>
+          <a:solidFill>
+            <a:srgbClr val="1E2761"/>
+          </a:solidFill>
+          <a:ln>
+            <a:noFill/>
+          </a:ln>
+          <a:effectLst/>
+        </p:spPr>
+        <p:style>
+          <a:lnRef idx="1">
+            <a:schemeClr val="accent1"/>
+          </a:lnRef>
+          <a:fillRef idx="3">
+            <a:schemeClr val="accent1"/>
+          </a:fillRef>
+          <a:effectRef idx="2">
+            <a:schemeClr val="accent1"/>
+          </a:effectRef>
+          <a:fontRef idx="minor">
+            <a:schemeClr val="lt1"/>
+          </a:fontRef>
+        </p:style>
+        <p:txBody>
+          <a:bodyPr rtlCol="0" anchor="ctr"/>
+          <a:lstStyle/>
+          <a:p>
+            <a:pPr algn="ctr"/>
+          </a:p>
+        </p:txBody>
+      </p:sp>
+      <p:sp>
+        <p:nvSpPr>
+          <p:cNvPr id="22" name="TextBox 21"/>
+          <p:cNvSpPr txBox="1"/>
+          <p:nvPr/>
+        </p:nvSpPr>
+        <p:spPr>
+          <a:xfrm>
+            <a:off x="6355080" y="4937760"/>
+            <a:ext cx="640080" cy="548640"/>
+          </a:xfrm>
+          <a:prstGeom prst="rect">
+            <a:avLst/>
+          </a:prstGeom>
+          <a:noFill/>
+        </p:spPr>
+        <p:txBody>
+          <a:bodyPr wrap="square">
+            <a:spAutoFit/>
+          </a:bodyPr>
+          <a:lstStyle/>
+          <a:p>
+            <a:pPr algn="ctr"/>
+            <a:r>
+              <a:rPr sz="2200" b="1" i="0">
+                <a:solidFill>
+                  <a:srgbClr val="FFFFFF"/>
+                </a:solidFill>
+                <a:latin typeface="Montserrat"/>
+              </a:rPr>
+              <a:t>D</a:t>
+            </a:r>
+          </a:p>
+        </p:txBody>
+      </p:sp>
+      <p:sp>
+        <p:nvSpPr>
+          <p:cNvPr id="23" name="TextBox 22"/>
+          <p:cNvSpPr txBox="1"/>
+          <p:nvPr/>
+        </p:nvSpPr>
+        <p:spPr>
+          <a:xfrm>
+            <a:off x="7132320" y="4800600"/>
+            <a:ext cx="4114800" cy="868680"/>
+          </a:xfrm>
+          <a:prstGeom prst="rect">
+            <a:avLst/>
+          </a:prstGeom>
+          <a:noFill/>
+        </p:spPr>
+        <p:txBody>
+          <a:bodyPr wrap="square">
+            <a:spAutoFit/>
+          </a:bodyPr>
+          <a:lstStyle/>
+          <a:p>
+            <a:r>
+              <a:rPr sz="1400" b="0" i="0">
+                <a:solidFill>
+                  <a:srgbClr val="1B2330"/>
+                </a:solidFill>
+                <a:latin typeface="Montserrat"/>
+              </a:rPr>
+              <a:t>El diámetro del tubo y la profundidad de la zanja</a:t>
             </a:r>
           </a:p>
         </p:txBody>
@@ -10389,6 +15039,18 @@
   <p:clrMapOvr>
     <a:masterClrMapping/>
   </p:clrMapOvr>
+  <mc:AlternateContent xmlns:mc="http://schemas.openxmlformats.org/markup-compatibility/2006">
+    <mc:Choice xmlns:p14="http://schemas.microsoft.com/office/powerpoint/2010/main" Requires="p14">
+      <p:transition spd="med" p14:dur="700">
+        <p14:cube dir="r"/>
+      </p:transition>
+    </mc:Choice>
+    <mc:Fallback>
+      <p:transition spd="med">
+        <p:push dir="r"/>
+      </p:transition>
+    </mc:Fallback>
+  </mc:AlternateContent>
 </p:sld>
 </file>
 
@@ -10476,7 +15138,7 @@
                 </a:solidFill>
                 <a:latin typeface="Montserrat"/>
               </a:rPr>
-              <a:t>007 / 016</a:t>
+              <a:t>007 / 022</a:t>
             </a:r>
           </a:p>
         </p:txBody>
@@ -10517,88 +15179,20 @@
       </p:sp>
       <p:sp>
         <p:nvSpPr>
-          <p:cNvPr id="5" name="TextBox 4"/>
-          <p:cNvSpPr txBox="1"/>
-          <p:nvPr/>
-        </p:nvSpPr>
-        <p:spPr>
-          <a:xfrm>
-            <a:off x="822960" y="457200"/>
-            <a:ext cx="10058400" cy="365760"/>
-          </a:xfrm>
-          <a:prstGeom prst="rect">
-            <a:avLst/>
-          </a:prstGeom>
-          <a:noFill/>
-        </p:spPr>
-        <p:txBody>
-          <a:bodyPr wrap="square">
-            <a:spAutoFit/>
-          </a:bodyPr>
-          <a:lstStyle/>
-          <a:p>
-            <a:r>
-              <a:rPr sz="1300" b="1" i="0">
-                <a:solidFill>
-                  <a:srgbClr val="E8801A"/>
-                </a:solidFill>
-                <a:latin typeface="Montserrat"/>
-              </a:rPr>
-              <a:t>APARTADO 6.2 · EMERGENCIAS</a:t>
-            </a:r>
-          </a:p>
-        </p:txBody>
-      </p:sp>
-      <p:sp>
-        <p:nvSpPr>
-          <p:cNvPr id="6" name="TextBox 5"/>
-          <p:cNvSpPr txBox="1"/>
-          <p:nvPr/>
-        </p:nvSpPr>
-        <p:spPr>
-          <a:xfrm>
-            <a:off x="822960" y="868680"/>
-            <a:ext cx="10515600" cy="914400"/>
-          </a:xfrm>
-          <a:prstGeom prst="rect">
-            <a:avLst/>
-          </a:prstGeom>
-          <a:noFill/>
-        </p:spPr>
-        <p:txBody>
-          <a:bodyPr wrap="square">
-            <a:spAutoFit/>
-          </a:bodyPr>
-          <a:lstStyle/>
-          <a:p>
-            <a:r>
-              <a:rPr sz="2800" b="1" i="0">
-                <a:solidFill>
-                  <a:srgbClr val="1E2761"/>
-                </a:solidFill>
-                <a:latin typeface="Montserrat"/>
-              </a:rPr>
-              <a:t>Plan escrito y teléfono 24 h</a:t>
-            </a:r>
-          </a:p>
-        </p:txBody>
-      </p:sp>
-      <p:sp>
-        <p:nvSpPr>
-          <p:cNvPr id="7" name="Rounded Rectangle 6"/>
+          <p:cNvPr id="5" name="Rectangle 4"/>
           <p:cNvSpPr/>
           <p:nvPr/>
         </p:nvSpPr>
         <p:spPr>
           <a:xfrm>
-            <a:off x="868680" y="1627632"/>
-            <a:ext cx="2011680" cy="73152"/>
-          </a:xfrm>
-          <a:prstGeom prst="roundRect">
+            <a:off x="0" y="0"/>
+            <a:ext cx="12191695" cy="1143000"/>
+          </a:xfrm>
+          <a:prstGeom prst="rect">
             <a:avLst/>
           </a:prstGeom>
           <a:solidFill>
-            <a:srgbClr val="E8801A"/>
+            <a:srgbClr val="1E8E4B"/>
           </a:solidFill>
           <a:ln>
             <a:noFill/>
@@ -10629,14 +15223,14 @@
       </p:sp>
       <p:sp>
         <p:nvSpPr>
-          <p:cNvPr id="8" name="TextBox 7"/>
+          <p:cNvPr id="6" name="TextBox 5"/>
           <p:cNvSpPr txBox="1"/>
           <p:nvPr/>
         </p:nvSpPr>
         <p:spPr>
           <a:xfrm>
-            <a:off x="822960" y="1965960"/>
-            <a:ext cx="4983480" cy="4206240"/>
+            <a:off x="822960" y="274320"/>
+            <a:ext cx="10515600" cy="640080"/>
           </a:xfrm>
           <a:prstGeom prst="rect">
             <a:avLst/>
@@ -10649,127 +15243,72 @@
           </a:bodyPr>
           <a:lstStyle/>
           <a:p>
-            <a:pPr>
-              <a:spcAft>
-                <a:spcPts val="1100"/>
-              </a:spcAft>
-            </a:pPr>
-            <a:r>
-              <a:rPr sz="1600" b="1" i="0">
-                <a:solidFill>
-                  <a:srgbClr val="E8801A"/>
-                </a:solidFill>
-                <a:latin typeface="Montserrat"/>
-              </a:rPr>
-              <a:t>▸  </a:t>
-            </a:r>
-            <a:r>
-              <a:rPr sz="1600" b="0" i="0">
-                <a:solidFill>
-                  <a:srgbClr val="1B2330"/>
-                </a:solidFill>
-                <a:latin typeface="Montserrat"/>
-              </a:rPr>
-              <a:t>Plan de emergencia: documento de 8 puntos</a:t>
-            </a:r>
-          </a:p>
-          <a:p>
-            <a:pPr>
-              <a:spcAft>
-                <a:spcPts val="1100"/>
-              </a:spcAft>
-            </a:pPr>
-            <a:r>
-              <a:rPr sz="1600" b="1" i="0">
-                <a:solidFill>
-                  <a:srgbClr val="E8801A"/>
-                </a:solidFill>
-                <a:latin typeface="Montserrat"/>
-              </a:rPr>
-              <a:t>▸  </a:t>
-            </a:r>
-            <a:r>
-              <a:rPr sz="1600" b="0" i="0">
-                <a:solidFill>
-                  <a:srgbClr val="1B2330"/>
-                </a:solidFill>
-                <a:latin typeface="Montserrat"/>
-              </a:rPr>
-              <a:t>Servicio de urgencias: teléfono y campo</a:t>
-            </a:r>
-          </a:p>
-          <a:p>
-            <a:pPr>
-              <a:spcAft>
-                <a:spcPts val="1100"/>
-              </a:spcAft>
-            </a:pPr>
-            <a:r>
-              <a:rPr sz="1600" b="1" i="0">
-                <a:solidFill>
-                  <a:srgbClr val="E8801A"/>
-                </a:solidFill>
-                <a:latin typeface="Montserrat"/>
-              </a:rPr>
-              <a:t>▸  </a:t>
-            </a:r>
-            <a:r>
-              <a:rPr sz="1600" b="0" i="0">
-                <a:solidFill>
-                  <a:srgbClr val="1B2330"/>
-                </a:solidFill>
-                <a:latin typeface="Montserrat"/>
-              </a:rPr>
-              <a:t>Permanente y capaz de activar el plan</a:t>
-            </a:r>
-          </a:p>
-          <a:p>
-            <a:pPr>
-              <a:spcAft>
-                <a:spcPts val="1100"/>
-              </a:spcAft>
-            </a:pPr>
-            <a:r>
-              <a:rPr sz="1600" b="1" i="0">
-                <a:solidFill>
-                  <a:srgbClr val="E8801A"/>
-                </a:solidFill>
-                <a:latin typeface="Montserrat"/>
-              </a:rPr>
-              <a:t>▸  </a:t>
-            </a:r>
-            <a:r>
-              <a:rPr sz="1600" b="0" i="0">
-                <a:solidFill>
-                  <a:srgbClr val="1B2330"/>
-                </a:solidFill>
-                <a:latin typeface="Montserrat"/>
-              </a:rPr>
-              <a:t>Avisa a policía, bomberos y sanitarios</a:t>
-            </a:r>
-          </a:p>
-        </p:txBody>
-      </p:sp>
-      <p:sp>
-        <p:nvSpPr>
-          <p:cNvPr id="9" name="imgph" descr="IMGQ:emergency call center operator headset"/>
+            <a:r>
+              <a:rPr sz="2400" b="1" i="0">
+                <a:solidFill>
+                  <a:srgbClr val="FFFFFF"/>
+                </a:solidFill>
+                <a:latin typeface="Montserrat"/>
+              </a:rPr>
+              <a:t>✔  RESPUESTA:  A</a:t>
+            </a:r>
+          </a:p>
+        </p:txBody>
+      </p:sp>
+      <p:sp>
+        <p:nvSpPr>
+          <p:cNvPr id="7" name="TextBox 6"/>
+          <p:cNvSpPr txBox="1"/>
+          <p:nvPr/>
+        </p:nvSpPr>
+        <p:spPr>
+          <a:xfrm>
+            <a:off x="822960" y="1417320"/>
+            <a:ext cx="10515600" cy="914400"/>
+          </a:xfrm>
+          <a:prstGeom prst="rect">
+            <a:avLst/>
+          </a:prstGeom>
+          <a:noFill/>
+        </p:spPr>
+        <p:txBody>
+          <a:bodyPr wrap="square">
+            <a:spAutoFit/>
+          </a:bodyPr>
+          <a:lstStyle/>
+          <a:p>
+            <a:r>
+              <a:rPr sz="1800" b="1" i="0">
+                <a:solidFill>
+                  <a:srgbClr val="64748B"/>
+                </a:solidFill>
+                <a:latin typeface="Montserrat"/>
+              </a:rPr>
+              <a:t>¿Cuáles son los dos parámetros de calidad que vigila el centro de operación?</a:t>
+            </a:r>
+          </a:p>
+        </p:txBody>
+      </p:sp>
+      <p:sp>
+        <p:nvSpPr>
+          <p:cNvPr id="8" name="Rounded Rectangle 7"/>
           <p:cNvSpPr/>
           <p:nvPr/>
         </p:nvSpPr>
         <p:spPr>
           <a:xfrm>
-            <a:off x="5806440" y="1051560"/>
-            <a:ext cx="5298947" cy="4629150"/>
+            <a:off x="822960" y="2514600"/>
+            <a:ext cx="10515600" cy="914400"/>
           </a:xfrm>
           <a:prstGeom prst="roundRect">
             <a:avLst/>
           </a:prstGeom>
           <a:solidFill>
-            <a:srgbClr val="F3F6FB"/>
+            <a:srgbClr val="E9F6EE"/>
           </a:solidFill>
           <a:ln w="12700">
             <a:solidFill>
-              <a:srgbClr val="C7D2E6"/>
+              <a:srgbClr val="1E8E4B"/>
             </a:solidFill>
           </a:ln>
           <a:effectLst/>
@@ -10798,14 +15337,14 @@
       </p:sp>
       <p:sp>
         <p:nvSpPr>
-          <p:cNvPr id="10" name="TextBox 9"/>
+          <p:cNvPr id="9" name="TextBox 8"/>
           <p:cNvSpPr txBox="1"/>
           <p:nvPr/>
         </p:nvSpPr>
         <p:spPr>
           <a:xfrm>
-            <a:off x="6080760" y="2726055"/>
-            <a:ext cx="4750307" cy="1280160"/>
+            <a:off x="1097280" y="2697480"/>
+            <a:ext cx="10058400" cy="640080"/>
           </a:xfrm>
           <a:prstGeom prst="rect">
             <a:avLst/>
@@ -10818,27 +15357,66 @@
           </a:bodyPr>
           <a:lstStyle/>
           <a:p>
-            <a:pPr algn="ctr"/>
-            <a:r>
-              <a:rPr sz="1400" b="1" i="0">
-                <a:solidFill>
-                  <a:srgbClr val="64748B"/>
-                </a:solidFill>
-                <a:latin typeface="Montserrat"/>
-              </a:rPr>
-              <a:t>IMAGEN REALISTA</a:t>
-            </a:r>
-          </a:p>
-          <a:p>
-            <a:pPr algn="ctr"/>
-            <a:r>
-              <a:rPr sz="1100" b="0" i="1">
-                <a:solidFill>
-                  <a:srgbClr val="64748B"/>
-                </a:solidFill>
-                <a:latin typeface="Montserrat"/>
-              </a:rPr>
-              <a:t>emergency call center operator headset</a:t>
+            <a:r>
+              <a:rPr sz="1800" b="1" i="0">
+                <a:solidFill>
+                  <a:srgbClr val="1E8E4B"/>
+                </a:solidFill>
+                <a:latin typeface="Montserrat"/>
+              </a:rPr>
+              <a:t>A.  </a:t>
+            </a:r>
+            <a:r>
+              <a:rPr sz="1800" b="1" i="0">
+                <a:solidFill>
+                  <a:srgbClr val="1E2761"/>
+                </a:solidFill>
+                <a:latin typeface="Montserrat"/>
+              </a:rPr>
+              <a:t>La presión y la concentración de odorizante</a:t>
+            </a:r>
+          </a:p>
+        </p:txBody>
+      </p:sp>
+      <p:sp>
+        <p:nvSpPr>
+          <p:cNvPr id="10" name="TextBox 9"/>
+          <p:cNvSpPr txBox="1"/>
+          <p:nvPr/>
+        </p:nvSpPr>
+        <p:spPr>
+          <a:xfrm>
+            <a:off x="822960" y="3749039"/>
+            <a:ext cx="10515600" cy="2194560"/>
+          </a:xfrm>
+          <a:prstGeom prst="rect">
+            <a:avLst/>
+          </a:prstGeom>
+          <a:noFill/>
+        </p:spPr>
+        <p:txBody>
+          <a:bodyPr wrap="square">
+            <a:spAutoFit/>
+          </a:bodyPr>
+          <a:lstStyle/>
+          <a:p>
+            <a:r>
+              <a:rPr sz="1500" b="1" i="0">
+                <a:solidFill>
+                  <a:srgbClr val="E8801A"/>
+                </a:solidFill>
+                <a:latin typeface="Montserrat"/>
+              </a:rPr>
+              <a:t>Por qué:  </a:t>
+            </a:r>
+            <a:r>
+              <a:rPr sz="1500" b="0" i="0">
+                <a:solidFill>
+                  <a:srgbClr val="1B2330"/>
+                </a:solidFill>
+                <a:latin typeface="Montserrat"/>
+              </a:rPr>
+              <a:t>Los parámetros de calidad son, al menos, la presión y el odorizante; sin odorante nadie huele la fuga.</a:t>
             </a:r>
           </a:p>
         </p:txBody>
@@ -10848,6 +15426,18 @@
   <p:clrMapOvr>
     <a:masterClrMapping/>
   </p:clrMapOvr>
+  <mc:AlternateContent xmlns:mc="http://schemas.openxmlformats.org/markup-compatibility/2006">
+    <mc:Choice xmlns:p14="http://schemas.microsoft.com/office/powerpoint/2010/main" Requires="p14">
+      <p:transition spd="med" p14:dur="700">
+        <p14:cube dir="l"/>
+      </p:transition>
+    </mc:Choice>
+    <mc:Fallback>
+      <p:transition spd="med">
+        <p:push dir="l"/>
+      </p:transition>
+    </mc:Fallback>
+  </mc:AlternateContent>
 </p:sld>
 </file>
 
@@ -10935,7 +15525,7 @@
                 </a:solidFill>
                 <a:latin typeface="Montserrat"/>
               </a:rPr>
-              <a:t>008 / 016</a:t>
+              <a:t>008 / 022</a:t>
             </a:r>
           </a:p>
         </p:txBody>
@@ -11003,7 +15593,7 @@
                 </a:solidFill>
                 <a:latin typeface="Montserrat"/>
               </a:rPr>
-              <a:t>APARTADO 6.2 · URGENCIAS DE SEGURIDAD</a:t>
+              <a:t>APARTADO 6.1 · CUATRO FUNCIONES</a:t>
             </a:r>
           </a:p>
         </p:txBody>
@@ -11037,14 +15627,14 @@
                 </a:solidFill>
                 <a:latin typeface="Montserrat"/>
               </a:rPr>
-              <a:t>Olor, incendio o explosión</a:t>
-            </a:r>
-          </a:p>
-        </p:txBody>
-      </p:sp>
-      <p:sp>
-        <p:nvSpPr>
-          <p:cNvPr id="7" name="Rounded Rectangle 6"/>
+              <a:t>Lo que hace el centro</a:t>
+            </a:r>
+          </a:p>
+        </p:txBody>
+      </p:sp>
+      <p:sp>
+        <p:nvSpPr>
+          <p:cNvPr id="7" name="Rectangle 6"/>
           <p:cNvSpPr/>
           <p:nvPr/>
         </p:nvSpPr>
@@ -11053,7 +15643,7 @@
             <a:off x="868680" y="1627632"/>
             <a:ext cx="2011680" cy="73152"/>
           </a:xfrm>
-          <a:prstGeom prst="roundRect">
+          <a:prstGeom prst="rect">
             <a:avLst/>
           </a:prstGeom>
           <a:solidFill>
@@ -11095,7 +15685,7 @@
         <p:spPr>
           <a:xfrm>
             <a:off x="822960" y="1965960"/>
-            <a:ext cx="4983480" cy="4206240"/>
+            <a:ext cx="5029200" cy="4206240"/>
           </a:xfrm>
           <a:prstGeom prst="rect">
             <a:avLst/>
@@ -11129,7 +15719,7 @@
                 </a:solidFill>
                 <a:latin typeface="Montserrat"/>
               </a:rPr>
-              <a:t>Lista cerrada: olor, incendio, explosión</a:t>
+              <a:t>Controlar: presión y odorante ahora</a:t>
             </a:r>
           </a:p>
           <a:p>
@@ -11154,7 +15744,7 @@
                 </a:solidFill>
                 <a:latin typeface="Montserrat"/>
               </a:rPr>
-              <a:t>Fuga de gas: máxima prioridad</a:t>
+              <a:t>Planificar: plan de operación</a:t>
             </a:r>
           </a:p>
           <a:p>
@@ -11179,7 +15769,7 @@
                 </a:solidFill>
                 <a:latin typeface="Montserrat"/>
               </a:rPr>
-              <a:t>Avisos clasificados por prioridades</a:t>
+              <a:t>Informar: informe mensual de calidad</a:t>
             </a:r>
           </a:p>
           <a:p>
@@ -11204,21 +15794,21 @@
                 </a:solidFill>
                 <a:latin typeface="Montserrat"/>
               </a:rPr>
-              <a:t>El coste se repercute al usuario</a:t>
-            </a:r>
-          </a:p>
-        </p:txBody>
-      </p:sp>
-      <p:sp>
-        <p:nvSpPr>
-          <p:cNvPr id="9" name="imgph" descr="IMGQ:person smelling gas leak kitchen worried"/>
+              <a:t>Programar: actuaciones en redes principales</a:t>
+            </a:r>
+          </a:p>
+        </p:txBody>
+      </p:sp>
+      <p:sp>
+        <p:nvSpPr>
+          <p:cNvPr id="9" name="imgph" descr="IMGQ:engineer analyzing data screens control center"/>
           <p:cNvSpPr/>
           <p:nvPr/>
         </p:nvSpPr>
         <p:spPr>
           <a:xfrm>
-            <a:off x="5806440" y="1051560"/>
-            <a:ext cx="5298947" cy="4629150"/>
+            <a:off x="6080760" y="1965960"/>
+            <a:ext cx="5303520" cy="4572000"/>
           </a:xfrm>
           <a:prstGeom prst="roundRect">
             <a:avLst/>
@@ -11263,8 +15853,8 @@
         </p:nvSpPr>
         <p:spPr>
           <a:xfrm>
-            <a:off x="6080760" y="2726055"/>
-            <a:ext cx="4750307" cy="1280160"/>
+            <a:off x="6355080" y="3611880"/>
+            <a:ext cx="4754880" cy="1280160"/>
           </a:xfrm>
           <a:prstGeom prst="rect">
             <a:avLst/>
@@ -11285,7 +15875,7 @@
                 </a:solidFill>
                 <a:latin typeface="Montserrat"/>
               </a:rPr>
-              <a:t>IMAGEN REALISTA</a:t>
+              <a:t>IMAGEN</a:t>
             </a:r>
           </a:p>
           <a:p>
@@ -11297,7 +15887,7 @@
                 </a:solidFill>
                 <a:latin typeface="Montserrat"/>
               </a:rPr>
-              <a:t>person smelling gas leak kitchen worried</a:t>
+              <a:t>engineer analyzing data screens control center</a:t>
             </a:r>
           </a:p>
         </p:txBody>
@@ -11307,6 +15897,18 @@
   <p:clrMapOvr>
     <a:masterClrMapping/>
   </p:clrMapOvr>
+  <mc:AlternateContent xmlns:mc="http://schemas.openxmlformats.org/markup-compatibility/2006">
+    <mc:Choice xmlns:p14="http://schemas.microsoft.com/office/powerpoint/2010/main" Requires="p14">
+      <p:transition spd="med" p14:dur="700">
+        <p14:cube dir="r"/>
+      </p:transition>
+    </mc:Choice>
+    <mc:Fallback>
+      <p:transition spd="med">
+        <p:push dir="r"/>
+      </p:transition>
+    </mc:Fallback>
+  </mc:AlternateContent>
 </p:sld>
 </file>
 
@@ -11394,7 +15996,7 @@
                 </a:solidFill>
                 <a:latin typeface="Montserrat"/>
               </a:rPr>
-              <a:t>009 / 016</a:t>
+              <a:t>009 / 022</a:t>
             </a:r>
           </a:p>
         </p:txBody>
@@ -11462,7 +16064,7 @@
                 </a:solidFill>
                 <a:latin typeface="Montserrat"/>
               </a:rPr>
-              <a:t>APARTADO 6.3 · CONTROL DE ESTANQUIDAD</a:t>
+              <a:t>APARTADO 6.2 · EMERGENCIAS</a:t>
             </a:r>
           </a:p>
         </p:txBody>
@@ -11496,14 +16098,14 @@
                 </a:solidFill>
                 <a:latin typeface="Montserrat"/>
               </a:rPr>
-              <a:t>Cazar y clasificar fugas</a:t>
-            </a:r>
-          </a:p>
-        </p:txBody>
-      </p:sp>
-      <p:sp>
-        <p:nvSpPr>
-          <p:cNvPr id="7" name="Rounded Rectangle 6"/>
+              <a:t>Plan escrito y teléfono 24 h</a:t>
+            </a:r>
+          </a:p>
+        </p:txBody>
+      </p:sp>
+      <p:sp>
+        <p:nvSpPr>
+          <p:cNvPr id="7" name="Rectangle 6"/>
           <p:cNvSpPr/>
           <p:nvPr/>
         </p:nvSpPr>
@@ -11512,7 +16114,7 @@
             <a:off x="868680" y="1627632"/>
             <a:ext cx="2011680" cy="73152"/>
           </a:xfrm>
-          <a:prstGeom prst="roundRect">
+          <a:prstGeom prst="rect">
             <a:avLst/>
           </a:prstGeom>
           <a:solidFill>
@@ -11553,8 +16155,8 @@
         </p:nvSpPr>
         <p:spPr>
           <a:xfrm>
-            <a:off x="822960" y="1965960"/>
-            <a:ext cx="4983480" cy="4206240"/>
+            <a:off x="6355080" y="1965960"/>
+            <a:ext cx="5029200" cy="4206240"/>
           </a:xfrm>
           <a:prstGeom prst="rect">
             <a:avLst/>
@@ -11588,7 +16190,7 @@
                 </a:solidFill>
                 <a:latin typeface="Montserrat"/>
               </a:rPr>
-              <a:t>Urgente: voy ya</a:t>
+              <a:t>Plan de emergencia: documento de 8 puntos</a:t>
             </a:r>
           </a:p>
           <a:p>
@@ -11613,7 +16215,7 @@
                 </a:solidFill>
                 <a:latin typeface="Montserrat"/>
               </a:rPr>
-              <a:t>Programada: la planifico</a:t>
+              <a:t>Servicio de urgencias: teléfono y campo</a:t>
             </a:r>
           </a:p>
           <a:p>
@@ -11638,7 +16240,7 @@
                 </a:solidFill>
                 <a:latin typeface="Montserrat"/>
               </a:rPr>
-              <a:t>Vigilancia de progresión: la vigilo</a:t>
+              <a:t>Permanente y capaz de activar el plan</a:t>
             </a:r>
           </a:p>
           <a:p>
@@ -11663,21 +16265,21 @@
                 </a:solidFill>
                 <a:latin typeface="Montserrat"/>
               </a:rPr>
-              <a:t>Lo que decide: la proximidad a edificios</a:t>
-            </a:r>
-          </a:p>
-        </p:txBody>
-      </p:sp>
-      <p:sp>
-        <p:nvSpPr>
-          <p:cNvPr id="9" name="imgph" descr="IMGQ:technician gas leak detector survey pipe"/>
+              <a:t>Avisa a policía, bomberos y sanitarios</a:t>
+            </a:r>
+          </a:p>
+        </p:txBody>
+      </p:sp>
+      <p:sp>
+        <p:nvSpPr>
+          <p:cNvPr id="9" name="imgph" descr="IMGQ:emergency call center operator headset"/>
           <p:cNvSpPr/>
           <p:nvPr/>
         </p:nvSpPr>
         <p:spPr>
           <a:xfrm>
-            <a:off x="5806440" y="1051560"/>
-            <a:ext cx="5298947" cy="4629150"/>
+            <a:off x="822960" y="1965960"/>
+            <a:ext cx="5303520" cy="4572000"/>
           </a:xfrm>
           <a:prstGeom prst="roundRect">
             <a:avLst/>
@@ -11722,8 +16324,8 @@
         </p:nvSpPr>
         <p:spPr>
           <a:xfrm>
-            <a:off x="6080760" y="2726055"/>
-            <a:ext cx="4750307" cy="1280160"/>
+            <a:off x="1097280" y="3611880"/>
+            <a:ext cx="4754880" cy="1280160"/>
           </a:xfrm>
           <a:prstGeom prst="rect">
             <a:avLst/>
@@ -11744,7 +16346,7 @@
                 </a:solidFill>
                 <a:latin typeface="Montserrat"/>
               </a:rPr>
-              <a:t>IMAGEN REALISTA</a:t>
+              <a:t>IMAGEN</a:t>
             </a:r>
           </a:p>
           <a:p>
@@ -11756,7 +16358,7 @@
                 </a:solidFill>
                 <a:latin typeface="Montserrat"/>
               </a:rPr>
-              <a:t>technician gas leak detector survey pipe</a:t>
+              <a:t>emergency call center operator headset</a:t>
             </a:r>
           </a:p>
         </p:txBody>
@@ -11766,6 +16368,18 @@
   <p:clrMapOvr>
     <a:masterClrMapping/>
   </p:clrMapOvr>
+  <mc:AlternateContent xmlns:mc="http://schemas.openxmlformats.org/markup-compatibility/2006">
+    <mc:Choice xmlns:p14="http://schemas.microsoft.com/office/powerpoint/2010/main" Requires="p14">
+      <p:transition spd="med" p14:dur="700">
+        <p14:cube dir="l"/>
+      </p:transition>
+    </mc:Choice>
+    <mc:Fallback>
+      <p:transition spd="med">
+        <p:push dir="l"/>
+      </p:transition>
+    </mc:Fallback>
+  </mc:AlternateContent>
 </p:sld>
 </file>
 

--- a/Curso Gas B/01 - ITC-ICG 01 - Distribucion por canalizacion/01 - ITC-ICG 01 - Distribucion por canalizacion - Vídeo 2.pptx
+++ b/Curso Gas B/01 - ITC-ICG 01 - Distribucion por canalizacion/01 - ITC-ICG 01 - Distribucion por canalizacion - Vídeo 2.pptx
@@ -748,12 +748,12 @@
           <a:lstStyle/>
           <a:p>
             <a:r>
-              <a:t>N1: Una fuga igual puede ser urgente o de simple vigilancia. ¿De qué depende?</a:t>
-            </a:r>
-          </a:p>
-          <a:p>
-            <a:r>
-              <a:t>N2: No es solo el tamaño. Piensa dónde está la fuga y quién vive al lado.</a:t>
+              <a:t>N1: Pregunta con miga. Escúchala con sus cuatro opciones. ¿Qué factor pesa más para clasificar una fuga como urgente? Opción A: la proximidad de la fuga a edificios habitados. Opción B: el color de la llama en los aparatos cercanos. Opción C: la antigüedad de la tubería afectada. Opción D: el día de la semana en que se detecta.</a:t>
+            </a:r>
+          </a:p>
+          <a:p>
+            <a:r>
+              <a:t>N2: Piénsalo un momento. Una misma fuga puede ser urgente o de simple vigilancia, y no es solo el tamaño. ¿Dónde está la fuga y quién vive al lado?</a:t>
             </a:r>
           </a:p>
         </p:txBody>
@@ -823,12 +823,12 @@
           <a:lstStyle/>
           <a:p>
             <a:r>
-              <a:t>N1: ¿Por qué la a?</a:t>
-            </a:r>
-          </a:p>
-          <a:p>
-            <a:r>
-              <a:t>N2: Porque lo que dispara la urgencia es la proximidad a propiedades y edificios y el uso que se les da: junto a una vivienda el gas se acumula y hace daño. También cuentan el tipo de gas, la presión de operación y el detector, pero la cercanía es la que más pesa.</a:t>
+              <a:t>N2: La respuesta correcta es la opción A: la proximidad de la fuga a edificios habitados. ¿Por qué? Porque lo que dispara la urgencia es la cercanía a propiedades y edificios y el uso que se les da: pegada a una vivienda, el gas se acumula y hace daño a la gente, mientras que esa misma fuga en pleno campo solo se vigila. También cuentan el tipo de gas, la presión de operación y lo que diga el detector, pero la cercanía es la que más pesa. El color de la llama, la antigüedad del tubo o el día de la semana no pintan nada aquí.</a:t>
+            </a:r>
+          </a:p>
+          <a:p>
+            <a:r>
+              <a:t>N1: La clave: no es el tamaño, es a quién tiene al lado.</a:t>
             </a:r>
           </a:p>
         </p:txBody>
@@ -1198,12 +1198,12 @@
           <a:lstStyle/>
           <a:p>
             <a:r>
-              <a:t>N1: Tres números seguidos, y el orden importa.</a:t>
-            </a:r>
-          </a:p>
-          <a:p>
-            <a:r>
-              <a:t>N2: Pido con antelación larga, me contestan algo más rápido y el arranque lo aviso con un día justo. ¿Cuántos días y horas exactos?</a:t>
+              <a:t>N1: Tres números seguidos, y el orden importa. Escucha la pregunta y las cuatro opciones. Obras de terceros: ¿cuáles son los tres plazos, en orden? Opción A: aviso treinta días antes; el distribuidor contesta en veinte; inicio con veinticuatro horas. Opción B: aviso veinte días antes; el distribuidor contesta en treinta; inicio con cuarenta y ocho horas. Opción C: aviso quince días antes; el distribuidor contesta en diez; inicio con veinticuatro horas. Opción D: aviso treinta días antes; el distribuidor contesta en veinticuatro; inicio con veinte horas.</a:t>
+            </a:r>
+          </a:p>
+          <a:p>
+            <a:r>
+              <a:t>N2: Tómate un momento. Pido con antelación larga, me contestan algo más rápido y el arranque lo aviso con un día justo. ¿Cuántos días y cuántas horas exactos?</a:t>
             </a:r>
           </a:p>
         </p:txBody>
@@ -1273,12 +1273,12 @@
           <a:lstStyle/>
           <a:p>
             <a:r>
-              <a:t>N1: ¿Por qué la a?</a:t>
-            </a:r>
-          </a:p>
-          <a:p>
-            <a:r>
-              <a:t>N2: Porque el truco temporal es: pido con treinta, me contestan en veinte, aviso con veinticuatro horas. Las demás bailan los números. Y ojo, no se puede empezar hasta recibir y aceptar formalmente la información.</a:t>
+              <a:t>N2: La respuesta correcta es la opción A: aviso treinta días antes; el distribuidor contesta en veinte; inicio con veinticuatro horas. ¿Por qué? Porque el truco temporal es pido con treinta, me contestan en veinte y aviso con veinticuatro horas. Las demás opciones bailan los números: cambian el orden o meten cuarenta y ocho o veinte horas donde no toca. Y ojo a un detalle: no se puede empezar a picar hasta haber recibido y aceptado formalmente esa información.</a:t>
+            </a:r>
+          </a:p>
+          <a:p>
+            <a:r>
+              <a:t>N1: Treinta, veinte y veinticuatro. En ese orden.</a:t>
             </a:r>
           </a:p>
         </p:txBody>
@@ -1874,12 +1874,12 @@
           <a:lstStyle/>
           <a:p>
             <a:r>
-              <a:t>N1: Dos parámetros, ni uno más para esta pregunta.</a:t>
-            </a:r>
-          </a:p>
-          <a:p>
-            <a:r>
-              <a:t>N2: Uno hace que el gas llegue con fuerza; el otro hace que puedas olerlo si se escapa. Esos dos.</a:t>
+              <a:t>N1: Vamos con una pregunta. Escucha la pregunta y las cuatro opciones. ¿Cuáles son los dos parámetros de calidad que vigila el centro de operación? Opción A: la presión y la concentración de odorizante. Opción B: la temperatura y el caudal del gas. Opción C: la humedad y el poder calorífico. Opción D: el diámetro del tubo y la profundidad de la zanja.</a:t>
+            </a:r>
+          </a:p>
+          <a:p>
+            <a:r>
+              <a:t>N2: Tómate un momento. Uno de los dos hace que el gas llegue con fuerza; el otro hace que puedas olerlo si se escapa. Con eso lo tienes.</a:t>
             </a:r>
           </a:p>
         </p:txBody>
@@ -1949,12 +1949,12 @@
           <a:lstStyle/>
           <a:p>
             <a:r>
-              <a:t>N1: ¿Por qué la a?</a:t>
-            </a:r>
-          </a:p>
-          <a:p>
-            <a:r>
-              <a:t>N2: Porque los dos parámetros de calidad que se vigilan siempre son la presión y el odorizante. El odorante es el que huele a huevo podrido: si falta, hay fuga y nadie la nota hasta que es tarde.</a:t>
+              <a:t>N2: La respuesta correcta es la opción A: la presión y la concentración de odorizante. ¿Por qué? Porque los dos parámetros de calidad que se vigilan siempre son la presión, para que el gas llegue con la fuerza justa, y el odorizante, esa sustancia que huele a huevo podrido y que se le añade al gas a propósito. Si falta el odorante, hay una fuga y nadie la nota hasta que es tarde. La temperatura, el caudal, la humedad o el diámetro son distractores. El truco: fuerza y olfato, presión y odorante.</a:t>
+            </a:r>
+          </a:p>
+          <a:p>
+            <a:r>
+              <a:t>N1: Esos dos, siempre a raya.</a:t>
             </a:r>
           </a:p>
         </p:txBody>
